--- a/docs/Cloud_Next_27_Agents_CLI_LangGraph.pptx
+++ b/docs/Cloud_Next_27_Agents_CLI_LangGraph.pptx
@@ -385,6 +385,212 @@
   <p:transition spd="med">
     <p:fade/>
   </p:transition>
+  <p:timing>
+    <p:tnLst>
+      <p:par>
+        <p:cTn id="1" dur="indefinite" restart="never" nodeType="tmRoot">
+          <p:childTnLst>
+            <p:seq concurrent="1" nextAc="seek">
+              <p:cTn id="2" dur="indefinite" nodeType="mainSeq">
+                <p:childTnLst>
+                  <p:par>
+                    <p:cTn id="3" fill="hold">
+                      <p:stCondLst>
+                        <p:cond delay="0"/>
+                      </p:stCondLst>
+                      <p:childTnLst>
+                        <p:par>
+                          <p:cTn id="4" presetID="10" presetClass="entr" presetSubtype="0" fill="hold" nodeType="withEffect">
+                            <p:stCondLst>
+                              <p:cond delay="0"/>
+                            </p:stCondLst>
+                            <p:childTnLst>
+                              <p:set>
+                                <p:cBhvr>
+                                  <p:cTn id="5" dur="1" fill="hold">
+                                    <p:stCondLst>
+                                      <p:cond delay="0"/>
+                                    </p:stCondLst>
+                                  </p:cTn>
+                                  <p:tgtEl>
+                                    <p:spTgt spid="6"/>
+                                  </p:tgtEl>
+                                  <p:attrNameLst>
+                                    <p:attrName>style.visibility</p:attrName>
+                                  </p:attrNameLst>
+                                </p:cBhvr>
+                                <p:to>
+                                  <p:strVal val="visible"/>
+                                </p:to>
+                              </p:set>
+                              <p:animEffect transition="in" filter="fade">
+                                <p:cBhvr>
+                                  <p:cTn id="6" dur="450"/>
+                                  <p:tgtEl>
+                                    <p:spTgt spid="6"/>
+                                  </p:tgtEl>
+                                </p:cBhvr>
+                              </p:animEffect>
+                            </p:childTnLst>
+                          </p:cTn>
+                        </p:par>
+                      </p:childTnLst>
+                    </p:cTn>
+                  </p:par>
+                  <p:par>
+                    <p:cTn id="7" fill="hold">
+                      <p:stCondLst>
+                        <p:cond delay="180"/>
+                      </p:stCondLst>
+                      <p:childTnLst>
+                        <p:par>
+                          <p:cTn id="8" presetID="10" presetClass="entr" presetSubtype="0" fill="hold" nodeType="withEffect">
+                            <p:stCondLst>
+                              <p:cond delay="0"/>
+                            </p:stCondLst>
+                            <p:childTnLst>
+                              <p:set>
+                                <p:cBhvr>
+                                  <p:cTn id="9" dur="1" fill="hold">
+                                    <p:stCondLst>
+                                      <p:cond delay="0"/>
+                                    </p:stCondLst>
+                                  </p:cTn>
+                                  <p:tgtEl>
+                                    <p:spTgt spid="7"/>
+                                  </p:tgtEl>
+                                  <p:attrNameLst>
+                                    <p:attrName>style.visibility</p:attrName>
+                                  </p:attrNameLst>
+                                </p:cBhvr>
+                                <p:to>
+                                  <p:strVal val="visible"/>
+                                </p:to>
+                              </p:set>
+                              <p:animEffect transition="in" filter="fade">
+                                <p:cBhvr>
+                                  <p:cTn id="10" dur="450"/>
+                                  <p:tgtEl>
+                                    <p:spTgt spid="7"/>
+                                  </p:tgtEl>
+                                </p:cBhvr>
+                              </p:animEffect>
+                            </p:childTnLst>
+                          </p:cTn>
+                        </p:par>
+                      </p:childTnLst>
+                    </p:cTn>
+                  </p:par>
+                  <p:par>
+                    <p:cTn id="11" fill="hold">
+                      <p:stCondLst>
+                        <p:cond delay="360"/>
+                      </p:stCondLst>
+                      <p:childTnLst>
+                        <p:par>
+                          <p:cTn id="12" presetID="10" presetClass="entr" presetSubtype="0" fill="hold" nodeType="withEffect">
+                            <p:stCondLst>
+                              <p:cond delay="0"/>
+                            </p:stCondLst>
+                            <p:childTnLst>
+                              <p:set>
+                                <p:cBhvr>
+                                  <p:cTn id="13" dur="1" fill="hold">
+                                    <p:stCondLst>
+                                      <p:cond delay="0"/>
+                                    </p:stCondLst>
+                                  </p:cTn>
+                                  <p:tgtEl>
+                                    <p:spTgt spid="8"/>
+                                  </p:tgtEl>
+                                  <p:attrNameLst>
+                                    <p:attrName>style.visibility</p:attrName>
+                                  </p:attrNameLst>
+                                </p:cBhvr>
+                                <p:to>
+                                  <p:strVal val="visible"/>
+                                </p:to>
+                              </p:set>
+                              <p:animEffect transition="in" filter="fade">
+                                <p:cBhvr>
+                                  <p:cTn id="14" dur="450"/>
+                                  <p:tgtEl>
+                                    <p:spTgt spid="8"/>
+                                  </p:tgtEl>
+                                </p:cBhvr>
+                              </p:animEffect>
+                            </p:childTnLst>
+                          </p:cTn>
+                        </p:par>
+                      </p:childTnLst>
+                    </p:cTn>
+                  </p:par>
+                  <p:par>
+                    <p:cTn id="15" fill="hold">
+                      <p:stCondLst>
+                        <p:cond delay="540"/>
+                      </p:stCondLst>
+                      <p:childTnLst>
+                        <p:par>
+                          <p:cTn id="16" presetID="10" presetClass="entr" presetSubtype="0" fill="hold" nodeType="withEffect">
+                            <p:stCondLst>
+                              <p:cond delay="0"/>
+                            </p:stCondLst>
+                            <p:childTnLst>
+                              <p:set>
+                                <p:cBhvr>
+                                  <p:cTn id="17" dur="1" fill="hold">
+                                    <p:stCondLst>
+                                      <p:cond delay="0"/>
+                                    </p:stCondLst>
+                                  </p:cTn>
+                                  <p:tgtEl>
+                                    <p:spTgt spid="9"/>
+                                  </p:tgtEl>
+                                  <p:attrNameLst>
+                                    <p:attrName>style.visibility</p:attrName>
+                                  </p:attrNameLst>
+                                </p:cBhvr>
+                                <p:to>
+                                  <p:strVal val="visible"/>
+                                </p:to>
+                              </p:set>
+                              <p:animEffect transition="in" filter="fade">
+                                <p:cBhvr>
+                                  <p:cTn id="18" dur="450"/>
+                                  <p:tgtEl>
+                                    <p:spTgt spid="9"/>
+                                  </p:tgtEl>
+                                </p:cBhvr>
+                              </p:animEffect>
+                            </p:childTnLst>
+                          </p:cTn>
+                        </p:par>
+                      </p:childTnLst>
+                    </p:cTn>
+                  </p:par>
+                </p:childTnLst>
+              </p:cTn>
+              <p:prevCondLst>
+                <p:cond evt="onPrev" delay="0">
+                  <p:tgtEl>
+                    <p:sldTgt/>
+                  </p:tgtEl>
+                </p:cond>
+              </p:prevCondLst>
+              <p:nextCondLst>
+                <p:cond evt="onNext" delay="0">
+                  <p:tgtEl>
+                    <p:sldTgt/>
+                  </p:tgtEl>
+                </p:cond>
+              </p:nextCondLst>
+            </p:seq>
+          </p:childTnLst>
+        </p:cTn>
+      </p:par>
+    </p:tnLst>
+  </p:timing>
 </p:sld>
 </file>
 
@@ -1261,6 +1467,476 @@
   <p:transition spd="med">
     <p:fade/>
   </p:transition>
+  <p:timing>
+    <p:tnLst>
+      <p:par>
+        <p:cTn id="1" dur="indefinite" restart="never" nodeType="tmRoot">
+          <p:childTnLst>
+            <p:seq concurrent="1" nextAc="seek">
+              <p:cTn id="2" dur="indefinite" nodeType="mainSeq">
+                <p:childTnLst>
+                  <p:par>
+                    <p:cTn id="3" fill="hold">
+                      <p:stCondLst>
+                        <p:cond delay="0"/>
+                      </p:stCondLst>
+                      <p:childTnLst>
+                        <p:par>
+                          <p:cTn id="4" presetID="10" presetClass="entr" presetSubtype="0" fill="hold" nodeType="withEffect">
+                            <p:stCondLst>
+                              <p:cond delay="0"/>
+                            </p:stCondLst>
+                            <p:childTnLst>
+                              <p:set>
+                                <p:cBhvr>
+                                  <p:cTn id="5" dur="1" fill="hold">
+                                    <p:stCondLst>
+                                      <p:cond delay="0"/>
+                                    </p:stCondLst>
+                                  </p:cTn>
+                                  <p:tgtEl>
+                                    <p:spTgt spid="6"/>
+                                  </p:tgtEl>
+                                  <p:attrNameLst>
+                                    <p:attrName>style.visibility</p:attrName>
+                                  </p:attrNameLst>
+                                </p:cBhvr>
+                                <p:to>
+                                  <p:strVal val="visible"/>
+                                </p:to>
+                              </p:set>
+                              <p:animEffect transition="in" filter="fade">
+                                <p:cBhvr>
+                                  <p:cTn id="6" dur="450"/>
+                                  <p:tgtEl>
+                                    <p:spTgt spid="6"/>
+                                  </p:tgtEl>
+                                </p:cBhvr>
+                              </p:animEffect>
+                            </p:childTnLst>
+                          </p:cTn>
+                        </p:par>
+                      </p:childTnLst>
+                    </p:cTn>
+                  </p:par>
+                  <p:par>
+                    <p:cTn id="7" fill="hold">
+                      <p:stCondLst>
+                        <p:cond delay="180"/>
+                      </p:stCondLst>
+                      <p:childTnLst>
+                        <p:par>
+                          <p:cTn id="8" presetID="10" presetClass="entr" presetSubtype="0" fill="hold" nodeType="withEffect">
+                            <p:stCondLst>
+                              <p:cond delay="0"/>
+                            </p:stCondLst>
+                            <p:childTnLst>
+                              <p:set>
+                                <p:cBhvr>
+                                  <p:cTn id="9" dur="1" fill="hold">
+                                    <p:stCondLst>
+                                      <p:cond delay="0"/>
+                                    </p:stCondLst>
+                                  </p:cTn>
+                                  <p:tgtEl>
+                                    <p:spTgt spid="7"/>
+                                  </p:tgtEl>
+                                  <p:attrNameLst>
+                                    <p:attrName>style.visibility</p:attrName>
+                                  </p:attrNameLst>
+                                </p:cBhvr>
+                                <p:to>
+                                  <p:strVal val="visible"/>
+                                </p:to>
+                              </p:set>
+                              <p:animEffect transition="in" filter="fade">
+                                <p:cBhvr>
+                                  <p:cTn id="10" dur="450"/>
+                                  <p:tgtEl>
+                                    <p:spTgt spid="7"/>
+                                  </p:tgtEl>
+                                </p:cBhvr>
+                              </p:animEffect>
+                            </p:childTnLst>
+                          </p:cTn>
+                        </p:par>
+                      </p:childTnLst>
+                    </p:cTn>
+                  </p:par>
+                  <p:par>
+                    <p:cTn id="11" fill="hold">
+                      <p:stCondLst>
+                        <p:cond delay="360"/>
+                      </p:stCondLst>
+                      <p:childTnLst>
+                        <p:par>
+                          <p:cTn id="12" presetID="10" presetClass="entr" presetSubtype="0" fill="hold" nodeType="withEffect">
+                            <p:stCondLst>
+                              <p:cond delay="0"/>
+                            </p:stCondLst>
+                            <p:childTnLst>
+                              <p:set>
+                                <p:cBhvr>
+                                  <p:cTn id="13" dur="1" fill="hold">
+                                    <p:stCondLst>
+                                      <p:cond delay="0"/>
+                                    </p:stCondLst>
+                                  </p:cTn>
+                                  <p:tgtEl>
+                                    <p:spTgt spid="8"/>
+                                  </p:tgtEl>
+                                  <p:attrNameLst>
+                                    <p:attrName>style.visibility</p:attrName>
+                                  </p:attrNameLst>
+                                </p:cBhvr>
+                                <p:to>
+                                  <p:strVal val="visible"/>
+                                </p:to>
+                              </p:set>
+                              <p:animEffect transition="in" filter="fade">
+                                <p:cBhvr>
+                                  <p:cTn id="14" dur="450"/>
+                                  <p:tgtEl>
+                                    <p:spTgt spid="8"/>
+                                  </p:tgtEl>
+                                </p:cBhvr>
+                              </p:animEffect>
+                            </p:childTnLst>
+                          </p:cTn>
+                        </p:par>
+                      </p:childTnLst>
+                    </p:cTn>
+                  </p:par>
+                  <p:par>
+                    <p:cTn id="15" fill="hold">
+                      <p:stCondLst>
+                        <p:cond delay="540"/>
+                      </p:stCondLst>
+                      <p:childTnLst>
+                        <p:par>
+                          <p:cTn id="16" presetID="10" presetClass="entr" presetSubtype="0" fill="hold" nodeType="withEffect">
+                            <p:stCondLst>
+                              <p:cond delay="0"/>
+                            </p:stCondLst>
+                            <p:childTnLst>
+                              <p:set>
+                                <p:cBhvr>
+                                  <p:cTn id="17" dur="1" fill="hold">
+                                    <p:stCondLst>
+                                      <p:cond delay="0"/>
+                                    </p:stCondLst>
+                                  </p:cTn>
+                                  <p:tgtEl>
+                                    <p:spTgt spid="9"/>
+                                  </p:tgtEl>
+                                  <p:attrNameLst>
+                                    <p:attrName>style.visibility</p:attrName>
+                                  </p:attrNameLst>
+                                </p:cBhvr>
+                                <p:to>
+                                  <p:strVal val="visible"/>
+                                </p:to>
+                              </p:set>
+                              <p:animEffect transition="in" filter="fade">
+                                <p:cBhvr>
+                                  <p:cTn id="18" dur="450"/>
+                                  <p:tgtEl>
+                                    <p:spTgt spid="9"/>
+                                  </p:tgtEl>
+                                </p:cBhvr>
+                              </p:animEffect>
+                            </p:childTnLst>
+                          </p:cTn>
+                        </p:par>
+                      </p:childTnLst>
+                    </p:cTn>
+                  </p:par>
+                  <p:par>
+                    <p:cTn id="19" fill="hold">
+                      <p:stCondLst>
+                        <p:cond delay="720"/>
+                      </p:stCondLst>
+                      <p:childTnLst>
+                        <p:par>
+                          <p:cTn id="20" presetID="10" presetClass="entr" presetSubtype="0" fill="hold" nodeType="withEffect">
+                            <p:stCondLst>
+                              <p:cond delay="0"/>
+                            </p:stCondLst>
+                            <p:childTnLst>
+                              <p:set>
+                                <p:cBhvr>
+                                  <p:cTn id="21" dur="1" fill="hold">
+                                    <p:stCondLst>
+                                      <p:cond delay="0"/>
+                                    </p:stCondLst>
+                                  </p:cTn>
+                                  <p:tgtEl>
+                                    <p:spTgt spid="10"/>
+                                  </p:tgtEl>
+                                  <p:attrNameLst>
+                                    <p:attrName>style.visibility</p:attrName>
+                                  </p:attrNameLst>
+                                </p:cBhvr>
+                                <p:to>
+                                  <p:strVal val="visible"/>
+                                </p:to>
+                              </p:set>
+                              <p:animEffect transition="in" filter="fade">
+                                <p:cBhvr>
+                                  <p:cTn id="22" dur="450"/>
+                                  <p:tgtEl>
+                                    <p:spTgt spid="10"/>
+                                  </p:tgtEl>
+                                </p:cBhvr>
+                              </p:animEffect>
+                            </p:childTnLst>
+                          </p:cTn>
+                        </p:par>
+                      </p:childTnLst>
+                    </p:cTn>
+                  </p:par>
+                  <p:par>
+                    <p:cTn id="23" fill="hold">
+                      <p:stCondLst>
+                        <p:cond delay="900"/>
+                      </p:stCondLst>
+                      <p:childTnLst>
+                        <p:par>
+                          <p:cTn id="24" presetID="10" presetClass="entr" presetSubtype="0" fill="hold" nodeType="withEffect">
+                            <p:stCondLst>
+                              <p:cond delay="0"/>
+                            </p:stCondLst>
+                            <p:childTnLst>
+                              <p:set>
+                                <p:cBhvr>
+                                  <p:cTn id="25" dur="1" fill="hold">
+                                    <p:stCondLst>
+                                      <p:cond delay="0"/>
+                                    </p:stCondLst>
+                                  </p:cTn>
+                                  <p:tgtEl>
+                                    <p:spTgt spid="11"/>
+                                  </p:tgtEl>
+                                  <p:attrNameLst>
+                                    <p:attrName>style.visibility</p:attrName>
+                                  </p:attrNameLst>
+                                </p:cBhvr>
+                                <p:to>
+                                  <p:strVal val="visible"/>
+                                </p:to>
+                              </p:set>
+                              <p:animEffect transition="in" filter="fade">
+                                <p:cBhvr>
+                                  <p:cTn id="26" dur="450"/>
+                                  <p:tgtEl>
+                                    <p:spTgt spid="11"/>
+                                  </p:tgtEl>
+                                </p:cBhvr>
+                              </p:animEffect>
+                            </p:childTnLst>
+                          </p:cTn>
+                        </p:par>
+                      </p:childTnLst>
+                    </p:cTn>
+                  </p:par>
+                  <p:par>
+                    <p:cTn id="27" fill="hold">
+                      <p:stCondLst>
+                        <p:cond delay="1080"/>
+                      </p:stCondLst>
+                      <p:childTnLst>
+                        <p:par>
+                          <p:cTn id="28" presetID="10" presetClass="entr" presetSubtype="0" fill="hold" nodeType="withEffect">
+                            <p:stCondLst>
+                              <p:cond delay="0"/>
+                            </p:stCondLst>
+                            <p:childTnLst>
+                              <p:set>
+                                <p:cBhvr>
+                                  <p:cTn id="29" dur="1" fill="hold">
+                                    <p:stCondLst>
+                                      <p:cond delay="0"/>
+                                    </p:stCondLst>
+                                  </p:cTn>
+                                  <p:tgtEl>
+                                    <p:spTgt spid="12"/>
+                                  </p:tgtEl>
+                                  <p:attrNameLst>
+                                    <p:attrName>style.visibility</p:attrName>
+                                  </p:attrNameLst>
+                                </p:cBhvr>
+                                <p:to>
+                                  <p:strVal val="visible"/>
+                                </p:to>
+                              </p:set>
+                              <p:animEffect transition="in" filter="fade">
+                                <p:cBhvr>
+                                  <p:cTn id="30" dur="450"/>
+                                  <p:tgtEl>
+                                    <p:spTgt spid="12"/>
+                                  </p:tgtEl>
+                                </p:cBhvr>
+                              </p:animEffect>
+                            </p:childTnLst>
+                          </p:cTn>
+                        </p:par>
+                      </p:childTnLst>
+                    </p:cTn>
+                  </p:par>
+                  <p:par>
+                    <p:cTn id="31" fill="hold">
+                      <p:stCondLst>
+                        <p:cond delay="1260"/>
+                      </p:stCondLst>
+                      <p:childTnLst>
+                        <p:par>
+                          <p:cTn id="32" presetID="10" presetClass="entr" presetSubtype="0" fill="hold" nodeType="withEffect">
+                            <p:stCondLst>
+                              <p:cond delay="0"/>
+                            </p:stCondLst>
+                            <p:childTnLst>
+                              <p:set>
+                                <p:cBhvr>
+                                  <p:cTn id="33" dur="1" fill="hold">
+                                    <p:stCondLst>
+                                      <p:cond delay="0"/>
+                                    </p:stCondLst>
+                                  </p:cTn>
+                                  <p:tgtEl>
+                                    <p:spTgt spid="13"/>
+                                  </p:tgtEl>
+                                  <p:attrNameLst>
+                                    <p:attrName>style.visibility</p:attrName>
+                                  </p:attrNameLst>
+                                </p:cBhvr>
+                                <p:to>
+                                  <p:strVal val="visible"/>
+                                </p:to>
+                              </p:set>
+                              <p:animEffect transition="in" filter="fade">
+                                <p:cBhvr>
+                                  <p:cTn id="34" dur="450"/>
+                                  <p:tgtEl>
+                                    <p:spTgt spid="13"/>
+                                  </p:tgtEl>
+                                </p:cBhvr>
+                              </p:animEffect>
+                            </p:childTnLst>
+                          </p:cTn>
+                        </p:par>
+                      </p:childTnLst>
+                    </p:cTn>
+                  </p:par>
+                  <p:par>
+                    <p:cTn id="35" fill="hold">
+                      <p:stCondLst>
+                        <p:cond delay="1440"/>
+                      </p:stCondLst>
+                      <p:childTnLst>
+                        <p:par>
+                          <p:cTn id="36" presetID="10" presetClass="entr" presetSubtype="0" fill="hold" nodeType="withEffect">
+                            <p:stCondLst>
+                              <p:cond delay="0"/>
+                            </p:stCondLst>
+                            <p:childTnLst>
+                              <p:set>
+                                <p:cBhvr>
+                                  <p:cTn id="37" dur="1" fill="hold">
+                                    <p:stCondLst>
+                                      <p:cond delay="0"/>
+                                    </p:stCondLst>
+                                  </p:cTn>
+                                  <p:tgtEl>
+                                    <p:spTgt spid="14"/>
+                                  </p:tgtEl>
+                                  <p:attrNameLst>
+                                    <p:attrName>style.visibility</p:attrName>
+                                  </p:attrNameLst>
+                                </p:cBhvr>
+                                <p:to>
+                                  <p:strVal val="visible"/>
+                                </p:to>
+                              </p:set>
+                              <p:animEffect transition="in" filter="fade">
+                                <p:cBhvr>
+                                  <p:cTn id="38" dur="450"/>
+                                  <p:tgtEl>
+                                    <p:spTgt spid="14"/>
+                                  </p:tgtEl>
+                                </p:cBhvr>
+                              </p:animEffect>
+                            </p:childTnLst>
+                          </p:cTn>
+                        </p:par>
+                      </p:childTnLst>
+                    </p:cTn>
+                  </p:par>
+                  <p:par>
+                    <p:cTn id="39" fill="hold">
+                      <p:stCondLst>
+                        <p:cond delay="1620"/>
+                      </p:stCondLst>
+                      <p:childTnLst>
+                        <p:par>
+                          <p:cTn id="40" presetID="10" presetClass="entr" presetSubtype="0" fill="hold" nodeType="withEffect">
+                            <p:stCondLst>
+                              <p:cond delay="0"/>
+                            </p:stCondLst>
+                            <p:childTnLst>
+                              <p:set>
+                                <p:cBhvr>
+                                  <p:cTn id="41" dur="1" fill="hold">
+                                    <p:stCondLst>
+                                      <p:cond delay="0"/>
+                                    </p:stCondLst>
+                                  </p:cTn>
+                                  <p:tgtEl>
+                                    <p:spTgt spid="15"/>
+                                  </p:tgtEl>
+                                  <p:attrNameLst>
+                                    <p:attrName>style.visibility</p:attrName>
+                                  </p:attrNameLst>
+                                </p:cBhvr>
+                                <p:to>
+                                  <p:strVal val="visible"/>
+                                </p:to>
+                              </p:set>
+                              <p:animEffect transition="in" filter="fade">
+                                <p:cBhvr>
+                                  <p:cTn id="42" dur="450"/>
+                                  <p:tgtEl>
+                                    <p:spTgt spid="15"/>
+                                  </p:tgtEl>
+                                </p:cBhvr>
+                              </p:animEffect>
+                            </p:childTnLst>
+                          </p:cTn>
+                        </p:par>
+                      </p:childTnLst>
+                    </p:cTn>
+                  </p:par>
+                </p:childTnLst>
+              </p:cTn>
+              <p:prevCondLst>
+                <p:cond evt="onPrev" delay="0">
+                  <p:tgtEl>
+                    <p:sldTgt/>
+                  </p:tgtEl>
+                </p:cond>
+              </p:prevCondLst>
+              <p:nextCondLst>
+                <p:cond evt="onNext" delay="0">
+                  <p:tgtEl>
+                    <p:sldTgt/>
+                  </p:tgtEl>
+                </p:cond>
+              </p:nextCondLst>
+            </p:seq>
+          </p:childTnLst>
+        </p:cTn>
+      </p:par>
+    </p:tnLst>
+  </p:timing>
 </p:sld>
 </file>
 
@@ -1843,6 +2519,344 @@
   <p:transition spd="med">
     <p:fade/>
   </p:transition>
+  <p:timing>
+    <p:tnLst>
+      <p:par>
+        <p:cTn id="1" dur="indefinite" restart="never" nodeType="tmRoot">
+          <p:childTnLst>
+            <p:seq concurrent="1" nextAc="seek">
+              <p:cTn id="2" dur="indefinite" nodeType="mainSeq">
+                <p:childTnLst>
+                  <p:par>
+                    <p:cTn id="3" fill="hold">
+                      <p:stCondLst>
+                        <p:cond delay="0"/>
+                      </p:stCondLst>
+                      <p:childTnLst>
+                        <p:par>
+                          <p:cTn id="4" presetID="10" presetClass="entr" presetSubtype="0" fill="hold" nodeType="withEffect">
+                            <p:stCondLst>
+                              <p:cond delay="0"/>
+                            </p:stCondLst>
+                            <p:childTnLst>
+                              <p:set>
+                                <p:cBhvr>
+                                  <p:cTn id="5" dur="1" fill="hold">
+                                    <p:stCondLst>
+                                      <p:cond delay="0"/>
+                                    </p:stCondLst>
+                                  </p:cTn>
+                                  <p:tgtEl>
+                                    <p:spTgt spid="6"/>
+                                  </p:tgtEl>
+                                  <p:attrNameLst>
+                                    <p:attrName>style.visibility</p:attrName>
+                                  </p:attrNameLst>
+                                </p:cBhvr>
+                                <p:to>
+                                  <p:strVal val="visible"/>
+                                </p:to>
+                              </p:set>
+                              <p:animEffect transition="in" filter="fade">
+                                <p:cBhvr>
+                                  <p:cTn id="6" dur="450"/>
+                                  <p:tgtEl>
+                                    <p:spTgt spid="6"/>
+                                  </p:tgtEl>
+                                </p:cBhvr>
+                              </p:animEffect>
+                            </p:childTnLst>
+                          </p:cTn>
+                        </p:par>
+                      </p:childTnLst>
+                    </p:cTn>
+                  </p:par>
+                  <p:par>
+                    <p:cTn id="7" fill="hold">
+                      <p:stCondLst>
+                        <p:cond delay="180"/>
+                      </p:stCondLst>
+                      <p:childTnLst>
+                        <p:par>
+                          <p:cTn id="8" presetID="10" presetClass="entr" presetSubtype="0" fill="hold" nodeType="withEffect">
+                            <p:stCondLst>
+                              <p:cond delay="0"/>
+                            </p:stCondLst>
+                            <p:childTnLst>
+                              <p:set>
+                                <p:cBhvr>
+                                  <p:cTn id="9" dur="1" fill="hold">
+                                    <p:stCondLst>
+                                      <p:cond delay="0"/>
+                                    </p:stCondLst>
+                                  </p:cTn>
+                                  <p:tgtEl>
+                                    <p:spTgt spid="7"/>
+                                  </p:tgtEl>
+                                  <p:attrNameLst>
+                                    <p:attrName>style.visibility</p:attrName>
+                                  </p:attrNameLst>
+                                </p:cBhvr>
+                                <p:to>
+                                  <p:strVal val="visible"/>
+                                </p:to>
+                              </p:set>
+                              <p:animEffect transition="in" filter="fade">
+                                <p:cBhvr>
+                                  <p:cTn id="10" dur="450"/>
+                                  <p:tgtEl>
+                                    <p:spTgt spid="7"/>
+                                  </p:tgtEl>
+                                </p:cBhvr>
+                              </p:animEffect>
+                            </p:childTnLst>
+                          </p:cTn>
+                        </p:par>
+                      </p:childTnLst>
+                    </p:cTn>
+                  </p:par>
+                  <p:par>
+                    <p:cTn id="11" fill="hold">
+                      <p:stCondLst>
+                        <p:cond delay="360"/>
+                      </p:stCondLst>
+                      <p:childTnLst>
+                        <p:par>
+                          <p:cTn id="12" presetID="10" presetClass="entr" presetSubtype="0" fill="hold" nodeType="withEffect">
+                            <p:stCondLst>
+                              <p:cond delay="0"/>
+                            </p:stCondLst>
+                            <p:childTnLst>
+                              <p:set>
+                                <p:cBhvr>
+                                  <p:cTn id="13" dur="1" fill="hold">
+                                    <p:stCondLst>
+                                      <p:cond delay="0"/>
+                                    </p:stCondLst>
+                                  </p:cTn>
+                                  <p:tgtEl>
+                                    <p:spTgt spid="8"/>
+                                  </p:tgtEl>
+                                  <p:attrNameLst>
+                                    <p:attrName>style.visibility</p:attrName>
+                                  </p:attrNameLst>
+                                </p:cBhvr>
+                                <p:to>
+                                  <p:strVal val="visible"/>
+                                </p:to>
+                              </p:set>
+                              <p:animEffect transition="in" filter="fade">
+                                <p:cBhvr>
+                                  <p:cTn id="14" dur="450"/>
+                                  <p:tgtEl>
+                                    <p:spTgt spid="8"/>
+                                  </p:tgtEl>
+                                </p:cBhvr>
+                              </p:animEffect>
+                            </p:childTnLst>
+                          </p:cTn>
+                        </p:par>
+                      </p:childTnLst>
+                    </p:cTn>
+                  </p:par>
+                  <p:par>
+                    <p:cTn id="15" fill="hold">
+                      <p:stCondLst>
+                        <p:cond delay="540"/>
+                      </p:stCondLst>
+                      <p:childTnLst>
+                        <p:par>
+                          <p:cTn id="16" presetID="10" presetClass="entr" presetSubtype="0" fill="hold" nodeType="withEffect">
+                            <p:stCondLst>
+                              <p:cond delay="0"/>
+                            </p:stCondLst>
+                            <p:childTnLst>
+                              <p:set>
+                                <p:cBhvr>
+                                  <p:cTn id="17" dur="1" fill="hold">
+                                    <p:stCondLst>
+                                      <p:cond delay="0"/>
+                                    </p:stCondLst>
+                                  </p:cTn>
+                                  <p:tgtEl>
+                                    <p:spTgt spid="9"/>
+                                  </p:tgtEl>
+                                  <p:attrNameLst>
+                                    <p:attrName>style.visibility</p:attrName>
+                                  </p:attrNameLst>
+                                </p:cBhvr>
+                                <p:to>
+                                  <p:strVal val="visible"/>
+                                </p:to>
+                              </p:set>
+                              <p:animEffect transition="in" filter="fade">
+                                <p:cBhvr>
+                                  <p:cTn id="18" dur="450"/>
+                                  <p:tgtEl>
+                                    <p:spTgt spid="9"/>
+                                  </p:tgtEl>
+                                </p:cBhvr>
+                              </p:animEffect>
+                            </p:childTnLst>
+                          </p:cTn>
+                        </p:par>
+                      </p:childTnLst>
+                    </p:cTn>
+                  </p:par>
+                  <p:par>
+                    <p:cTn id="19" fill="hold">
+                      <p:stCondLst>
+                        <p:cond delay="720"/>
+                      </p:stCondLst>
+                      <p:childTnLst>
+                        <p:par>
+                          <p:cTn id="20" presetID="10" presetClass="entr" presetSubtype="0" fill="hold" nodeType="withEffect">
+                            <p:stCondLst>
+                              <p:cond delay="0"/>
+                            </p:stCondLst>
+                            <p:childTnLst>
+                              <p:set>
+                                <p:cBhvr>
+                                  <p:cTn id="21" dur="1" fill="hold">
+                                    <p:stCondLst>
+                                      <p:cond delay="0"/>
+                                    </p:stCondLst>
+                                  </p:cTn>
+                                  <p:tgtEl>
+                                    <p:spTgt spid="10"/>
+                                  </p:tgtEl>
+                                  <p:attrNameLst>
+                                    <p:attrName>style.visibility</p:attrName>
+                                  </p:attrNameLst>
+                                </p:cBhvr>
+                                <p:to>
+                                  <p:strVal val="visible"/>
+                                </p:to>
+                              </p:set>
+                              <p:animEffect transition="in" filter="fade">
+                                <p:cBhvr>
+                                  <p:cTn id="22" dur="450"/>
+                                  <p:tgtEl>
+                                    <p:spTgt spid="10"/>
+                                  </p:tgtEl>
+                                </p:cBhvr>
+                              </p:animEffect>
+                            </p:childTnLst>
+                          </p:cTn>
+                        </p:par>
+                      </p:childTnLst>
+                    </p:cTn>
+                  </p:par>
+                  <p:par>
+                    <p:cTn id="23" fill="hold">
+                      <p:stCondLst>
+                        <p:cond delay="900"/>
+                      </p:stCondLst>
+                      <p:childTnLst>
+                        <p:par>
+                          <p:cTn id="24" presetID="10" presetClass="entr" presetSubtype="0" fill="hold" nodeType="withEffect">
+                            <p:stCondLst>
+                              <p:cond delay="0"/>
+                            </p:stCondLst>
+                            <p:childTnLst>
+                              <p:set>
+                                <p:cBhvr>
+                                  <p:cTn id="25" dur="1" fill="hold">
+                                    <p:stCondLst>
+                                      <p:cond delay="0"/>
+                                    </p:stCondLst>
+                                  </p:cTn>
+                                  <p:tgtEl>
+                                    <p:spTgt spid="11"/>
+                                  </p:tgtEl>
+                                  <p:attrNameLst>
+                                    <p:attrName>style.visibility</p:attrName>
+                                  </p:attrNameLst>
+                                </p:cBhvr>
+                                <p:to>
+                                  <p:strVal val="visible"/>
+                                </p:to>
+                              </p:set>
+                              <p:animEffect transition="in" filter="fade">
+                                <p:cBhvr>
+                                  <p:cTn id="26" dur="450"/>
+                                  <p:tgtEl>
+                                    <p:spTgt spid="11"/>
+                                  </p:tgtEl>
+                                </p:cBhvr>
+                              </p:animEffect>
+                            </p:childTnLst>
+                          </p:cTn>
+                        </p:par>
+                      </p:childTnLst>
+                    </p:cTn>
+                  </p:par>
+                  <p:par>
+                    <p:cTn id="27" fill="hold">
+                      <p:stCondLst>
+                        <p:cond delay="1080"/>
+                      </p:stCondLst>
+                      <p:childTnLst>
+                        <p:par>
+                          <p:cTn id="28" presetID="10" presetClass="entr" presetSubtype="0" fill="hold" nodeType="withEffect">
+                            <p:stCondLst>
+                              <p:cond delay="0"/>
+                            </p:stCondLst>
+                            <p:childTnLst>
+                              <p:set>
+                                <p:cBhvr>
+                                  <p:cTn id="29" dur="1" fill="hold">
+                                    <p:stCondLst>
+                                      <p:cond delay="0"/>
+                                    </p:stCondLst>
+                                  </p:cTn>
+                                  <p:tgtEl>
+                                    <p:spTgt spid="12"/>
+                                  </p:tgtEl>
+                                  <p:attrNameLst>
+                                    <p:attrName>style.visibility</p:attrName>
+                                  </p:attrNameLst>
+                                </p:cBhvr>
+                                <p:to>
+                                  <p:strVal val="visible"/>
+                                </p:to>
+                              </p:set>
+                              <p:animEffect transition="in" filter="fade">
+                                <p:cBhvr>
+                                  <p:cTn id="30" dur="450"/>
+                                  <p:tgtEl>
+                                    <p:spTgt spid="12"/>
+                                  </p:tgtEl>
+                                </p:cBhvr>
+                              </p:animEffect>
+                            </p:childTnLst>
+                          </p:cTn>
+                        </p:par>
+                      </p:childTnLst>
+                    </p:cTn>
+                  </p:par>
+                </p:childTnLst>
+              </p:cTn>
+              <p:prevCondLst>
+                <p:cond evt="onPrev" delay="0">
+                  <p:tgtEl>
+                    <p:sldTgt/>
+                  </p:tgtEl>
+                </p:cond>
+              </p:prevCondLst>
+              <p:nextCondLst>
+                <p:cond evt="onNext" delay="0">
+                  <p:tgtEl>
+                    <p:sldTgt/>
+                  </p:tgtEl>
+                </p:cond>
+              </p:nextCondLst>
+            </p:seq>
+          </p:childTnLst>
+        </p:cTn>
+      </p:par>
+    </p:tnLst>
+  </p:timing>
 </p:sld>
 </file>
 
@@ -2527,6 +3541,344 @@
   <p:transition spd="med">
     <p:fade/>
   </p:transition>
+  <p:timing>
+    <p:tnLst>
+      <p:par>
+        <p:cTn id="1" dur="indefinite" restart="never" nodeType="tmRoot">
+          <p:childTnLst>
+            <p:seq concurrent="1" nextAc="seek">
+              <p:cTn id="2" dur="indefinite" nodeType="mainSeq">
+                <p:childTnLst>
+                  <p:par>
+                    <p:cTn id="3" fill="hold">
+                      <p:stCondLst>
+                        <p:cond delay="0"/>
+                      </p:stCondLst>
+                      <p:childTnLst>
+                        <p:par>
+                          <p:cTn id="4" presetID="10" presetClass="entr" presetSubtype="0" fill="hold" nodeType="withEffect">
+                            <p:stCondLst>
+                              <p:cond delay="0"/>
+                            </p:stCondLst>
+                            <p:childTnLst>
+                              <p:set>
+                                <p:cBhvr>
+                                  <p:cTn id="5" dur="1" fill="hold">
+                                    <p:stCondLst>
+                                      <p:cond delay="0"/>
+                                    </p:stCondLst>
+                                  </p:cTn>
+                                  <p:tgtEl>
+                                    <p:spTgt spid="6"/>
+                                  </p:tgtEl>
+                                  <p:attrNameLst>
+                                    <p:attrName>style.visibility</p:attrName>
+                                  </p:attrNameLst>
+                                </p:cBhvr>
+                                <p:to>
+                                  <p:strVal val="visible"/>
+                                </p:to>
+                              </p:set>
+                              <p:animEffect transition="in" filter="fade">
+                                <p:cBhvr>
+                                  <p:cTn id="6" dur="450"/>
+                                  <p:tgtEl>
+                                    <p:spTgt spid="6"/>
+                                  </p:tgtEl>
+                                </p:cBhvr>
+                              </p:animEffect>
+                            </p:childTnLst>
+                          </p:cTn>
+                        </p:par>
+                      </p:childTnLst>
+                    </p:cTn>
+                  </p:par>
+                  <p:par>
+                    <p:cTn id="7" fill="hold">
+                      <p:stCondLst>
+                        <p:cond delay="180"/>
+                      </p:stCondLst>
+                      <p:childTnLst>
+                        <p:par>
+                          <p:cTn id="8" presetID="10" presetClass="entr" presetSubtype="0" fill="hold" nodeType="withEffect">
+                            <p:stCondLst>
+                              <p:cond delay="0"/>
+                            </p:stCondLst>
+                            <p:childTnLst>
+                              <p:set>
+                                <p:cBhvr>
+                                  <p:cTn id="9" dur="1" fill="hold">
+                                    <p:stCondLst>
+                                      <p:cond delay="0"/>
+                                    </p:stCondLst>
+                                  </p:cTn>
+                                  <p:tgtEl>
+                                    <p:spTgt spid="7"/>
+                                  </p:tgtEl>
+                                  <p:attrNameLst>
+                                    <p:attrName>style.visibility</p:attrName>
+                                  </p:attrNameLst>
+                                </p:cBhvr>
+                                <p:to>
+                                  <p:strVal val="visible"/>
+                                </p:to>
+                              </p:set>
+                              <p:animEffect transition="in" filter="fade">
+                                <p:cBhvr>
+                                  <p:cTn id="10" dur="450"/>
+                                  <p:tgtEl>
+                                    <p:spTgt spid="7"/>
+                                  </p:tgtEl>
+                                </p:cBhvr>
+                              </p:animEffect>
+                            </p:childTnLst>
+                          </p:cTn>
+                        </p:par>
+                      </p:childTnLst>
+                    </p:cTn>
+                  </p:par>
+                  <p:par>
+                    <p:cTn id="11" fill="hold">
+                      <p:stCondLst>
+                        <p:cond delay="360"/>
+                      </p:stCondLst>
+                      <p:childTnLst>
+                        <p:par>
+                          <p:cTn id="12" presetID="10" presetClass="entr" presetSubtype="0" fill="hold" nodeType="withEffect">
+                            <p:stCondLst>
+                              <p:cond delay="0"/>
+                            </p:stCondLst>
+                            <p:childTnLst>
+                              <p:set>
+                                <p:cBhvr>
+                                  <p:cTn id="13" dur="1" fill="hold">
+                                    <p:stCondLst>
+                                      <p:cond delay="0"/>
+                                    </p:stCondLst>
+                                  </p:cTn>
+                                  <p:tgtEl>
+                                    <p:spTgt spid="8"/>
+                                  </p:tgtEl>
+                                  <p:attrNameLst>
+                                    <p:attrName>style.visibility</p:attrName>
+                                  </p:attrNameLst>
+                                </p:cBhvr>
+                                <p:to>
+                                  <p:strVal val="visible"/>
+                                </p:to>
+                              </p:set>
+                              <p:animEffect transition="in" filter="fade">
+                                <p:cBhvr>
+                                  <p:cTn id="14" dur="450"/>
+                                  <p:tgtEl>
+                                    <p:spTgt spid="8"/>
+                                  </p:tgtEl>
+                                </p:cBhvr>
+                              </p:animEffect>
+                            </p:childTnLst>
+                          </p:cTn>
+                        </p:par>
+                      </p:childTnLst>
+                    </p:cTn>
+                  </p:par>
+                  <p:par>
+                    <p:cTn id="15" fill="hold">
+                      <p:stCondLst>
+                        <p:cond delay="540"/>
+                      </p:stCondLst>
+                      <p:childTnLst>
+                        <p:par>
+                          <p:cTn id="16" presetID="10" presetClass="entr" presetSubtype="0" fill="hold" nodeType="withEffect">
+                            <p:stCondLst>
+                              <p:cond delay="0"/>
+                            </p:stCondLst>
+                            <p:childTnLst>
+                              <p:set>
+                                <p:cBhvr>
+                                  <p:cTn id="17" dur="1" fill="hold">
+                                    <p:stCondLst>
+                                      <p:cond delay="0"/>
+                                    </p:stCondLst>
+                                  </p:cTn>
+                                  <p:tgtEl>
+                                    <p:spTgt spid="9"/>
+                                  </p:tgtEl>
+                                  <p:attrNameLst>
+                                    <p:attrName>style.visibility</p:attrName>
+                                  </p:attrNameLst>
+                                </p:cBhvr>
+                                <p:to>
+                                  <p:strVal val="visible"/>
+                                </p:to>
+                              </p:set>
+                              <p:animEffect transition="in" filter="fade">
+                                <p:cBhvr>
+                                  <p:cTn id="18" dur="450"/>
+                                  <p:tgtEl>
+                                    <p:spTgt spid="9"/>
+                                  </p:tgtEl>
+                                </p:cBhvr>
+                              </p:animEffect>
+                            </p:childTnLst>
+                          </p:cTn>
+                        </p:par>
+                      </p:childTnLst>
+                    </p:cTn>
+                  </p:par>
+                  <p:par>
+                    <p:cTn id="19" fill="hold">
+                      <p:stCondLst>
+                        <p:cond delay="720"/>
+                      </p:stCondLst>
+                      <p:childTnLst>
+                        <p:par>
+                          <p:cTn id="20" presetID="10" presetClass="entr" presetSubtype="0" fill="hold" nodeType="withEffect">
+                            <p:stCondLst>
+                              <p:cond delay="0"/>
+                            </p:stCondLst>
+                            <p:childTnLst>
+                              <p:set>
+                                <p:cBhvr>
+                                  <p:cTn id="21" dur="1" fill="hold">
+                                    <p:stCondLst>
+                                      <p:cond delay="0"/>
+                                    </p:stCondLst>
+                                  </p:cTn>
+                                  <p:tgtEl>
+                                    <p:spTgt spid="10"/>
+                                  </p:tgtEl>
+                                  <p:attrNameLst>
+                                    <p:attrName>style.visibility</p:attrName>
+                                  </p:attrNameLst>
+                                </p:cBhvr>
+                                <p:to>
+                                  <p:strVal val="visible"/>
+                                </p:to>
+                              </p:set>
+                              <p:animEffect transition="in" filter="fade">
+                                <p:cBhvr>
+                                  <p:cTn id="22" dur="450"/>
+                                  <p:tgtEl>
+                                    <p:spTgt spid="10"/>
+                                  </p:tgtEl>
+                                </p:cBhvr>
+                              </p:animEffect>
+                            </p:childTnLst>
+                          </p:cTn>
+                        </p:par>
+                      </p:childTnLst>
+                    </p:cTn>
+                  </p:par>
+                  <p:par>
+                    <p:cTn id="23" fill="hold">
+                      <p:stCondLst>
+                        <p:cond delay="900"/>
+                      </p:stCondLst>
+                      <p:childTnLst>
+                        <p:par>
+                          <p:cTn id="24" presetID="10" presetClass="entr" presetSubtype="0" fill="hold" nodeType="withEffect">
+                            <p:stCondLst>
+                              <p:cond delay="0"/>
+                            </p:stCondLst>
+                            <p:childTnLst>
+                              <p:set>
+                                <p:cBhvr>
+                                  <p:cTn id="25" dur="1" fill="hold">
+                                    <p:stCondLst>
+                                      <p:cond delay="0"/>
+                                    </p:stCondLst>
+                                  </p:cTn>
+                                  <p:tgtEl>
+                                    <p:spTgt spid="11"/>
+                                  </p:tgtEl>
+                                  <p:attrNameLst>
+                                    <p:attrName>style.visibility</p:attrName>
+                                  </p:attrNameLst>
+                                </p:cBhvr>
+                                <p:to>
+                                  <p:strVal val="visible"/>
+                                </p:to>
+                              </p:set>
+                              <p:animEffect transition="in" filter="fade">
+                                <p:cBhvr>
+                                  <p:cTn id="26" dur="450"/>
+                                  <p:tgtEl>
+                                    <p:spTgt spid="11"/>
+                                  </p:tgtEl>
+                                </p:cBhvr>
+                              </p:animEffect>
+                            </p:childTnLst>
+                          </p:cTn>
+                        </p:par>
+                      </p:childTnLst>
+                    </p:cTn>
+                  </p:par>
+                  <p:par>
+                    <p:cTn id="27" fill="hold">
+                      <p:stCondLst>
+                        <p:cond delay="1080"/>
+                      </p:stCondLst>
+                      <p:childTnLst>
+                        <p:par>
+                          <p:cTn id="28" presetID="10" presetClass="entr" presetSubtype="0" fill="hold" nodeType="withEffect">
+                            <p:stCondLst>
+                              <p:cond delay="0"/>
+                            </p:stCondLst>
+                            <p:childTnLst>
+                              <p:set>
+                                <p:cBhvr>
+                                  <p:cTn id="29" dur="1" fill="hold">
+                                    <p:stCondLst>
+                                      <p:cond delay="0"/>
+                                    </p:stCondLst>
+                                  </p:cTn>
+                                  <p:tgtEl>
+                                    <p:spTgt spid="12"/>
+                                  </p:tgtEl>
+                                  <p:attrNameLst>
+                                    <p:attrName>style.visibility</p:attrName>
+                                  </p:attrNameLst>
+                                </p:cBhvr>
+                                <p:to>
+                                  <p:strVal val="visible"/>
+                                </p:to>
+                              </p:set>
+                              <p:animEffect transition="in" filter="fade">
+                                <p:cBhvr>
+                                  <p:cTn id="30" dur="450"/>
+                                  <p:tgtEl>
+                                    <p:spTgt spid="12"/>
+                                  </p:tgtEl>
+                                </p:cBhvr>
+                              </p:animEffect>
+                            </p:childTnLst>
+                          </p:cTn>
+                        </p:par>
+                      </p:childTnLst>
+                    </p:cTn>
+                  </p:par>
+                </p:childTnLst>
+              </p:cTn>
+              <p:prevCondLst>
+                <p:cond evt="onPrev" delay="0">
+                  <p:tgtEl>
+                    <p:sldTgt/>
+                  </p:tgtEl>
+                </p:cond>
+              </p:prevCondLst>
+              <p:nextCondLst>
+                <p:cond evt="onNext" delay="0">
+                  <p:tgtEl>
+                    <p:sldTgt/>
+                  </p:tgtEl>
+                </p:cond>
+              </p:nextCondLst>
+            </p:seq>
+          </p:childTnLst>
+        </p:cTn>
+      </p:par>
+    </p:tnLst>
+  </p:timing>
 </p:sld>
 </file>
 
@@ -3164,6 +4516,300 @@
   <p:transition spd="med">
     <p:fade/>
   </p:transition>
+  <p:timing>
+    <p:tnLst>
+      <p:par>
+        <p:cTn id="1" dur="indefinite" restart="never" nodeType="tmRoot">
+          <p:childTnLst>
+            <p:seq concurrent="1" nextAc="seek">
+              <p:cTn id="2" dur="indefinite" nodeType="mainSeq">
+                <p:childTnLst>
+                  <p:par>
+                    <p:cTn id="3" fill="hold">
+                      <p:stCondLst>
+                        <p:cond delay="0"/>
+                      </p:stCondLst>
+                      <p:childTnLst>
+                        <p:par>
+                          <p:cTn id="4" presetID="10" presetClass="entr" presetSubtype="0" fill="hold" nodeType="withEffect">
+                            <p:stCondLst>
+                              <p:cond delay="0"/>
+                            </p:stCondLst>
+                            <p:childTnLst>
+                              <p:set>
+                                <p:cBhvr>
+                                  <p:cTn id="5" dur="1" fill="hold">
+                                    <p:stCondLst>
+                                      <p:cond delay="0"/>
+                                    </p:stCondLst>
+                                  </p:cTn>
+                                  <p:tgtEl>
+                                    <p:spTgt spid="6"/>
+                                  </p:tgtEl>
+                                  <p:attrNameLst>
+                                    <p:attrName>style.visibility</p:attrName>
+                                  </p:attrNameLst>
+                                </p:cBhvr>
+                                <p:to>
+                                  <p:strVal val="visible"/>
+                                </p:to>
+                              </p:set>
+                              <p:animEffect transition="in" filter="fade">
+                                <p:cBhvr>
+                                  <p:cTn id="6" dur="450"/>
+                                  <p:tgtEl>
+                                    <p:spTgt spid="6"/>
+                                  </p:tgtEl>
+                                </p:cBhvr>
+                              </p:animEffect>
+                            </p:childTnLst>
+                          </p:cTn>
+                        </p:par>
+                      </p:childTnLst>
+                    </p:cTn>
+                  </p:par>
+                  <p:par>
+                    <p:cTn id="7" fill="hold">
+                      <p:stCondLst>
+                        <p:cond delay="180"/>
+                      </p:stCondLst>
+                      <p:childTnLst>
+                        <p:par>
+                          <p:cTn id="8" presetID="10" presetClass="entr" presetSubtype="0" fill="hold" nodeType="withEffect">
+                            <p:stCondLst>
+                              <p:cond delay="0"/>
+                            </p:stCondLst>
+                            <p:childTnLst>
+                              <p:set>
+                                <p:cBhvr>
+                                  <p:cTn id="9" dur="1" fill="hold">
+                                    <p:stCondLst>
+                                      <p:cond delay="0"/>
+                                    </p:stCondLst>
+                                  </p:cTn>
+                                  <p:tgtEl>
+                                    <p:spTgt spid="7"/>
+                                  </p:tgtEl>
+                                  <p:attrNameLst>
+                                    <p:attrName>style.visibility</p:attrName>
+                                  </p:attrNameLst>
+                                </p:cBhvr>
+                                <p:to>
+                                  <p:strVal val="visible"/>
+                                </p:to>
+                              </p:set>
+                              <p:animEffect transition="in" filter="fade">
+                                <p:cBhvr>
+                                  <p:cTn id="10" dur="450"/>
+                                  <p:tgtEl>
+                                    <p:spTgt spid="7"/>
+                                  </p:tgtEl>
+                                </p:cBhvr>
+                              </p:animEffect>
+                            </p:childTnLst>
+                          </p:cTn>
+                        </p:par>
+                      </p:childTnLst>
+                    </p:cTn>
+                  </p:par>
+                  <p:par>
+                    <p:cTn id="11" fill="hold">
+                      <p:stCondLst>
+                        <p:cond delay="360"/>
+                      </p:stCondLst>
+                      <p:childTnLst>
+                        <p:par>
+                          <p:cTn id="12" presetID="10" presetClass="entr" presetSubtype="0" fill="hold" nodeType="withEffect">
+                            <p:stCondLst>
+                              <p:cond delay="0"/>
+                            </p:stCondLst>
+                            <p:childTnLst>
+                              <p:set>
+                                <p:cBhvr>
+                                  <p:cTn id="13" dur="1" fill="hold">
+                                    <p:stCondLst>
+                                      <p:cond delay="0"/>
+                                    </p:stCondLst>
+                                  </p:cTn>
+                                  <p:tgtEl>
+                                    <p:spTgt spid="8"/>
+                                  </p:tgtEl>
+                                  <p:attrNameLst>
+                                    <p:attrName>style.visibility</p:attrName>
+                                  </p:attrNameLst>
+                                </p:cBhvr>
+                                <p:to>
+                                  <p:strVal val="visible"/>
+                                </p:to>
+                              </p:set>
+                              <p:animEffect transition="in" filter="fade">
+                                <p:cBhvr>
+                                  <p:cTn id="14" dur="450"/>
+                                  <p:tgtEl>
+                                    <p:spTgt spid="8"/>
+                                  </p:tgtEl>
+                                </p:cBhvr>
+                              </p:animEffect>
+                            </p:childTnLst>
+                          </p:cTn>
+                        </p:par>
+                      </p:childTnLst>
+                    </p:cTn>
+                  </p:par>
+                  <p:par>
+                    <p:cTn id="15" fill="hold">
+                      <p:stCondLst>
+                        <p:cond delay="540"/>
+                      </p:stCondLst>
+                      <p:childTnLst>
+                        <p:par>
+                          <p:cTn id="16" presetID="10" presetClass="entr" presetSubtype="0" fill="hold" nodeType="withEffect">
+                            <p:stCondLst>
+                              <p:cond delay="0"/>
+                            </p:stCondLst>
+                            <p:childTnLst>
+                              <p:set>
+                                <p:cBhvr>
+                                  <p:cTn id="17" dur="1" fill="hold">
+                                    <p:stCondLst>
+                                      <p:cond delay="0"/>
+                                    </p:stCondLst>
+                                  </p:cTn>
+                                  <p:tgtEl>
+                                    <p:spTgt spid="9"/>
+                                  </p:tgtEl>
+                                  <p:attrNameLst>
+                                    <p:attrName>style.visibility</p:attrName>
+                                  </p:attrNameLst>
+                                </p:cBhvr>
+                                <p:to>
+                                  <p:strVal val="visible"/>
+                                </p:to>
+                              </p:set>
+                              <p:animEffect transition="in" filter="fade">
+                                <p:cBhvr>
+                                  <p:cTn id="18" dur="450"/>
+                                  <p:tgtEl>
+                                    <p:spTgt spid="9"/>
+                                  </p:tgtEl>
+                                </p:cBhvr>
+                              </p:animEffect>
+                            </p:childTnLst>
+                          </p:cTn>
+                        </p:par>
+                      </p:childTnLst>
+                    </p:cTn>
+                  </p:par>
+                  <p:par>
+                    <p:cTn id="19" fill="hold">
+                      <p:stCondLst>
+                        <p:cond delay="720"/>
+                      </p:stCondLst>
+                      <p:childTnLst>
+                        <p:par>
+                          <p:cTn id="20" presetID="10" presetClass="entr" presetSubtype="0" fill="hold" nodeType="withEffect">
+                            <p:stCondLst>
+                              <p:cond delay="0"/>
+                            </p:stCondLst>
+                            <p:childTnLst>
+                              <p:set>
+                                <p:cBhvr>
+                                  <p:cTn id="21" dur="1" fill="hold">
+                                    <p:stCondLst>
+                                      <p:cond delay="0"/>
+                                    </p:stCondLst>
+                                  </p:cTn>
+                                  <p:tgtEl>
+                                    <p:spTgt spid="10"/>
+                                  </p:tgtEl>
+                                  <p:attrNameLst>
+                                    <p:attrName>style.visibility</p:attrName>
+                                  </p:attrNameLst>
+                                </p:cBhvr>
+                                <p:to>
+                                  <p:strVal val="visible"/>
+                                </p:to>
+                              </p:set>
+                              <p:animEffect transition="in" filter="fade">
+                                <p:cBhvr>
+                                  <p:cTn id="22" dur="450"/>
+                                  <p:tgtEl>
+                                    <p:spTgt spid="10"/>
+                                  </p:tgtEl>
+                                </p:cBhvr>
+                              </p:animEffect>
+                            </p:childTnLst>
+                          </p:cTn>
+                        </p:par>
+                      </p:childTnLst>
+                    </p:cTn>
+                  </p:par>
+                  <p:par>
+                    <p:cTn id="23" fill="hold">
+                      <p:stCondLst>
+                        <p:cond delay="900"/>
+                      </p:stCondLst>
+                      <p:childTnLst>
+                        <p:par>
+                          <p:cTn id="24" presetID="10" presetClass="entr" presetSubtype="0" fill="hold" nodeType="withEffect">
+                            <p:stCondLst>
+                              <p:cond delay="0"/>
+                            </p:stCondLst>
+                            <p:childTnLst>
+                              <p:set>
+                                <p:cBhvr>
+                                  <p:cTn id="25" dur="1" fill="hold">
+                                    <p:stCondLst>
+                                      <p:cond delay="0"/>
+                                    </p:stCondLst>
+                                  </p:cTn>
+                                  <p:tgtEl>
+                                    <p:spTgt spid="11"/>
+                                  </p:tgtEl>
+                                  <p:attrNameLst>
+                                    <p:attrName>style.visibility</p:attrName>
+                                  </p:attrNameLst>
+                                </p:cBhvr>
+                                <p:to>
+                                  <p:strVal val="visible"/>
+                                </p:to>
+                              </p:set>
+                              <p:animEffect transition="in" filter="fade">
+                                <p:cBhvr>
+                                  <p:cTn id="26" dur="450"/>
+                                  <p:tgtEl>
+                                    <p:spTgt spid="11"/>
+                                  </p:tgtEl>
+                                </p:cBhvr>
+                              </p:animEffect>
+                            </p:childTnLst>
+                          </p:cTn>
+                        </p:par>
+                      </p:childTnLst>
+                    </p:cTn>
+                  </p:par>
+                </p:childTnLst>
+              </p:cTn>
+              <p:prevCondLst>
+                <p:cond evt="onPrev" delay="0">
+                  <p:tgtEl>
+                    <p:sldTgt/>
+                  </p:tgtEl>
+                </p:cond>
+              </p:prevCondLst>
+              <p:nextCondLst>
+                <p:cond evt="onNext" delay="0">
+                  <p:tgtEl>
+                    <p:sldTgt/>
+                  </p:tgtEl>
+                </p:cond>
+              </p:nextCondLst>
+            </p:seq>
+          </p:childTnLst>
+        </p:cTn>
+      </p:par>
+    </p:tnLst>
+  </p:timing>
 </p:sld>
 </file>
 
@@ -3720,6 +5366,256 @@
   <p:transition spd="med">
     <p:fade/>
   </p:transition>
+  <p:timing>
+    <p:tnLst>
+      <p:par>
+        <p:cTn id="1" dur="indefinite" restart="never" nodeType="tmRoot">
+          <p:childTnLst>
+            <p:seq concurrent="1" nextAc="seek">
+              <p:cTn id="2" dur="indefinite" nodeType="mainSeq">
+                <p:childTnLst>
+                  <p:par>
+                    <p:cTn id="3" fill="hold">
+                      <p:stCondLst>
+                        <p:cond delay="0"/>
+                      </p:stCondLst>
+                      <p:childTnLst>
+                        <p:par>
+                          <p:cTn id="4" presetID="10" presetClass="entr" presetSubtype="0" fill="hold" nodeType="withEffect">
+                            <p:stCondLst>
+                              <p:cond delay="0"/>
+                            </p:stCondLst>
+                            <p:childTnLst>
+                              <p:set>
+                                <p:cBhvr>
+                                  <p:cTn id="5" dur="1" fill="hold">
+                                    <p:stCondLst>
+                                      <p:cond delay="0"/>
+                                    </p:stCondLst>
+                                  </p:cTn>
+                                  <p:tgtEl>
+                                    <p:spTgt spid="6"/>
+                                  </p:tgtEl>
+                                  <p:attrNameLst>
+                                    <p:attrName>style.visibility</p:attrName>
+                                  </p:attrNameLst>
+                                </p:cBhvr>
+                                <p:to>
+                                  <p:strVal val="visible"/>
+                                </p:to>
+                              </p:set>
+                              <p:animEffect transition="in" filter="fade">
+                                <p:cBhvr>
+                                  <p:cTn id="6" dur="450"/>
+                                  <p:tgtEl>
+                                    <p:spTgt spid="6"/>
+                                  </p:tgtEl>
+                                </p:cBhvr>
+                              </p:animEffect>
+                            </p:childTnLst>
+                          </p:cTn>
+                        </p:par>
+                      </p:childTnLst>
+                    </p:cTn>
+                  </p:par>
+                  <p:par>
+                    <p:cTn id="7" fill="hold">
+                      <p:stCondLst>
+                        <p:cond delay="180"/>
+                      </p:stCondLst>
+                      <p:childTnLst>
+                        <p:par>
+                          <p:cTn id="8" presetID="10" presetClass="entr" presetSubtype="0" fill="hold" nodeType="withEffect">
+                            <p:stCondLst>
+                              <p:cond delay="0"/>
+                            </p:stCondLst>
+                            <p:childTnLst>
+                              <p:set>
+                                <p:cBhvr>
+                                  <p:cTn id="9" dur="1" fill="hold">
+                                    <p:stCondLst>
+                                      <p:cond delay="0"/>
+                                    </p:stCondLst>
+                                  </p:cTn>
+                                  <p:tgtEl>
+                                    <p:spTgt spid="7"/>
+                                  </p:tgtEl>
+                                  <p:attrNameLst>
+                                    <p:attrName>style.visibility</p:attrName>
+                                  </p:attrNameLst>
+                                </p:cBhvr>
+                                <p:to>
+                                  <p:strVal val="visible"/>
+                                </p:to>
+                              </p:set>
+                              <p:animEffect transition="in" filter="fade">
+                                <p:cBhvr>
+                                  <p:cTn id="10" dur="450"/>
+                                  <p:tgtEl>
+                                    <p:spTgt spid="7"/>
+                                  </p:tgtEl>
+                                </p:cBhvr>
+                              </p:animEffect>
+                            </p:childTnLst>
+                          </p:cTn>
+                        </p:par>
+                      </p:childTnLst>
+                    </p:cTn>
+                  </p:par>
+                  <p:par>
+                    <p:cTn id="11" fill="hold">
+                      <p:stCondLst>
+                        <p:cond delay="360"/>
+                      </p:stCondLst>
+                      <p:childTnLst>
+                        <p:par>
+                          <p:cTn id="12" presetID="10" presetClass="entr" presetSubtype="0" fill="hold" nodeType="withEffect">
+                            <p:stCondLst>
+                              <p:cond delay="0"/>
+                            </p:stCondLst>
+                            <p:childTnLst>
+                              <p:set>
+                                <p:cBhvr>
+                                  <p:cTn id="13" dur="1" fill="hold">
+                                    <p:stCondLst>
+                                      <p:cond delay="0"/>
+                                    </p:stCondLst>
+                                  </p:cTn>
+                                  <p:tgtEl>
+                                    <p:spTgt spid="8"/>
+                                  </p:tgtEl>
+                                  <p:attrNameLst>
+                                    <p:attrName>style.visibility</p:attrName>
+                                  </p:attrNameLst>
+                                </p:cBhvr>
+                                <p:to>
+                                  <p:strVal val="visible"/>
+                                </p:to>
+                              </p:set>
+                              <p:animEffect transition="in" filter="fade">
+                                <p:cBhvr>
+                                  <p:cTn id="14" dur="450"/>
+                                  <p:tgtEl>
+                                    <p:spTgt spid="8"/>
+                                  </p:tgtEl>
+                                </p:cBhvr>
+                              </p:animEffect>
+                            </p:childTnLst>
+                          </p:cTn>
+                        </p:par>
+                      </p:childTnLst>
+                    </p:cTn>
+                  </p:par>
+                  <p:par>
+                    <p:cTn id="15" fill="hold">
+                      <p:stCondLst>
+                        <p:cond delay="540"/>
+                      </p:stCondLst>
+                      <p:childTnLst>
+                        <p:par>
+                          <p:cTn id="16" presetID="10" presetClass="entr" presetSubtype="0" fill="hold" nodeType="withEffect">
+                            <p:stCondLst>
+                              <p:cond delay="0"/>
+                            </p:stCondLst>
+                            <p:childTnLst>
+                              <p:set>
+                                <p:cBhvr>
+                                  <p:cTn id="17" dur="1" fill="hold">
+                                    <p:stCondLst>
+                                      <p:cond delay="0"/>
+                                    </p:stCondLst>
+                                  </p:cTn>
+                                  <p:tgtEl>
+                                    <p:spTgt spid="9"/>
+                                  </p:tgtEl>
+                                  <p:attrNameLst>
+                                    <p:attrName>style.visibility</p:attrName>
+                                  </p:attrNameLst>
+                                </p:cBhvr>
+                                <p:to>
+                                  <p:strVal val="visible"/>
+                                </p:to>
+                              </p:set>
+                              <p:animEffect transition="in" filter="fade">
+                                <p:cBhvr>
+                                  <p:cTn id="18" dur="450"/>
+                                  <p:tgtEl>
+                                    <p:spTgt spid="9"/>
+                                  </p:tgtEl>
+                                </p:cBhvr>
+                              </p:animEffect>
+                            </p:childTnLst>
+                          </p:cTn>
+                        </p:par>
+                      </p:childTnLst>
+                    </p:cTn>
+                  </p:par>
+                  <p:par>
+                    <p:cTn id="19" fill="hold">
+                      <p:stCondLst>
+                        <p:cond delay="720"/>
+                      </p:stCondLst>
+                      <p:childTnLst>
+                        <p:par>
+                          <p:cTn id="20" presetID="10" presetClass="entr" presetSubtype="0" fill="hold" nodeType="withEffect">
+                            <p:stCondLst>
+                              <p:cond delay="0"/>
+                            </p:stCondLst>
+                            <p:childTnLst>
+                              <p:set>
+                                <p:cBhvr>
+                                  <p:cTn id="21" dur="1" fill="hold">
+                                    <p:stCondLst>
+                                      <p:cond delay="0"/>
+                                    </p:stCondLst>
+                                  </p:cTn>
+                                  <p:tgtEl>
+                                    <p:spTgt spid="10"/>
+                                  </p:tgtEl>
+                                  <p:attrNameLst>
+                                    <p:attrName>style.visibility</p:attrName>
+                                  </p:attrNameLst>
+                                </p:cBhvr>
+                                <p:to>
+                                  <p:strVal val="visible"/>
+                                </p:to>
+                              </p:set>
+                              <p:animEffect transition="in" filter="fade">
+                                <p:cBhvr>
+                                  <p:cTn id="22" dur="450"/>
+                                  <p:tgtEl>
+                                    <p:spTgt spid="10"/>
+                                  </p:tgtEl>
+                                </p:cBhvr>
+                              </p:animEffect>
+                            </p:childTnLst>
+                          </p:cTn>
+                        </p:par>
+                      </p:childTnLst>
+                    </p:cTn>
+                  </p:par>
+                </p:childTnLst>
+              </p:cTn>
+              <p:prevCondLst>
+                <p:cond evt="onPrev" delay="0">
+                  <p:tgtEl>
+                    <p:sldTgt/>
+                  </p:tgtEl>
+                </p:cond>
+              </p:prevCondLst>
+              <p:nextCondLst>
+                <p:cond evt="onNext" delay="0">
+                  <p:tgtEl>
+                    <p:sldTgt/>
+                  </p:tgtEl>
+                </p:cond>
+              </p:nextCondLst>
+            </p:seq>
+          </p:childTnLst>
+        </p:cTn>
+      </p:par>
+    </p:tnLst>
+  </p:timing>
 </p:sld>
 </file>
 
@@ -4646,6 +6542,300 @@
   <p:transition spd="med">
     <p:fade/>
   </p:transition>
+  <p:timing>
+    <p:tnLst>
+      <p:par>
+        <p:cTn id="1" dur="indefinite" restart="never" nodeType="tmRoot">
+          <p:childTnLst>
+            <p:seq concurrent="1" nextAc="seek">
+              <p:cTn id="2" dur="indefinite" nodeType="mainSeq">
+                <p:childTnLst>
+                  <p:par>
+                    <p:cTn id="3" fill="hold">
+                      <p:stCondLst>
+                        <p:cond delay="0"/>
+                      </p:stCondLst>
+                      <p:childTnLst>
+                        <p:par>
+                          <p:cTn id="4" presetID="10" presetClass="entr" presetSubtype="0" fill="hold" nodeType="withEffect">
+                            <p:stCondLst>
+                              <p:cond delay="0"/>
+                            </p:stCondLst>
+                            <p:childTnLst>
+                              <p:set>
+                                <p:cBhvr>
+                                  <p:cTn id="5" dur="1" fill="hold">
+                                    <p:stCondLst>
+                                      <p:cond delay="0"/>
+                                    </p:stCondLst>
+                                  </p:cTn>
+                                  <p:tgtEl>
+                                    <p:spTgt spid="6"/>
+                                  </p:tgtEl>
+                                  <p:attrNameLst>
+                                    <p:attrName>style.visibility</p:attrName>
+                                  </p:attrNameLst>
+                                </p:cBhvr>
+                                <p:to>
+                                  <p:strVal val="visible"/>
+                                </p:to>
+                              </p:set>
+                              <p:animEffect transition="in" filter="fade">
+                                <p:cBhvr>
+                                  <p:cTn id="6" dur="450"/>
+                                  <p:tgtEl>
+                                    <p:spTgt spid="6"/>
+                                  </p:tgtEl>
+                                </p:cBhvr>
+                              </p:animEffect>
+                            </p:childTnLst>
+                          </p:cTn>
+                        </p:par>
+                      </p:childTnLst>
+                    </p:cTn>
+                  </p:par>
+                  <p:par>
+                    <p:cTn id="7" fill="hold">
+                      <p:stCondLst>
+                        <p:cond delay="180"/>
+                      </p:stCondLst>
+                      <p:childTnLst>
+                        <p:par>
+                          <p:cTn id="8" presetID="10" presetClass="entr" presetSubtype="0" fill="hold" nodeType="withEffect">
+                            <p:stCondLst>
+                              <p:cond delay="0"/>
+                            </p:stCondLst>
+                            <p:childTnLst>
+                              <p:set>
+                                <p:cBhvr>
+                                  <p:cTn id="9" dur="1" fill="hold">
+                                    <p:stCondLst>
+                                      <p:cond delay="0"/>
+                                    </p:stCondLst>
+                                  </p:cTn>
+                                  <p:tgtEl>
+                                    <p:spTgt spid="7"/>
+                                  </p:tgtEl>
+                                  <p:attrNameLst>
+                                    <p:attrName>style.visibility</p:attrName>
+                                  </p:attrNameLst>
+                                </p:cBhvr>
+                                <p:to>
+                                  <p:strVal val="visible"/>
+                                </p:to>
+                              </p:set>
+                              <p:animEffect transition="in" filter="fade">
+                                <p:cBhvr>
+                                  <p:cTn id="10" dur="450"/>
+                                  <p:tgtEl>
+                                    <p:spTgt spid="7"/>
+                                  </p:tgtEl>
+                                </p:cBhvr>
+                              </p:animEffect>
+                            </p:childTnLst>
+                          </p:cTn>
+                        </p:par>
+                      </p:childTnLst>
+                    </p:cTn>
+                  </p:par>
+                  <p:par>
+                    <p:cTn id="11" fill="hold">
+                      <p:stCondLst>
+                        <p:cond delay="360"/>
+                      </p:stCondLst>
+                      <p:childTnLst>
+                        <p:par>
+                          <p:cTn id="12" presetID="10" presetClass="entr" presetSubtype="0" fill="hold" nodeType="withEffect">
+                            <p:stCondLst>
+                              <p:cond delay="0"/>
+                            </p:stCondLst>
+                            <p:childTnLst>
+                              <p:set>
+                                <p:cBhvr>
+                                  <p:cTn id="13" dur="1" fill="hold">
+                                    <p:stCondLst>
+                                      <p:cond delay="0"/>
+                                    </p:stCondLst>
+                                  </p:cTn>
+                                  <p:tgtEl>
+                                    <p:spTgt spid="8"/>
+                                  </p:tgtEl>
+                                  <p:attrNameLst>
+                                    <p:attrName>style.visibility</p:attrName>
+                                  </p:attrNameLst>
+                                </p:cBhvr>
+                                <p:to>
+                                  <p:strVal val="visible"/>
+                                </p:to>
+                              </p:set>
+                              <p:animEffect transition="in" filter="fade">
+                                <p:cBhvr>
+                                  <p:cTn id="14" dur="450"/>
+                                  <p:tgtEl>
+                                    <p:spTgt spid="8"/>
+                                  </p:tgtEl>
+                                </p:cBhvr>
+                              </p:animEffect>
+                            </p:childTnLst>
+                          </p:cTn>
+                        </p:par>
+                      </p:childTnLst>
+                    </p:cTn>
+                  </p:par>
+                  <p:par>
+                    <p:cTn id="15" fill="hold">
+                      <p:stCondLst>
+                        <p:cond delay="540"/>
+                      </p:stCondLst>
+                      <p:childTnLst>
+                        <p:par>
+                          <p:cTn id="16" presetID="10" presetClass="entr" presetSubtype="0" fill="hold" nodeType="withEffect">
+                            <p:stCondLst>
+                              <p:cond delay="0"/>
+                            </p:stCondLst>
+                            <p:childTnLst>
+                              <p:set>
+                                <p:cBhvr>
+                                  <p:cTn id="17" dur="1" fill="hold">
+                                    <p:stCondLst>
+                                      <p:cond delay="0"/>
+                                    </p:stCondLst>
+                                  </p:cTn>
+                                  <p:tgtEl>
+                                    <p:spTgt spid="9"/>
+                                  </p:tgtEl>
+                                  <p:attrNameLst>
+                                    <p:attrName>style.visibility</p:attrName>
+                                  </p:attrNameLst>
+                                </p:cBhvr>
+                                <p:to>
+                                  <p:strVal val="visible"/>
+                                </p:to>
+                              </p:set>
+                              <p:animEffect transition="in" filter="fade">
+                                <p:cBhvr>
+                                  <p:cTn id="18" dur="450"/>
+                                  <p:tgtEl>
+                                    <p:spTgt spid="9"/>
+                                  </p:tgtEl>
+                                </p:cBhvr>
+                              </p:animEffect>
+                            </p:childTnLst>
+                          </p:cTn>
+                        </p:par>
+                      </p:childTnLst>
+                    </p:cTn>
+                  </p:par>
+                  <p:par>
+                    <p:cTn id="19" fill="hold">
+                      <p:stCondLst>
+                        <p:cond delay="720"/>
+                      </p:stCondLst>
+                      <p:childTnLst>
+                        <p:par>
+                          <p:cTn id="20" presetID="10" presetClass="entr" presetSubtype="0" fill="hold" nodeType="withEffect">
+                            <p:stCondLst>
+                              <p:cond delay="0"/>
+                            </p:stCondLst>
+                            <p:childTnLst>
+                              <p:set>
+                                <p:cBhvr>
+                                  <p:cTn id="21" dur="1" fill="hold">
+                                    <p:stCondLst>
+                                      <p:cond delay="0"/>
+                                    </p:stCondLst>
+                                  </p:cTn>
+                                  <p:tgtEl>
+                                    <p:spTgt spid="10"/>
+                                  </p:tgtEl>
+                                  <p:attrNameLst>
+                                    <p:attrName>style.visibility</p:attrName>
+                                  </p:attrNameLst>
+                                </p:cBhvr>
+                                <p:to>
+                                  <p:strVal val="visible"/>
+                                </p:to>
+                              </p:set>
+                              <p:animEffect transition="in" filter="fade">
+                                <p:cBhvr>
+                                  <p:cTn id="22" dur="450"/>
+                                  <p:tgtEl>
+                                    <p:spTgt spid="10"/>
+                                  </p:tgtEl>
+                                </p:cBhvr>
+                              </p:animEffect>
+                            </p:childTnLst>
+                          </p:cTn>
+                        </p:par>
+                      </p:childTnLst>
+                    </p:cTn>
+                  </p:par>
+                  <p:par>
+                    <p:cTn id="23" fill="hold">
+                      <p:stCondLst>
+                        <p:cond delay="900"/>
+                      </p:stCondLst>
+                      <p:childTnLst>
+                        <p:par>
+                          <p:cTn id="24" presetID="10" presetClass="entr" presetSubtype="0" fill="hold" nodeType="withEffect">
+                            <p:stCondLst>
+                              <p:cond delay="0"/>
+                            </p:stCondLst>
+                            <p:childTnLst>
+                              <p:set>
+                                <p:cBhvr>
+                                  <p:cTn id="25" dur="1" fill="hold">
+                                    <p:stCondLst>
+                                      <p:cond delay="0"/>
+                                    </p:stCondLst>
+                                  </p:cTn>
+                                  <p:tgtEl>
+                                    <p:spTgt spid="11"/>
+                                  </p:tgtEl>
+                                  <p:attrNameLst>
+                                    <p:attrName>style.visibility</p:attrName>
+                                  </p:attrNameLst>
+                                </p:cBhvr>
+                                <p:to>
+                                  <p:strVal val="visible"/>
+                                </p:to>
+                              </p:set>
+                              <p:animEffect transition="in" filter="fade">
+                                <p:cBhvr>
+                                  <p:cTn id="26" dur="450"/>
+                                  <p:tgtEl>
+                                    <p:spTgt spid="11"/>
+                                  </p:tgtEl>
+                                </p:cBhvr>
+                              </p:animEffect>
+                            </p:childTnLst>
+                          </p:cTn>
+                        </p:par>
+                      </p:childTnLst>
+                    </p:cTn>
+                  </p:par>
+                </p:childTnLst>
+              </p:cTn>
+              <p:prevCondLst>
+                <p:cond evt="onPrev" delay="0">
+                  <p:tgtEl>
+                    <p:sldTgt/>
+                  </p:tgtEl>
+                </p:cond>
+              </p:prevCondLst>
+              <p:nextCondLst>
+                <p:cond evt="onNext" delay="0">
+                  <p:tgtEl>
+                    <p:sldTgt/>
+                  </p:tgtEl>
+                </p:cond>
+              </p:nextCondLst>
+            </p:seq>
+          </p:childTnLst>
+        </p:cTn>
+      </p:par>
+    </p:tnLst>
+  </p:timing>
 </p:sld>
 </file>
 
@@ -5326,6 +7516,388 @@
   <p:transition spd="med">
     <p:fade/>
   </p:transition>
+  <p:timing>
+    <p:tnLst>
+      <p:par>
+        <p:cTn id="1" dur="indefinite" restart="never" nodeType="tmRoot">
+          <p:childTnLst>
+            <p:seq concurrent="1" nextAc="seek">
+              <p:cTn id="2" dur="indefinite" nodeType="mainSeq">
+                <p:childTnLst>
+                  <p:par>
+                    <p:cTn id="3" fill="hold">
+                      <p:stCondLst>
+                        <p:cond delay="0"/>
+                      </p:stCondLst>
+                      <p:childTnLst>
+                        <p:par>
+                          <p:cTn id="4" presetID="10" presetClass="entr" presetSubtype="0" fill="hold" nodeType="withEffect">
+                            <p:stCondLst>
+                              <p:cond delay="0"/>
+                            </p:stCondLst>
+                            <p:childTnLst>
+                              <p:set>
+                                <p:cBhvr>
+                                  <p:cTn id="5" dur="1" fill="hold">
+                                    <p:stCondLst>
+                                      <p:cond delay="0"/>
+                                    </p:stCondLst>
+                                  </p:cTn>
+                                  <p:tgtEl>
+                                    <p:spTgt spid="6"/>
+                                  </p:tgtEl>
+                                  <p:attrNameLst>
+                                    <p:attrName>style.visibility</p:attrName>
+                                  </p:attrNameLst>
+                                </p:cBhvr>
+                                <p:to>
+                                  <p:strVal val="visible"/>
+                                </p:to>
+                              </p:set>
+                              <p:animEffect transition="in" filter="fade">
+                                <p:cBhvr>
+                                  <p:cTn id="6" dur="450"/>
+                                  <p:tgtEl>
+                                    <p:spTgt spid="6"/>
+                                  </p:tgtEl>
+                                </p:cBhvr>
+                              </p:animEffect>
+                            </p:childTnLst>
+                          </p:cTn>
+                        </p:par>
+                      </p:childTnLst>
+                    </p:cTn>
+                  </p:par>
+                  <p:par>
+                    <p:cTn id="7" fill="hold">
+                      <p:stCondLst>
+                        <p:cond delay="180"/>
+                      </p:stCondLst>
+                      <p:childTnLst>
+                        <p:par>
+                          <p:cTn id="8" presetID="10" presetClass="entr" presetSubtype="0" fill="hold" nodeType="withEffect">
+                            <p:stCondLst>
+                              <p:cond delay="0"/>
+                            </p:stCondLst>
+                            <p:childTnLst>
+                              <p:set>
+                                <p:cBhvr>
+                                  <p:cTn id="9" dur="1" fill="hold">
+                                    <p:stCondLst>
+                                      <p:cond delay="0"/>
+                                    </p:stCondLst>
+                                  </p:cTn>
+                                  <p:tgtEl>
+                                    <p:spTgt spid="7"/>
+                                  </p:tgtEl>
+                                  <p:attrNameLst>
+                                    <p:attrName>style.visibility</p:attrName>
+                                  </p:attrNameLst>
+                                </p:cBhvr>
+                                <p:to>
+                                  <p:strVal val="visible"/>
+                                </p:to>
+                              </p:set>
+                              <p:animEffect transition="in" filter="fade">
+                                <p:cBhvr>
+                                  <p:cTn id="10" dur="450"/>
+                                  <p:tgtEl>
+                                    <p:spTgt spid="7"/>
+                                  </p:tgtEl>
+                                </p:cBhvr>
+                              </p:animEffect>
+                            </p:childTnLst>
+                          </p:cTn>
+                        </p:par>
+                      </p:childTnLst>
+                    </p:cTn>
+                  </p:par>
+                  <p:par>
+                    <p:cTn id="11" fill="hold">
+                      <p:stCondLst>
+                        <p:cond delay="360"/>
+                      </p:stCondLst>
+                      <p:childTnLst>
+                        <p:par>
+                          <p:cTn id="12" presetID="10" presetClass="entr" presetSubtype="0" fill="hold" nodeType="withEffect">
+                            <p:stCondLst>
+                              <p:cond delay="0"/>
+                            </p:stCondLst>
+                            <p:childTnLst>
+                              <p:set>
+                                <p:cBhvr>
+                                  <p:cTn id="13" dur="1" fill="hold">
+                                    <p:stCondLst>
+                                      <p:cond delay="0"/>
+                                    </p:stCondLst>
+                                  </p:cTn>
+                                  <p:tgtEl>
+                                    <p:spTgt spid="8"/>
+                                  </p:tgtEl>
+                                  <p:attrNameLst>
+                                    <p:attrName>style.visibility</p:attrName>
+                                  </p:attrNameLst>
+                                </p:cBhvr>
+                                <p:to>
+                                  <p:strVal val="visible"/>
+                                </p:to>
+                              </p:set>
+                              <p:animEffect transition="in" filter="fade">
+                                <p:cBhvr>
+                                  <p:cTn id="14" dur="450"/>
+                                  <p:tgtEl>
+                                    <p:spTgt spid="8"/>
+                                  </p:tgtEl>
+                                </p:cBhvr>
+                              </p:animEffect>
+                            </p:childTnLst>
+                          </p:cTn>
+                        </p:par>
+                      </p:childTnLst>
+                    </p:cTn>
+                  </p:par>
+                  <p:par>
+                    <p:cTn id="15" fill="hold">
+                      <p:stCondLst>
+                        <p:cond delay="540"/>
+                      </p:stCondLst>
+                      <p:childTnLst>
+                        <p:par>
+                          <p:cTn id="16" presetID="10" presetClass="entr" presetSubtype="0" fill="hold" nodeType="withEffect">
+                            <p:stCondLst>
+                              <p:cond delay="0"/>
+                            </p:stCondLst>
+                            <p:childTnLst>
+                              <p:set>
+                                <p:cBhvr>
+                                  <p:cTn id="17" dur="1" fill="hold">
+                                    <p:stCondLst>
+                                      <p:cond delay="0"/>
+                                    </p:stCondLst>
+                                  </p:cTn>
+                                  <p:tgtEl>
+                                    <p:spTgt spid="9"/>
+                                  </p:tgtEl>
+                                  <p:attrNameLst>
+                                    <p:attrName>style.visibility</p:attrName>
+                                  </p:attrNameLst>
+                                </p:cBhvr>
+                                <p:to>
+                                  <p:strVal val="visible"/>
+                                </p:to>
+                              </p:set>
+                              <p:animEffect transition="in" filter="fade">
+                                <p:cBhvr>
+                                  <p:cTn id="18" dur="450"/>
+                                  <p:tgtEl>
+                                    <p:spTgt spid="9"/>
+                                  </p:tgtEl>
+                                </p:cBhvr>
+                              </p:animEffect>
+                            </p:childTnLst>
+                          </p:cTn>
+                        </p:par>
+                      </p:childTnLst>
+                    </p:cTn>
+                  </p:par>
+                  <p:par>
+                    <p:cTn id="19" fill="hold">
+                      <p:stCondLst>
+                        <p:cond delay="720"/>
+                      </p:stCondLst>
+                      <p:childTnLst>
+                        <p:par>
+                          <p:cTn id="20" presetID="10" presetClass="entr" presetSubtype="0" fill="hold" nodeType="withEffect">
+                            <p:stCondLst>
+                              <p:cond delay="0"/>
+                            </p:stCondLst>
+                            <p:childTnLst>
+                              <p:set>
+                                <p:cBhvr>
+                                  <p:cTn id="21" dur="1" fill="hold">
+                                    <p:stCondLst>
+                                      <p:cond delay="0"/>
+                                    </p:stCondLst>
+                                  </p:cTn>
+                                  <p:tgtEl>
+                                    <p:spTgt spid="10"/>
+                                  </p:tgtEl>
+                                  <p:attrNameLst>
+                                    <p:attrName>style.visibility</p:attrName>
+                                  </p:attrNameLst>
+                                </p:cBhvr>
+                                <p:to>
+                                  <p:strVal val="visible"/>
+                                </p:to>
+                              </p:set>
+                              <p:animEffect transition="in" filter="fade">
+                                <p:cBhvr>
+                                  <p:cTn id="22" dur="450"/>
+                                  <p:tgtEl>
+                                    <p:spTgt spid="10"/>
+                                  </p:tgtEl>
+                                </p:cBhvr>
+                              </p:animEffect>
+                            </p:childTnLst>
+                          </p:cTn>
+                        </p:par>
+                      </p:childTnLst>
+                    </p:cTn>
+                  </p:par>
+                  <p:par>
+                    <p:cTn id="23" fill="hold">
+                      <p:stCondLst>
+                        <p:cond delay="900"/>
+                      </p:stCondLst>
+                      <p:childTnLst>
+                        <p:par>
+                          <p:cTn id="24" presetID="10" presetClass="entr" presetSubtype="0" fill="hold" nodeType="withEffect">
+                            <p:stCondLst>
+                              <p:cond delay="0"/>
+                            </p:stCondLst>
+                            <p:childTnLst>
+                              <p:set>
+                                <p:cBhvr>
+                                  <p:cTn id="25" dur="1" fill="hold">
+                                    <p:stCondLst>
+                                      <p:cond delay="0"/>
+                                    </p:stCondLst>
+                                  </p:cTn>
+                                  <p:tgtEl>
+                                    <p:spTgt spid="11"/>
+                                  </p:tgtEl>
+                                  <p:attrNameLst>
+                                    <p:attrName>style.visibility</p:attrName>
+                                  </p:attrNameLst>
+                                </p:cBhvr>
+                                <p:to>
+                                  <p:strVal val="visible"/>
+                                </p:to>
+                              </p:set>
+                              <p:animEffect transition="in" filter="fade">
+                                <p:cBhvr>
+                                  <p:cTn id="26" dur="450"/>
+                                  <p:tgtEl>
+                                    <p:spTgt spid="11"/>
+                                  </p:tgtEl>
+                                </p:cBhvr>
+                              </p:animEffect>
+                            </p:childTnLst>
+                          </p:cTn>
+                        </p:par>
+                      </p:childTnLst>
+                    </p:cTn>
+                  </p:par>
+                  <p:par>
+                    <p:cTn id="27" fill="hold">
+                      <p:stCondLst>
+                        <p:cond delay="1080"/>
+                      </p:stCondLst>
+                      <p:childTnLst>
+                        <p:par>
+                          <p:cTn id="28" presetID="10" presetClass="entr" presetSubtype="0" fill="hold" nodeType="withEffect">
+                            <p:stCondLst>
+                              <p:cond delay="0"/>
+                            </p:stCondLst>
+                            <p:childTnLst>
+                              <p:set>
+                                <p:cBhvr>
+                                  <p:cTn id="29" dur="1" fill="hold">
+                                    <p:stCondLst>
+                                      <p:cond delay="0"/>
+                                    </p:stCondLst>
+                                  </p:cTn>
+                                  <p:tgtEl>
+                                    <p:spTgt spid="12"/>
+                                  </p:tgtEl>
+                                  <p:attrNameLst>
+                                    <p:attrName>style.visibility</p:attrName>
+                                  </p:attrNameLst>
+                                </p:cBhvr>
+                                <p:to>
+                                  <p:strVal val="visible"/>
+                                </p:to>
+                              </p:set>
+                              <p:animEffect transition="in" filter="fade">
+                                <p:cBhvr>
+                                  <p:cTn id="30" dur="450"/>
+                                  <p:tgtEl>
+                                    <p:spTgt spid="12"/>
+                                  </p:tgtEl>
+                                </p:cBhvr>
+                              </p:animEffect>
+                            </p:childTnLst>
+                          </p:cTn>
+                        </p:par>
+                      </p:childTnLst>
+                    </p:cTn>
+                  </p:par>
+                  <p:par>
+                    <p:cTn id="31" fill="hold">
+                      <p:stCondLst>
+                        <p:cond delay="1260"/>
+                      </p:stCondLst>
+                      <p:childTnLst>
+                        <p:par>
+                          <p:cTn id="32" presetID="10" presetClass="entr" presetSubtype="0" fill="hold" nodeType="withEffect">
+                            <p:stCondLst>
+                              <p:cond delay="0"/>
+                            </p:stCondLst>
+                            <p:childTnLst>
+                              <p:set>
+                                <p:cBhvr>
+                                  <p:cTn id="33" dur="1" fill="hold">
+                                    <p:stCondLst>
+                                      <p:cond delay="0"/>
+                                    </p:stCondLst>
+                                  </p:cTn>
+                                  <p:tgtEl>
+                                    <p:spTgt spid="13"/>
+                                  </p:tgtEl>
+                                  <p:attrNameLst>
+                                    <p:attrName>style.visibility</p:attrName>
+                                  </p:attrNameLst>
+                                </p:cBhvr>
+                                <p:to>
+                                  <p:strVal val="visible"/>
+                                </p:to>
+                              </p:set>
+                              <p:animEffect transition="in" filter="fade">
+                                <p:cBhvr>
+                                  <p:cTn id="34" dur="450"/>
+                                  <p:tgtEl>
+                                    <p:spTgt spid="13"/>
+                                  </p:tgtEl>
+                                </p:cBhvr>
+                              </p:animEffect>
+                            </p:childTnLst>
+                          </p:cTn>
+                        </p:par>
+                      </p:childTnLst>
+                    </p:cTn>
+                  </p:par>
+                </p:childTnLst>
+              </p:cTn>
+              <p:prevCondLst>
+                <p:cond evt="onPrev" delay="0">
+                  <p:tgtEl>
+                    <p:sldTgt/>
+                  </p:tgtEl>
+                </p:cond>
+              </p:prevCondLst>
+              <p:nextCondLst>
+                <p:cond evt="onNext" delay="0">
+                  <p:tgtEl>
+                    <p:sldTgt/>
+                  </p:tgtEl>
+                </p:cond>
+              </p:nextCondLst>
+            </p:seq>
+          </p:childTnLst>
+        </p:cTn>
+      </p:par>
+    </p:tnLst>
+  </p:timing>
 </p:sld>
 </file>
 
@@ -6116,6 +8688,300 @@
   <p:transition spd="med">
     <p:fade/>
   </p:transition>
+  <p:timing>
+    <p:tnLst>
+      <p:par>
+        <p:cTn id="1" dur="indefinite" restart="never" nodeType="tmRoot">
+          <p:childTnLst>
+            <p:seq concurrent="1" nextAc="seek">
+              <p:cTn id="2" dur="indefinite" nodeType="mainSeq">
+                <p:childTnLst>
+                  <p:par>
+                    <p:cTn id="3" fill="hold">
+                      <p:stCondLst>
+                        <p:cond delay="0"/>
+                      </p:stCondLst>
+                      <p:childTnLst>
+                        <p:par>
+                          <p:cTn id="4" presetID="10" presetClass="entr" presetSubtype="0" fill="hold" nodeType="withEffect">
+                            <p:stCondLst>
+                              <p:cond delay="0"/>
+                            </p:stCondLst>
+                            <p:childTnLst>
+                              <p:set>
+                                <p:cBhvr>
+                                  <p:cTn id="5" dur="1" fill="hold">
+                                    <p:stCondLst>
+                                      <p:cond delay="0"/>
+                                    </p:stCondLst>
+                                  </p:cTn>
+                                  <p:tgtEl>
+                                    <p:spTgt spid="6"/>
+                                  </p:tgtEl>
+                                  <p:attrNameLst>
+                                    <p:attrName>style.visibility</p:attrName>
+                                  </p:attrNameLst>
+                                </p:cBhvr>
+                                <p:to>
+                                  <p:strVal val="visible"/>
+                                </p:to>
+                              </p:set>
+                              <p:animEffect transition="in" filter="fade">
+                                <p:cBhvr>
+                                  <p:cTn id="6" dur="450"/>
+                                  <p:tgtEl>
+                                    <p:spTgt spid="6"/>
+                                  </p:tgtEl>
+                                </p:cBhvr>
+                              </p:animEffect>
+                            </p:childTnLst>
+                          </p:cTn>
+                        </p:par>
+                      </p:childTnLst>
+                    </p:cTn>
+                  </p:par>
+                  <p:par>
+                    <p:cTn id="7" fill="hold">
+                      <p:stCondLst>
+                        <p:cond delay="180"/>
+                      </p:stCondLst>
+                      <p:childTnLst>
+                        <p:par>
+                          <p:cTn id="8" presetID="10" presetClass="entr" presetSubtype="0" fill="hold" nodeType="withEffect">
+                            <p:stCondLst>
+                              <p:cond delay="0"/>
+                            </p:stCondLst>
+                            <p:childTnLst>
+                              <p:set>
+                                <p:cBhvr>
+                                  <p:cTn id="9" dur="1" fill="hold">
+                                    <p:stCondLst>
+                                      <p:cond delay="0"/>
+                                    </p:stCondLst>
+                                  </p:cTn>
+                                  <p:tgtEl>
+                                    <p:spTgt spid="7"/>
+                                  </p:tgtEl>
+                                  <p:attrNameLst>
+                                    <p:attrName>style.visibility</p:attrName>
+                                  </p:attrNameLst>
+                                </p:cBhvr>
+                                <p:to>
+                                  <p:strVal val="visible"/>
+                                </p:to>
+                              </p:set>
+                              <p:animEffect transition="in" filter="fade">
+                                <p:cBhvr>
+                                  <p:cTn id="10" dur="450"/>
+                                  <p:tgtEl>
+                                    <p:spTgt spid="7"/>
+                                  </p:tgtEl>
+                                </p:cBhvr>
+                              </p:animEffect>
+                            </p:childTnLst>
+                          </p:cTn>
+                        </p:par>
+                      </p:childTnLst>
+                    </p:cTn>
+                  </p:par>
+                  <p:par>
+                    <p:cTn id="11" fill="hold">
+                      <p:stCondLst>
+                        <p:cond delay="360"/>
+                      </p:stCondLst>
+                      <p:childTnLst>
+                        <p:par>
+                          <p:cTn id="12" presetID="10" presetClass="entr" presetSubtype="0" fill="hold" nodeType="withEffect">
+                            <p:stCondLst>
+                              <p:cond delay="0"/>
+                            </p:stCondLst>
+                            <p:childTnLst>
+                              <p:set>
+                                <p:cBhvr>
+                                  <p:cTn id="13" dur="1" fill="hold">
+                                    <p:stCondLst>
+                                      <p:cond delay="0"/>
+                                    </p:stCondLst>
+                                  </p:cTn>
+                                  <p:tgtEl>
+                                    <p:spTgt spid="8"/>
+                                  </p:tgtEl>
+                                  <p:attrNameLst>
+                                    <p:attrName>style.visibility</p:attrName>
+                                  </p:attrNameLst>
+                                </p:cBhvr>
+                                <p:to>
+                                  <p:strVal val="visible"/>
+                                </p:to>
+                              </p:set>
+                              <p:animEffect transition="in" filter="fade">
+                                <p:cBhvr>
+                                  <p:cTn id="14" dur="450"/>
+                                  <p:tgtEl>
+                                    <p:spTgt spid="8"/>
+                                  </p:tgtEl>
+                                </p:cBhvr>
+                              </p:animEffect>
+                            </p:childTnLst>
+                          </p:cTn>
+                        </p:par>
+                      </p:childTnLst>
+                    </p:cTn>
+                  </p:par>
+                  <p:par>
+                    <p:cTn id="15" fill="hold">
+                      <p:stCondLst>
+                        <p:cond delay="540"/>
+                      </p:stCondLst>
+                      <p:childTnLst>
+                        <p:par>
+                          <p:cTn id="16" presetID="10" presetClass="entr" presetSubtype="0" fill="hold" nodeType="withEffect">
+                            <p:stCondLst>
+                              <p:cond delay="0"/>
+                            </p:stCondLst>
+                            <p:childTnLst>
+                              <p:set>
+                                <p:cBhvr>
+                                  <p:cTn id="17" dur="1" fill="hold">
+                                    <p:stCondLst>
+                                      <p:cond delay="0"/>
+                                    </p:stCondLst>
+                                  </p:cTn>
+                                  <p:tgtEl>
+                                    <p:spTgt spid="9"/>
+                                  </p:tgtEl>
+                                  <p:attrNameLst>
+                                    <p:attrName>style.visibility</p:attrName>
+                                  </p:attrNameLst>
+                                </p:cBhvr>
+                                <p:to>
+                                  <p:strVal val="visible"/>
+                                </p:to>
+                              </p:set>
+                              <p:animEffect transition="in" filter="fade">
+                                <p:cBhvr>
+                                  <p:cTn id="18" dur="450"/>
+                                  <p:tgtEl>
+                                    <p:spTgt spid="9"/>
+                                  </p:tgtEl>
+                                </p:cBhvr>
+                              </p:animEffect>
+                            </p:childTnLst>
+                          </p:cTn>
+                        </p:par>
+                      </p:childTnLst>
+                    </p:cTn>
+                  </p:par>
+                  <p:par>
+                    <p:cTn id="19" fill="hold">
+                      <p:stCondLst>
+                        <p:cond delay="720"/>
+                      </p:stCondLst>
+                      <p:childTnLst>
+                        <p:par>
+                          <p:cTn id="20" presetID="10" presetClass="entr" presetSubtype="0" fill="hold" nodeType="withEffect">
+                            <p:stCondLst>
+                              <p:cond delay="0"/>
+                            </p:stCondLst>
+                            <p:childTnLst>
+                              <p:set>
+                                <p:cBhvr>
+                                  <p:cTn id="21" dur="1" fill="hold">
+                                    <p:stCondLst>
+                                      <p:cond delay="0"/>
+                                    </p:stCondLst>
+                                  </p:cTn>
+                                  <p:tgtEl>
+                                    <p:spTgt spid="10"/>
+                                  </p:tgtEl>
+                                  <p:attrNameLst>
+                                    <p:attrName>style.visibility</p:attrName>
+                                  </p:attrNameLst>
+                                </p:cBhvr>
+                                <p:to>
+                                  <p:strVal val="visible"/>
+                                </p:to>
+                              </p:set>
+                              <p:animEffect transition="in" filter="fade">
+                                <p:cBhvr>
+                                  <p:cTn id="22" dur="450"/>
+                                  <p:tgtEl>
+                                    <p:spTgt spid="10"/>
+                                  </p:tgtEl>
+                                </p:cBhvr>
+                              </p:animEffect>
+                            </p:childTnLst>
+                          </p:cTn>
+                        </p:par>
+                      </p:childTnLst>
+                    </p:cTn>
+                  </p:par>
+                  <p:par>
+                    <p:cTn id="23" fill="hold">
+                      <p:stCondLst>
+                        <p:cond delay="900"/>
+                      </p:stCondLst>
+                      <p:childTnLst>
+                        <p:par>
+                          <p:cTn id="24" presetID="10" presetClass="entr" presetSubtype="0" fill="hold" nodeType="withEffect">
+                            <p:stCondLst>
+                              <p:cond delay="0"/>
+                            </p:stCondLst>
+                            <p:childTnLst>
+                              <p:set>
+                                <p:cBhvr>
+                                  <p:cTn id="25" dur="1" fill="hold">
+                                    <p:stCondLst>
+                                      <p:cond delay="0"/>
+                                    </p:stCondLst>
+                                  </p:cTn>
+                                  <p:tgtEl>
+                                    <p:spTgt spid="11"/>
+                                  </p:tgtEl>
+                                  <p:attrNameLst>
+                                    <p:attrName>style.visibility</p:attrName>
+                                  </p:attrNameLst>
+                                </p:cBhvr>
+                                <p:to>
+                                  <p:strVal val="visible"/>
+                                </p:to>
+                              </p:set>
+                              <p:animEffect transition="in" filter="fade">
+                                <p:cBhvr>
+                                  <p:cTn id="26" dur="450"/>
+                                  <p:tgtEl>
+                                    <p:spTgt spid="11"/>
+                                  </p:tgtEl>
+                                </p:cBhvr>
+                              </p:animEffect>
+                            </p:childTnLst>
+                          </p:cTn>
+                        </p:par>
+                      </p:childTnLst>
+                    </p:cTn>
+                  </p:par>
+                </p:childTnLst>
+              </p:cTn>
+              <p:prevCondLst>
+                <p:cond evt="onPrev" delay="0">
+                  <p:tgtEl>
+                    <p:sldTgt/>
+                  </p:tgtEl>
+                </p:cond>
+              </p:prevCondLst>
+              <p:nextCondLst>
+                <p:cond evt="onNext" delay="0">
+                  <p:tgtEl>
+                    <p:sldTgt/>
+                  </p:tgtEl>
+                </p:cond>
+              </p:nextCondLst>
+            </p:seq>
+          </p:childTnLst>
+        </p:cTn>
+      </p:par>
+    </p:tnLst>
+  </p:timing>
 </p:sld>
 </file>
 
@@ -6974,6 +9840,300 @@
   <p:transition spd="med">
     <p:fade/>
   </p:transition>
+  <p:timing>
+    <p:tnLst>
+      <p:par>
+        <p:cTn id="1" dur="indefinite" restart="never" nodeType="tmRoot">
+          <p:childTnLst>
+            <p:seq concurrent="1" nextAc="seek">
+              <p:cTn id="2" dur="indefinite" nodeType="mainSeq">
+                <p:childTnLst>
+                  <p:par>
+                    <p:cTn id="3" fill="hold">
+                      <p:stCondLst>
+                        <p:cond delay="0"/>
+                      </p:stCondLst>
+                      <p:childTnLst>
+                        <p:par>
+                          <p:cTn id="4" presetID="10" presetClass="entr" presetSubtype="0" fill="hold" nodeType="withEffect">
+                            <p:stCondLst>
+                              <p:cond delay="0"/>
+                            </p:stCondLst>
+                            <p:childTnLst>
+                              <p:set>
+                                <p:cBhvr>
+                                  <p:cTn id="5" dur="1" fill="hold">
+                                    <p:stCondLst>
+                                      <p:cond delay="0"/>
+                                    </p:stCondLst>
+                                  </p:cTn>
+                                  <p:tgtEl>
+                                    <p:spTgt spid="6"/>
+                                  </p:tgtEl>
+                                  <p:attrNameLst>
+                                    <p:attrName>style.visibility</p:attrName>
+                                  </p:attrNameLst>
+                                </p:cBhvr>
+                                <p:to>
+                                  <p:strVal val="visible"/>
+                                </p:to>
+                              </p:set>
+                              <p:animEffect transition="in" filter="fade">
+                                <p:cBhvr>
+                                  <p:cTn id="6" dur="450"/>
+                                  <p:tgtEl>
+                                    <p:spTgt spid="6"/>
+                                  </p:tgtEl>
+                                </p:cBhvr>
+                              </p:animEffect>
+                            </p:childTnLst>
+                          </p:cTn>
+                        </p:par>
+                      </p:childTnLst>
+                    </p:cTn>
+                  </p:par>
+                  <p:par>
+                    <p:cTn id="7" fill="hold">
+                      <p:stCondLst>
+                        <p:cond delay="180"/>
+                      </p:stCondLst>
+                      <p:childTnLst>
+                        <p:par>
+                          <p:cTn id="8" presetID="10" presetClass="entr" presetSubtype="0" fill="hold" nodeType="withEffect">
+                            <p:stCondLst>
+                              <p:cond delay="0"/>
+                            </p:stCondLst>
+                            <p:childTnLst>
+                              <p:set>
+                                <p:cBhvr>
+                                  <p:cTn id="9" dur="1" fill="hold">
+                                    <p:stCondLst>
+                                      <p:cond delay="0"/>
+                                    </p:stCondLst>
+                                  </p:cTn>
+                                  <p:tgtEl>
+                                    <p:spTgt spid="7"/>
+                                  </p:tgtEl>
+                                  <p:attrNameLst>
+                                    <p:attrName>style.visibility</p:attrName>
+                                  </p:attrNameLst>
+                                </p:cBhvr>
+                                <p:to>
+                                  <p:strVal val="visible"/>
+                                </p:to>
+                              </p:set>
+                              <p:animEffect transition="in" filter="fade">
+                                <p:cBhvr>
+                                  <p:cTn id="10" dur="450"/>
+                                  <p:tgtEl>
+                                    <p:spTgt spid="7"/>
+                                  </p:tgtEl>
+                                </p:cBhvr>
+                              </p:animEffect>
+                            </p:childTnLst>
+                          </p:cTn>
+                        </p:par>
+                      </p:childTnLst>
+                    </p:cTn>
+                  </p:par>
+                  <p:par>
+                    <p:cTn id="11" fill="hold">
+                      <p:stCondLst>
+                        <p:cond delay="360"/>
+                      </p:stCondLst>
+                      <p:childTnLst>
+                        <p:par>
+                          <p:cTn id="12" presetID="10" presetClass="entr" presetSubtype="0" fill="hold" nodeType="withEffect">
+                            <p:stCondLst>
+                              <p:cond delay="0"/>
+                            </p:stCondLst>
+                            <p:childTnLst>
+                              <p:set>
+                                <p:cBhvr>
+                                  <p:cTn id="13" dur="1" fill="hold">
+                                    <p:stCondLst>
+                                      <p:cond delay="0"/>
+                                    </p:stCondLst>
+                                  </p:cTn>
+                                  <p:tgtEl>
+                                    <p:spTgt spid="8"/>
+                                  </p:tgtEl>
+                                  <p:attrNameLst>
+                                    <p:attrName>style.visibility</p:attrName>
+                                  </p:attrNameLst>
+                                </p:cBhvr>
+                                <p:to>
+                                  <p:strVal val="visible"/>
+                                </p:to>
+                              </p:set>
+                              <p:animEffect transition="in" filter="fade">
+                                <p:cBhvr>
+                                  <p:cTn id="14" dur="450"/>
+                                  <p:tgtEl>
+                                    <p:spTgt spid="8"/>
+                                  </p:tgtEl>
+                                </p:cBhvr>
+                              </p:animEffect>
+                            </p:childTnLst>
+                          </p:cTn>
+                        </p:par>
+                      </p:childTnLst>
+                    </p:cTn>
+                  </p:par>
+                  <p:par>
+                    <p:cTn id="15" fill="hold">
+                      <p:stCondLst>
+                        <p:cond delay="540"/>
+                      </p:stCondLst>
+                      <p:childTnLst>
+                        <p:par>
+                          <p:cTn id="16" presetID="10" presetClass="entr" presetSubtype="0" fill="hold" nodeType="withEffect">
+                            <p:stCondLst>
+                              <p:cond delay="0"/>
+                            </p:stCondLst>
+                            <p:childTnLst>
+                              <p:set>
+                                <p:cBhvr>
+                                  <p:cTn id="17" dur="1" fill="hold">
+                                    <p:stCondLst>
+                                      <p:cond delay="0"/>
+                                    </p:stCondLst>
+                                  </p:cTn>
+                                  <p:tgtEl>
+                                    <p:spTgt spid="9"/>
+                                  </p:tgtEl>
+                                  <p:attrNameLst>
+                                    <p:attrName>style.visibility</p:attrName>
+                                  </p:attrNameLst>
+                                </p:cBhvr>
+                                <p:to>
+                                  <p:strVal val="visible"/>
+                                </p:to>
+                              </p:set>
+                              <p:animEffect transition="in" filter="fade">
+                                <p:cBhvr>
+                                  <p:cTn id="18" dur="450"/>
+                                  <p:tgtEl>
+                                    <p:spTgt spid="9"/>
+                                  </p:tgtEl>
+                                </p:cBhvr>
+                              </p:animEffect>
+                            </p:childTnLst>
+                          </p:cTn>
+                        </p:par>
+                      </p:childTnLst>
+                    </p:cTn>
+                  </p:par>
+                  <p:par>
+                    <p:cTn id="19" fill="hold">
+                      <p:stCondLst>
+                        <p:cond delay="720"/>
+                      </p:stCondLst>
+                      <p:childTnLst>
+                        <p:par>
+                          <p:cTn id="20" presetID="10" presetClass="entr" presetSubtype="0" fill="hold" nodeType="withEffect">
+                            <p:stCondLst>
+                              <p:cond delay="0"/>
+                            </p:stCondLst>
+                            <p:childTnLst>
+                              <p:set>
+                                <p:cBhvr>
+                                  <p:cTn id="21" dur="1" fill="hold">
+                                    <p:stCondLst>
+                                      <p:cond delay="0"/>
+                                    </p:stCondLst>
+                                  </p:cTn>
+                                  <p:tgtEl>
+                                    <p:spTgt spid="10"/>
+                                  </p:tgtEl>
+                                  <p:attrNameLst>
+                                    <p:attrName>style.visibility</p:attrName>
+                                  </p:attrNameLst>
+                                </p:cBhvr>
+                                <p:to>
+                                  <p:strVal val="visible"/>
+                                </p:to>
+                              </p:set>
+                              <p:animEffect transition="in" filter="fade">
+                                <p:cBhvr>
+                                  <p:cTn id="22" dur="450"/>
+                                  <p:tgtEl>
+                                    <p:spTgt spid="10"/>
+                                  </p:tgtEl>
+                                </p:cBhvr>
+                              </p:animEffect>
+                            </p:childTnLst>
+                          </p:cTn>
+                        </p:par>
+                      </p:childTnLst>
+                    </p:cTn>
+                  </p:par>
+                  <p:par>
+                    <p:cTn id="23" fill="hold">
+                      <p:stCondLst>
+                        <p:cond delay="900"/>
+                      </p:stCondLst>
+                      <p:childTnLst>
+                        <p:par>
+                          <p:cTn id="24" presetID="10" presetClass="entr" presetSubtype="0" fill="hold" nodeType="withEffect">
+                            <p:stCondLst>
+                              <p:cond delay="0"/>
+                            </p:stCondLst>
+                            <p:childTnLst>
+                              <p:set>
+                                <p:cBhvr>
+                                  <p:cTn id="25" dur="1" fill="hold">
+                                    <p:stCondLst>
+                                      <p:cond delay="0"/>
+                                    </p:stCondLst>
+                                  </p:cTn>
+                                  <p:tgtEl>
+                                    <p:spTgt spid="11"/>
+                                  </p:tgtEl>
+                                  <p:attrNameLst>
+                                    <p:attrName>style.visibility</p:attrName>
+                                  </p:attrNameLst>
+                                </p:cBhvr>
+                                <p:to>
+                                  <p:strVal val="visible"/>
+                                </p:to>
+                              </p:set>
+                              <p:animEffect transition="in" filter="fade">
+                                <p:cBhvr>
+                                  <p:cTn id="26" dur="450"/>
+                                  <p:tgtEl>
+                                    <p:spTgt spid="11"/>
+                                  </p:tgtEl>
+                                </p:cBhvr>
+                              </p:animEffect>
+                            </p:childTnLst>
+                          </p:cTn>
+                        </p:par>
+                      </p:childTnLst>
+                    </p:cTn>
+                  </p:par>
+                </p:childTnLst>
+              </p:cTn>
+              <p:prevCondLst>
+                <p:cond evt="onPrev" delay="0">
+                  <p:tgtEl>
+                    <p:sldTgt/>
+                  </p:tgtEl>
+                </p:cond>
+              </p:prevCondLst>
+              <p:nextCondLst>
+                <p:cond evt="onNext" delay="0">
+                  <p:tgtEl>
+                    <p:sldTgt/>
+                  </p:tgtEl>
+                </p:cond>
+              </p:nextCondLst>
+            </p:seq>
+          </p:childTnLst>
+        </p:cTn>
+      </p:par>
+    </p:tnLst>
+  </p:timing>
 </p:sld>
 </file>
 

--- a/docs/Cloud_Next_27_Agents_CLI_LangGraph.pptx
+++ b/docs/Cloud_Next_27_Agents_CLI_LangGraph.pptx
@@ -594,9 +594,410 @@
   <p:clrMapOvr>
     <a:masterClrMapping/>
   </p:clrMapOvr>
-  <p:transition spd="med">
+  <p:transition spd="med" advClick="1">
     <p:fade/>
   </p:transition>
+  <p:timing>
+    <p:tnLst>
+      <p:par>
+        <p:cTn id="1" dur="indefinite" restart="never" nodeType="tmRoot">
+          <p:childTnLst>
+            <p:seq concurrent="1" nextAc="seek">
+              <p:cTn id="2" dur="indefinite" nodeType="mainSeq">
+                <p:childTnLst>
+                  <p:par>
+                    <p:cTn id="3" fill="hold">
+                      <p:stCondLst>
+                        <p:cond delay="0"/>
+                      </p:stCondLst>
+                      <p:childTnLst>
+                        <p:par>
+                          <p:cTn id="4" fill="hold">
+                            <p:stCondLst>
+                              <p:cond delay="100"/>
+                            </p:stCondLst>
+                            <p:childTnLst>
+                              <p:par>
+                                <p:cTn id="5" presetID="2" presetClass="entr" presetSubtype="4" fill="hold" grpId="0" nodeType="withEffect">
+                                  <p:stCondLst>
+                                    <p:cond delay="0"/>
+                                  </p:stCondLst>
+                                  <p:childTnLst>
+                                    <p:set>
+                                      <p:cBhvr>
+                                        <p:cTn id="6" dur="1" fill="hold">
+                                          <p:stCondLst>
+                                            <p:cond delay="0"/>
+                                          </p:stCondLst>
+                                        </p:cTn>
+                                        <p:tgtEl>
+                                          <p:spTgt spid="6"/>
+                                        </p:tgtEl>
+                                        <p:attrNameLst>
+                                          <p:attrName>style.visibility</p:attrName>
+                                        </p:attrNameLst>
+                                      </p:cBhvr>
+                                      <p:to>
+                                        <p:strVal val="visible"/>
+                                      </p:to>
+                                    </p:set>
+                                    <p:animEffect transition="in" filter="fade">
+                                      <p:cBhvr>
+                                        <p:cTn id="7" dur="450"/>
+                                        <p:tgtEl>
+                                          <p:spTgt spid="6"/>
+                                        </p:tgtEl>
+                                      </p:cBhvr>
+                                    </p:animEffect>
+                                  </p:childTnLst>
+                                </p:cTn>
+                              </p:par>
+                            </p:childTnLst>
+                          </p:cTn>
+                        </p:par>
+                        <p:par>
+                          <p:cTn id="8" fill="hold">
+                            <p:stCondLst>
+                              <p:cond delay="180"/>
+                            </p:stCondLst>
+                            <p:childTnLst>
+                              <p:par>
+                                <p:cTn id="9" presetID="2" presetClass="entr" presetSubtype="4" fill="hold" grpId="0" nodeType="afterEffect">
+                                  <p:stCondLst>
+                                    <p:cond delay="0"/>
+                                  </p:stCondLst>
+                                  <p:childTnLst>
+                                    <p:set>
+                                      <p:cBhvr>
+                                        <p:cTn id="10" dur="1" fill="hold">
+                                          <p:stCondLst>
+                                            <p:cond delay="0"/>
+                                          </p:stCondLst>
+                                        </p:cTn>
+                                        <p:tgtEl>
+                                          <p:spTgt spid="7"/>
+                                        </p:tgtEl>
+                                        <p:attrNameLst>
+                                          <p:attrName>style.visibility</p:attrName>
+                                        </p:attrNameLst>
+                                      </p:cBhvr>
+                                      <p:to>
+                                        <p:strVal val="visible"/>
+                                      </p:to>
+                                    </p:set>
+                                    <p:animEffect transition="in" filter="fade">
+                                      <p:cBhvr>
+                                        <p:cTn id="11" dur="450"/>
+                                        <p:tgtEl>
+                                          <p:spTgt spid="7"/>
+                                        </p:tgtEl>
+                                      </p:cBhvr>
+                                    </p:animEffect>
+                                  </p:childTnLst>
+                                </p:cTn>
+                              </p:par>
+                            </p:childTnLst>
+                          </p:cTn>
+                        </p:par>
+                        <p:par>
+                          <p:cTn id="12" fill="hold">
+                            <p:stCondLst>
+                              <p:cond delay="180"/>
+                            </p:stCondLst>
+                            <p:childTnLst>
+                              <p:par>
+                                <p:cTn id="13" presetID="2" presetClass="entr" presetSubtype="4" fill="hold" grpId="0" nodeType="afterEffect">
+                                  <p:stCondLst>
+                                    <p:cond delay="0"/>
+                                  </p:stCondLst>
+                                  <p:childTnLst>
+                                    <p:set>
+                                      <p:cBhvr>
+                                        <p:cTn id="14" dur="1" fill="hold">
+                                          <p:stCondLst>
+                                            <p:cond delay="0"/>
+                                          </p:stCondLst>
+                                        </p:cTn>
+                                        <p:tgtEl>
+                                          <p:spTgt spid="8"/>
+                                        </p:tgtEl>
+                                        <p:attrNameLst>
+                                          <p:attrName>style.visibility</p:attrName>
+                                        </p:attrNameLst>
+                                      </p:cBhvr>
+                                      <p:to>
+                                        <p:strVal val="visible"/>
+                                      </p:to>
+                                    </p:set>
+                                    <p:animEffect transition="in" filter="fade">
+                                      <p:cBhvr>
+                                        <p:cTn id="15" dur="450"/>
+                                        <p:tgtEl>
+                                          <p:spTgt spid="8"/>
+                                        </p:tgtEl>
+                                      </p:cBhvr>
+                                    </p:animEffect>
+                                  </p:childTnLst>
+                                </p:cTn>
+                              </p:par>
+                            </p:childTnLst>
+                          </p:cTn>
+                        </p:par>
+                        <p:par>
+                          <p:cTn id="16" fill="hold">
+                            <p:stCondLst>
+                              <p:cond delay="180"/>
+                            </p:stCondLst>
+                            <p:childTnLst>
+                              <p:par>
+                                <p:cTn id="17" presetID="2" presetClass="entr" presetSubtype="4" fill="hold" grpId="0" nodeType="afterEffect">
+                                  <p:stCondLst>
+                                    <p:cond delay="0"/>
+                                  </p:stCondLst>
+                                  <p:childTnLst>
+                                    <p:set>
+                                      <p:cBhvr>
+                                        <p:cTn id="18" dur="1" fill="hold">
+                                          <p:stCondLst>
+                                            <p:cond delay="0"/>
+                                          </p:stCondLst>
+                                        </p:cTn>
+                                        <p:tgtEl>
+                                          <p:spTgt spid="9"/>
+                                        </p:tgtEl>
+                                        <p:attrNameLst>
+                                          <p:attrName>style.visibility</p:attrName>
+                                        </p:attrNameLst>
+                                      </p:cBhvr>
+                                      <p:to>
+                                        <p:strVal val="visible"/>
+                                      </p:to>
+                                    </p:set>
+                                    <p:animEffect transition="in" filter="fade">
+                                      <p:cBhvr>
+                                        <p:cTn id="19" dur="450"/>
+                                        <p:tgtEl>
+                                          <p:spTgt spid="9"/>
+                                        </p:tgtEl>
+                                      </p:cBhvr>
+                                    </p:animEffect>
+                                  </p:childTnLst>
+                                </p:cTn>
+                              </p:par>
+                            </p:childTnLst>
+                          </p:cTn>
+                        </p:par>
+                        <p:par>
+                          <p:cTn id="20" fill="hold">
+                            <p:stCondLst>
+                              <p:cond delay="180"/>
+                            </p:stCondLst>
+                            <p:childTnLst>
+                              <p:par>
+                                <p:cTn id="21" presetID="2" presetClass="entr" presetSubtype="4" fill="hold" grpId="0" nodeType="afterEffect">
+                                  <p:stCondLst>
+                                    <p:cond delay="0"/>
+                                  </p:stCondLst>
+                                  <p:childTnLst>
+                                    <p:set>
+                                      <p:cBhvr>
+                                        <p:cTn id="22" dur="1" fill="hold">
+                                          <p:stCondLst>
+                                            <p:cond delay="0"/>
+                                          </p:stCondLst>
+                                        </p:cTn>
+                                        <p:tgtEl>
+                                          <p:spTgt spid="10"/>
+                                        </p:tgtEl>
+                                        <p:attrNameLst>
+                                          <p:attrName>style.visibility</p:attrName>
+                                        </p:attrNameLst>
+                                      </p:cBhvr>
+                                      <p:to>
+                                        <p:strVal val="visible"/>
+                                      </p:to>
+                                    </p:set>
+                                    <p:animEffect transition="in" filter="fade">
+                                      <p:cBhvr>
+                                        <p:cTn id="23" dur="450"/>
+                                        <p:tgtEl>
+                                          <p:spTgt spid="10"/>
+                                        </p:tgtEl>
+                                      </p:cBhvr>
+                                    </p:animEffect>
+                                  </p:childTnLst>
+                                </p:cTn>
+                              </p:par>
+                            </p:childTnLst>
+                          </p:cTn>
+                        </p:par>
+                        <p:par>
+                          <p:cTn id="24" fill="hold">
+                            <p:stCondLst>
+                              <p:cond delay="180"/>
+                            </p:stCondLst>
+                            <p:childTnLst>
+                              <p:par>
+                                <p:cTn id="25" presetID="2" presetClass="entr" presetSubtype="4" fill="hold" grpId="0" nodeType="afterEffect">
+                                  <p:stCondLst>
+                                    <p:cond delay="0"/>
+                                  </p:stCondLst>
+                                  <p:childTnLst>
+                                    <p:set>
+                                      <p:cBhvr>
+                                        <p:cTn id="26" dur="1" fill="hold">
+                                          <p:stCondLst>
+                                            <p:cond delay="0"/>
+                                          </p:stCondLst>
+                                        </p:cTn>
+                                        <p:tgtEl>
+                                          <p:spTgt spid="11"/>
+                                        </p:tgtEl>
+                                        <p:attrNameLst>
+                                          <p:attrName>style.visibility</p:attrName>
+                                        </p:attrNameLst>
+                                      </p:cBhvr>
+                                      <p:to>
+                                        <p:strVal val="visible"/>
+                                      </p:to>
+                                    </p:set>
+                                    <p:animEffect transition="in" filter="fade">
+                                      <p:cBhvr>
+                                        <p:cTn id="27" dur="450"/>
+                                        <p:tgtEl>
+                                          <p:spTgt spid="11"/>
+                                        </p:tgtEl>
+                                      </p:cBhvr>
+                                    </p:animEffect>
+                                  </p:childTnLst>
+                                </p:cTn>
+                              </p:par>
+                            </p:childTnLst>
+                          </p:cTn>
+                        </p:par>
+                        <p:par>
+                          <p:cTn id="28" fill="hold">
+                            <p:stCondLst>
+                              <p:cond delay="180"/>
+                            </p:stCondLst>
+                            <p:childTnLst>
+                              <p:par>
+                                <p:cTn id="29" presetID="2" presetClass="entr" presetSubtype="4" fill="hold" grpId="0" nodeType="afterEffect">
+                                  <p:stCondLst>
+                                    <p:cond delay="0"/>
+                                  </p:stCondLst>
+                                  <p:childTnLst>
+                                    <p:set>
+                                      <p:cBhvr>
+                                        <p:cTn id="30" dur="1" fill="hold">
+                                          <p:stCondLst>
+                                            <p:cond delay="0"/>
+                                          </p:stCondLst>
+                                        </p:cTn>
+                                        <p:tgtEl>
+                                          <p:spTgt spid="13"/>
+                                        </p:tgtEl>
+                                        <p:attrNameLst>
+                                          <p:attrName>style.visibility</p:attrName>
+                                        </p:attrNameLst>
+                                      </p:cBhvr>
+                                      <p:to>
+                                        <p:strVal val="visible"/>
+                                      </p:to>
+                                    </p:set>
+                                    <p:animEffect transition="in" filter="fade">
+                                      <p:cBhvr>
+                                        <p:cTn id="31" dur="450"/>
+                                        <p:tgtEl>
+                                          <p:spTgt spid="13"/>
+                                        </p:tgtEl>
+                                      </p:cBhvr>
+                                    </p:animEffect>
+                                  </p:childTnLst>
+                                </p:cTn>
+                              </p:par>
+                            </p:childTnLst>
+                          </p:cTn>
+                        </p:par>
+                        <p:par>
+                          <p:cTn id="32" fill="hold">
+                            <p:stCondLst>
+                              <p:cond delay="180"/>
+                            </p:stCondLst>
+                            <p:childTnLst>
+                              <p:par>
+                                <p:cTn id="33" presetID="2" presetClass="entr" presetSubtype="4" fill="hold" grpId="0" nodeType="afterEffect">
+                                  <p:stCondLst>
+                                    <p:cond delay="0"/>
+                                  </p:stCondLst>
+                                  <p:childTnLst>
+                                    <p:set>
+                                      <p:cBhvr>
+                                        <p:cTn id="34" dur="1" fill="hold">
+                                          <p:stCondLst>
+                                            <p:cond delay="0"/>
+                                          </p:stCondLst>
+                                        </p:cTn>
+                                        <p:tgtEl>
+                                          <p:spTgt spid="14"/>
+                                        </p:tgtEl>
+                                        <p:attrNameLst>
+                                          <p:attrName>style.visibility</p:attrName>
+                                        </p:attrNameLst>
+                                      </p:cBhvr>
+                                      <p:to>
+                                        <p:strVal val="visible"/>
+                                      </p:to>
+                                    </p:set>
+                                    <p:animEffect transition="in" filter="fade">
+                                      <p:cBhvr>
+                                        <p:cTn id="35" dur="450"/>
+                                        <p:tgtEl>
+                                          <p:spTgt spid="14"/>
+                                        </p:tgtEl>
+                                      </p:cBhvr>
+                                    </p:animEffect>
+                                  </p:childTnLst>
+                                </p:cTn>
+                              </p:par>
+                            </p:childTnLst>
+                          </p:cTn>
+                        </p:par>
+                      </p:childTnLst>
+                    </p:cTn>
+                  </p:par>
+                </p:childTnLst>
+              </p:cTn>
+              <p:prevCondLst>
+                <p:cond evt="onPrev" delay="0">
+                  <p:tgtEl>
+                    <p:sldTgt/>
+                  </p:tgtEl>
+                </p:cond>
+              </p:prevCondLst>
+              <p:nextCondLst>
+                <p:cond evt="onNext" delay="0">
+                  <p:tgtEl>
+                    <p:sldTgt/>
+                  </p:tgtEl>
+                </p:cond>
+              </p:nextCondLst>
+            </p:seq>
+          </p:childTnLst>
+        </p:cTn>
+      </p:par>
+    </p:tnLst>
+    <p:bldLst>
+      <p:bldP spid="6" grpId="0"/>
+      <p:bldP spid="7" grpId="0"/>
+      <p:bldP spid="8" grpId="0"/>
+      <p:bldP spid="9" grpId="0"/>
+      <p:bldP spid="10" grpId="0"/>
+      <p:bldP spid="11" grpId="0"/>
+      <p:bldP spid="13" grpId="0"/>
+      <p:bldP spid="14" grpId="0"/>
+    </p:bldLst>
+  </p:timing>
 </p:sld>
 </file>
 
@@ -1558,9 +1959,545 @@
   <p:clrMapOvr>
     <a:masterClrMapping/>
   </p:clrMapOvr>
-  <p:transition spd="med">
+  <p:transition spd="med" advClick="1">
     <p:fade/>
   </p:transition>
+  <p:timing>
+    <p:tnLst>
+      <p:par>
+        <p:cTn id="1" dur="indefinite" restart="never" nodeType="tmRoot">
+          <p:childTnLst>
+            <p:seq concurrent="1" nextAc="seek">
+              <p:cTn id="2" dur="indefinite" nodeType="mainSeq">
+                <p:childTnLst>
+                  <p:par>
+                    <p:cTn id="3" fill="hold">
+                      <p:stCondLst>
+                        <p:cond delay="0"/>
+                      </p:stCondLst>
+                      <p:childTnLst>
+                        <p:par>
+                          <p:cTn id="4" fill="hold">
+                            <p:stCondLst>
+                              <p:cond delay="100"/>
+                            </p:stCondLst>
+                            <p:childTnLst>
+                              <p:par>
+                                <p:cTn id="5" presetID="2" presetClass="entr" presetSubtype="4" fill="hold" grpId="0" nodeType="withEffect">
+                                  <p:stCondLst>
+                                    <p:cond delay="0"/>
+                                  </p:stCondLst>
+                                  <p:childTnLst>
+                                    <p:set>
+                                      <p:cBhvr>
+                                        <p:cTn id="6" dur="1" fill="hold">
+                                          <p:stCondLst>
+                                            <p:cond delay="0"/>
+                                          </p:stCondLst>
+                                        </p:cTn>
+                                        <p:tgtEl>
+                                          <p:spTgt spid="6"/>
+                                        </p:tgtEl>
+                                        <p:attrNameLst>
+                                          <p:attrName>style.visibility</p:attrName>
+                                        </p:attrNameLst>
+                                      </p:cBhvr>
+                                      <p:to>
+                                        <p:strVal val="visible"/>
+                                      </p:to>
+                                    </p:set>
+                                    <p:animEffect transition="in" filter="fade">
+                                      <p:cBhvr>
+                                        <p:cTn id="7" dur="450"/>
+                                        <p:tgtEl>
+                                          <p:spTgt spid="6"/>
+                                        </p:tgtEl>
+                                      </p:cBhvr>
+                                    </p:animEffect>
+                                  </p:childTnLst>
+                                </p:cTn>
+                              </p:par>
+                            </p:childTnLst>
+                          </p:cTn>
+                        </p:par>
+                        <p:par>
+                          <p:cTn id="8" fill="hold">
+                            <p:stCondLst>
+                              <p:cond delay="180"/>
+                            </p:stCondLst>
+                            <p:childTnLst>
+                              <p:par>
+                                <p:cTn id="9" presetID="2" presetClass="entr" presetSubtype="4" fill="hold" grpId="0" nodeType="afterEffect">
+                                  <p:stCondLst>
+                                    <p:cond delay="0"/>
+                                  </p:stCondLst>
+                                  <p:childTnLst>
+                                    <p:set>
+                                      <p:cBhvr>
+                                        <p:cTn id="10" dur="1" fill="hold">
+                                          <p:stCondLst>
+                                            <p:cond delay="0"/>
+                                          </p:stCondLst>
+                                        </p:cTn>
+                                        <p:tgtEl>
+                                          <p:spTgt spid="7"/>
+                                        </p:tgtEl>
+                                        <p:attrNameLst>
+                                          <p:attrName>style.visibility</p:attrName>
+                                        </p:attrNameLst>
+                                      </p:cBhvr>
+                                      <p:to>
+                                        <p:strVal val="visible"/>
+                                      </p:to>
+                                    </p:set>
+                                    <p:animEffect transition="in" filter="fade">
+                                      <p:cBhvr>
+                                        <p:cTn id="11" dur="450"/>
+                                        <p:tgtEl>
+                                          <p:spTgt spid="7"/>
+                                        </p:tgtEl>
+                                      </p:cBhvr>
+                                    </p:animEffect>
+                                  </p:childTnLst>
+                                </p:cTn>
+                              </p:par>
+                            </p:childTnLst>
+                          </p:cTn>
+                        </p:par>
+                        <p:par>
+                          <p:cTn id="12" fill="hold">
+                            <p:stCondLst>
+                              <p:cond delay="180"/>
+                            </p:stCondLst>
+                            <p:childTnLst>
+                              <p:par>
+                                <p:cTn id="13" presetID="2" presetClass="entr" presetSubtype="4" fill="hold" grpId="0" nodeType="afterEffect">
+                                  <p:stCondLst>
+                                    <p:cond delay="0"/>
+                                  </p:stCondLst>
+                                  <p:childTnLst>
+                                    <p:set>
+                                      <p:cBhvr>
+                                        <p:cTn id="14" dur="1" fill="hold">
+                                          <p:stCondLst>
+                                            <p:cond delay="0"/>
+                                          </p:stCondLst>
+                                        </p:cTn>
+                                        <p:tgtEl>
+                                          <p:spTgt spid="8"/>
+                                        </p:tgtEl>
+                                        <p:attrNameLst>
+                                          <p:attrName>style.visibility</p:attrName>
+                                        </p:attrNameLst>
+                                      </p:cBhvr>
+                                      <p:to>
+                                        <p:strVal val="visible"/>
+                                      </p:to>
+                                    </p:set>
+                                    <p:animEffect transition="in" filter="fade">
+                                      <p:cBhvr>
+                                        <p:cTn id="15" dur="450"/>
+                                        <p:tgtEl>
+                                          <p:spTgt spid="8"/>
+                                        </p:tgtEl>
+                                      </p:cBhvr>
+                                    </p:animEffect>
+                                  </p:childTnLst>
+                                </p:cTn>
+                              </p:par>
+                            </p:childTnLst>
+                          </p:cTn>
+                        </p:par>
+                        <p:par>
+                          <p:cTn id="16" fill="hold">
+                            <p:stCondLst>
+                              <p:cond delay="180"/>
+                            </p:stCondLst>
+                            <p:childTnLst>
+                              <p:par>
+                                <p:cTn id="17" presetID="2" presetClass="entr" presetSubtype="4" fill="hold" grpId="0" nodeType="afterEffect">
+                                  <p:stCondLst>
+                                    <p:cond delay="0"/>
+                                  </p:stCondLst>
+                                  <p:childTnLst>
+                                    <p:set>
+                                      <p:cBhvr>
+                                        <p:cTn id="18" dur="1" fill="hold">
+                                          <p:stCondLst>
+                                            <p:cond delay="0"/>
+                                          </p:stCondLst>
+                                        </p:cTn>
+                                        <p:tgtEl>
+                                          <p:spTgt spid="9"/>
+                                        </p:tgtEl>
+                                        <p:attrNameLst>
+                                          <p:attrName>style.visibility</p:attrName>
+                                        </p:attrNameLst>
+                                      </p:cBhvr>
+                                      <p:to>
+                                        <p:strVal val="visible"/>
+                                      </p:to>
+                                    </p:set>
+                                    <p:animEffect transition="in" filter="fade">
+                                      <p:cBhvr>
+                                        <p:cTn id="19" dur="450"/>
+                                        <p:tgtEl>
+                                          <p:spTgt spid="9"/>
+                                        </p:tgtEl>
+                                      </p:cBhvr>
+                                    </p:animEffect>
+                                  </p:childTnLst>
+                                </p:cTn>
+                              </p:par>
+                            </p:childTnLst>
+                          </p:cTn>
+                        </p:par>
+                        <p:par>
+                          <p:cTn id="20" fill="hold">
+                            <p:stCondLst>
+                              <p:cond delay="180"/>
+                            </p:stCondLst>
+                            <p:childTnLst>
+                              <p:par>
+                                <p:cTn id="21" presetID="2" presetClass="entr" presetSubtype="4" fill="hold" grpId="0" nodeType="afterEffect">
+                                  <p:stCondLst>
+                                    <p:cond delay="0"/>
+                                  </p:stCondLst>
+                                  <p:childTnLst>
+                                    <p:set>
+                                      <p:cBhvr>
+                                        <p:cTn id="22" dur="1" fill="hold">
+                                          <p:stCondLst>
+                                            <p:cond delay="0"/>
+                                          </p:stCondLst>
+                                        </p:cTn>
+                                        <p:tgtEl>
+                                          <p:spTgt spid="10"/>
+                                        </p:tgtEl>
+                                        <p:attrNameLst>
+                                          <p:attrName>style.visibility</p:attrName>
+                                        </p:attrNameLst>
+                                      </p:cBhvr>
+                                      <p:to>
+                                        <p:strVal val="visible"/>
+                                      </p:to>
+                                    </p:set>
+                                    <p:animEffect transition="in" filter="fade">
+                                      <p:cBhvr>
+                                        <p:cTn id="23" dur="450"/>
+                                        <p:tgtEl>
+                                          <p:spTgt spid="10"/>
+                                        </p:tgtEl>
+                                      </p:cBhvr>
+                                    </p:animEffect>
+                                  </p:childTnLst>
+                                </p:cTn>
+                              </p:par>
+                            </p:childTnLst>
+                          </p:cTn>
+                        </p:par>
+                        <p:par>
+                          <p:cTn id="24" fill="hold">
+                            <p:stCondLst>
+                              <p:cond delay="180"/>
+                            </p:stCondLst>
+                            <p:childTnLst>
+                              <p:par>
+                                <p:cTn id="25" presetID="2" presetClass="entr" presetSubtype="4" fill="hold" grpId="0" nodeType="afterEffect">
+                                  <p:stCondLst>
+                                    <p:cond delay="0"/>
+                                  </p:stCondLst>
+                                  <p:childTnLst>
+                                    <p:set>
+                                      <p:cBhvr>
+                                        <p:cTn id="26" dur="1" fill="hold">
+                                          <p:stCondLst>
+                                            <p:cond delay="0"/>
+                                          </p:stCondLst>
+                                        </p:cTn>
+                                        <p:tgtEl>
+                                          <p:spTgt spid="11"/>
+                                        </p:tgtEl>
+                                        <p:attrNameLst>
+                                          <p:attrName>style.visibility</p:attrName>
+                                        </p:attrNameLst>
+                                      </p:cBhvr>
+                                      <p:to>
+                                        <p:strVal val="visible"/>
+                                      </p:to>
+                                    </p:set>
+                                    <p:animEffect transition="in" filter="fade">
+                                      <p:cBhvr>
+                                        <p:cTn id="27" dur="450"/>
+                                        <p:tgtEl>
+                                          <p:spTgt spid="11"/>
+                                        </p:tgtEl>
+                                      </p:cBhvr>
+                                    </p:animEffect>
+                                  </p:childTnLst>
+                                </p:cTn>
+                              </p:par>
+                            </p:childTnLst>
+                          </p:cTn>
+                        </p:par>
+                        <p:par>
+                          <p:cTn id="28" fill="hold">
+                            <p:stCondLst>
+                              <p:cond delay="180"/>
+                            </p:stCondLst>
+                            <p:childTnLst>
+                              <p:par>
+                                <p:cTn id="29" presetID="2" presetClass="entr" presetSubtype="4" fill="hold" grpId="0" nodeType="afterEffect">
+                                  <p:stCondLst>
+                                    <p:cond delay="0"/>
+                                  </p:stCondLst>
+                                  <p:childTnLst>
+                                    <p:set>
+                                      <p:cBhvr>
+                                        <p:cTn id="30" dur="1" fill="hold">
+                                          <p:stCondLst>
+                                            <p:cond delay="0"/>
+                                          </p:stCondLst>
+                                        </p:cTn>
+                                        <p:tgtEl>
+                                          <p:spTgt spid="12"/>
+                                        </p:tgtEl>
+                                        <p:attrNameLst>
+                                          <p:attrName>style.visibility</p:attrName>
+                                        </p:attrNameLst>
+                                      </p:cBhvr>
+                                      <p:to>
+                                        <p:strVal val="visible"/>
+                                      </p:to>
+                                    </p:set>
+                                    <p:animEffect transition="in" filter="fade">
+                                      <p:cBhvr>
+                                        <p:cTn id="31" dur="450"/>
+                                        <p:tgtEl>
+                                          <p:spTgt spid="12"/>
+                                        </p:tgtEl>
+                                      </p:cBhvr>
+                                    </p:animEffect>
+                                  </p:childTnLst>
+                                </p:cTn>
+                              </p:par>
+                            </p:childTnLst>
+                          </p:cTn>
+                        </p:par>
+                        <p:par>
+                          <p:cTn id="32" fill="hold">
+                            <p:stCondLst>
+                              <p:cond delay="180"/>
+                            </p:stCondLst>
+                            <p:childTnLst>
+                              <p:par>
+                                <p:cTn id="33" presetID="2" presetClass="entr" presetSubtype="4" fill="hold" grpId="0" nodeType="afterEffect">
+                                  <p:stCondLst>
+                                    <p:cond delay="0"/>
+                                  </p:stCondLst>
+                                  <p:childTnLst>
+                                    <p:set>
+                                      <p:cBhvr>
+                                        <p:cTn id="34" dur="1" fill="hold">
+                                          <p:stCondLst>
+                                            <p:cond delay="0"/>
+                                          </p:stCondLst>
+                                        </p:cTn>
+                                        <p:tgtEl>
+                                          <p:spTgt spid="13"/>
+                                        </p:tgtEl>
+                                        <p:attrNameLst>
+                                          <p:attrName>style.visibility</p:attrName>
+                                        </p:attrNameLst>
+                                      </p:cBhvr>
+                                      <p:to>
+                                        <p:strVal val="visible"/>
+                                      </p:to>
+                                    </p:set>
+                                    <p:animEffect transition="in" filter="fade">
+                                      <p:cBhvr>
+                                        <p:cTn id="35" dur="450"/>
+                                        <p:tgtEl>
+                                          <p:spTgt spid="13"/>
+                                        </p:tgtEl>
+                                      </p:cBhvr>
+                                    </p:animEffect>
+                                  </p:childTnLst>
+                                </p:cTn>
+                              </p:par>
+                            </p:childTnLst>
+                          </p:cTn>
+                        </p:par>
+                        <p:par>
+                          <p:cTn id="36" fill="hold">
+                            <p:stCondLst>
+                              <p:cond delay="180"/>
+                            </p:stCondLst>
+                            <p:childTnLst>
+                              <p:par>
+                                <p:cTn id="37" presetID="2" presetClass="entr" presetSubtype="4" fill="hold" grpId="0" nodeType="afterEffect">
+                                  <p:stCondLst>
+                                    <p:cond delay="0"/>
+                                  </p:stCondLst>
+                                  <p:childTnLst>
+                                    <p:set>
+                                      <p:cBhvr>
+                                        <p:cTn id="38" dur="1" fill="hold">
+                                          <p:stCondLst>
+                                            <p:cond delay="0"/>
+                                          </p:stCondLst>
+                                        </p:cTn>
+                                        <p:tgtEl>
+                                          <p:spTgt spid="14"/>
+                                        </p:tgtEl>
+                                        <p:attrNameLst>
+                                          <p:attrName>style.visibility</p:attrName>
+                                        </p:attrNameLst>
+                                      </p:cBhvr>
+                                      <p:to>
+                                        <p:strVal val="visible"/>
+                                      </p:to>
+                                    </p:set>
+                                    <p:animEffect transition="in" filter="fade">
+                                      <p:cBhvr>
+                                        <p:cTn id="39" dur="450"/>
+                                        <p:tgtEl>
+                                          <p:spTgt spid="14"/>
+                                        </p:tgtEl>
+                                      </p:cBhvr>
+                                    </p:animEffect>
+                                  </p:childTnLst>
+                                </p:cTn>
+                              </p:par>
+                            </p:childTnLst>
+                          </p:cTn>
+                        </p:par>
+                        <p:par>
+                          <p:cTn id="40" fill="hold">
+                            <p:stCondLst>
+                              <p:cond delay="180"/>
+                            </p:stCondLst>
+                            <p:childTnLst>
+                              <p:par>
+                                <p:cTn id="41" presetID="2" presetClass="entr" presetSubtype="4" fill="hold" grpId="0" nodeType="afterEffect">
+                                  <p:stCondLst>
+                                    <p:cond delay="0"/>
+                                  </p:stCondLst>
+                                  <p:childTnLst>
+                                    <p:set>
+                                      <p:cBhvr>
+                                        <p:cTn id="42" dur="1" fill="hold">
+                                          <p:stCondLst>
+                                            <p:cond delay="0"/>
+                                          </p:stCondLst>
+                                        </p:cTn>
+                                        <p:tgtEl>
+                                          <p:spTgt spid="16"/>
+                                        </p:tgtEl>
+                                        <p:attrNameLst>
+                                          <p:attrName>style.visibility</p:attrName>
+                                        </p:attrNameLst>
+                                      </p:cBhvr>
+                                      <p:to>
+                                        <p:strVal val="visible"/>
+                                      </p:to>
+                                    </p:set>
+                                    <p:animEffect transition="in" filter="fade">
+                                      <p:cBhvr>
+                                        <p:cTn id="43" dur="450"/>
+                                        <p:tgtEl>
+                                          <p:spTgt spid="16"/>
+                                        </p:tgtEl>
+                                      </p:cBhvr>
+                                    </p:animEffect>
+                                  </p:childTnLst>
+                                </p:cTn>
+                              </p:par>
+                            </p:childTnLst>
+                          </p:cTn>
+                        </p:par>
+                        <p:par>
+                          <p:cTn id="44" fill="hold">
+                            <p:stCondLst>
+                              <p:cond delay="180"/>
+                            </p:stCondLst>
+                            <p:childTnLst>
+                              <p:par>
+                                <p:cTn id="45" presetID="2" presetClass="entr" presetSubtype="4" fill="hold" grpId="0" nodeType="afterEffect">
+                                  <p:stCondLst>
+                                    <p:cond delay="0"/>
+                                  </p:stCondLst>
+                                  <p:childTnLst>
+                                    <p:set>
+                                      <p:cBhvr>
+                                        <p:cTn id="46" dur="1" fill="hold">
+                                          <p:stCondLst>
+                                            <p:cond delay="0"/>
+                                          </p:stCondLst>
+                                        </p:cTn>
+                                        <p:tgtEl>
+                                          <p:spTgt spid="17"/>
+                                        </p:tgtEl>
+                                        <p:attrNameLst>
+                                          <p:attrName>style.visibility</p:attrName>
+                                        </p:attrNameLst>
+                                      </p:cBhvr>
+                                      <p:to>
+                                        <p:strVal val="visible"/>
+                                      </p:to>
+                                    </p:set>
+                                    <p:animEffect transition="in" filter="fade">
+                                      <p:cBhvr>
+                                        <p:cTn id="47" dur="450"/>
+                                        <p:tgtEl>
+                                          <p:spTgt spid="17"/>
+                                        </p:tgtEl>
+                                      </p:cBhvr>
+                                    </p:animEffect>
+                                  </p:childTnLst>
+                                </p:cTn>
+                              </p:par>
+                            </p:childTnLst>
+                          </p:cTn>
+                        </p:par>
+                      </p:childTnLst>
+                    </p:cTn>
+                  </p:par>
+                </p:childTnLst>
+              </p:cTn>
+              <p:prevCondLst>
+                <p:cond evt="onPrev" delay="0">
+                  <p:tgtEl>
+                    <p:sldTgt/>
+                  </p:tgtEl>
+                </p:cond>
+              </p:prevCondLst>
+              <p:nextCondLst>
+                <p:cond evt="onNext" delay="0">
+                  <p:tgtEl>
+                    <p:sldTgt/>
+                  </p:tgtEl>
+                </p:cond>
+              </p:nextCondLst>
+            </p:seq>
+          </p:childTnLst>
+        </p:cTn>
+      </p:par>
+    </p:tnLst>
+    <p:bldLst>
+      <p:bldP spid="6" grpId="0"/>
+      <p:bldP spid="7" grpId="0"/>
+      <p:bldP spid="8" grpId="0"/>
+      <p:bldP spid="9" grpId="0"/>
+      <p:bldP spid="10" grpId="0"/>
+      <p:bldP spid="11" grpId="0"/>
+      <p:bldP spid="12" grpId="0"/>
+      <p:bldP spid="13" grpId="0"/>
+      <p:bldP spid="14" grpId="0"/>
+      <p:bldP spid="16" grpId="0"/>
+      <p:bldP spid="17" grpId="0"/>
+    </p:bldLst>
+  </p:timing>
 </p:sld>
 </file>
 
@@ -2295,9 +3232,455 @@
   <p:clrMapOvr>
     <a:masterClrMapping/>
   </p:clrMapOvr>
-  <p:transition spd="med">
+  <p:transition spd="med" advClick="1">
     <p:fade/>
   </p:transition>
+  <p:timing>
+    <p:tnLst>
+      <p:par>
+        <p:cTn id="1" dur="indefinite" restart="never" nodeType="tmRoot">
+          <p:childTnLst>
+            <p:seq concurrent="1" nextAc="seek">
+              <p:cTn id="2" dur="indefinite" nodeType="mainSeq">
+                <p:childTnLst>
+                  <p:par>
+                    <p:cTn id="3" fill="hold">
+                      <p:stCondLst>
+                        <p:cond delay="0"/>
+                      </p:stCondLst>
+                      <p:childTnLst>
+                        <p:par>
+                          <p:cTn id="4" fill="hold">
+                            <p:stCondLst>
+                              <p:cond delay="100"/>
+                            </p:stCondLst>
+                            <p:childTnLst>
+                              <p:par>
+                                <p:cTn id="5" presetID="2" presetClass="entr" presetSubtype="4" fill="hold" grpId="0" nodeType="withEffect">
+                                  <p:stCondLst>
+                                    <p:cond delay="0"/>
+                                  </p:stCondLst>
+                                  <p:childTnLst>
+                                    <p:set>
+                                      <p:cBhvr>
+                                        <p:cTn id="6" dur="1" fill="hold">
+                                          <p:stCondLst>
+                                            <p:cond delay="0"/>
+                                          </p:stCondLst>
+                                        </p:cTn>
+                                        <p:tgtEl>
+                                          <p:spTgt spid="6"/>
+                                        </p:tgtEl>
+                                        <p:attrNameLst>
+                                          <p:attrName>style.visibility</p:attrName>
+                                        </p:attrNameLst>
+                                      </p:cBhvr>
+                                      <p:to>
+                                        <p:strVal val="visible"/>
+                                      </p:to>
+                                    </p:set>
+                                    <p:animEffect transition="in" filter="fade">
+                                      <p:cBhvr>
+                                        <p:cTn id="7" dur="450"/>
+                                        <p:tgtEl>
+                                          <p:spTgt spid="6"/>
+                                        </p:tgtEl>
+                                      </p:cBhvr>
+                                    </p:animEffect>
+                                  </p:childTnLst>
+                                </p:cTn>
+                              </p:par>
+                            </p:childTnLst>
+                          </p:cTn>
+                        </p:par>
+                        <p:par>
+                          <p:cTn id="8" fill="hold">
+                            <p:stCondLst>
+                              <p:cond delay="180"/>
+                            </p:stCondLst>
+                            <p:childTnLst>
+                              <p:par>
+                                <p:cTn id="9" presetID="2" presetClass="entr" presetSubtype="4" fill="hold" grpId="0" nodeType="afterEffect">
+                                  <p:stCondLst>
+                                    <p:cond delay="0"/>
+                                  </p:stCondLst>
+                                  <p:childTnLst>
+                                    <p:set>
+                                      <p:cBhvr>
+                                        <p:cTn id="10" dur="1" fill="hold">
+                                          <p:stCondLst>
+                                            <p:cond delay="0"/>
+                                          </p:stCondLst>
+                                        </p:cTn>
+                                        <p:tgtEl>
+                                          <p:spTgt spid="7"/>
+                                        </p:tgtEl>
+                                        <p:attrNameLst>
+                                          <p:attrName>style.visibility</p:attrName>
+                                        </p:attrNameLst>
+                                      </p:cBhvr>
+                                      <p:to>
+                                        <p:strVal val="visible"/>
+                                      </p:to>
+                                    </p:set>
+                                    <p:animEffect transition="in" filter="fade">
+                                      <p:cBhvr>
+                                        <p:cTn id="11" dur="450"/>
+                                        <p:tgtEl>
+                                          <p:spTgt spid="7"/>
+                                        </p:tgtEl>
+                                      </p:cBhvr>
+                                    </p:animEffect>
+                                  </p:childTnLst>
+                                </p:cTn>
+                              </p:par>
+                            </p:childTnLst>
+                          </p:cTn>
+                        </p:par>
+                        <p:par>
+                          <p:cTn id="12" fill="hold">
+                            <p:stCondLst>
+                              <p:cond delay="180"/>
+                            </p:stCondLst>
+                            <p:childTnLst>
+                              <p:par>
+                                <p:cTn id="13" presetID="2" presetClass="entr" presetSubtype="4" fill="hold" grpId="0" nodeType="afterEffect">
+                                  <p:stCondLst>
+                                    <p:cond delay="0"/>
+                                  </p:stCondLst>
+                                  <p:childTnLst>
+                                    <p:set>
+                                      <p:cBhvr>
+                                        <p:cTn id="14" dur="1" fill="hold">
+                                          <p:stCondLst>
+                                            <p:cond delay="0"/>
+                                          </p:stCondLst>
+                                        </p:cTn>
+                                        <p:tgtEl>
+                                          <p:spTgt spid="8"/>
+                                        </p:tgtEl>
+                                        <p:attrNameLst>
+                                          <p:attrName>style.visibility</p:attrName>
+                                        </p:attrNameLst>
+                                      </p:cBhvr>
+                                      <p:to>
+                                        <p:strVal val="visible"/>
+                                      </p:to>
+                                    </p:set>
+                                    <p:animEffect transition="in" filter="fade">
+                                      <p:cBhvr>
+                                        <p:cTn id="15" dur="450"/>
+                                        <p:tgtEl>
+                                          <p:spTgt spid="8"/>
+                                        </p:tgtEl>
+                                      </p:cBhvr>
+                                    </p:animEffect>
+                                  </p:childTnLst>
+                                </p:cTn>
+                              </p:par>
+                            </p:childTnLst>
+                          </p:cTn>
+                        </p:par>
+                        <p:par>
+                          <p:cTn id="16" fill="hold">
+                            <p:stCondLst>
+                              <p:cond delay="180"/>
+                            </p:stCondLst>
+                            <p:childTnLst>
+                              <p:par>
+                                <p:cTn id="17" presetID="2" presetClass="entr" presetSubtype="4" fill="hold" grpId="0" nodeType="afterEffect">
+                                  <p:stCondLst>
+                                    <p:cond delay="0"/>
+                                  </p:stCondLst>
+                                  <p:childTnLst>
+                                    <p:set>
+                                      <p:cBhvr>
+                                        <p:cTn id="18" dur="1" fill="hold">
+                                          <p:stCondLst>
+                                            <p:cond delay="0"/>
+                                          </p:stCondLst>
+                                        </p:cTn>
+                                        <p:tgtEl>
+                                          <p:spTgt spid="9"/>
+                                        </p:tgtEl>
+                                        <p:attrNameLst>
+                                          <p:attrName>style.visibility</p:attrName>
+                                        </p:attrNameLst>
+                                      </p:cBhvr>
+                                      <p:to>
+                                        <p:strVal val="visible"/>
+                                      </p:to>
+                                    </p:set>
+                                    <p:animEffect transition="in" filter="fade">
+                                      <p:cBhvr>
+                                        <p:cTn id="19" dur="450"/>
+                                        <p:tgtEl>
+                                          <p:spTgt spid="9"/>
+                                        </p:tgtEl>
+                                      </p:cBhvr>
+                                    </p:animEffect>
+                                  </p:childTnLst>
+                                </p:cTn>
+                              </p:par>
+                            </p:childTnLst>
+                          </p:cTn>
+                        </p:par>
+                        <p:par>
+                          <p:cTn id="20" fill="hold">
+                            <p:stCondLst>
+                              <p:cond delay="180"/>
+                            </p:stCondLst>
+                            <p:childTnLst>
+                              <p:par>
+                                <p:cTn id="21" presetID="2" presetClass="entr" presetSubtype="4" fill="hold" grpId="0" nodeType="afterEffect">
+                                  <p:stCondLst>
+                                    <p:cond delay="0"/>
+                                  </p:stCondLst>
+                                  <p:childTnLst>
+                                    <p:set>
+                                      <p:cBhvr>
+                                        <p:cTn id="22" dur="1" fill="hold">
+                                          <p:stCondLst>
+                                            <p:cond delay="0"/>
+                                          </p:stCondLst>
+                                        </p:cTn>
+                                        <p:tgtEl>
+                                          <p:spTgt spid="10"/>
+                                        </p:tgtEl>
+                                        <p:attrNameLst>
+                                          <p:attrName>style.visibility</p:attrName>
+                                        </p:attrNameLst>
+                                      </p:cBhvr>
+                                      <p:to>
+                                        <p:strVal val="visible"/>
+                                      </p:to>
+                                    </p:set>
+                                    <p:animEffect transition="in" filter="fade">
+                                      <p:cBhvr>
+                                        <p:cTn id="23" dur="450"/>
+                                        <p:tgtEl>
+                                          <p:spTgt spid="10"/>
+                                        </p:tgtEl>
+                                      </p:cBhvr>
+                                    </p:animEffect>
+                                  </p:childTnLst>
+                                </p:cTn>
+                              </p:par>
+                            </p:childTnLst>
+                          </p:cTn>
+                        </p:par>
+                        <p:par>
+                          <p:cTn id="24" fill="hold">
+                            <p:stCondLst>
+                              <p:cond delay="180"/>
+                            </p:stCondLst>
+                            <p:childTnLst>
+                              <p:par>
+                                <p:cTn id="25" presetID="2" presetClass="entr" presetSubtype="4" fill="hold" grpId="0" nodeType="afterEffect">
+                                  <p:stCondLst>
+                                    <p:cond delay="0"/>
+                                  </p:stCondLst>
+                                  <p:childTnLst>
+                                    <p:set>
+                                      <p:cBhvr>
+                                        <p:cTn id="26" dur="1" fill="hold">
+                                          <p:stCondLst>
+                                            <p:cond delay="0"/>
+                                          </p:stCondLst>
+                                        </p:cTn>
+                                        <p:tgtEl>
+                                          <p:spTgt spid="11"/>
+                                        </p:tgtEl>
+                                        <p:attrNameLst>
+                                          <p:attrName>style.visibility</p:attrName>
+                                        </p:attrNameLst>
+                                      </p:cBhvr>
+                                      <p:to>
+                                        <p:strVal val="visible"/>
+                                      </p:to>
+                                    </p:set>
+                                    <p:animEffect transition="in" filter="fade">
+                                      <p:cBhvr>
+                                        <p:cTn id="27" dur="450"/>
+                                        <p:tgtEl>
+                                          <p:spTgt spid="11"/>
+                                        </p:tgtEl>
+                                      </p:cBhvr>
+                                    </p:animEffect>
+                                  </p:childTnLst>
+                                </p:cTn>
+                              </p:par>
+                            </p:childTnLst>
+                          </p:cTn>
+                        </p:par>
+                        <p:par>
+                          <p:cTn id="28" fill="hold">
+                            <p:stCondLst>
+                              <p:cond delay="180"/>
+                            </p:stCondLst>
+                            <p:childTnLst>
+                              <p:par>
+                                <p:cTn id="29" presetID="2" presetClass="entr" presetSubtype="4" fill="hold" grpId="0" nodeType="afterEffect">
+                                  <p:stCondLst>
+                                    <p:cond delay="0"/>
+                                  </p:stCondLst>
+                                  <p:childTnLst>
+                                    <p:set>
+                                      <p:cBhvr>
+                                        <p:cTn id="30" dur="1" fill="hold">
+                                          <p:stCondLst>
+                                            <p:cond delay="0"/>
+                                          </p:stCondLst>
+                                        </p:cTn>
+                                        <p:tgtEl>
+                                          <p:spTgt spid="12"/>
+                                        </p:tgtEl>
+                                        <p:attrNameLst>
+                                          <p:attrName>style.visibility</p:attrName>
+                                        </p:attrNameLst>
+                                      </p:cBhvr>
+                                      <p:to>
+                                        <p:strVal val="visible"/>
+                                      </p:to>
+                                    </p:set>
+                                    <p:animEffect transition="in" filter="fade">
+                                      <p:cBhvr>
+                                        <p:cTn id="31" dur="450"/>
+                                        <p:tgtEl>
+                                          <p:spTgt spid="12"/>
+                                        </p:tgtEl>
+                                      </p:cBhvr>
+                                    </p:animEffect>
+                                  </p:childTnLst>
+                                </p:cTn>
+                              </p:par>
+                            </p:childTnLst>
+                          </p:cTn>
+                        </p:par>
+                        <p:par>
+                          <p:cTn id="32" fill="hold">
+                            <p:stCondLst>
+                              <p:cond delay="180"/>
+                            </p:stCondLst>
+                            <p:childTnLst>
+                              <p:par>
+                                <p:cTn id="33" presetID="2" presetClass="entr" presetSubtype="4" fill="hold" grpId="0" nodeType="afterEffect">
+                                  <p:stCondLst>
+                                    <p:cond delay="0"/>
+                                  </p:stCondLst>
+                                  <p:childTnLst>
+                                    <p:set>
+                                      <p:cBhvr>
+                                        <p:cTn id="34" dur="1" fill="hold">
+                                          <p:stCondLst>
+                                            <p:cond delay="0"/>
+                                          </p:stCondLst>
+                                        </p:cTn>
+                                        <p:tgtEl>
+                                          <p:spTgt spid="14"/>
+                                        </p:tgtEl>
+                                        <p:attrNameLst>
+                                          <p:attrName>style.visibility</p:attrName>
+                                        </p:attrNameLst>
+                                      </p:cBhvr>
+                                      <p:to>
+                                        <p:strVal val="visible"/>
+                                      </p:to>
+                                    </p:set>
+                                    <p:animEffect transition="in" filter="fade">
+                                      <p:cBhvr>
+                                        <p:cTn id="35" dur="450"/>
+                                        <p:tgtEl>
+                                          <p:spTgt spid="14"/>
+                                        </p:tgtEl>
+                                      </p:cBhvr>
+                                    </p:animEffect>
+                                  </p:childTnLst>
+                                </p:cTn>
+                              </p:par>
+                            </p:childTnLst>
+                          </p:cTn>
+                        </p:par>
+                        <p:par>
+                          <p:cTn id="36" fill="hold">
+                            <p:stCondLst>
+                              <p:cond delay="180"/>
+                            </p:stCondLst>
+                            <p:childTnLst>
+                              <p:par>
+                                <p:cTn id="37" presetID="2" presetClass="entr" presetSubtype="4" fill="hold" grpId="0" nodeType="afterEffect">
+                                  <p:stCondLst>
+                                    <p:cond delay="0"/>
+                                  </p:stCondLst>
+                                  <p:childTnLst>
+                                    <p:set>
+                                      <p:cBhvr>
+                                        <p:cTn id="38" dur="1" fill="hold">
+                                          <p:stCondLst>
+                                            <p:cond delay="0"/>
+                                          </p:stCondLst>
+                                        </p:cTn>
+                                        <p:tgtEl>
+                                          <p:spTgt spid="15"/>
+                                        </p:tgtEl>
+                                        <p:attrNameLst>
+                                          <p:attrName>style.visibility</p:attrName>
+                                        </p:attrNameLst>
+                                      </p:cBhvr>
+                                      <p:to>
+                                        <p:strVal val="visible"/>
+                                      </p:to>
+                                    </p:set>
+                                    <p:animEffect transition="in" filter="fade">
+                                      <p:cBhvr>
+                                        <p:cTn id="39" dur="450"/>
+                                        <p:tgtEl>
+                                          <p:spTgt spid="15"/>
+                                        </p:tgtEl>
+                                      </p:cBhvr>
+                                    </p:animEffect>
+                                  </p:childTnLst>
+                                </p:cTn>
+                              </p:par>
+                            </p:childTnLst>
+                          </p:cTn>
+                        </p:par>
+                      </p:childTnLst>
+                    </p:cTn>
+                  </p:par>
+                </p:childTnLst>
+              </p:cTn>
+              <p:prevCondLst>
+                <p:cond evt="onPrev" delay="0">
+                  <p:tgtEl>
+                    <p:sldTgt/>
+                  </p:tgtEl>
+                </p:cond>
+              </p:prevCondLst>
+              <p:nextCondLst>
+                <p:cond evt="onNext" delay="0">
+                  <p:tgtEl>
+                    <p:sldTgt/>
+                  </p:tgtEl>
+                </p:cond>
+              </p:nextCondLst>
+            </p:seq>
+          </p:childTnLst>
+        </p:cTn>
+      </p:par>
+    </p:tnLst>
+    <p:bldLst>
+      <p:bldP spid="6" grpId="0"/>
+      <p:bldP spid="7" grpId="0"/>
+      <p:bldP spid="8" grpId="0"/>
+      <p:bldP spid="9" grpId="0"/>
+      <p:bldP spid="10" grpId="0"/>
+      <p:bldP spid="11" grpId="0"/>
+      <p:bldP spid="12" grpId="0"/>
+      <p:bldP spid="14" grpId="0"/>
+      <p:bldP spid="15" grpId="0"/>
+    </p:bldLst>
+  </p:timing>
 </p:sld>
 </file>
 
@@ -3314,9 +4697,725 @@
   <p:clrMapOvr>
     <a:masterClrMapping/>
   </p:clrMapOvr>
-  <p:transition spd="med">
+  <p:transition spd="med" advClick="1">
     <p:fade/>
   </p:transition>
+  <p:timing>
+    <p:tnLst>
+      <p:par>
+        <p:cTn id="1" dur="indefinite" restart="never" nodeType="tmRoot">
+          <p:childTnLst>
+            <p:seq concurrent="1" nextAc="seek">
+              <p:cTn id="2" dur="indefinite" nodeType="mainSeq">
+                <p:childTnLst>
+                  <p:par>
+                    <p:cTn id="3" fill="hold">
+                      <p:stCondLst>
+                        <p:cond delay="0"/>
+                      </p:stCondLst>
+                      <p:childTnLst>
+                        <p:par>
+                          <p:cTn id="4" fill="hold">
+                            <p:stCondLst>
+                              <p:cond delay="100"/>
+                            </p:stCondLst>
+                            <p:childTnLst>
+                              <p:par>
+                                <p:cTn id="5" presetID="2" presetClass="entr" presetSubtype="4" fill="hold" grpId="0" nodeType="withEffect">
+                                  <p:stCondLst>
+                                    <p:cond delay="0"/>
+                                  </p:stCondLst>
+                                  <p:childTnLst>
+                                    <p:set>
+                                      <p:cBhvr>
+                                        <p:cTn id="6" dur="1" fill="hold">
+                                          <p:stCondLst>
+                                            <p:cond delay="0"/>
+                                          </p:stCondLst>
+                                        </p:cTn>
+                                        <p:tgtEl>
+                                          <p:spTgt spid="6"/>
+                                        </p:tgtEl>
+                                        <p:attrNameLst>
+                                          <p:attrName>style.visibility</p:attrName>
+                                        </p:attrNameLst>
+                                      </p:cBhvr>
+                                      <p:to>
+                                        <p:strVal val="visible"/>
+                                      </p:to>
+                                    </p:set>
+                                    <p:animEffect transition="in" filter="fade">
+                                      <p:cBhvr>
+                                        <p:cTn id="7" dur="450"/>
+                                        <p:tgtEl>
+                                          <p:spTgt spid="6"/>
+                                        </p:tgtEl>
+                                      </p:cBhvr>
+                                    </p:animEffect>
+                                  </p:childTnLst>
+                                </p:cTn>
+                              </p:par>
+                            </p:childTnLst>
+                          </p:cTn>
+                        </p:par>
+                        <p:par>
+                          <p:cTn id="8" fill="hold">
+                            <p:stCondLst>
+                              <p:cond delay="180"/>
+                            </p:stCondLst>
+                            <p:childTnLst>
+                              <p:par>
+                                <p:cTn id="9" presetID="2" presetClass="entr" presetSubtype="4" fill="hold" grpId="0" nodeType="afterEffect">
+                                  <p:stCondLst>
+                                    <p:cond delay="0"/>
+                                  </p:stCondLst>
+                                  <p:childTnLst>
+                                    <p:set>
+                                      <p:cBhvr>
+                                        <p:cTn id="10" dur="1" fill="hold">
+                                          <p:stCondLst>
+                                            <p:cond delay="0"/>
+                                          </p:stCondLst>
+                                        </p:cTn>
+                                        <p:tgtEl>
+                                          <p:spTgt spid="7"/>
+                                        </p:tgtEl>
+                                        <p:attrNameLst>
+                                          <p:attrName>style.visibility</p:attrName>
+                                        </p:attrNameLst>
+                                      </p:cBhvr>
+                                      <p:to>
+                                        <p:strVal val="visible"/>
+                                      </p:to>
+                                    </p:set>
+                                    <p:animEffect transition="in" filter="fade">
+                                      <p:cBhvr>
+                                        <p:cTn id="11" dur="450"/>
+                                        <p:tgtEl>
+                                          <p:spTgt spid="7"/>
+                                        </p:tgtEl>
+                                      </p:cBhvr>
+                                    </p:animEffect>
+                                  </p:childTnLst>
+                                </p:cTn>
+                              </p:par>
+                            </p:childTnLst>
+                          </p:cTn>
+                        </p:par>
+                        <p:par>
+                          <p:cTn id="12" fill="hold">
+                            <p:stCondLst>
+                              <p:cond delay="180"/>
+                            </p:stCondLst>
+                            <p:childTnLst>
+                              <p:par>
+                                <p:cTn id="13" presetID="2" presetClass="entr" presetSubtype="4" fill="hold" grpId="0" nodeType="afterEffect">
+                                  <p:stCondLst>
+                                    <p:cond delay="0"/>
+                                  </p:stCondLst>
+                                  <p:childTnLst>
+                                    <p:set>
+                                      <p:cBhvr>
+                                        <p:cTn id="14" dur="1" fill="hold">
+                                          <p:stCondLst>
+                                            <p:cond delay="0"/>
+                                          </p:stCondLst>
+                                        </p:cTn>
+                                        <p:tgtEl>
+                                          <p:spTgt spid="8"/>
+                                        </p:tgtEl>
+                                        <p:attrNameLst>
+                                          <p:attrName>style.visibility</p:attrName>
+                                        </p:attrNameLst>
+                                      </p:cBhvr>
+                                      <p:to>
+                                        <p:strVal val="visible"/>
+                                      </p:to>
+                                    </p:set>
+                                    <p:animEffect transition="in" filter="fade">
+                                      <p:cBhvr>
+                                        <p:cTn id="15" dur="450"/>
+                                        <p:tgtEl>
+                                          <p:spTgt spid="8"/>
+                                        </p:tgtEl>
+                                      </p:cBhvr>
+                                    </p:animEffect>
+                                  </p:childTnLst>
+                                </p:cTn>
+                              </p:par>
+                            </p:childTnLst>
+                          </p:cTn>
+                        </p:par>
+                        <p:par>
+                          <p:cTn id="16" fill="hold">
+                            <p:stCondLst>
+                              <p:cond delay="180"/>
+                            </p:stCondLst>
+                            <p:childTnLst>
+                              <p:par>
+                                <p:cTn id="17" presetID="2" presetClass="entr" presetSubtype="4" fill="hold" grpId="0" nodeType="afterEffect">
+                                  <p:stCondLst>
+                                    <p:cond delay="0"/>
+                                  </p:stCondLst>
+                                  <p:childTnLst>
+                                    <p:set>
+                                      <p:cBhvr>
+                                        <p:cTn id="18" dur="1" fill="hold">
+                                          <p:stCondLst>
+                                            <p:cond delay="0"/>
+                                          </p:stCondLst>
+                                        </p:cTn>
+                                        <p:tgtEl>
+                                          <p:spTgt spid="9"/>
+                                        </p:tgtEl>
+                                        <p:attrNameLst>
+                                          <p:attrName>style.visibility</p:attrName>
+                                        </p:attrNameLst>
+                                      </p:cBhvr>
+                                      <p:to>
+                                        <p:strVal val="visible"/>
+                                      </p:to>
+                                    </p:set>
+                                    <p:animEffect transition="in" filter="fade">
+                                      <p:cBhvr>
+                                        <p:cTn id="19" dur="450"/>
+                                        <p:tgtEl>
+                                          <p:spTgt spid="9"/>
+                                        </p:tgtEl>
+                                      </p:cBhvr>
+                                    </p:animEffect>
+                                  </p:childTnLst>
+                                </p:cTn>
+                              </p:par>
+                            </p:childTnLst>
+                          </p:cTn>
+                        </p:par>
+                        <p:par>
+                          <p:cTn id="20" fill="hold">
+                            <p:stCondLst>
+                              <p:cond delay="180"/>
+                            </p:stCondLst>
+                            <p:childTnLst>
+                              <p:par>
+                                <p:cTn id="21" presetID="2" presetClass="entr" presetSubtype="4" fill="hold" grpId="0" nodeType="afterEffect">
+                                  <p:stCondLst>
+                                    <p:cond delay="0"/>
+                                  </p:stCondLst>
+                                  <p:childTnLst>
+                                    <p:set>
+                                      <p:cBhvr>
+                                        <p:cTn id="22" dur="1" fill="hold">
+                                          <p:stCondLst>
+                                            <p:cond delay="0"/>
+                                          </p:stCondLst>
+                                        </p:cTn>
+                                        <p:tgtEl>
+                                          <p:spTgt spid="11"/>
+                                        </p:tgtEl>
+                                        <p:attrNameLst>
+                                          <p:attrName>style.visibility</p:attrName>
+                                        </p:attrNameLst>
+                                      </p:cBhvr>
+                                      <p:to>
+                                        <p:strVal val="visible"/>
+                                      </p:to>
+                                    </p:set>
+                                    <p:animEffect transition="in" filter="fade">
+                                      <p:cBhvr>
+                                        <p:cTn id="23" dur="450"/>
+                                        <p:tgtEl>
+                                          <p:spTgt spid="11"/>
+                                        </p:tgtEl>
+                                      </p:cBhvr>
+                                    </p:animEffect>
+                                  </p:childTnLst>
+                                </p:cTn>
+                              </p:par>
+                            </p:childTnLst>
+                          </p:cTn>
+                        </p:par>
+                        <p:par>
+                          <p:cTn id="24" fill="hold">
+                            <p:stCondLst>
+                              <p:cond delay="180"/>
+                            </p:stCondLst>
+                            <p:childTnLst>
+                              <p:par>
+                                <p:cTn id="25" presetID="2" presetClass="entr" presetSubtype="4" fill="hold" grpId="0" nodeType="afterEffect">
+                                  <p:stCondLst>
+                                    <p:cond delay="0"/>
+                                  </p:stCondLst>
+                                  <p:childTnLst>
+                                    <p:set>
+                                      <p:cBhvr>
+                                        <p:cTn id="26" dur="1" fill="hold">
+                                          <p:stCondLst>
+                                            <p:cond delay="0"/>
+                                          </p:stCondLst>
+                                        </p:cTn>
+                                        <p:tgtEl>
+                                          <p:spTgt spid="12"/>
+                                        </p:tgtEl>
+                                        <p:attrNameLst>
+                                          <p:attrName>style.visibility</p:attrName>
+                                        </p:attrNameLst>
+                                      </p:cBhvr>
+                                      <p:to>
+                                        <p:strVal val="visible"/>
+                                      </p:to>
+                                    </p:set>
+                                    <p:animEffect transition="in" filter="fade">
+                                      <p:cBhvr>
+                                        <p:cTn id="27" dur="450"/>
+                                        <p:tgtEl>
+                                          <p:spTgt spid="12"/>
+                                        </p:tgtEl>
+                                      </p:cBhvr>
+                                    </p:animEffect>
+                                  </p:childTnLst>
+                                </p:cTn>
+                              </p:par>
+                            </p:childTnLst>
+                          </p:cTn>
+                        </p:par>
+                        <p:par>
+                          <p:cTn id="28" fill="hold">
+                            <p:stCondLst>
+                              <p:cond delay="180"/>
+                            </p:stCondLst>
+                            <p:childTnLst>
+                              <p:par>
+                                <p:cTn id="29" presetID="2" presetClass="entr" presetSubtype="4" fill="hold" grpId="0" nodeType="afterEffect">
+                                  <p:stCondLst>
+                                    <p:cond delay="0"/>
+                                  </p:stCondLst>
+                                  <p:childTnLst>
+                                    <p:set>
+                                      <p:cBhvr>
+                                        <p:cTn id="30" dur="1" fill="hold">
+                                          <p:stCondLst>
+                                            <p:cond delay="0"/>
+                                          </p:stCondLst>
+                                        </p:cTn>
+                                        <p:tgtEl>
+                                          <p:spTgt spid="14"/>
+                                        </p:tgtEl>
+                                        <p:attrNameLst>
+                                          <p:attrName>style.visibility</p:attrName>
+                                        </p:attrNameLst>
+                                      </p:cBhvr>
+                                      <p:to>
+                                        <p:strVal val="visible"/>
+                                      </p:to>
+                                    </p:set>
+                                    <p:animEffect transition="in" filter="fade">
+                                      <p:cBhvr>
+                                        <p:cTn id="31" dur="450"/>
+                                        <p:tgtEl>
+                                          <p:spTgt spid="14"/>
+                                        </p:tgtEl>
+                                      </p:cBhvr>
+                                    </p:animEffect>
+                                  </p:childTnLst>
+                                </p:cTn>
+                              </p:par>
+                            </p:childTnLst>
+                          </p:cTn>
+                        </p:par>
+                        <p:par>
+                          <p:cTn id="32" fill="hold">
+                            <p:stCondLst>
+                              <p:cond delay="180"/>
+                            </p:stCondLst>
+                            <p:childTnLst>
+                              <p:par>
+                                <p:cTn id="33" presetID="2" presetClass="entr" presetSubtype="4" fill="hold" grpId="0" nodeType="afterEffect">
+                                  <p:stCondLst>
+                                    <p:cond delay="0"/>
+                                  </p:stCondLst>
+                                  <p:childTnLst>
+                                    <p:set>
+                                      <p:cBhvr>
+                                        <p:cTn id="34" dur="1" fill="hold">
+                                          <p:stCondLst>
+                                            <p:cond delay="0"/>
+                                          </p:stCondLst>
+                                        </p:cTn>
+                                        <p:tgtEl>
+                                          <p:spTgt spid="16"/>
+                                        </p:tgtEl>
+                                        <p:attrNameLst>
+                                          <p:attrName>style.visibility</p:attrName>
+                                        </p:attrNameLst>
+                                      </p:cBhvr>
+                                      <p:to>
+                                        <p:strVal val="visible"/>
+                                      </p:to>
+                                    </p:set>
+                                    <p:animEffect transition="in" filter="fade">
+                                      <p:cBhvr>
+                                        <p:cTn id="35" dur="450"/>
+                                        <p:tgtEl>
+                                          <p:spTgt spid="16"/>
+                                        </p:tgtEl>
+                                      </p:cBhvr>
+                                    </p:animEffect>
+                                  </p:childTnLst>
+                                </p:cTn>
+                              </p:par>
+                            </p:childTnLst>
+                          </p:cTn>
+                        </p:par>
+                        <p:par>
+                          <p:cTn id="36" fill="hold">
+                            <p:stCondLst>
+                              <p:cond delay="180"/>
+                            </p:stCondLst>
+                            <p:childTnLst>
+                              <p:par>
+                                <p:cTn id="37" presetID="2" presetClass="entr" presetSubtype="4" fill="hold" grpId="0" nodeType="afterEffect">
+                                  <p:stCondLst>
+                                    <p:cond delay="0"/>
+                                  </p:stCondLst>
+                                  <p:childTnLst>
+                                    <p:set>
+                                      <p:cBhvr>
+                                        <p:cTn id="38" dur="1" fill="hold">
+                                          <p:stCondLst>
+                                            <p:cond delay="0"/>
+                                          </p:stCondLst>
+                                        </p:cTn>
+                                        <p:tgtEl>
+                                          <p:spTgt spid="17"/>
+                                        </p:tgtEl>
+                                        <p:attrNameLst>
+                                          <p:attrName>style.visibility</p:attrName>
+                                        </p:attrNameLst>
+                                      </p:cBhvr>
+                                      <p:to>
+                                        <p:strVal val="visible"/>
+                                      </p:to>
+                                    </p:set>
+                                    <p:animEffect transition="in" filter="fade">
+                                      <p:cBhvr>
+                                        <p:cTn id="39" dur="450"/>
+                                        <p:tgtEl>
+                                          <p:spTgt spid="17"/>
+                                        </p:tgtEl>
+                                      </p:cBhvr>
+                                    </p:animEffect>
+                                  </p:childTnLst>
+                                </p:cTn>
+                              </p:par>
+                            </p:childTnLst>
+                          </p:cTn>
+                        </p:par>
+                        <p:par>
+                          <p:cTn id="40" fill="hold">
+                            <p:stCondLst>
+                              <p:cond delay="180"/>
+                            </p:stCondLst>
+                            <p:childTnLst>
+                              <p:par>
+                                <p:cTn id="41" presetID="2" presetClass="entr" presetSubtype="4" fill="hold" grpId="0" nodeType="afterEffect">
+                                  <p:stCondLst>
+                                    <p:cond delay="0"/>
+                                  </p:stCondLst>
+                                  <p:childTnLst>
+                                    <p:set>
+                                      <p:cBhvr>
+                                        <p:cTn id="42" dur="1" fill="hold">
+                                          <p:stCondLst>
+                                            <p:cond delay="0"/>
+                                          </p:stCondLst>
+                                        </p:cTn>
+                                        <p:tgtEl>
+                                          <p:spTgt spid="19"/>
+                                        </p:tgtEl>
+                                        <p:attrNameLst>
+                                          <p:attrName>style.visibility</p:attrName>
+                                        </p:attrNameLst>
+                                      </p:cBhvr>
+                                      <p:to>
+                                        <p:strVal val="visible"/>
+                                      </p:to>
+                                    </p:set>
+                                    <p:animEffect transition="in" filter="fade">
+                                      <p:cBhvr>
+                                        <p:cTn id="43" dur="450"/>
+                                        <p:tgtEl>
+                                          <p:spTgt spid="19"/>
+                                        </p:tgtEl>
+                                      </p:cBhvr>
+                                    </p:animEffect>
+                                  </p:childTnLst>
+                                </p:cTn>
+                              </p:par>
+                            </p:childTnLst>
+                          </p:cTn>
+                        </p:par>
+                        <p:par>
+                          <p:cTn id="44" fill="hold">
+                            <p:stCondLst>
+                              <p:cond delay="180"/>
+                            </p:stCondLst>
+                            <p:childTnLst>
+                              <p:par>
+                                <p:cTn id="45" presetID="2" presetClass="entr" presetSubtype="4" fill="hold" grpId="0" nodeType="afterEffect">
+                                  <p:stCondLst>
+                                    <p:cond delay="0"/>
+                                  </p:stCondLst>
+                                  <p:childTnLst>
+                                    <p:set>
+                                      <p:cBhvr>
+                                        <p:cTn id="46" dur="1" fill="hold">
+                                          <p:stCondLst>
+                                            <p:cond delay="0"/>
+                                          </p:stCondLst>
+                                        </p:cTn>
+                                        <p:tgtEl>
+                                          <p:spTgt spid="21"/>
+                                        </p:tgtEl>
+                                        <p:attrNameLst>
+                                          <p:attrName>style.visibility</p:attrName>
+                                        </p:attrNameLst>
+                                      </p:cBhvr>
+                                      <p:to>
+                                        <p:strVal val="visible"/>
+                                      </p:to>
+                                    </p:set>
+                                    <p:animEffect transition="in" filter="fade">
+                                      <p:cBhvr>
+                                        <p:cTn id="47" dur="450"/>
+                                        <p:tgtEl>
+                                          <p:spTgt spid="21"/>
+                                        </p:tgtEl>
+                                      </p:cBhvr>
+                                    </p:animEffect>
+                                  </p:childTnLst>
+                                </p:cTn>
+                              </p:par>
+                            </p:childTnLst>
+                          </p:cTn>
+                        </p:par>
+                        <p:par>
+                          <p:cTn id="48" fill="hold">
+                            <p:stCondLst>
+                              <p:cond delay="180"/>
+                            </p:stCondLst>
+                            <p:childTnLst>
+                              <p:par>
+                                <p:cTn id="49" presetID="2" presetClass="entr" presetSubtype="4" fill="hold" grpId="0" nodeType="afterEffect">
+                                  <p:stCondLst>
+                                    <p:cond delay="0"/>
+                                  </p:stCondLst>
+                                  <p:childTnLst>
+                                    <p:set>
+                                      <p:cBhvr>
+                                        <p:cTn id="50" dur="1" fill="hold">
+                                          <p:stCondLst>
+                                            <p:cond delay="0"/>
+                                          </p:stCondLst>
+                                        </p:cTn>
+                                        <p:tgtEl>
+                                          <p:spTgt spid="22"/>
+                                        </p:tgtEl>
+                                        <p:attrNameLst>
+                                          <p:attrName>style.visibility</p:attrName>
+                                        </p:attrNameLst>
+                                      </p:cBhvr>
+                                      <p:to>
+                                        <p:strVal val="visible"/>
+                                      </p:to>
+                                    </p:set>
+                                    <p:animEffect transition="in" filter="fade">
+                                      <p:cBhvr>
+                                        <p:cTn id="51" dur="450"/>
+                                        <p:tgtEl>
+                                          <p:spTgt spid="22"/>
+                                        </p:tgtEl>
+                                      </p:cBhvr>
+                                    </p:animEffect>
+                                  </p:childTnLst>
+                                </p:cTn>
+                              </p:par>
+                            </p:childTnLst>
+                          </p:cTn>
+                        </p:par>
+                        <p:par>
+                          <p:cTn id="52" fill="hold">
+                            <p:stCondLst>
+                              <p:cond delay="180"/>
+                            </p:stCondLst>
+                            <p:childTnLst>
+                              <p:par>
+                                <p:cTn id="53" presetID="2" presetClass="entr" presetSubtype="4" fill="hold" grpId="0" nodeType="afterEffect">
+                                  <p:stCondLst>
+                                    <p:cond delay="0"/>
+                                  </p:stCondLst>
+                                  <p:childTnLst>
+                                    <p:set>
+                                      <p:cBhvr>
+                                        <p:cTn id="54" dur="1" fill="hold">
+                                          <p:stCondLst>
+                                            <p:cond delay="0"/>
+                                          </p:stCondLst>
+                                        </p:cTn>
+                                        <p:tgtEl>
+                                          <p:spTgt spid="24"/>
+                                        </p:tgtEl>
+                                        <p:attrNameLst>
+                                          <p:attrName>style.visibility</p:attrName>
+                                        </p:attrNameLst>
+                                      </p:cBhvr>
+                                      <p:to>
+                                        <p:strVal val="visible"/>
+                                      </p:to>
+                                    </p:set>
+                                    <p:animEffect transition="in" filter="fade">
+                                      <p:cBhvr>
+                                        <p:cTn id="55" dur="450"/>
+                                        <p:tgtEl>
+                                          <p:spTgt spid="24"/>
+                                        </p:tgtEl>
+                                      </p:cBhvr>
+                                    </p:animEffect>
+                                  </p:childTnLst>
+                                </p:cTn>
+                              </p:par>
+                            </p:childTnLst>
+                          </p:cTn>
+                        </p:par>
+                        <p:par>
+                          <p:cTn id="56" fill="hold">
+                            <p:stCondLst>
+                              <p:cond delay="180"/>
+                            </p:stCondLst>
+                            <p:childTnLst>
+                              <p:par>
+                                <p:cTn id="57" presetID="2" presetClass="entr" presetSubtype="4" fill="hold" grpId="0" nodeType="afterEffect">
+                                  <p:stCondLst>
+                                    <p:cond delay="0"/>
+                                  </p:stCondLst>
+                                  <p:childTnLst>
+                                    <p:set>
+                                      <p:cBhvr>
+                                        <p:cTn id="58" dur="1" fill="hold">
+                                          <p:stCondLst>
+                                            <p:cond delay="0"/>
+                                          </p:stCondLst>
+                                        </p:cTn>
+                                        <p:tgtEl>
+                                          <p:spTgt spid="26"/>
+                                        </p:tgtEl>
+                                        <p:attrNameLst>
+                                          <p:attrName>style.visibility</p:attrName>
+                                        </p:attrNameLst>
+                                      </p:cBhvr>
+                                      <p:to>
+                                        <p:strVal val="visible"/>
+                                      </p:to>
+                                    </p:set>
+                                    <p:animEffect transition="in" filter="fade">
+                                      <p:cBhvr>
+                                        <p:cTn id="59" dur="450"/>
+                                        <p:tgtEl>
+                                          <p:spTgt spid="26"/>
+                                        </p:tgtEl>
+                                      </p:cBhvr>
+                                    </p:animEffect>
+                                  </p:childTnLst>
+                                </p:cTn>
+                              </p:par>
+                            </p:childTnLst>
+                          </p:cTn>
+                        </p:par>
+                        <p:par>
+                          <p:cTn id="60" fill="hold">
+                            <p:stCondLst>
+                              <p:cond delay="180"/>
+                            </p:stCondLst>
+                            <p:childTnLst>
+                              <p:par>
+                                <p:cTn id="61" presetID="2" presetClass="entr" presetSubtype="4" fill="hold" grpId="0" nodeType="afterEffect">
+                                  <p:stCondLst>
+                                    <p:cond delay="0"/>
+                                  </p:stCondLst>
+                                  <p:childTnLst>
+                                    <p:set>
+                                      <p:cBhvr>
+                                        <p:cTn id="62" dur="1" fill="hold">
+                                          <p:stCondLst>
+                                            <p:cond delay="0"/>
+                                          </p:stCondLst>
+                                        </p:cTn>
+                                        <p:tgtEl>
+                                          <p:spTgt spid="27"/>
+                                        </p:tgtEl>
+                                        <p:attrNameLst>
+                                          <p:attrName>style.visibility</p:attrName>
+                                        </p:attrNameLst>
+                                      </p:cBhvr>
+                                      <p:to>
+                                        <p:strVal val="visible"/>
+                                      </p:to>
+                                    </p:set>
+                                    <p:animEffect transition="in" filter="fade">
+                                      <p:cBhvr>
+                                        <p:cTn id="63" dur="450"/>
+                                        <p:tgtEl>
+                                          <p:spTgt spid="27"/>
+                                        </p:tgtEl>
+                                      </p:cBhvr>
+                                    </p:animEffect>
+                                  </p:childTnLst>
+                                </p:cTn>
+                              </p:par>
+                            </p:childTnLst>
+                          </p:cTn>
+                        </p:par>
+                      </p:childTnLst>
+                    </p:cTn>
+                  </p:par>
+                </p:childTnLst>
+              </p:cTn>
+              <p:prevCondLst>
+                <p:cond evt="onPrev" delay="0">
+                  <p:tgtEl>
+                    <p:sldTgt/>
+                  </p:tgtEl>
+                </p:cond>
+              </p:prevCondLst>
+              <p:nextCondLst>
+                <p:cond evt="onNext" delay="0">
+                  <p:tgtEl>
+                    <p:sldTgt/>
+                  </p:tgtEl>
+                </p:cond>
+              </p:nextCondLst>
+            </p:seq>
+          </p:childTnLst>
+        </p:cTn>
+      </p:par>
+    </p:tnLst>
+    <p:bldLst>
+      <p:bldP spid="6" grpId="0"/>
+      <p:bldP spid="7" grpId="0"/>
+      <p:bldP spid="8" grpId="0"/>
+      <p:bldP spid="9" grpId="0"/>
+      <p:bldP spid="11" grpId="0"/>
+      <p:bldP spid="12" grpId="0"/>
+      <p:bldP spid="14" grpId="0"/>
+      <p:bldP spid="16" grpId="0"/>
+      <p:bldP spid="17" grpId="0"/>
+      <p:bldP spid="19" grpId="0"/>
+      <p:bldP spid="21" grpId="0"/>
+      <p:bldP spid="22" grpId="0"/>
+      <p:bldP spid="24" grpId="0"/>
+      <p:bldP spid="26" grpId="0"/>
+      <p:bldP spid="27" grpId="0"/>
+    </p:bldLst>
+  </p:timing>
 </p:sld>
 </file>
 
@@ -4490,9 +6589,860 @@
   <p:clrMapOvr>
     <a:masterClrMapping/>
   </p:clrMapOvr>
-  <p:transition spd="med">
+  <p:transition spd="med" advClick="1">
     <p:fade/>
   </p:transition>
+  <p:timing>
+    <p:tnLst>
+      <p:par>
+        <p:cTn id="1" dur="indefinite" restart="never" nodeType="tmRoot">
+          <p:childTnLst>
+            <p:seq concurrent="1" nextAc="seek">
+              <p:cTn id="2" dur="indefinite" nodeType="mainSeq">
+                <p:childTnLst>
+                  <p:par>
+                    <p:cTn id="3" fill="hold">
+                      <p:stCondLst>
+                        <p:cond delay="0"/>
+                      </p:stCondLst>
+                      <p:childTnLst>
+                        <p:par>
+                          <p:cTn id="4" fill="hold">
+                            <p:stCondLst>
+                              <p:cond delay="100"/>
+                            </p:stCondLst>
+                            <p:childTnLst>
+                              <p:par>
+                                <p:cTn id="5" presetID="2" presetClass="entr" presetSubtype="4" fill="hold" grpId="0" nodeType="withEffect">
+                                  <p:stCondLst>
+                                    <p:cond delay="0"/>
+                                  </p:stCondLst>
+                                  <p:childTnLst>
+                                    <p:set>
+                                      <p:cBhvr>
+                                        <p:cTn id="6" dur="1" fill="hold">
+                                          <p:stCondLst>
+                                            <p:cond delay="0"/>
+                                          </p:stCondLst>
+                                        </p:cTn>
+                                        <p:tgtEl>
+                                          <p:spTgt spid="6"/>
+                                        </p:tgtEl>
+                                        <p:attrNameLst>
+                                          <p:attrName>style.visibility</p:attrName>
+                                        </p:attrNameLst>
+                                      </p:cBhvr>
+                                      <p:to>
+                                        <p:strVal val="visible"/>
+                                      </p:to>
+                                    </p:set>
+                                    <p:animEffect transition="in" filter="fade">
+                                      <p:cBhvr>
+                                        <p:cTn id="7" dur="450"/>
+                                        <p:tgtEl>
+                                          <p:spTgt spid="6"/>
+                                        </p:tgtEl>
+                                      </p:cBhvr>
+                                    </p:animEffect>
+                                  </p:childTnLst>
+                                </p:cTn>
+                              </p:par>
+                            </p:childTnLst>
+                          </p:cTn>
+                        </p:par>
+                        <p:par>
+                          <p:cTn id="8" fill="hold">
+                            <p:stCondLst>
+                              <p:cond delay="180"/>
+                            </p:stCondLst>
+                            <p:childTnLst>
+                              <p:par>
+                                <p:cTn id="9" presetID="2" presetClass="entr" presetSubtype="4" fill="hold" grpId="0" nodeType="afterEffect">
+                                  <p:stCondLst>
+                                    <p:cond delay="0"/>
+                                  </p:stCondLst>
+                                  <p:childTnLst>
+                                    <p:set>
+                                      <p:cBhvr>
+                                        <p:cTn id="10" dur="1" fill="hold">
+                                          <p:stCondLst>
+                                            <p:cond delay="0"/>
+                                          </p:stCondLst>
+                                        </p:cTn>
+                                        <p:tgtEl>
+                                          <p:spTgt spid="7"/>
+                                        </p:tgtEl>
+                                        <p:attrNameLst>
+                                          <p:attrName>style.visibility</p:attrName>
+                                        </p:attrNameLst>
+                                      </p:cBhvr>
+                                      <p:to>
+                                        <p:strVal val="visible"/>
+                                      </p:to>
+                                    </p:set>
+                                    <p:animEffect transition="in" filter="fade">
+                                      <p:cBhvr>
+                                        <p:cTn id="11" dur="450"/>
+                                        <p:tgtEl>
+                                          <p:spTgt spid="7"/>
+                                        </p:tgtEl>
+                                      </p:cBhvr>
+                                    </p:animEffect>
+                                  </p:childTnLst>
+                                </p:cTn>
+                              </p:par>
+                            </p:childTnLst>
+                          </p:cTn>
+                        </p:par>
+                        <p:par>
+                          <p:cTn id="12" fill="hold">
+                            <p:stCondLst>
+                              <p:cond delay="180"/>
+                            </p:stCondLst>
+                            <p:childTnLst>
+                              <p:par>
+                                <p:cTn id="13" presetID="2" presetClass="entr" presetSubtype="4" fill="hold" grpId="0" nodeType="afterEffect">
+                                  <p:stCondLst>
+                                    <p:cond delay="0"/>
+                                  </p:stCondLst>
+                                  <p:childTnLst>
+                                    <p:set>
+                                      <p:cBhvr>
+                                        <p:cTn id="14" dur="1" fill="hold">
+                                          <p:stCondLst>
+                                            <p:cond delay="0"/>
+                                          </p:stCondLst>
+                                        </p:cTn>
+                                        <p:tgtEl>
+                                          <p:spTgt spid="8"/>
+                                        </p:tgtEl>
+                                        <p:attrNameLst>
+                                          <p:attrName>style.visibility</p:attrName>
+                                        </p:attrNameLst>
+                                      </p:cBhvr>
+                                      <p:to>
+                                        <p:strVal val="visible"/>
+                                      </p:to>
+                                    </p:set>
+                                    <p:animEffect transition="in" filter="fade">
+                                      <p:cBhvr>
+                                        <p:cTn id="15" dur="450"/>
+                                        <p:tgtEl>
+                                          <p:spTgt spid="8"/>
+                                        </p:tgtEl>
+                                      </p:cBhvr>
+                                    </p:animEffect>
+                                  </p:childTnLst>
+                                </p:cTn>
+                              </p:par>
+                            </p:childTnLst>
+                          </p:cTn>
+                        </p:par>
+                        <p:par>
+                          <p:cTn id="16" fill="hold">
+                            <p:stCondLst>
+                              <p:cond delay="180"/>
+                            </p:stCondLst>
+                            <p:childTnLst>
+                              <p:par>
+                                <p:cTn id="17" presetID="2" presetClass="entr" presetSubtype="4" fill="hold" grpId="0" nodeType="afterEffect">
+                                  <p:stCondLst>
+                                    <p:cond delay="0"/>
+                                  </p:stCondLst>
+                                  <p:childTnLst>
+                                    <p:set>
+                                      <p:cBhvr>
+                                        <p:cTn id="18" dur="1" fill="hold">
+                                          <p:stCondLst>
+                                            <p:cond delay="0"/>
+                                          </p:stCondLst>
+                                        </p:cTn>
+                                        <p:tgtEl>
+                                          <p:spTgt spid="9"/>
+                                        </p:tgtEl>
+                                        <p:attrNameLst>
+                                          <p:attrName>style.visibility</p:attrName>
+                                        </p:attrNameLst>
+                                      </p:cBhvr>
+                                      <p:to>
+                                        <p:strVal val="visible"/>
+                                      </p:to>
+                                    </p:set>
+                                    <p:animEffect transition="in" filter="fade">
+                                      <p:cBhvr>
+                                        <p:cTn id="19" dur="450"/>
+                                        <p:tgtEl>
+                                          <p:spTgt spid="9"/>
+                                        </p:tgtEl>
+                                      </p:cBhvr>
+                                    </p:animEffect>
+                                  </p:childTnLst>
+                                </p:cTn>
+                              </p:par>
+                            </p:childTnLst>
+                          </p:cTn>
+                        </p:par>
+                        <p:par>
+                          <p:cTn id="20" fill="hold">
+                            <p:stCondLst>
+                              <p:cond delay="180"/>
+                            </p:stCondLst>
+                            <p:childTnLst>
+                              <p:par>
+                                <p:cTn id="21" presetID="2" presetClass="entr" presetSubtype="4" fill="hold" grpId="0" nodeType="afterEffect">
+                                  <p:stCondLst>
+                                    <p:cond delay="0"/>
+                                  </p:stCondLst>
+                                  <p:childTnLst>
+                                    <p:set>
+                                      <p:cBhvr>
+                                        <p:cTn id="22" dur="1" fill="hold">
+                                          <p:stCondLst>
+                                            <p:cond delay="0"/>
+                                          </p:stCondLst>
+                                        </p:cTn>
+                                        <p:tgtEl>
+                                          <p:spTgt spid="11"/>
+                                        </p:tgtEl>
+                                        <p:attrNameLst>
+                                          <p:attrName>style.visibility</p:attrName>
+                                        </p:attrNameLst>
+                                      </p:cBhvr>
+                                      <p:to>
+                                        <p:strVal val="visible"/>
+                                      </p:to>
+                                    </p:set>
+                                    <p:animEffect transition="in" filter="fade">
+                                      <p:cBhvr>
+                                        <p:cTn id="23" dur="450"/>
+                                        <p:tgtEl>
+                                          <p:spTgt spid="11"/>
+                                        </p:tgtEl>
+                                      </p:cBhvr>
+                                    </p:animEffect>
+                                  </p:childTnLst>
+                                </p:cTn>
+                              </p:par>
+                            </p:childTnLst>
+                          </p:cTn>
+                        </p:par>
+                        <p:par>
+                          <p:cTn id="24" fill="hold">
+                            <p:stCondLst>
+                              <p:cond delay="180"/>
+                            </p:stCondLst>
+                            <p:childTnLst>
+                              <p:par>
+                                <p:cTn id="25" presetID="2" presetClass="entr" presetSubtype="4" fill="hold" grpId="0" nodeType="afterEffect">
+                                  <p:stCondLst>
+                                    <p:cond delay="0"/>
+                                  </p:stCondLst>
+                                  <p:childTnLst>
+                                    <p:set>
+                                      <p:cBhvr>
+                                        <p:cTn id="26" dur="1" fill="hold">
+                                          <p:stCondLst>
+                                            <p:cond delay="0"/>
+                                          </p:stCondLst>
+                                        </p:cTn>
+                                        <p:tgtEl>
+                                          <p:spTgt spid="12"/>
+                                        </p:tgtEl>
+                                        <p:attrNameLst>
+                                          <p:attrName>style.visibility</p:attrName>
+                                        </p:attrNameLst>
+                                      </p:cBhvr>
+                                      <p:to>
+                                        <p:strVal val="visible"/>
+                                      </p:to>
+                                    </p:set>
+                                    <p:animEffect transition="in" filter="fade">
+                                      <p:cBhvr>
+                                        <p:cTn id="27" dur="450"/>
+                                        <p:tgtEl>
+                                          <p:spTgt spid="12"/>
+                                        </p:tgtEl>
+                                      </p:cBhvr>
+                                    </p:animEffect>
+                                  </p:childTnLst>
+                                </p:cTn>
+                              </p:par>
+                            </p:childTnLst>
+                          </p:cTn>
+                        </p:par>
+                        <p:par>
+                          <p:cTn id="28" fill="hold">
+                            <p:stCondLst>
+                              <p:cond delay="180"/>
+                            </p:stCondLst>
+                            <p:childTnLst>
+                              <p:par>
+                                <p:cTn id="29" presetID="2" presetClass="entr" presetSubtype="4" fill="hold" grpId="0" nodeType="afterEffect">
+                                  <p:stCondLst>
+                                    <p:cond delay="0"/>
+                                  </p:stCondLst>
+                                  <p:childTnLst>
+                                    <p:set>
+                                      <p:cBhvr>
+                                        <p:cTn id="30" dur="1" fill="hold">
+                                          <p:stCondLst>
+                                            <p:cond delay="0"/>
+                                          </p:stCondLst>
+                                        </p:cTn>
+                                        <p:tgtEl>
+                                          <p:spTgt spid="13"/>
+                                        </p:tgtEl>
+                                        <p:attrNameLst>
+                                          <p:attrName>style.visibility</p:attrName>
+                                        </p:attrNameLst>
+                                      </p:cBhvr>
+                                      <p:to>
+                                        <p:strVal val="visible"/>
+                                      </p:to>
+                                    </p:set>
+                                    <p:animEffect transition="in" filter="fade">
+                                      <p:cBhvr>
+                                        <p:cTn id="31" dur="450"/>
+                                        <p:tgtEl>
+                                          <p:spTgt spid="13"/>
+                                        </p:tgtEl>
+                                      </p:cBhvr>
+                                    </p:animEffect>
+                                  </p:childTnLst>
+                                </p:cTn>
+                              </p:par>
+                            </p:childTnLst>
+                          </p:cTn>
+                        </p:par>
+                        <p:par>
+                          <p:cTn id="32" fill="hold">
+                            <p:stCondLst>
+                              <p:cond delay="180"/>
+                            </p:stCondLst>
+                            <p:childTnLst>
+                              <p:par>
+                                <p:cTn id="33" presetID="2" presetClass="entr" presetSubtype="4" fill="hold" grpId="0" nodeType="afterEffect">
+                                  <p:stCondLst>
+                                    <p:cond delay="0"/>
+                                  </p:stCondLst>
+                                  <p:childTnLst>
+                                    <p:set>
+                                      <p:cBhvr>
+                                        <p:cTn id="34" dur="1" fill="hold">
+                                          <p:stCondLst>
+                                            <p:cond delay="0"/>
+                                          </p:stCondLst>
+                                        </p:cTn>
+                                        <p:tgtEl>
+                                          <p:spTgt spid="14"/>
+                                        </p:tgtEl>
+                                        <p:attrNameLst>
+                                          <p:attrName>style.visibility</p:attrName>
+                                        </p:attrNameLst>
+                                      </p:cBhvr>
+                                      <p:to>
+                                        <p:strVal val="visible"/>
+                                      </p:to>
+                                    </p:set>
+                                    <p:animEffect transition="in" filter="fade">
+                                      <p:cBhvr>
+                                        <p:cTn id="35" dur="450"/>
+                                        <p:tgtEl>
+                                          <p:spTgt spid="14"/>
+                                        </p:tgtEl>
+                                      </p:cBhvr>
+                                    </p:animEffect>
+                                  </p:childTnLst>
+                                </p:cTn>
+                              </p:par>
+                            </p:childTnLst>
+                          </p:cTn>
+                        </p:par>
+                        <p:par>
+                          <p:cTn id="36" fill="hold">
+                            <p:stCondLst>
+                              <p:cond delay="180"/>
+                            </p:stCondLst>
+                            <p:childTnLst>
+                              <p:par>
+                                <p:cTn id="37" presetID="2" presetClass="entr" presetSubtype="4" fill="hold" grpId="0" nodeType="afterEffect">
+                                  <p:stCondLst>
+                                    <p:cond delay="0"/>
+                                  </p:stCondLst>
+                                  <p:childTnLst>
+                                    <p:set>
+                                      <p:cBhvr>
+                                        <p:cTn id="38" dur="1" fill="hold">
+                                          <p:stCondLst>
+                                            <p:cond delay="0"/>
+                                          </p:stCondLst>
+                                        </p:cTn>
+                                        <p:tgtEl>
+                                          <p:spTgt spid="15"/>
+                                        </p:tgtEl>
+                                        <p:attrNameLst>
+                                          <p:attrName>style.visibility</p:attrName>
+                                        </p:attrNameLst>
+                                      </p:cBhvr>
+                                      <p:to>
+                                        <p:strVal val="visible"/>
+                                      </p:to>
+                                    </p:set>
+                                    <p:animEffect transition="in" filter="fade">
+                                      <p:cBhvr>
+                                        <p:cTn id="39" dur="450"/>
+                                        <p:tgtEl>
+                                          <p:spTgt spid="15"/>
+                                        </p:tgtEl>
+                                      </p:cBhvr>
+                                    </p:animEffect>
+                                  </p:childTnLst>
+                                </p:cTn>
+                              </p:par>
+                            </p:childTnLst>
+                          </p:cTn>
+                        </p:par>
+                        <p:par>
+                          <p:cTn id="40" fill="hold">
+                            <p:stCondLst>
+                              <p:cond delay="180"/>
+                            </p:stCondLst>
+                            <p:childTnLst>
+                              <p:par>
+                                <p:cTn id="41" presetID="2" presetClass="entr" presetSubtype="4" fill="hold" grpId="0" nodeType="afterEffect">
+                                  <p:stCondLst>
+                                    <p:cond delay="0"/>
+                                  </p:stCondLst>
+                                  <p:childTnLst>
+                                    <p:set>
+                                      <p:cBhvr>
+                                        <p:cTn id="42" dur="1" fill="hold">
+                                          <p:stCondLst>
+                                            <p:cond delay="0"/>
+                                          </p:stCondLst>
+                                        </p:cTn>
+                                        <p:tgtEl>
+                                          <p:spTgt spid="16"/>
+                                        </p:tgtEl>
+                                        <p:attrNameLst>
+                                          <p:attrName>style.visibility</p:attrName>
+                                        </p:attrNameLst>
+                                      </p:cBhvr>
+                                      <p:to>
+                                        <p:strVal val="visible"/>
+                                      </p:to>
+                                    </p:set>
+                                    <p:animEffect transition="in" filter="fade">
+                                      <p:cBhvr>
+                                        <p:cTn id="43" dur="450"/>
+                                        <p:tgtEl>
+                                          <p:spTgt spid="16"/>
+                                        </p:tgtEl>
+                                      </p:cBhvr>
+                                    </p:animEffect>
+                                  </p:childTnLst>
+                                </p:cTn>
+                              </p:par>
+                            </p:childTnLst>
+                          </p:cTn>
+                        </p:par>
+                        <p:par>
+                          <p:cTn id="44" fill="hold">
+                            <p:stCondLst>
+                              <p:cond delay="180"/>
+                            </p:stCondLst>
+                            <p:childTnLst>
+                              <p:par>
+                                <p:cTn id="45" presetID="2" presetClass="entr" presetSubtype="4" fill="hold" grpId="0" nodeType="afterEffect">
+                                  <p:stCondLst>
+                                    <p:cond delay="0"/>
+                                  </p:stCondLst>
+                                  <p:childTnLst>
+                                    <p:set>
+                                      <p:cBhvr>
+                                        <p:cTn id="46" dur="1" fill="hold">
+                                          <p:stCondLst>
+                                            <p:cond delay="0"/>
+                                          </p:stCondLst>
+                                        </p:cTn>
+                                        <p:tgtEl>
+                                          <p:spTgt spid="17"/>
+                                        </p:tgtEl>
+                                        <p:attrNameLst>
+                                          <p:attrName>style.visibility</p:attrName>
+                                        </p:attrNameLst>
+                                      </p:cBhvr>
+                                      <p:to>
+                                        <p:strVal val="visible"/>
+                                      </p:to>
+                                    </p:set>
+                                    <p:animEffect transition="in" filter="fade">
+                                      <p:cBhvr>
+                                        <p:cTn id="47" dur="450"/>
+                                        <p:tgtEl>
+                                          <p:spTgt spid="17"/>
+                                        </p:tgtEl>
+                                      </p:cBhvr>
+                                    </p:animEffect>
+                                  </p:childTnLst>
+                                </p:cTn>
+                              </p:par>
+                            </p:childTnLst>
+                          </p:cTn>
+                        </p:par>
+                        <p:par>
+                          <p:cTn id="48" fill="hold">
+                            <p:stCondLst>
+                              <p:cond delay="180"/>
+                            </p:stCondLst>
+                            <p:childTnLst>
+                              <p:par>
+                                <p:cTn id="49" presetID="2" presetClass="entr" presetSubtype="4" fill="hold" grpId="0" nodeType="afterEffect">
+                                  <p:stCondLst>
+                                    <p:cond delay="0"/>
+                                  </p:stCondLst>
+                                  <p:childTnLst>
+                                    <p:set>
+                                      <p:cBhvr>
+                                        <p:cTn id="50" dur="1" fill="hold">
+                                          <p:stCondLst>
+                                            <p:cond delay="0"/>
+                                          </p:stCondLst>
+                                        </p:cTn>
+                                        <p:tgtEl>
+                                          <p:spTgt spid="19"/>
+                                        </p:tgtEl>
+                                        <p:attrNameLst>
+                                          <p:attrName>style.visibility</p:attrName>
+                                        </p:attrNameLst>
+                                      </p:cBhvr>
+                                      <p:to>
+                                        <p:strVal val="visible"/>
+                                      </p:to>
+                                    </p:set>
+                                    <p:animEffect transition="in" filter="fade">
+                                      <p:cBhvr>
+                                        <p:cTn id="51" dur="450"/>
+                                        <p:tgtEl>
+                                          <p:spTgt spid="19"/>
+                                        </p:tgtEl>
+                                      </p:cBhvr>
+                                    </p:animEffect>
+                                  </p:childTnLst>
+                                </p:cTn>
+                              </p:par>
+                            </p:childTnLst>
+                          </p:cTn>
+                        </p:par>
+                        <p:par>
+                          <p:cTn id="52" fill="hold">
+                            <p:stCondLst>
+                              <p:cond delay="180"/>
+                            </p:stCondLst>
+                            <p:childTnLst>
+                              <p:par>
+                                <p:cTn id="53" presetID="2" presetClass="entr" presetSubtype="4" fill="hold" grpId="0" nodeType="afterEffect">
+                                  <p:stCondLst>
+                                    <p:cond delay="0"/>
+                                  </p:stCondLst>
+                                  <p:childTnLst>
+                                    <p:set>
+                                      <p:cBhvr>
+                                        <p:cTn id="54" dur="1" fill="hold">
+                                          <p:stCondLst>
+                                            <p:cond delay="0"/>
+                                          </p:stCondLst>
+                                        </p:cTn>
+                                        <p:tgtEl>
+                                          <p:spTgt spid="20"/>
+                                        </p:tgtEl>
+                                        <p:attrNameLst>
+                                          <p:attrName>style.visibility</p:attrName>
+                                        </p:attrNameLst>
+                                      </p:cBhvr>
+                                      <p:to>
+                                        <p:strVal val="visible"/>
+                                      </p:to>
+                                    </p:set>
+                                    <p:animEffect transition="in" filter="fade">
+                                      <p:cBhvr>
+                                        <p:cTn id="55" dur="450"/>
+                                        <p:tgtEl>
+                                          <p:spTgt spid="20"/>
+                                        </p:tgtEl>
+                                      </p:cBhvr>
+                                    </p:animEffect>
+                                  </p:childTnLst>
+                                </p:cTn>
+                              </p:par>
+                            </p:childTnLst>
+                          </p:cTn>
+                        </p:par>
+                        <p:par>
+                          <p:cTn id="56" fill="hold">
+                            <p:stCondLst>
+                              <p:cond delay="180"/>
+                            </p:stCondLst>
+                            <p:childTnLst>
+                              <p:par>
+                                <p:cTn id="57" presetID="2" presetClass="entr" presetSubtype="4" fill="hold" grpId="0" nodeType="afterEffect">
+                                  <p:stCondLst>
+                                    <p:cond delay="0"/>
+                                  </p:stCondLst>
+                                  <p:childTnLst>
+                                    <p:set>
+                                      <p:cBhvr>
+                                        <p:cTn id="58" dur="1" fill="hold">
+                                          <p:stCondLst>
+                                            <p:cond delay="0"/>
+                                          </p:stCondLst>
+                                        </p:cTn>
+                                        <p:tgtEl>
+                                          <p:spTgt spid="21"/>
+                                        </p:tgtEl>
+                                        <p:attrNameLst>
+                                          <p:attrName>style.visibility</p:attrName>
+                                        </p:attrNameLst>
+                                      </p:cBhvr>
+                                      <p:to>
+                                        <p:strVal val="visible"/>
+                                      </p:to>
+                                    </p:set>
+                                    <p:animEffect transition="in" filter="fade">
+                                      <p:cBhvr>
+                                        <p:cTn id="59" dur="450"/>
+                                        <p:tgtEl>
+                                          <p:spTgt spid="21"/>
+                                        </p:tgtEl>
+                                      </p:cBhvr>
+                                    </p:animEffect>
+                                  </p:childTnLst>
+                                </p:cTn>
+                              </p:par>
+                            </p:childTnLst>
+                          </p:cTn>
+                        </p:par>
+                        <p:par>
+                          <p:cTn id="60" fill="hold">
+                            <p:stCondLst>
+                              <p:cond delay="180"/>
+                            </p:stCondLst>
+                            <p:childTnLst>
+                              <p:par>
+                                <p:cTn id="61" presetID="2" presetClass="entr" presetSubtype="4" fill="hold" grpId="0" nodeType="afterEffect">
+                                  <p:stCondLst>
+                                    <p:cond delay="0"/>
+                                  </p:stCondLst>
+                                  <p:childTnLst>
+                                    <p:set>
+                                      <p:cBhvr>
+                                        <p:cTn id="62" dur="1" fill="hold">
+                                          <p:stCondLst>
+                                            <p:cond delay="0"/>
+                                          </p:stCondLst>
+                                        </p:cTn>
+                                        <p:tgtEl>
+                                          <p:spTgt spid="22"/>
+                                        </p:tgtEl>
+                                        <p:attrNameLst>
+                                          <p:attrName>style.visibility</p:attrName>
+                                        </p:attrNameLst>
+                                      </p:cBhvr>
+                                      <p:to>
+                                        <p:strVal val="visible"/>
+                                      </p:to>
+                                    </p:set>
+                                    <p:animEffect transition="in" filter="fade">
+                                      <p:cBhvr>
+                                        <p:cTn id="63" dur="450"/>
+                                        <p:tgtEl>
+                                          <p:spTgt spid="22"/>
+                                        </p:tgtEl>
+                                      </p:cBhvr>
+                                    </p:animEffect>
+                                  </p:childTnLst>
+                                </p:cTn>
+                              </p:par>
+                            </p:childTnLst>
+                          </p:cTn>
+                        </p:par>
+                        <p:par>
+                          <p:cTn id="64" fill="hold">
+                            <p:stCondLst>
+                              <p:cond delay="180"/>
+                            </p:stCondLst>
+                            <p:childTnLst>
+                              <p:par>
+                                <p:cTn id="65" presetID="2" presetClass="entr" presetSubtype="4" fill="hold" grpId="0" nodeType="afterEffect">
+                                  <p:stCondLst>
+                                    <p:cond delay="0"/>
+                                  </p:stCondLst>
+                                  <p:childTnLst>
+                                    <p:set>
+                                      <p:cBhvr>
+                                        <p:cTn id="66" dur="1" fill="hold">
+                                          <p:stCondLst>
+                                            <p:cond delay="0"/>
+                                          </p:stCondLst>
+                                        </p:cTn>
+                                        <p:tgtEl>
+                                          <p:spTgt spid="23"/>
+                                        </p:tgtEl>
+                                        <p:attrNameLst>
+                                          <p:attrName>style.visibility</p:attrName>
+                                        </p:attrNameLst>
+                                      </p:cBhvr>
+                                      <p:to>
+                                        <p:strVal val="visible"/>
+                                      </p:to>
+                                    </p:set>
+                                    <p:animEffect transition="in" filter="fade">
+                                      <p:cBhvr>
+                                        <p:cTn id="67" dur="450"/>
+                                        <p:tgtEl>
+                                          <p:spTgt spid="23"/>
+                                        </p:tgtEl>
+                                      </p:cBhvr>
+                                    </p:animEffect>
+                                  </p:childTnLst>
+                                </p:cTn>
+                              </p:par>
+                            </p:childTnLst>
+                          </p:cTn>
+                        </p:par>
+                        <p:par>
+                          <p:cTn id="68" fill="hold">
+                            <p:stCondLst>
+                              <p:cond delay="180"/>
+                            </p:stCondLst>
+                            <p:childTnLst>
+                              <p:par>
+                                <p:cTn id="69" presetID="2" presetClass="entr" presetSubtype="4" fill="hold" grpId="0" nodeType="afterEffect">
+                                  <p:stCondLst>
+                                    <p:cond delay="0"/>
+                                  </p:stCondLst>
+                                  <p:childTnLst>
+                                    <p:set>
+                                      <p:cBhvr>
+                                        <p:cTn id="70" dur="1" fill="hold">
+                                          <p:stCondLst>
+                                            <p:cond delay="0"/>
+                                          </p:stCondLst>
+                                        </p:cTn>
+                                        <p:tgtEl>
+                                          <p:spTgt spid="25"/>
+                                        </p:tgtEl>
+                                        <p:attrNameLst>
+                                          <p:attrName>style.visibility</p:attrName>
+                                        </p:attrNameLst>
+                                      </p:cBhvr>
+                                      <p:to>
+                                        <p:strVal val="visible"/>
+                                      </p:to>
+                                    </p:set>
+                                    <p:animEffect transition="in" filter="fade">
+                                      <p:cBhvr>
+                                        <p:cTn id="71" dur="450"/>
+                                        <p:tgtEl>
+                                          <p:spTgt spid="25"/>
+                                        </p:tgtEl>
+                                      </p:cBhvr>
+                                    </p:animEffect>
+                                  </p:childTnLst>
+                                </p:cTn>
+                              </p:par>
+                            </p:childTnLst>
+                          </p:cTn>
+                        </p:par>
+                        <p:par>
+                          <p:cTn id="72" fill="hold">
+                            <p:stCondLst>
+                              <p:cond delay="180"/>
+                            </p:stCondLst>
+                            <p:childTnLst>
+                              <p:par>
+                                <p:cTn id="73" presetID="2" presetClass="entr" presetSubtype="4" fill="hold" grpId="0" nodeType="afterEffect">
+                                  <p:stCondLst>
+                                    <p:cond delay="0"/>
+                                  </p:stCondLst>
+                                  <p:childTnLst>
+                                    <p:set>
+                                      <p:cBhvr>
+                                        <p:cTn id="74" dur="1" fill="hold">
+                                          <p:stCondLst>
+                                            <p:cond delay="0"/>
+                                          </p:stCondLst>
+                                        </p:cTn>
+                                        <p:tgtEl>
+                                          <p:spTgt spid="26"/>
+                                        </p:tgtEl>
+                                        <p:attrNameLst>
+                                          <p:attrName>style.visibility</p:attrName>
+                                        </p:attrNameLst>
+                                      </p:cBhvr>
+                                      <p:to>
+                                        <p:strVal val="visible"/>
+                                      </p:to>
+                                    </p:set>
+                                    <p:animEffect transition="in" filter="fade">
+                                      <p:cBhvr>
+                                        <p:cTn id="75" dur="450"/>
+                                        <p:tgtEl>
+                                          <p:spTgt spid="26"/>
+                                        </p:tgtEl>
+                                      </p:cBhvr>
+                                    </p:animEffect>
+                                  </p:childTnLst>
+                                </p:cTn>
+                              </p:par>
+                            </p:childTnLst>
+                          </p:cTn>
+                        </p:par>
+                      </p:childTnLst>
+                    </p:cTn>
+                  </p:par>
+                </p:childTnLst>
+              </p:cTn>
+              <p:prevCondLst>
+                <p:cond evt="onPrev" delay="0">
+                  <p:tgtEl>
+                    <p:sldTgt/>
+                  </p:tgtEl>
+                </p:cond>
+              </p:prevCondLst>
+              <p:nextCondLst>
+                <p:cond evt="onNext" delay="0">
+                  <p:tgtEl>
+                    <p:sldTgt/>
+                  </p:tgtEl>
+                </p:cond>
+              </p:nextCondLst>
+            </p:seq>
+          </p:childTnLst>
+        </p:cTn>
+      </p:par>
+    </p:tnLst>
+    <p:bldLst>
+      <p:bldP spid="6" grpId="0"/>
+      <p:bldP spid="7" grpId="0"/>
+      <p:bldP spid="8" grpId="0"/>
+      <p:bldP spid="9" grpId="0"/>
+      <p:bldP spid="11" grpId="0"/>
+      <p:bldP spid="12" grpId="0"/>
+      <p:bldP spid="13" grpId="0"/>
+      <p:bldP spid="14" grpId="0"/>
+      <p:bldP spid="15" grpId="0"/>
+      <p:bldP spid="16" grpId="0"/>
+      <p:bldP spid="17" grpId="0"/>
+      <p:bldP spid="19" grpId="0"/>
+      <p:bldP spid="20" grpId="0"/>
+      <p:bldP spid="21" grpId="0"/>
+      <p:bldP spid="22" grpId="0"/>
+      <p:bldP spid="23" grpId="0"/>
+      <p:bldP spid="25" grpId="0"/>
+      <p:bldP spid="26" grpId="0"/>
+    </p:bldLst>
+  </p:timing>
 </p:sld>
 </file>
 
@@ -4775,8 +7725,8 @@
       </p:sp>
       <p:sp>
         <p:nvSpPr>
-          <p:cNvPr id="10" name="Box 10"/>
-          <p:cNvSpPr txBox="1"/>
+          <p:cNvPr id="10" name="Rect 10"/>
+          <p:cNvSpPr/>
           <p:nvPr/>
         </p:nvSpPr>
         <p:spPr>
@@ -4786,7 +7736,7 @@
           </a:xfrm>
           <a:prstGeom prst="roundRect">
             <a:avLst>
-              <a:gd name="adj" fmla="val 4500"/>
+              <a:gd name="adj" fmla="val 6000"/>
             </a:avLst>
           </a:prstGeom>
           <a:solidFill>
@@ -4798,8 +7748,126 @@
             </a:solidFill>
           </a:ln>
         </p:spPr>
+      </p:sp>
+      <p:sp>
+        <p:nvSpPr>
+          <p:cNvPr id="11" name="Rect 11"/>
+          <p:cNvSpPr/>
+          <p:nvPr/>
+        </p:nvSpPr>
+        <p:spPr>
+          <a:xfrm>
+            <a:off x="609600" y="1651000"/>
+            <a:ext cx="10972800" cy="406400"/>
+          </a:xfrm>
+          <a:prstGeom prst="roundRect">
+            <a:avLst>
+              <a:gd name="adj" fmla="val 6000"/>
+            </a:avLst>
+          </a:prstGeom>
+          <a:solidFill>
+            <a:srgbClr val="1E1F22"/>
+          </a:solidFill>
+          <a:ln w="12700">
+            <a:solidFill>
+              <a:srgbClr val="3C4043"/>
+            </a:solidFill>
+          </a:ln>
+        </p:spPr>
+      </p:sp>
+      <p:sp>
+        <p:nvSpPr>
+          <p:cNvPr id="12" name="Rect 12"/>
+          <p:cNvSpPr/>
+          <p:nvPr/>
+        </p:nvSpPr>
+        <p:spPr>
+          <a:xfrm>
+            <a:off x="812800" y="1790700"/>
+            <a:ext cx="127000" cy="127000"/>
+          </a:xfrm>
+          <a:prstGeom prst="roundRect">
+            <a:avLst>
+              <a:gd name="adj" fmla="val 50000"/>
+            </a:avLst>
+          </a:prstGeom>
+          <a:solidFill>
+            <a:srgbClr val="EA4335"/>
+          </a:solidFill>
+          <a:ln>
+            <a:noFill/>
+          </a:ln>
+        </p:spPr>
+      </p:sp>
+      <p:sp>
+        <p:nvSpPr>
+          <p:cNvPr id="13" name="Rect 13"/>
+          <p:cNvSpPr/>
+          <p:nvPr/>
+        </p:nvSpPr>
+        <p:spPr>
+          <a:xfrm>
+            <a:off x="1016000" y="1790700"/>
+            <a:ext cx="127000" cy="127000"/>
+          </a:xfrm>
+          <a:prstGeom prst="roundRect">
+            <a:avLst>
+              <a:gd name="adj" fmla="val 50000"/>
+            </a:avLst>
+          </a:prstGeom>
+          <a:solidFill>
+            <a:srgbClr val="FBBC04"/>
+          </a:solidFill>
+          <a:ln>
+            <a:noFill/>
+          </a:ln>
+        </p:spPr>
+      </p:sp>
+      <p:sp>
+        <p:nvSpPr>
+          <p:cNvPr id="14" name="Rect 14"/>
+          <p:cNvSpPr/>
+          <p:nvPr/>
+        </p:nvSpPr>
+        <p:spPr>
+          <a:xfrm>
+            <a:off x="1219200" y="1790700"/>
+            <a:ext cx="127000" cy="127000"/>
+          </a:xfrm>
+          <a:prstGeom prst="roundRect">
+            <a:avLst>
+              <a:gd name="adj" fmla="val 50000"/>
+            </a:avLst>
+          </a:prstGeom>
+          <a:solidFill>
+            <a:srgbClr val="34A853"/>
+          </a:solidFill>
+          <a:ln>
+            <a:noFill/>
+          </a:ln>
+        </p:spPr>
+      </p:sp>
+      <p:sp>
+        <p:nvSpPr>
+          <p:cNvPr id="15" name="Box 15"/>
+          <p:cNvSpPr txBox="1"/>
+          <p:nvPr/>
+        </p:nvSpPr>
+        <p:spPr>
+          <a:xfrm>
+            <a:off x="1498600" y="1701800"/>
+            <a:ext cx="5334000" cy="304800"/>
+          </a:xfrm>
+          <a:prstGeom prst="rect">
+            <a:avLst/>
+          </a:prstGeom>
+          <a:noFill/>
+          <a:ln>
+            <a:noFill/>
+          </a:ln>
+        </p:spPr>
         <p:txBody>
-          <a:bodyPr wrap="square" lIns="279400" tIns="254000" rIns="279400" bIns="254000" anchor="t"/>
+          <a:bodyPr wrap="square" lIns="0" tIns="25400" rIns="0" bIns="25400" anchor="ctr"/>
           <a:lstStyle/>
           <a:p>
             <a:pPr algn="l">
@@ -4808,6 +7876,47 @@
               </a:lnSpc>
             </a:pPr>
             <a:r>
+              <a:rPr lang="en-US" sz="950" b="0" dirty="0">
+                <a:solidFill>
+                  <a:srgbClr val="9AA0A6"/>
+                </a:solidFill>
+                <a:latin typeface="Google Sans Mono"/>
+                <a:cs typeface="Google Sans Mono"/>
+              </a:rPr>
+              <a:t>zsh — scalfod-langgraph-agentscli</a:t>
+            </a:r>
+          </a:p>
+        </p:txBody>
+      </p:sp>
+      <p:sp>
+        <p:nvSpPr>
+          <p:cNvPr id="16" name="Box 16"/>
+          <p:cNvSpPr txBox="1"/>
+          <p:nvPr/>
+        </p:nvSpPr>
+        <p:spPr>
+          <a:xfrm>
+            <a:off x="863600" y="2209800"/>
+            <a:ext cx="10464800" cy="1168400"/>
+          </a:xfrm>
+          <a:prstGeom prst="rect">
+            <a:avLst/>
+          </a:prstGeom>
+          <a:noFill/>
+          <a:ln>
+            <a:noFill/>
+          </a:ln>
+        </p:spPr>
+        <p:txBody>
+          <a:bodyPr wrap="square" lIns="0" tIns="0" rIns="0" bIns="0" anchor="t"/>
+          <a:lstStyle/>
+          <a:p>
+            <a:pPr algn="l">
+              <a:lnSpc>
+                <a:spcPct val="118000"/>
+              </a:lnSpc>
+            </a:pPr>
+            <a:r>
               <a:rPr lang="en-US" sz="1100" b="0" dirty="0">
                 <a:solidFill>
                   <a:srgbClr val="8AB4F8"/>
@@ -4869,23 +7978,105 @@
               <a:t>    -d cloud_run</a:t>
             </a:r>
           </a:p>
-          <a:p>
-            <a:pPr algn="l">
-              <a:lnSpc>
-                <a:spcPct val="118000"/>
-              </a:lnSpc>
-            </a:pPr>
-            <a:r>
-              <a:rPr lang="en-US" sz="600" b="0" dirty="0">
+        </p:txBody>
+      </p:sp>
+      <p:sp>
+        <p:nvSpPr>
+          <p:cNvPr id="17" name="Box 17"/>
+          <p:cNvSpPr txBox="1"/>
+          <p:nvPr/>
+        </p:nvSpPr>
+        <p:spPr>
+          <a:xfrm>
+            <a:off x="863600" y="3505200"/>
+            <a:ext cx="10464800" cy="990600"/>
+          </a:xfrm>
+          <a:prstGeom prst="rect">
+            <a:avLst/>
+          </a:prstGeom>
+          <a:noFill/>
+          <a:ln>
+            <a:noFill/>
+          </a:ln>
+        </p:spPr>
+        <p:txBody>
+          <a:bodyPr wrap="square" lIns="0" tIns="0" rIns="0" bIns="0" anchor="t"/>
+          <a:lstStyle/>
+          <a:p>
+            <a:pPr algn="l">
+              <a:lnSpc>
+                <a:spcPct val="118000"/>
+              </a:lnSpc>
+            </a:pPr>
+            <a:r>
+              <a:rPr lang="en-US" sz="1100" b="0" dirty="0">
                 <a:solidFill>
                   <a:srgbClr val="E8EAED"/>
                 </a:solidFill>
                 <a:latin typeface="Google Sans Mono"/>
                 <a:cs typeface="Google Sans Mono"/>
               </a:rPr>
-              <a:t/>
-            </a:r>
-          </a:p>
+              <a:t>$ cd scalfod-langgraph-agentscli &amp;&amp; agents-cli install</a:t>
+            </a:r>
+          </a:p>
+          <a:p>
+            <a:pPr algn="l">
+              <a:lnSpc>
+                <a:spcPct val="118000"/>
+              </a:lnSpc>
+            </a:pPr>
+            <a:r>
+              <a:rPr lang="en-US" sz="1050" b="0" dirty="0">
+                <a:solidFill>
+                  <a:srgbClr val="81C995"/>
+                </a:solidFill>
+                <a:latin typeface="Google Sans Mono"/>
+                <a:cs typeface="Google Sans Mono"/>
+              </a:rPr>
+              <a:t>Agents CLI v1.8.0 • Fetching remote template: google/agents-cli/extensions/langchain/template@v1.8.0</a:t>
+            </a:r>
+          </a:p>
+          <a:p>
+            <a:pPr algn="l">
+              <a:lnSpc>
+                <a:spcPct val="118000"/>
+              </a:lnSpc>
+            </a:pPr>
+            <a:r>
+              <a:rPr lang="en-US" sz="1050" b="1" dirty="0">
+                <a:solidFill>
+                  <a:srgbClr val="81C995"/>
+                </a:solidFill>
+                <a:latin typeface="Google Sans Mono"/>
+                <a:cs typeface="Google Sans Mono"/>
+              </a:rPr>
+              <a:t>&gt; ✓ Connected to project: your-project • Your agent project is ready.</a:t>
+            </a:r>
+          </a:p>
+        </p:txBody>
+      </p:sp>
+      <p:sp>
+        <p:nvSpPr>
+          <p:cNvPr id="18" name="Box 18"/>
+          <p:cNvSpPr txBox="1"/>
+          <p:nvPr/>
+        </p:nvSpPr>
+        <p:spPr>
+          <a:xfrm>
+            <a:off x="863600" y="4648200"/>
+            <a:ext cx="10464800" cy="1066800"/>
+          </a:xfrm>
+          <a:prstGeom prst="rect">
+            <a:avLst/>
+          </a:prstGeom>
+          <a:noFill/>
+          <a:ln>
+            <a:noFill/>
+          </a:ln>
+        </p:spPr>
+        <p:txBody>
+          <a:bodyPr wrap="square" lIns="0" tIns="0" rIns="0" bIns="0" anchor="t"/>
+          <a:lstStyle/>
           <a:p>
             <a:pPr algn="l">
               <a:lnSpc>
@@ -4895,96 +8086,28 @@
             <a:r>
               <a:rPr lang="en-US" sz="1100" b="0" dirty="0">
                 <a:solidFill>
+                  <a:srgbClr val="8AB4F8"/>
+                </a:solidFill>
+                <a:latin typeface="Google Sans Mono"/>
+                <a:cs typeface="Google Sans Mono"/>
+              </a:rPr>
+              <a:t># 2. Prove zero google-adk dependency in pyproject.toml and app/</a:t>
+            </a:r>
+          </a:p>
+          <a:p>
+            <a:pPr algn="l">
+              <a:lnSpc>
+                <a:spcPct val="118000"/>
+              </a:lnSpc>
+            </a:pPr>
+            <a:r>
+              <a:rPr lang="en-US" sz="1100" b="0" dirty="0">
+                <a:solidFill>
                   <a:srgbClr val="E8EAED"/>
                 </a:solidFill>
                 <a:latin typeface="Google Sans Mono"/>
                 <a:cs typeface="Google Sans Mono"/>
               </a:rPr>
-              <a:t>$ cd scalfod-langgraph-agentscli &amp;&amp; agents-cli install</a:t>
-            </a:r>
-          </a:p>
-          <a:p>
-            <a:pPr algn="l">
-              <a:lnSpc>
-                <a:spcPct val="118000"/>
-              </a:lnSpc>
-            </a:pPr>
-            <a:r>
-              <a:rPr lang="en-US" sz="1100" b="0" dirty="0">
-                <a:solidFill>
-                  <a:srgbClr val="81C995"/>
-                </a:solidFill>
-                <a:latin typeface="Google Sans Mono"/>
-                <a:cs typeface="Google Sans Mono"/>
-              </a:rPr>
-              <a:t>Agents CLI v1.8.0 • Fetching remote template: google/agents-cli/extensions/langchain/template@v1.8.0</a:t>
-            </a:r>
-          </a:p>
-          <a:p>
-            <a:pPr algn="l">
-              <a:lnSpc>
-                <a:spcPct val="118000"/>
-              </a:lnSpc>
-            </a:pPr>
-            <a:r>
-              <a:rPr lang="en-US" sz="1100" b="0" dirty="0">
-                <a:solidFill>
-                  <a:srgbClr val="81C995"/>
-                </a:solidFill>
-                <a:latin typeface="Google Sans Mono"/>
-                <a:cs typeface="Google Sans Mono"/>
-              </a:rPr>
-              <a:t>&gt; ✓ Connected to project: your-project • Your agent project is ready.</a:t>
-            </a:r>
-          </a:p>
-          <a:p>
-            <a:pPr algn="l">
-              <a:lnSpc>
-                <a:spcPct val="118000"/>
-              </a:lnSpc>
-            </a:pPr>
-            <a:r>
-              <a:rPr lang="en-US" sz="600" b="0" dirty="0">
-                <a:solidFill>
-                  <a:srgbClr val="E8EAED"/>
-                </a:solidFill>
-                <a:latin typeface="Google Sans Mono"/>
-                <a:cs typeface="Google Sans Mono"/>
-              </a:rPr>
-              <a:t/>
-            </a:r>
-          </a:p>
-          <a:p>
-            <a:pPr algn="l">
-              <a:lnSpc>
-                <a:spcPct val="118000"/>
-              </a:lnSpc>
-            </a:pPr>
-            <a:r>
-              <a:rPr lang="en-US" sz="1100" b="0" dirty="0">
-                <a:solidFill>
-                  <a:srgbClr val="8AB4F8"/>
-                </a:solidFill>
-                <a:latin typeface="Google Sans Mono"/>
-                <a:cs typeface="Google Sans Mono"/>
-              </a:rPr>
-              <a:t># 2. Prove zero google-adk dependency in pyproject.toml and app/</a:t>
-            </a:r>
-          </a:p>
-          <a:p>
-            <a:pPr algn="l">
-              <a:lnSpc>
-                <a:spcPct val="118000"/>
-              </a:lnSpc>
-            </a:pPr>
-            <a:r>
-              <a:rPr lang="en-US" sz="1100" b="0" dirty="0">
-                <a:solidFill>
-                  <a:srgbClr val="E8EAED"/>
-                </a:solidFill>
-                <a:latin typeface="Google Sans Mono"/>
-                <a:cs typeface="Google Sans Mono"/>
-              </a:rPr>
               <a:t>$ grep -r "google.adk\|google-adk" pyproject.toml app/ ; echo "exit: $?"</a:t>
             </a:r>
           </a:p>
@@ -5009,7 +8132,7 @@
       </p:sp>
       <p:sp>
         <p:nvSpPr>
-          <p:cNvPr id="11" name="Rect 11"/>
+          <p:cNvPr id="19" name="Rect 19"/>
           <p:cNvSpPr/>
           <p:nvPr/>
         </p:nvSpPr>
@@ -5031,7 +8154,7 @@
       </p:sp>
       <p:sp>
         <p:nvSpPr>
-          <p:cNvPr id="12" name="Box 12"/>
+          <p:cNvPr id="20" name="Box 20"/>
           <p:cNvSpPr txBox="1"/>
           <p:nvPr/>
         </p:nvSpPr>
@@ -5072,7 +8195,7 @@
       </p:sp>
       <p:sp>
         <p:nvSpPr>
-          <p:cNvPr id="13" name="Box 13"/>
+          <p:cNvPr id="21" name="Box 21"/>
           <p:cNvSpPr txBox="1"/>
           <p:nvPr/>
         </p:nvSpPr>
@@ -5116,9 +8239,500 @@
   <p:clrMapOvr>
     <a:masterClrMapping/>
   </p:clrMapOvr>
-  <p:transition spd="med">
+  <p:transition spd="med" advClick="1">
     <p:fade/>
   </p:transition>
+  <p:timing>
+    <p:tnLst>
+      <p:par>
+        <p:cTn id="1" dur="indefinite" restart="never" nodeType="tmRoot">
+          <p:childTnLst>
+            <p:seq concurrent="1" nextAc="seek">
+              <p:cTn id="2" dur="indefinite" nodeType="mainSeq">
+                <p:childTnLst>
+                  <p:par>
+                    <p:cTn id="3" fill="hold">
+                      <p:stCondLst>
+                        <p:cond delay="0"/>
+                      </p:stCondLst>
+                      <p:childTnLst>
+                        <p:par>
+                          <p:cTn id="4" fill="hold">
+                            <p:stCondLst>
+                              <p:cond delay="100"/>
+                            </p:stCondLst>
+                            <p:childTnLst>
+                              <p:par>
+                                <p:cTn id="5" presetID="2" presetClass="entr" presetSubtype="4" fill="hold" grpId="0" nodeType="withEffect">
+                                  <p:stCondLst>
+                                    <p:cond delay="0"/>
+                                  </p:stCondLst>
+                                  <p:childTnLst>
+                                    <p:set>
+                                      <p:cBhvr>
+                                        <p:cTn id="6" dur="1" fill="hold">
+                                          <p:stCondLst>
+                                            <p:cond delay="0"/>
+                                          </p:stCondLst>
+                                        </p:cTn>
+                                        <p:tgtEl>
+                                          <p:spTgt spid="6"/>
+                                        </p:tgtEl>
+                                        <p:attrNameLst>
+                                          <p:attrName>style.visibility</p:attrName>
+                                        </p:attrNameLst>
+                                      </p:cBhvr>
+                                      <p:to>
+                                        <p:strVal val="visible"/>
+                                      </p:to>
+                                    </p:set>
+                                    <p:animEffect transition="in" filter="fade">
+                                      <p:cBhvr>
+                                        <p:cTn id="7" dur="450"/>
+                                        <p:tgtEl>
+                                          <p:spTgt spid="6"/>
+                                        </p:tgtEl>
+                                      </p:cBhvr>
+                                    </p:animEffect>
+                                  </p:childTnLst>
+                                </p:cTn>
+                              </p:par>
+                            </p:childTnLst>
+                          </p:cTn>
+                        </p:par>
+                        <p:par>
+                          <p:cTn id="8" fill="hold">
+                            <p:stCondLst>
+                              <p:cond delay="180"/>
+                            </p:stCondLst>
+                            <p:childTnLst>
+                              <p:par>
+                                <p:cTn id="9" presetID="2" presetClass="entr" presetSubtype="4" fill="hold" grpId="0" nodeType="afterEffect">
+                                  <p:stCondLst>
+                                    <p:cond delay="0"/>
+                                  </p:stCondLst>
+                                  <p:childTnLst>
+                                    <p:set>
+                                      <p:cBhvr>
+                                        <p:cTn id="10" dur="1" fill="hold">
+                                          <p:stCondLst>
+                                            <p:cond delay="0"/>
+                                          </p:stCondLst>
+                                        </p:cTn>
+                                        <p:tgtEl>
+                                          <p:spTgt spid="7"/>
+                                        </p:tgtEl>
+                                        <p:attrNameLst>
+                                          <p:attrName>style.visibility</p:attrName>
+                                        </p:attrNameLst>
+                                      </p:cBhvr>
+                                      <p:to>
+                                        <p:strVal val="visible"/>
+                                      </p:to>
+                                    </p:set>
+                                    <p:animEffect transition="in" filter="fade">
+                                      <p:cBhvr>
+                                        <p:cTn id="11" dur="450"/>
+                                        <p:tgtEl>
+                                          <p:spTgt spid="7"/>
+                                        </p:tgtEl>
+                                      </p:cBhvr>
+                                    </p:animEffect>
+                                  </p:childTnLst>
+                                </p:cTn>
+                              </p:par>
+                            </p:childTnLst>
+                          </p:cTn>
+                        </p:par>
+                        <p:par>
+                          <p:cTn id="12" fill="hold">
+                            <p:stCondLst>
+                              <p:cond delay="180"/>
+                            </p:stCondLst>
+                            <p:childTnLst>
+                              <p:par>
+                                <p:cTn id="13" presetID="2" presetClass="entr" presetSubtype="4" fill="hold" grpId="0" nodeType="afterEffect">
+                                  <p:stCondLst>
+                                    <p:cond delay="0"/>
+                                  </p:stCondLst>
+                                  <p:childTnLst>
+                                    <p:set>
+                                      <p:cBhvr>
+                                        <p:cTn id="14" dur="1" fill="hold">
+                                          <p:stCondLst>
+                                            <p:cond delay="0"/>
+                                          </p:stCondLst>
+                                        </p:cTn>
+                                        <p:tgtEl>
+                                          <p:spTgt spid="8"/>
+                                        </p:tgtEl>
+                                        <p:attrNameLst>
+                                          <p:attrName>style.visibility</p:attrName>
+                                        </p:attrNameLst>
+                                      </p:cBhvr>
+                                      <p:to>
+                                        <p:strVal val="visible"/>
+                                      </p:to>
+                                    </p:set>
+                                    <p:animEffect transition="in" filter="fade">
+                                      <p:cBhvr>
+                                        <p:cTn id="15" dur="450"/>
+                                        <p:tgtEl>
+                                          <p:spTgt spid="8"/>
+                                        </p:tgtEl>
+                                      </p:cBhvr>
+                                    </p:animEffect>
+                                  </p:childTnLst>
+                                </p:cTn>
+                              </p:par>
+                            </p:childTnLst>
+                          </p:cTn>
+                        </p:par>
+                        <p:par>
+                          <p:cTn id="16" fill="hold">
+                            <p:stCondLst>
+                              <p:cond delay="180"/>
+                            </p:stCondLst>
+                            <p:childTnLst>
+                              <p:par>
+                                <p:cTn id="17" presetID="2" presetClass="entr" presetSubtype="4" fill="hold" grpId="0" nodeType="afterEffect">
+                                  <p:stCondLst>
+                                    <p:cond delay="0"/>
+                                  </p:stCondLst>
+                                  <p:childTnLst>
+                                    <p:set>
+                                      <p:cBhvr>
+                                        <p:cTn id="18" dur="1" fill="hold">
+                                          <p:stCondLst>
+                                            <p:cond delay="0"/>
+                                          </p:stCondLst>
+                                        </p:cTn>
+                                        <p:tgtEl>
+                                          <p:spTgt spid="9"/>
+                                        </p:tgtEl>
+                                        <p:attrNameLst>
+                                          <p:attrName>style.visibility</p:attrName>
+                                        </p:attrNameLst>
+                                      </p:cBhvr>
+                                      <p:to>
+                                        <p:strVal val="visible"/>
+                                      </p:to>
+                                    </p:set>
+                                    <p:animEffect transition="in" filter="fade">
+                                      <p:cBhvr>
+                                        <p:cTn id="19" dur="450"/>
+                                        <p:tgtEl>
+                                          <p:spTgt spid="9"/>
+                                        </p:tgtEl>
+                                      </p:cBhvr>
+                                    </p:animEffect>
+                                  </p:childTnLst>
+                                </p:cTn>
+                              </p:par>
+                            </p:childTnLst>
+                          </p:cTn>
+                        </p:par>
+                        <p:par>
+                          <p:cTn id="20" fill="hold">
+                            <p:stCondLst>
+                              <p:cond delay="180"/>
+                            </p:stCondLst>
+                            <p:childTnLst>
+                              <p:par>
+                                <p:cTn id="21" presetID="2" presetClass="entr" presetSubtype="4" fill="hold" grpId="0" nodeType="afterEffect">
+                                  <p:stCondLst>
+                                    <p:cond delay="0"/>
+                                  </p:stCondLst>
+                                  <p:childTnLst>
+                                    <p:set>
+                                      <p:cBhvr>
+                                        <p:cTn id="22" dur="1" fill="hold">
+                                          <p:stCondLst>
+                                            <p:cond delay="0"/>
+                                          </p:stCondLst>
+                                        </p:cTn>
+                                        <p:tgtEl>
+                                          <p:spTgt spid="15"/>
+                                        </p:tgtEl>
+                                        <p:attrNameLst>
+                                          <p:attrName>style.visibility</p:attrName>
+                                        </p:attrNameLst>
+                                      </p:cBhvr>
+                                      <p:to>
+                                        <p:strVal val="visible"/>
+                                      </p:to>
+                                    </p:set>
+                                    <p:animEffect transition="in" filter="fade">
+                                      <p:cBhvr>
+                                        <p:cTn id="23" dur="450"/>
+                                        <p:tgtEl>
+                                          <p:spTgt spid="15"/>
+                                        </p:tgtEl>
+                                      </p:cBhvr>
+                                    </p:animEffect>
+                                  </p:childTnLst>
+                                </p:cTn>
+                              </p:par>
+                            </p:childTnLst>
+                          </p:cTn>
+                        </p:par>
+                        <p:par>
+                          <p:cTn id="24" fill="hold">
+                            <p:stCondLst>
+                              <p:cond delay="180"/>
+                            </p:stCondLst>
+                            <p:childTnLst>
+                              <p:par>
+                                <p:cTn id="25" presetID="2" presetClass="entr" presetSubtype="4" fill="hold" grpId="0" nodeType="afterEffect">
+                                  <p:stCondLst>
+                                    <p:cond delay="0"/>
+                                  </p:stCondLst>
+                                  <p:childTnLst>
+                                    <p:set>
+                                      <p:cBhvr>
+                                        <p:cTn id="26" dur="1" fill="hold">
+                                          <p:stCondLst>
+                                            <p:cond delay="0"/>
+                                          </p:stCondLst>
+                                        </p:cTn>
+                                        <p:tgtEl>
+                                          <p:spTgt spid="16"/>
+                                        </p:tgtEl>
+                                        <p:attrNameLst>
+                                          <p:attrName>style.visibility</p:attrName>
+                                        </p:attrNameLst>
+                                      </p:cBhvr>
+                                      <p:to>
+                                        <p:strVal val="visible"/>
+                                      </p:to>
+                                    </p:set>
+                                    <p:animEffect transition="in" filter="fade">
+                                      <p:cBhvr>
+                                        <p:cTn id="27" dur="450"/>
+                                        <p:tgtEl>
+                                          <p:spTgt spid="16"/>
+                                        </p:tgtEl>
+                                      </p:cBhvr>
+                                    </p:animEffect>
+                                  </p:childTnLst>
+                                </p:cTn>
+                              </p:par>
+                            </p:childTnLst>
+                          </p:cTn>
+                        </p:par>
+                        <p:par>
+                          <p:cTn id="28" fill="hold">
+                            <p:stCondLst>
+                              <p:cond delay="180"/>
+                            </p:stCondLst>
+                            <p:childTnLst>
+                              <p:par>
+                                <p:cTn id="29" presetID="2" presetClass="entr" presetSubtype="4" fill="hold" grpId="0" nodeType="afterEffect">
+                                  <p:stCondLst>
+                                    <p:cond delay="0"/>
+                                  </p:stCondLst>
+                                  <p:childTnLst>
+                                    <p:set>
+                                      <p:cBhvr>
+                                        <p:cTn id="30" dur="1" fill="hold">
+                                          <p:stCondLst>
+                                            <p:cond delay="0"/>
+                                          </p:stCondLst>
+                                        </p:cTn>
+                                        <p:tgtEl>
+                                          <p:spTgt spid="17"/>
+                                        </p:tgtEl>
+                                        <p:attrNameLst>
+                                          <p:attrName>style.visibility</p:attrName>
+                                        </p:attrNameLst>
+                                      </p:cBhvr>
+                                      <p:to>
+                                        <p:strVal val="visible"/>
+                                      </p:to>
+                                    </p:set>
+                                    <p:animEffect transition="in" filter="fade">
+                                      <p:cBhvr>
+                                        <p:cTn id="31" dur="450"/>
+                                        <p:tgtEl>
+                                          <p:spTgt spid="17"/>
+                                        </p:tgtEl>
+                                      </p:cBhvr>
+                                    </p:animEffect>
+                                  </p:childTnLst>
+                                </p:cTn>
+                              </p:par>
+                            </p:childTnLst>
+                          </p:cTn>
+                        </p:par>
+                        <p:par>
+                          <p:cTn id="32" fill="hold">
+                            <p:stCondLst>
+                              <p:cond delay="180"/>
+                            </p:stCondLst>
+                            <p:childTnLst>
+                              <p:par>
+                                <p:cTn id="33" presetID="2" presetClass="entr" presetSubtype="4" fill="hold" grpId="0" nodeType="afterEffect">
+                                  <p:stCondLst>
+                                    <p:cond delay="0"/>
+                                  </p:stCondLst>
+                                  <p:childTnLst>
+                                    <p:set>
+                                      <p:cBhvr>
+                                        <p:cTn id="34" dur="1" fill="hold">
+                                          <p:stCondLst>
+                                            <p:cond delay="0"/>
+                                          </p:stCondLst>
+                                        </p:cTn>
+                                        <p:tgtEl>
+                                          <p:spTgt spid="18"/>
+                                        </p:tgtEl>
+                                        <p:attrNameLst>
+                                          <p:attrName>style.visibility</p:attrName>
+                                        </p:attrNameLst>
+                                      </p:cBhvr>
+                                      <p:to>
+                                        <p:strVal val="visible"/>
+                                      </p:to>
+                                    </p:set>
+                                    <p:animEffect transition="in" filter="fade">
+                                      <p:cBhvr>
+                                        <p:cTn id="35" dur="450"/>
+                                        <p:tgtEl>
+                                          <p:spTgt spid="18"/>
+                                        </p:tgtEl>
+                                      </p:cBhvr>
+                                    </p:animEffect>
+                                  </p:childTnLst>
+                                </p:cTn>
+                              </p:par>
+                            </p:childTnLst>
+                          </p:cTn>
+                        </p:par>
+                        <p:par>
+                          <p:cTn id="36" fill="hold">
+                            <p:stCondLst>
+                              <p:cond delay="180"/>
+                            </p:stCondLst>
+                            <p:childTnLst>
+                              <p:par>
+                                <p:cTn id="37" presetID="2" presetClass="entr" presetSubtype="4" fill="hold" grpId="0" nodeType="afterEffect">
+                                  <p:stCondLst>
+                                    <p:cond delay="0"/>
+                                  </p:stCondLst>
+                                  <p:childTnLst>
+                                    <p:set>
+                                      <p:cBhvr>
+                                        <p:cTn id="38" dur="1" fill="hold">
+                                          <p:stCondLst>
+                                            <p:cond delay="0"/>
+                                          </p:stCondLst>
+                                        </p:cTn>
+                                        <p:tgtEl>
+                                          <p:spTgt spid="20"/>
+                                        </p:tgtEl>
+                                        <p:attrNameLst>
+                                          <p:attrName>style.visibility</p:attrName>
+                                        </p:attrNameLst>
+                                      </p:cBhvr>
+                                      <p:to>
+                                        <p:strVal val="visible"/>
+                                      </p:to>
+                                    </p:set>
+                                    <p:animEffect transition="in" filter="fade">
+                                      <p:cBhvr>
+                                        <p:cTn id="39" dur="450"/>
+                                        <p:tgtEl>
+                                          <p:spTgt spid="20"/>
+                                        </p:tgtEl>
+                                      </p:cBhvr>
+                                    </p:animEffect>
+                                  </p:childTnLst>
+                                </p:cTn>
+                              </p:par>
+                            </p:childTnLst>
+                          </p:cTn>
+                        </p:par>
+                        <p:par>
+                          <p:cTn id="40" fill="hold">
+                            <p:stCondLst>
+                              <p:cond delay="180"/>
+                            </p:stCondLst>
+                            <p:childTnLst>
+                              <p:par>
+                                <p:cTn id="41" presetID="2" presetClass="entr" presetSubtype="4" fill="hold" grpId="0" nodeType="afterEffect">
+                                  <p:stCondLst>
+                                    <p:cond delay="0"/>
+                                  </p:stCondLst>
+                                  <p:childTnLst>
+                                    <p:set>
+                                      <p:cBhvr>
+                                        <p:cTn id="42" dur="1" fill="hold">
+                                          <p:stCondLst>
+                                            <p:cond delay="0"/>
+                                          </p:stCondLst>
+                                        </p:cTn>
+                                        <p:tgtEl>
+                                          <p:spTgt spid="21"/>
+                                        </p:tgtEl>
+                                        <p:attrNameLst>
+                                          <p:attrName>style.visibility</p:attrName>
+                                        </p:attrNameLst>
+                                      </p:cBhvr>
+                                      <p:to>
+                                        <p:strVal val="visible"/>
+                                      </p:to>
+                                    </p:set>
+                                    <p:animEffect transition="in" filter="fade">
+                                      <p:cBhvr>
+                                        <p:cTn id="43" dur="450"/>
+                                        <p:tgtEl>
+                                          <p:spTgt spid="21"/>
+                                        </p:tgtEl>
+                                      </p:cBhvr>
+                                    </p:animEffect>
+                                  </p:childTnLst>
+                                </p:cTn>
+                              </p:par>
+                            </p:childTnLst>
+                          </p:cTn>
+                        </p:par>
+                      </p:childTnLst>
+                    </p:cTn>
+                  </p:par>
+                </p:childTnLst>
+              </p:cTn>
+              <p:prevCondLst>
+                <p:cond evt="onPrev" delay="0">
+                  <p:tgtEl>
+                    <p:sldTgt/>
+                  </p:tgtEl>
+                </p:cond>
+              </p:prevCondLst>
+              <p:nextCondLst>
+                <p:cond evt="onNext" delay="0">
+                  <p:tgtEl>
+                    <p:sldTgt/>
+                  </p:tgtEl>
+                </p:cond>
+              </p:nextCondLst>
+            </p:seq>
+          </p:childTnLst>
+        </p:cTn>
+      </p:par>
+    </p:tnLst>
+    <p:bldLst>
+      <p:bldP spid="6" grpId="0"/>
+      <p:bldP spid="7" grpId="0"/>
+      <p:bldP spid="8" grpId="0"/>
+      <p:bldP spid="9" grpId="0"/>
+      <p:bldP spid="15" grpId="0"/>
+      <p:bldP spid="16" grpId="0"/>
+      <p:bldP spid="17" grpId="0"/>
+      <p:bldP spid="18" grpId="0"/>
+      <p:bldP spid="20" grpId="0"/>
+      <p:bldP spid="21" grpId="0"/>
+    </p:bldLst>
+  </p:timing>
 </p:sld>
 </file>
 
@@ -6158,9 +9772,410 @@
   <p:clrMapOvr>
     <a:masterClrMapping/>
   </p:clrMapOvr>
-  <p:transition spd="med">
+  <p:transition spd="med" advClick="1">
     <p:fade/>
   </p:transition>
+  <p:timing>
+    <p:tnLst>
+      <p:par>
+        <p:cTn id="1" dur="indefinite" restart="never" nodeType="tmRoot">
+          <p:childTnLst>
+            <p:seq concurrent="1" nextAc="seek">
+              <p:cTn id="2" dur="indefinite" nodeType="mainSeq">
+                <p:childTnLst>
+                  <p:par>
+                    <p:cTn id="3" fill="hold">
+                      <p:stCondLst>
+                        <p:cond delay="0"/>
+                      </p:stCondLst>
+                      <p:childTnLst>
+                        <p:par>
+                          <p:cTn id="4" fill="hold">
+                            <p:stCondLst>
+                              <p:cond delay="100"/>
+                            </p:stCondLst>
+                            <p:childTnLst>
+                              <p:par>
+                                <p:cTn id="5" presetID="2" presetClass="entr" presetSubtype="4" fill="hold" grpId="0" nodeType="withEffect">
+                                  <p:stCondLst>
+                                    <p:cond delay="0"/>
+                                  </p:stCondLst>
+                                  <p:childTnLst>
+                                    <p:set>
+                                      <p:cBhvr>
+                                        <p:cTn id="6" dur="1" fill="hold">
+                                          <p:stCondLst>
+                                            <p:cond delay="0"/>
+                                          </p:stCondLst>
+                                        </p:cTn>
+                                        <p:tgtEl>
+                                          <p:spTgt spid="6"/>
+                                        </p:tgtEl>
+                                        <p:attrNameLst>
+                                          <p:attrName>style.visibility</p:attrName>
+                                        </p:attrNameLst>
+                                      </p:cBhvr>
+                                      <p:to>
+                                        <p:strVal val="visible"/>
+                                      </p:to>
+                                    </p:set>
+                                    <p:animEffect transition="in" filter="fade">
+                                      <p:cBhvr>
+                                        <p:cTn id="7" dur="450"/>
+                                        <p:tgtEl>
+                                          <p:spTgt spid="6"/>
+                                        </p:tgtEl>
+                                      </p:cBhvr>
+                                    </p:animEffect>
+                                  </p:childTnLst>
+                                </p:cTn>
+                              </p:par>
+                            </p:childTnLst>
+                          </p:cTn>
+                        </p:par>
+                        <p:par>
+                          <p:cTn id="8" fill="hold">
+                            <p:stCondLst>
+                              <p:cond delay="180"/>
+                            </p:stCondLst>
+                            <p:childTnLst>
+                              <p:par>
+                                <p:cTn id="9" presetID="2" presetClass="entr" presetSubtype="4" fill="hold" grpId="0" nodeType="afterEffect">
+                                  <p:stCondLst>
+                                    <p:cond delay="0"/>
+                                  </p:stCondLst>
+                                  <p:childTnLst>
+                                    <p:set>
+                                      <p:cBhvr>
+                                        <p:cTn id="10" dur="1" fill="hold">
+                                          <p:stCondLst>
+                                            <p:cond delay="0"/>
+                                          </p:stCondLst>
+                                        </p:cTn>
+                                        <p:tgtEl>
+                                          <p:spTgt spid="7"/>
+                                        </p:tgtEl>
+                                        <p:attrNameLst>
+                                          <p:attrName>style.visibility</p:attrName>
+                                        </p:attrNameLst>
+                                      </p:cBhvr>
+                                      <p:to>
+                                        <p:strVal val="visible"/>
+                                      </p:to>
+                                    </p:set>
+                                    <p:animEffect transition="in" filter="fade">
+                                      <p:cBhvr>
+                                        <p:cTn id="11" dur="450"/>
+                                        <p:tgtEl>
+                                          <p:spTgt spid="7"/>
+                                        </p:tgtEl>
+                                      </p:cBhvr>
+                                    </p:animEffect>
+                                  </p:childTnLst>
+                                </p:cTn>
+                              </p:par>
+                            </p:childTnLst>
+                          </p:cTn>
+                        </p:par>
+                        <p:par>
+                          <p:cTn id="12" fill="hold">
+                            <p:stCondLst>
+                              <p:cond delay="180"/>
+                            </p:stCondLst>
+                            <p:childTnLst>
+                              <p:par>
+                                <p:cTn id="13" presetID="2" presetClass="entr" presetSubtype="4" fill="hold" grpId="0" nodeType="afterEffect">
+                                  <p:stCondLst>
+                                    <p:cond delay="0"/>
+                                  </p:stCondLst>
+                                  <p:childTnLst>
+                                    <p:set>
+                                      <p:cBhvr>
+                                        <p:cTn id="14" dur="1" fill="hold">
+                                          <p:stCondLst>
+                                            <p:cond delay="0"/>
+                                          </p:stCondLst>
+                                        </p:cTn>
+                                        <p:tgtEl>
+                                          <p:spTgt spid="8"/>
+                                        </p:tgtEl>
+                                        <p:attrNameLst>
+                                          <p:attrName>style.visibility</p:attrName>
+                                        </p:attrNameLst>
+                                      </p:cBhvr>
+                                      <p:to>
+                                        <p:strVal val="visible"/>
+                                      </p:to>
+                                    </p:set>
+                                    <p:animEffect transition="in" filter="fade">
+                                      <p:cBhvr>
+                                        <p:cTn id="15" dur="450"/>
+                                        <p:tgtEl>
+                                          <p:spTgt spid="8"/>
+                                        </p:tgtEl>
+                                      </p:cBhvr>
+                                    </p:animEffect>
+                                  </p:childTnLst>
+                                </p:cTn>
+                              </p:par>
+                            </p:childTnLst>
+                          </p:cTn>
+                        </p:par>
+                        <p:par>
+                          <p:cTn id="16" fill="hold">
+                            <p:stCondLst>
+                              <p:cond delay="180"/>
+                            </p:stCondLst>
+                            <p:childTnLst>
+                              <p:par>
+                                <p:cTn id="17" presetID="2" presetClass="entr" presetSubtype="4" fill="hold" grpId="0" nodeType="afterEffect">
+                                  <p:stCondLst>
+                                    <p:cond delay="0"/>
+                                  </p:stCondLst>
+                                  <p:childTnLst>
+                                    <p:set>
+                                      <p:cBhvr>
+                                        <p:cTn id="18" dur="1" fill="hold">
+                                          <p:stCondLst>
+                                            <p:cond delay="0"/>
+                                          </p:stCondLst>
+                                        </p:cTn>
+                                        <p:tgtEl>
+                                          <p:spTgt spid="9"/>
+                                        </p:tgtEl>
+                                        <p:attrNameLst>
+                                          <p:attrName>style.visibility</p:attrName>
+                                        </p:attrNameLst>
+                                      </p:cBhvr>
+                                      <p:to>
+                                        <p:strVal val="visible"/>
+                                      </p:to>
+                                    </p:set>
+                                    <p:animEffect transition="in" filter="fade">
+                                      <p:cBhvr>
+                                        <p:cTn id="19" dur="450"/>
+                                        <p:tgtEl>
+                                          <p:spTgt spid="9"/>
+                                        </p:tgtEl>
+                                      </p:cBhvr>
+                                    </p:animEffect>
+                                  </p:childTnLst>
+                                </p:cTn>
+                              </p:par>
+                            </p:childTnLst>
+                          </p:cTn>
+                        </p:par>
+                        <p:par>
+                          <p:cTn id="20" fill="hold">
+                            <p:stCondLst>
+                              <p:cond delay="180"/>
+                            </p:stCondLst>
+                            <p:childTnLst>
+                              <p:par>
+                                <p:cTn id="21" presetID="2" presetClass="entr" presetSubtype="4" fill="hold" grpId="0" nodeType="afterEffect">
+                                  <p:stCondLst>
+                                    <p:cond delay="0"/>
+                                  </p:stCondLst>
+                                  <p:childTnLst>
+                                    <p:set>
+                                      <p:cBhvr>
+                                        <p:cTn id="22" dur="1" fill="hold">
+                                          <p:stCondLst>
+                                            <p:cond delay="0"/>
+                                          </p:stCondLst>
+                                        </p:cTn>
+                                        <p:tgtEl>
+                                          <p:spTgt spid="10"/>
+                                        </p:tgtEl>
+                                        <p:attrNameLst>
+                                          <p:attrName>style.visibility</p:attrName>
+                                        </p:attrNameLst>
+                                      </p:cBhvr>
+                                      <p:to>
+                                        <p:strVal val="visible"/>
+                                      </p:to>
+                                    </p:set>
+                                    <p:animEffect transition="in" filter="fade">
+                                      <p:cBhvr>
+                                        <p:cTn id="23" dur="450"/>
+                                        <p:tgtEl>
+                                          <p:spTgt spid="10"/>
+                                        </p:tgtEl>
+                                      </p:cBhvr>
+                                    </p:animEffect>
+                                  </p:childTnLst>
+                                </p:cTn>
+                              </p:par>
+                            </p:childTnLst>
+                          </p:cTn>
+                        </p:par>
+                        <p:par>
+                          <p:cTn id="24" fill="hold">
+                            <p:stCondLst>
+                              <p:cond delay="180"/>
+                            </p:stCondLst>
+                            <p:childTnLst>
+                              <p:par>
+                                <p:cTn id="25" presetID="2" presetClass="entr" presetSubtype="4" fill="hold" grpId="0" nodeType="afterEffect">
+                                  <p:stCondLst>
+                                    <p:cond delay="0"/>
+                                  </p:stCondLst>
+                                  <p:childTnLst>
+                                    <p:set>
+                                      <p:cBhvr>
+                                        <p:cTn id="26" dur="1" fill="hold">
+                                          <p:stCondLst>
+                                            <p:cond delay="0"/>
+                                          </p:stCondLst>
+                                        </p:cTn>
+                                        <p:tgtEl>
+                                          <p:spTgt spid="11"/>
+                                        </p:tgtEl>
+                                        <p:attrNameLst>
+                                          <p:attrName>style.visibility</p:attrName>
+                                        </p:attrNameLst>
+                                      </p:cBhvr>
+                                      <p:to>
+                                        <p:strVal val="visible"/>
+                                      </p:to>
+                                    </p:set>
+                                    <p:animEffect transition="in" filter="fade">
+                                      <p:cBhvr>
+                                        <p:cTn id="27" dur="450"/>
+                                        <p:tgtEl>
+                                          <p:spTgt spid="11"/>
+                                        </p:tgtEl>
+                                      </p:cBhvr>
+                                    </p:animEffect>
+                                  </p:childTnLst>
+                                </p:cTn>
+                              </p:par>
+                            </p:childTnLst>
+                          </p:cTn>
+                        </p:par>
+                        <p:par>
+                          <p:cTn id="28" fill="hold">
+                            <p:stCondLst>
+                              <p:cond delay="180"/>
+                            </p:stCondLst>
+                            <p:childTnLst>
+                              <p:par>
+                                <p:cTn id="29" presetID="2" presetClass="entr" presetSubtype="4" fill="hold" grpId="0" nodeType="afterEffect">
+                                  <p:stCondLst>
+                                    <p:cond delay="0"/>
+                                  </p:stCondLst>
+                                  <p:childTnLst>
+                                    <p:set>
+                                      <p:cBhvr>
+                                        <p:cTn id="30" dur="1" fill="hold">
+                                          <p:stCondLst>
+                                            <p:cond delay="0"/>
+                                          </p:stCondLst>
+                                        </p:cTn>
+                                        <p:tgtEl>
+                                          <p:spTgt spid="13"/>
+                                        </p:tgtEl>
+                                        <p:attrNameLst>
+                                          <p:attrName>style.visibility</p:attrName>
+                                        </p:attrNameLst>
+                                      </p:cBhvr>
+                                      <p:to>
+                                        <p:strVal val="visible"/>
+                                      </p:to>
+                                    </p:set>
+                                    <p:animEffect transition="in" filter="fade">
+                                      <p:cBhvr>
+                                        <p:cTn id="31" dur="450"/>
+                                        <p:tgtEl>
+                                          <p:spTgt spid="13"/>
+                                        </p:tgtEl>
+                                      </p:cBhvr>
+                                    </p:animEffect>
+                                  </p:childTnLst>
+                                </p:cTn>
+                              </p:par>
+                            </p:childTnLst>
+                          </p:cTn>
+                        </p:par>
+                        <p:par>
+                          <p:cTn id="32" fill="hold">
+                            <p:stCondLst>
+                              <p:cond delay="180"/>
+                            </p:stCondLst>
+                            <p:childTnLst>
+                              <p:par>
+                                <p:cTn id="33" presetID="2" presetClass="entr" presetSubtype="4" fill="hold" grpId="0" nodeType="afterEffect">
+                                  <p:stCondLst>
+                                    <p:cond delay="0"/>
+                                  </p:stCondLst>
+                                  <p:childTnLst>
+                                    <p:set>
+                                      <p:cBhvr>
+                                        <p:cTn id="34" dur="1" fill="hold">
+                                          <p:stCondLst>
+                                            <p:cond delay="0"/>
+                                          </p:stCondLst>
+                                        </p:cTn>
+                                        <p:tgtEl>
+                                          <p:spTgt spid="14"/>
+                                        </p:tgtEl>
+                                        <p:attrNameLst>
+                                          <p:attrName>style.visibility</p:attrName>
+                                        </p:attrNameLst>
+                                      </p:cBhvr>
+                                      <p:to>
+                                        <p:strVal val="visible"/>
+                                      </p:to>
+                                    </p:set>
+                                    <p:animEffect transition="in" filter="fade">
+                                      <p:cBhvr>
+                                        <p:cTn id="35" dur="450"/>
+                                        <p:tgtEl>
+                                          <p:spTgt spid="14"/>
+                                        </p:tgtEl>
+                                      </p:cBhvr>
+                                    </p:animEffect>
+                                  </p:childTnLst>
+                                </p:cTn>
+                              </p:par>
+                            </p:childTnLst>
+                          </p:cTn>
+                        </p:par>
+                      </p:childTnLst>
+                    </p:cTn>
+                  </p:par>
+                </p:childTnLst>
+              </p:cTn>
+              <p:prevCondLst>
+                <p:cond evt="onPrev" delay="0">
+                  <p:tgtEl>
+                    <p:sldTgt/>
+                  </p:tgtEl>
+                </p:cond>
+              </p:prevCondLst>
+              <p:nextCondLst>
+                <p:cond evt="onNext" delay="0">
+                  <p:tgtEl>
+                    <p:sldTgt/>
+                  </p:tgtEl>
+                </p:cond>
+              </p:nextCondLst>
+            </p:seq>
+          </p:childTnLst>
+        </p:cTn>
+      </p:par>
+    </p:tnLst>
+    <p:bldLst>
+      <p:bldP spid="6" grpId="0"/>
+      <p:bldP spid="7" grpId="0"/>
+      <p:bldP spid="8" grpId="0"/>
+      <p:bldP spid="9" grpId="0"/>
+      <p:bldP spid="10" grpId="0"/>
+      <p:bldP spid="11" grpId="0"/>
+      <p:bldP spid="13" grpId="0"/>
+      <p:bldP spid="14" grpId="0"/>
+    </p:bldLst>
+  </p:timing>
 </p:sld>
 </file>
 
@@ -7098,9 +11113,500 @@
   <p:clrMapOvr>
     <a:masterClrMapping/>
   </p:clrMapOvr>
-  <p:transition spd="med">
+  <p:transition spd="med" advClick="1">
     <p:fade/>
   </p:transition>
+  <p:timing>
+    <p:tnLst>
+      <p:par>
+        <p:cTn id="1" dur="indefinite" restart="never" nodeType="tmRoot">
+          <p:childTnLst>
+            <p:seq concurrent="1" nextAc="seek">
+              <p:cTn id="2" dur="indefinite" nodeType="mainSeq">
+                <p:childTnLst>
+                  <p:par>
+                    <p:cTn id="3" fill="hold">
+                      <p:stCondLst>
+                        <p:cond delay="0"/>
+                      </p:stCondLst>
+                      <p:childTnLst>
+                        <p:par>
+                          <p:cTn id="4" fill="hold">
+                            <p:stCondLst>
+                              <p:cond delay="100"/>
+                            </p:stCondLst>
+                            <p:childTnLst>
+                              <p:par>
+                                <p:cTn id="5" presetID="2" presetClass="entr" presetSubtype="4" fill="hold" grpId="0" nodeType="withEffect">
+                                  <p:stCondLst>
+                                    <p:cond delay="0"/>
+                                  </p:stCondLst>
+                                  <p:childTnLst>
+                                    <p:set>
+                                      <p:cBhvr>
+                                        <p:cTn id="6" dur="1" fill="hold">
+                                          <p:stCondLst>
+                                            <p:cond delay="0"/>
+                                          </p:stCondLst>
+                                        </p:cTn>
+                                        <p:tgtEl>
+                                          <p:spTgt spid="6"/>
+                                        </p:tgtEl>
+                                        <p:attrNameLst>
+                                          <p:attrName>style.visibility</p:attrName>
+                                        </p:attrNameLst>
+                                      </p:cBhvr>
+                                      <p:to>
+                                        <p:strVal val="visible"/>
+                                      </p:to>
+                                    </p:set>
+                                    <p:animEffect transition="in" filter="fade">
+                                      <p:cBhvr>
+                                        <p:cTn id="7" dur="450"/>
+                                        <p:tgtEl>
+                                          <p:spTgt spid="6"/>
+                                        </p:tgtEl>
+                                      </p:cBhvr>
+                                    </p:animEffect>
+                                  </p:childTnLst>
+                                </p:cTn>
+                              </p:par>
+                            </p:childTnLst>
+                          </p:cTn>
+                        </p:par>
+                        <p:par>
+                          <p:cTn id="8" fill="hold">
+                            <p:stCondLst>
+                              <p:cond delay="180"/>
+                            </p:stCondLst>
+                            <p:childTnLst>
+                              <p:par>
+                                <p:cTn id="9" presetID="2" presetClass="entr" presetSubtype="4" fill="hold" grpId="0" nodeType="afterEffect">
+                                  <p:stCondLst>
+                                    <p:cond delay="0"/>
+                                  </p:stCondLst>
+                                  <p:childTnLst>
+                                    <p:set>
+                                      <p:cBhvr>
+                                        <p:cTn id="10" dur="1" fill="hold">
+                                          <p:stCondLst>
+                                            <p:cond delay="0"/>
+                                          </p:stCondLst>
+                                        </p:cTn>
+                                        <p:tgtEl>
+                                          <p:spTgt spid="7"/>
+                                        </p:tgtEl>
+                                        <p:attrNameLst>
+                                          <p:attrName>style.visibility</p:attrName>
+                                        </p:attrNameLst>
+                                      </p:cBhvr>
+                                      <p:to>
+                                        <p:strVal val="visible"/>
+                                      </p:to>
+                                    </p:set>
+                                    <p:animEffect transition="in" filter="fade">
+                                      <p:cBhvr>
+                                        <p:cTn id="11" dur="450"/>
+                                        <p:tgtEl>
+                                          <p:spTgt spid="7"/>
+                                        </p:tgtEl>
+                                      </p:cBhvr>
+                                    </p:animEffect>
+                                  </p:childTnLst>
+                                </p:cTn>
+                              </p:par>
+                            </p:childTnLst>
+                          </p:cTn>
+                        </p:par>
+                        <p:par>
+                          <p:cTn id="12" fill="hold">
+                            <p:stCondLst>
+                              <p:cond delay="180"/>
+                            </p:stCondLst>
+                            <p:childTnLst>
+                              <p:par>
+                                <p:cTn id="13" presetID="2" presetClass="entr" presetSubtype="4" fill="hold" grpId="0" nodeType="afterEffect">
+                                  <p:stCondLst>
+                                    <p:cond delay="0"/>
+                                  </p:stCondLst>
+                                  <p:childTnLst>
+                                    <p:set>
+                                      <p:cBhvr>
+                                        <p:cTn id="14" dur="1" fill="hold">
+                                          <p:stCondLst>
+                                            <p:cond delay="0"/>
+                                          </p:stCondLst>
+                                        </p:cTn>
+                                        <p:tgtEl>
+                                          <p:spTgt spid="8"/>
+                                        </p:tgtEl>
+                                        <p:attrNameLst>
+                                          <p:attrName>style.visibility</p:attrName>
+                                        </p:attrNameLst>
+                                      </p:cBhvr>
+                                      <p:to>
+                                        <p:strVal val="visible"/>
+                                      </p:to>
+                                    </p:set>
+                                    <p:animEffect transition="in" filter="fade">
+                                      <p:cBhvr>
+                                        <p:cTn id="15" dur="450"/>
+                                        <p:tgtEl>
+                                          <p:spTgt spid="8"/>
+                                        </p:tgtEl>
+                                      </p:cBhvr>
+                                    </p:animEffect>
+                                  </p:childTnLst>
+                                </p:cTn>
+                              </p:par>
+                            </p:childTnLst>
+                          </p:cTn>
+                        </p:par>
+                        <p:par>
+                          <p:cTn id="16" fill="hold">
+                            <p:stCondLst>
+                              <p:cond delay="180"/>
+                            </p:stCondLst>
+                            <p:childTnLst>
+                              <p:par>
+                                <p:cTn id="17" presetID="2" presetClass="entr" presetSubtype="4" fill="hold" grpId="0" nodeType="afterEffect">
+                                  <p:stCondLst>
+                                    <p:cond delay="0"/>
+                                  </p:stCondLst>
+                                  <p:childTnLst>
+                                    <p:set>
+                                      <p:cBhvr>
+                                        <p:cTn id="18" dur="1" fill="hold">
+                                          <p:stCondLst>
+                                            <p:cond delay="0"/>
+                                          </p:stCondLst>
+                                        </p:cTn>
+                                        <p:tgtEl>
+                                          <p:spTgt spid="9"/>
+                                        </p:tgtEl>
+                                        <p:attrNameLst>
+                                          <p:attrName>style.visibility</p:attrName>
+                                        </p:attrNameLst>
+                                      </p:cBhvr>
+                                      <p:to>
+                                        <p:strVal val="visible"/>
+                                      </p:to>
+                                    </p:set>
+                                    <p:animEffect transition="in" filter="fade">
+                                      <p:cBhvr>
+                                        <p:cTn id="19" dur="450"/>
+                                        <p:tgtEl>
+                                          <p:spTgt spid="9"/>
+                                        </p:tgtEl>
+                                      </p:cBhvr>
+                                    </p:animEffect>
+                                  </p:childTnLst>
+                                </p:cTn>
+                              </p:par>
+                            </p:childTnLst>
+                          </p:cTn>
+                        </p:par>
+                        <p:par>
+                          <p:cTn id="20" fill="hold">
+                            <p:stCondLst>
+                              <p:cond delay="180"/>
+                            </p:stCondLst>
+                            <p:childTnLst>
+                              <p:par>
+                                <p:cTn id="21" presetID="2" presetClass="entr" presetSubtype="4" fill="hold" grpId="0" nodeType="afterEffect">
+                                  <p:stCondLst>
+                                    <p:cond delay="0"/>
+                                  </p:stCondLst>
+                                  <p:childTnLst>
+                                    <p:set>
+                                      <p:cBhvr>
+                                        <p:cTn id="22" dur="1" fill="hold">
+                                          <p:stCondLst>
+                                            <p:cond delay="0"/>
+                                          </p:stCondLst>
+                                        </p:cTn>
+                                        <p:tgtEl>
+                                          <p:spTgt spid="10"/>
+                                        </p:tgtEl>
+                                        <p:attrNameLst>
+                                          <p:attrName>style.visibility</p:attrName>
+                                        </p:attrNameLst>
+                                      </p:cBhvr>
+                                      <p:to>
+                                        <p:strVal val="visible"/>
+                                      </p:to>
+                                    </p:set>
+                                    <p:animEffect transition="in" filter="fade">
+                                      <p:cBhvr>
+                                        <p:cTn id="23" dur="450"/>
+                                        <p:tgtEl>
+                                          <p:spTgt spid="10"/>
+                                        </p:tgtEl>
+                                      </p:cBhvr>
+                                    </p:animEffect>
+                                  </p:childTnLst>
+                                </p:cTn>
+                              </p:par>
+                            </p:childTnLst>
+                          </p:cTn>
+                        </p:par>
+                        <p:par>
+                          <p:cTn id="24" fill="hold">
+                            <p:stCondLst>
+                              <p:cond delay="180"/>
+                            </p:stCondLst>
+                            <p:childTnLst>
+                              <p:par>
+                                <p:cTn id="25" presetID="2" presetClass="entr" presetSubtype="4" fill="hold" grpId="0" nodeType="afterEffect">
+                                  <p:stCondLst>
+                                    <p:cond delay="0"/>
+                                  </p:stCondLst>
+                                  <p:childTnLst>
+                                    <p:set>
+                                      <p:cBhvr>
+                                        <p:cTn id="26" dur="1" fill="hold">
+                                          <p:stCondLst>
+                                            <p:cond delay="0"/>
+                                          </p:stCondLst>
+                                        </p:cTn>
+                                        <p:tgtEl>
+                                          <p:spTgt spid="12"/>
+                                        </p:tgtEl>
+                                        <p:attrNameLst>
+                                          <p:attrName>style.visibility</p:attrName>
+                                        </p:attrNameLst>
+                                      </p:cBhvr>
+                                      <p:to>
+                                        <p:strVal val="visible"/>
+                                      </p:to>
+                                    </p:set>
+                                    <p:animEffect transition="in" filter="fade">
+                                      <p:cBhvr>
+                                        <p:cTn id="27" dur="450"/>
+                                        <p:tgtEl>
+                                          <p:spTgt spid="12"/>
+                                        </p:tgtEl>
+                                      </p:cBhvr>
+                                    </p:animEffect>
+                                  </p:childTnLst>
+                                </p:cTn>
+                              </p:par>
+                            </p:childTnLst>
+                          </p:cTn>
+                        </p:par>
+                        <p:par>
+                          <p:cTn id="28" fill="hold">
+                            <p:stCondLst>
+                              <p:cond delay="180"/>
+                            </p:stCondLst>
+                            <p:childTnLst>
+                              <p:par>
+                                <p:cTn id="29" presetID="2" presetClass="entr" presetSubtype="4" fill="hold" grpId="0" nodeType="afterEffect">
+                                  <p:stCondLst>
+                                    <p:cond delay="0"/>
+                                  </p:stCondLst>
+                                  <p:childTnLst>
+                                    <p:set>
+                                      <p:cBhvr>
+                                        <p:cTn id="30" dur="1" fill="hold">
+                                          <p:stCondLst>
+                                            <p:cond delay="0"/>
+                                          </p:stCondLst>
+                                        </p:cTn>
+                                        <p:tgtEl>
+                                          <p:spTgt spid="14"/>
+                                        </p:tgtEl>
+                                        <p:attrNameLst>
+                                          <p:attrName>style.visibility</p:attrName>
+                                        </p:attrNameLst>
+                                      </p:cBhvr>
+                                      <p:to>
+                                        <p:strVal val="visible"/>
+                                      </p:to>
+                                    </p:set>
+                                    <p:animEffect transition="in" filter="fade">
+                                      <p:cBhvr>
+                                        <p:cTn id="31" dur="450"/>
+                                        <p:tgtEl>
+                                          <p:spTgt spid="14"/>
+                                        </p:tgtEl>
+                                      </p:cBhvr>
+                                    </p:animEffect>
+                                  </p:childTnLst>
+                                </p:cTn>
+                              </p:par>
+                            </p:childTnLst>
+                          </p:cTn>
+                        </p:par>
+                        <p:par>
+                          <p:cTn id="32" fill="hold">
+                            <p:stCondLst>
+                              <p:cond delay="180"/>
+                            </p:stCondLst>
+                            <p:childTnLst>
+                              <p:par>
+                                <p:cTn id="33" presetID="2" presetClass="entr" presetSubtype="4" fill="hold" grpId="0" nodeType="afterEffect">
+                                  <p:stCondLst>
+                                    <p:cond delay="0"/>
+                                  </p:stCondLst>
+                                  <p:childTnLst>
+                                    <p:set>
+                                      <p:cBhvr>
+                                        <p:cTn id="34" dur="1" fill="hold">
+                                          <p:stCondLst>
+                                            <p:cond delay="0"/>
+                                          </p:stCondLst>
+                                        </p:cTn>
+                                        <p:tgtEl>
+                                          <p:spTgt spid="16"/>
+                                        </p:tgtEl>
+                                        <p:attrNameLst>
+                                          <p:attrName>style.visibility</p:attrName>
+                                        </p:attrNameLst>
+                                      </p:cBhvr>
+                                      <p:to>
+                                        <p:strVal val="visible"/>
+                                      </p:to>
+                                    </p:set>
+                                    <p:animEffect transition="in" filter="fade">
+                                      <p:cBhvr>
+                                        <p:cTn id="35" dur="450"/>
+                                        <p:tgtEl>
+                                          <p:spTgt spid="16"/>
+                                        </p:tgtEl>
+                                      </p:cBhvr>
+                                    </p:animEffect>
+                                  </p:childTnLst>
+                                </p:cTn>
+                              </p:par>
+                            </p:childTnLst>
+                          </p:cTn>
+                        </p:par>
+                        <p:par>
+                          <p:cTn id="36" fill="hold">
+                            <p:stCondLst>
+                              <p:cond delay="180"/>
+                            </p:stCondLst>
+                            <p:childTnLst>
+                              <p:par>
+                                <p:cTn id="37" presetID="2" presetClass="entr" presetSubtype="4" fill="hold" grpId="0" nodeType="afterEffect">
+                                  <p:stCondLst>
+                                    <p:cond delay="0"/>
+                                  </p:stCondLst>
+                                  <p:childTnLst>
+                                    <p:set>
+                                      <p:cBhvr>
+                                        <p:cTn id="38" dur="1" fill="hold">
+                                          <p:stCondLst>
+                                            <p:cond delay="0"/>
+                                          </p:stCondLst>
+                                        </p:cTn>
+                                        <p:tgtEl>
+                                          <p:spTgt spid="19"/>
+                                        </p:tgtEl>
+                                        <p:attrNameLst>
+                                          <p:attrName>style.visibility</p:attrName>
+                                        </p:attrNameLst>
+                                      </p:cBhvr>
+                                      <p:to>
+                                        <p:strVal val="visible"/>
+                                      </p:to>
+                                    </p:set>
+                                    <p:animEffect transition="in" filter="fade">
+                                      <p:cBhvr>
+                                        <p:cTn id="39" dur="450"/>
+                                        <p:tgtEl>
+                                          <p:spTgt spid="19"/>
+                                        </p:tgtEl>
+                                      </p:cBhvr>
+                                    </p:animEffect>
+                                  </p:childTnLst>
+                                </p:cTn>
+                              </p:par>
+                            </p:childTnLst>
+                          </p:cTn>
+                        </p:par>
+                        <p:par>
+                          <p:cTn id="40" fill="hold">
+                            <p:stCondLst>
+                              <p:cond delay="180"/>
+                            </p:stCondLst>
+                            <p:childTnLst>
+                              <p:par>
+                                <p:cTn id="41" presetID="2" presetClass="entr" presetSubtype="4" fill="hold" grpId="0" nodeType="afterEffect">
+                                  <p:stCondLst>
+                                    <p:cond delay="0"/>
+                                  </p:stCondLst>
+                                  <p:childTnLst>
+                                    <p:set>
+                                      <p:cBhvr>
+                                        <p:cTn id="42" dur="1" fill="hold">
+                                          <p:stCondLst>
+                                            <p:cond delay="0"/>
+                                          </p:stCondLst>
+                                        </p:cTn>
+                                        <p:tgtEl>
+                                          <p:spTgt spid="20"/>
+                                        </p:tgtEl>
+                                        <p:attrNameLst>
+                                          <p:attrName>style.visibility</p:attrName>
+                                        </p:attrNameLst>
+                                      </p:cBhvr>
+                                      <p:to>
+                                        <p:strVal val="visible"/>
+                                      </p:to>
+                                    </p:set>
+                                    <p:animEffect transition="in" filter="fade">
+                                      <p:cBhvr>
+                                        <p:cTn id="43" dur="450"/>
+                                        <p:tgtEl>
+                                          <p:spTgt spid="20"/>
+                                        </p:tgtEl>
+                                      </p:cBhvr>
+                                    </p:animEffect>
+                                  </p:childTnLst>
+                                </p:cTn>
+                              </p:par>
+                            </p:childTnLst>
+                          </p:cTn>
+                        </p:par>
+                      </p:childTnLst>
+                    </p:cTn>
+                  </p:par>
+                </p:childTnLst>
+              </p:cTn>
+              <p:prevCondLst>
+                <p:cond evt="onPrev" delay="0">
+                  <p:tgtEl>
+                    <p:sldTgt/>
+                  </p:tgtEl>
+                </p:cond>
+              </p:prevCondLst>
+              <p:nextCondLst>
+                <p:cond evt="onNext" delay="0">
+                  <p:tgtEl>
+                    <p:sldTgt/>
+                  </p:tgtEl>
+                </p:cond>
+              </p:nextCondLst>
+            </p:seq>
+          </p:childTnLst>
+        </p:cTn>
+      </p:par>
+    </p:tnLst>
+    <p:bldLst>
+      <p:bldP spid="6" grpId="0"/>
+      <p:bldP spid="7" grpId="0"/>
+      <p:bldP spid="8" grpId="0"/>
+      <p:bldP spid="9" grpId="0"/>
+      <p:bldP spid="10" grpId="0"/>
+      <p:bldP spid="12" grpId="0"/>
+      <p:bldP spid="14" grpId="0"/>
+      <p:bldP spid="16" grpId="0"/>
+      <p:bldP spid="19" grpId="0"/>
+      <p:bldP spid="20" grpId="0"/>
+    </p:bldLst>
+  </p:timing>
 </p:sld>
 </file>
 
@@ -7944,9 +12450,410 @@
   <p:clrMapOvr>
     <a:masterClrMapping/>
   </p:clrMapOvr>
-  <p:transition spd="med">
+  <p:transition spd="med" advClick="1">
     <p:fade/>
   </p:transition>
+  <p:timing>
+    <p:tnLst>
+      <p:par>
+        <p:cTn id="1" dur="indefinite" restart="never" nodeType="tmRoot">
+          <p:childTnLst>
+            <p:seq concurrent="1" nextAc="seek">
+              <p:cTn id="2" dur="indefinite" nodeType="mainSeq">
+                <p:childTnLst>
+                  <p:par>
+                    <p:cTn id="3" fill="hold">
+                      <p:stCondLst>
+                        <p:cond delay="0"/>
+                      </p:stCondLst>
+                      <p:childTnLst>
+                        <p:par>
+                          <p:cTn id="4" fill="hold">
+                            <p:stCondLst>
+                              <p:cond delay="100"/>
+                            </p:stCondLst>
+                            <p:childTnLst>
+                              <p:par>
+                                <p:cTn id="5" presetID="2" presetClass="entr" presetSubtype="4" fill="hold" grpId="0" nodeType="withEffect">
+                                  <p:stCondLst>
+                                    <p:cond delay="0"/>
+                                  </p:stCondLst>
+                                  <p:childTnLst>
+                                    <p:set>
+                                      <p:cBhvr>
+                                        <p:cTn id="6" dur="1" fill="hold">
+                                          <p:stCondLst>
+                                            <p:cond delay="0"/>
+                                          </p:stCondLst>
+                                        </p:cTn>
+                                        <p:tgtEl>
+                                          <p:spTgt spid="6"/>
+                                        </p:tgtEl>
+                                        <p:attrNameLst>
+                                          <p:attrName>style.visibility</p:attrName>
+                                        </p:attrNameLst>
+                                      </p:cBhvr>
+                                      <p:to>
+                                        <p:strVal val="visible"/>
+                                      </p:to>
+                                    </p:set>
+                                    <p:animEffect transition="in" filter="fade">
+                                      <p:cBhvr>
+                                        <p:cTn id="7" dur="450"/>
+                                        <p:tgtEl>
+                                          <p:spTgt spid="6"/>
+                                        </p:tgtEl>
+                                      </p:cBhvr>
+                                    </p:animEffect>
+                                  </p:childTnLst>
+                                </p:cTn>
+                              </p:par>
+                            </p:childTnLst>
+                          </p:cTn>
+                        </p:par>
+                        <p:par>
+                          <p:cTn id="8" fill="hold">
+                            <p:stCondLst>
+                              <p:cond delay="180"/>
+                            </p:stCondLst>
+                            <p:childTnLst>
+                              <p:par>
+                                <p:cTn id="9" presetID="2" presetClass="entr" presetSubtype="4" fill="hold" grpId="0" nodeType="afterEffect">
+                                  <p:stCondLst>
+                                    <p:cond delay="0"/>
+                                  </p:stCondLst>
+                                  <p:childTnLst>
+                                    <p:set>
+                                      <p:cBhvr>
+                                        <p:cTn id="10" dur="1" fill="hold">
+                                          <p:stCondLst>
+                                            <p:cond delay="0"/>
+                                          </p:stCondLst>
+                                        </p:cTn>
+                                        <p:tgtEl>
+                                          <p:spTgt spid="7"/>
+                                        </p:tgtEl>
+                                        <p:attrNameLst>
+                                          <p:attrName>style.visibility</p:attrName>
+                                        </p:attrNameLst>
+                                      </p:cBhvr>
+                                      <p:to>
+                                        <p:strVal val="visible"/>
+                                      </p:to>
+                                    </p:set>
+                                    <p:animEffect transition="in" filter="fade">
+                                      <p:cBhvr>
+                                        <p:cTn id="11" dur="450"/>
+                                        <p:tgtEl>
+                                          <p:spTgt spid="7"/>
+                                        </p:tgtEl>
+                                      </p:cBhvr>
+                                    </p:animEffect>
+                                  </p:childTnLst>
+                                </p:cTn>
+                              </p:par>
+                            </p:childTnLst>
+                          </p:cTn>
+                        </p:par>
+                        <p:par>
+                          <p:cTn id="12" fill="hold">
+                            <p:stCondLst>
+                              <p:cond delay="180"/>
+                            </p:stCondLst>
+                            <p:childTnLst>
+                              <p:par>
+                                <p:cTn id="13" presetID="2" presetClass="entr" presetSubtype="4" fill="hold" grpId="0" nodeType="afterEffect">
+                                  <p:stCondLst>
+                                    <p:cond delay="0"/>
+                                  </p:stCondLst>
+                                  <p:childTnLst>
+                                    <p:set>
+                                      <p:cBhvr>
+                                        <p:cTn id="14" dur="1" fill="hold">
+                                          <p:stCondLst>
+                                            <p:cond delay="0"/>
+                                          </p:stCondLst>
+                                        </p:cTn>
+                                        <p:tgtEl>
+                                          <p:spTgt spid="8"/>
+                                        </p:tgtEl>
+                                        <p:attrNameLst>
+                                          <p:attrName>style.visibility</p:attrName>
+                                        </p:attrNameLst>
+                                      </p:cBhvr>
+                                      <p:to>
+                                        <p:strVal val="visible"/>
+                                      </p:to>
+                                    </p:set>
+                                    <p:animEffect transition="in" filter="fade">
+                                      <p:cBhvr>
+                                        <p:cTn id="15" dur="450"/>
+                                        <p:tgtEl>
+                                          <p:spTgt spid="8"/>
+                                        </p:tgtEl>
+                                      </p:cBhvr>
+                                    </p:animEffect>
+                                  </p:childTnLst>
+                                </p:cTn>
+                              </p:par>
+                            </p:childTnLst>
+                          </p:cTn>
+                        </p:par>
+                        <p:par>
+                          <p:cTn id="16" fill="hold">
+                            <p:stCondLst>
+                              <p:cond delay="180"/>
+                            </p:stCondLst>
+                            <p:childTnLst>
+                              <p:par>
+                                <p:cTn id="17" presetID="2" presetClass="entr" presetSubtype="4" fill="hold" grpId="0" nodeType="afterEffect">
+                                  <p:stCondLst>
+                                    <p:cond delay="0"/>
+                                  </p:stCondLst>
+                                  <p:childTnLst>
+                                    <p:set>
+                                      <p:cBhvr>
+                                        <p:cTn id="18" dur="1" fill="hold">
+                                          <p:stCondLst>
+                                            <p:cond delay="0"/>
+                                          </p:stCondLst>
+                                        </p:cTn>
+                                        <p:tgtEl>
+                                          <p:spTgt spid="9"/>
+                                        </p:tgtEl>
+                                        <p:attrNameLst>
+                                          <p:attrName>style.visibility</p:attrName>
+                                        </p:attrNameLst>
+                                      </p:cBhvr>
+                                      <p:to>
+                                        <p:strVal val="visible"/>
+                                      </p:to>
+                                    </p:set>
+                                    <p:animEffect transition="in" filter="fade">
+                                      <p:cBhvr>
+                                        <p:cTn id="19" dur="450"/>
+                                        <p:tgtEl>
+                                          <p:spTgt spid="9"/>
+                                        </p:tgtEl>
+                                      </p:cBhvr>
+                                    </p:animEffect>
+                                  </p:childTnLst>
+                                </p:cTn>
+                              </p:par>
+                            </p:childTnLst>
+                          </p:cTn>
+                        </p:par>
+                        <p:par>
+                          <p:cTn id="20" fill="hold">
+                            <p:stCondLst>
+                              <p:cond delay="180"/>
+                            </p:stCondLst>
+                            <p:childTnLst>
+                              <p:par>
+                                <p:cTn id="21" presetID="2" presetClass="entr" presetSubtype="4" fill="hold" grpId="0" nodeType="afterEffect">
+                                  <p:stCondLst>
+                                    <p:cond delay="0"/>
+                                  </p:stCondLst>
+                                  <p:childTnLst>
+                                    <p:set>
+                                      <p:cBhvr>
+                                        <p:cTn id="22" dur="1" fill="hold">
+                                          <p:stCondLst>
+                                            <p:cond delay="0"/>
+                                          </p:stCondLst>
+                                        </p:cTn>
+                                        <p:tgtEl>
+                                          <p:spTgt spid="10"/>
+                                        </p:tgtEl>
+                                        <p:attrNameLst>
+                                          <p:attrName>style.visibility</p:attrName>
+                                        </p:attrNameLst>
+                                      </p:cBhvr>
+                                      <p:to>
+                                        <p:strVal val="visible"/>
+                                      </p:to>
+                                    </p:set>
+                                    <p:animEffect transition="in" filter="fade">
+                                      <p:cBhvr>
+                                        <p:cTn id="23" dur="450"/>
+                                        <p:tgtEl>
+                                          <p:spTgt spid="10"/>
+                                        </p:tgtEl>
+                                      </p:cBhvr>
+                                    </p:animEffect>
+                                  </p:childTnLst>
+                                </p:cTn>
+                              </p:par>
+                            </p:childTnLst>
+                          </p:cTn>
+                        </p:par>
+                        <p:par>
+                          <p:cTn id="24" fill="hold">
+                            <p:stCondLst>
+                              <p:cond delay="180"/>
+                            </p:stCondLst>
+                            <p:childTnLst>
+                              <p:par>
+                                <p:cTn id="25" presetID="2" presetClass="entr" presetSubtype="4" fill="hold" grpId="0" nodeType="afterEffect">
+                                  <p:stCondLst>
+                                    <p:cond delay="0"/>
+                                  </p:stCondLst>
+                                  <p:childTnLst>
+                                    <p:set>
+                                      <p:cBhvr>
+                                        <p:cTn id="26" dur="1" fill="hold">
+                                          <p:stCondLst>
+                                            <p:cond delay="0"/>
+                                          </p:stCondLst>
+                                        </p:cTn>
+                                        <p:tgtEl>
+                                          <p:spTgt spid="11"/>
+                                        </p:tgtEl>
+                                        <p:attrNameLst>
+                                          <p:attrName>style.visibility</p:attrName>
+                                        </p:attrNameLst>
+                                      </p:cBhvr>
+                                      <p:to>
+                                        <p:strVal val="visible"/>
+                                      </p:to>
+                                    </p:set>
+                                    <p:animEffect transition="in" filter="fade">
+                                      <p:cBhvr>
+                                        <p:cTn id="27" dur="450"/>
+                                        <p:tgtEl>
+                                          <p:spTgt spid="11"/>
+                                        </p:tgtEl>
+                                      </p:cBhvr>
+                                    </p:animEffect>
+                                  </p:childTnLst>
+                                </p:cTn>
+                              </p:par>
+                            </p:childTnLst>
+                          </p:cTn>
+                        </p:par>
+                        <p:par>
+                          <p:cTn id="28" fill="hold">
+                            <p:stCondLst>
+                              <p:cond delay="180"/>
+                            </p:stCondLst>
+                            <p:childTnLst>
+                              <p:par>
+                                <p:cTn id="29" presetID="2" presetClass="entr" presetSubtype="4" fill="hold" grpId="0" nodeType="afterEffect">
+                                  <p:stCondLst>
+                                    <p:cond delay="0"/>
+                                  </p:stCondLst>
+                                  <p:childTnLst>
+                                    <p:set>
+                                      <p:cBhvr>
+                                        <p:cTn id="30" dur="1" fill="hold">
+                                          <p:stCondLst>
+                                            <p:cond delay="0"/>
+                                          </p:stCondLst>
+                                        </p:cTn>
+                                        <p:tgtEl>
+                                          <p:spTgt spid="13"/>
+                                        </p:tgtEl>
+                                        <p:attrNameLst>
+                                          <p:attrName>style.visibility</p:attrName>
+                                        </p:attrNameLst>
+                                      </p:cBhvr>
+                                      <p:to>
+                                        <p:strVal val="visible"/>
+                                      </p:to>
+                                    </p:set>
+                                    <p:animEffect transition="in" filter="fade">
+                                      <p:cBhvr>
+                                        <p:cTn id="31" dur="450"/>
+                                        <p:tgtEl>
+                                          <p:spTgt spid="13"/>
+                                        </p:tgtEl>
+                                      </p:cBhvr>
+                                    </p:animEffect>
+                                  </p:childTnLst>
+                                </p:cTn>
+                              </p:par>
+                            </p:childTnLst>
+                          </p:cTn>
+                        </p:par>
+                        <p:par>
+                          <p:cTn id="32" fill="hold">
+                            <p:stCondLst>
+                              <p:cond delay="180"/>
+                            </p:stCondLst>
+                            <p:childTnLst>
+                              <p:par>
+                                <p:cTn id="33" presetID="2" presetClass="entr" presetSubtype="4" fill="hold" grpId="0" nodeType="afterEffect">
+                                  <p:stCondLst>
+                                    <p:cond delay="0"/>
+                                  </p:stCondLst>
+                                  <p:childTnLst>
+                                    <p:set>
+                                      <p:cBhvr>
+                                        <p:cTn id="34" dur="1" fill="hold">
+                                          <p:stCondLst>
+                                            <p:cond delay="0"/>
+                                          </p:stCondLst>
+                                        </p:cTn>
+                                        <p:tgtEl>
+                                          <p:spTgt spid="14"/>
+                                        </p:tgtEl>
+                                        <p:attrNameLst>
+                                          <p:attrName>style.visibility</p:attrName>
+                                        </p:attrNameLst>
+                                      </p:cBhvr>
+                                      <p:to>
+                                        <p:strVal val="visible"/>
+                                      </p:to>
+                                    </p:set>
+                                    <p:animEffect transition="in" filter="fade">
+                                      <p:cBhvr>
+                                        <p:cTn id="35" dur="450"/>
+                                        <p:tgtEl>
+                                          <p:spTgt spid="14"/>
+                                        </p:tgtEl>
+                                      </p:cBhvr>
+                                    </p:animEffect>
+                                  </p:childTnLst>
+                                </p:cTn>
+                              </p:par>
+                            </p:childTnLst>
+                          </p:cTn>
+                        </p:par>
+                      </p:childTnLst>
+                    </p:cTn>
+                  </p:par>
+                </p:childTnLst>
+              </p:cTn>
+              <p:prevCondLst>
+                <p:cond evt="onPrev" delay="0">
+                  <p:tgtEl>
+                    <p:sldTgt/>
+                  </p:tgtEl>
+                </p:cond>
+              </p:prevCondLst>
+              <p:nextCondLst>
+                <p:cond evt="onNext" delay="0">
+                  <p:tgtEl>
+                    <p:sldTgt/>
+                  </p:tgtEl>
+                </p:cond>
+              </p:nextCondLst>
+            </p:seq>
+          </p:childTnLst>
+        </p:cTn>
+      </p:par>
+    </p:tnLst>
+    <p:bldLst>
+      <p:bldP spid="6" grpId="0"/>
+      <p:bldP spid="7" grpId="0"/>
+      <p:bldP spid="8" grpId="0"/>
+      <p:bldP spid="9" grpId="0"/>
+      <p:bldP spid="10" grpId="0"/>
+      <p:bldP spid="11" grpId="0"/>
+      <p:bldP spid="13" grpId="0"/>
+      <p:bldP spid="14" grpId="0"/>
+    </p:bldLst>
+  </p:timing>
 </p:sld>
 </file>
 
@@ -8906,9 +13813,410 @@
   <p:clrMapOvr>
     <a:masterClrMapping/>
   </p:clrMapOvr>
-  <p:transition spd="med">
+  <p:transition spd="med" advClick="1">
     <p:fade/>
   </p:transition>
+  <p:timing>
+    <p:tnLst>
+      <p:par>
+        <p:cTn id="1" dur="indefinite" restart="never" nodeType="tmRoot">
+          <p:childTnLst>
+            <p:seq concurrent="1" nextAc="seek">
+              <p:cTn id="2" dur="indefinite" nodeType="mainSeq">
+                <p:childTnLst>
+                  <p:par>
+                    <p:cTn id="3" fill="hold">
+                      <p:stCondLst>
+                        <p:cond delay="0"/>
+                      </p:stCondLst>
+                      <p:childTnLst>
+                        <p:par>
+                          <p:cTn id="4" fill="hold">
+                            <p:stCondLst>
+                              <p:cond delay="100"/>
+                            </p:stCondLst>
+                            <p:childTnLst>
+                              <p:par>
+                                <p:cTn id="5" presetID="2" presetClass="entr" presetSubtype="4" fill="hold" grpId="0" nodeType="withEffect">
+                                  <p:stCondLst>
+                                    <p:cond delay="0"/>
+                                  </p:stCondLst>
+                                  <p:childTnLst>
+                                    <p:set>
+                                      <p:cBhvr>
+                                        <p:cTn id="6" dur="1" fill="hold">
+                                          <p:stCondLst>
+                                            <p:cond delay="0"/>
+                                          </p:stCondLst>
+                                        </p:cTn>
+                                        <p:tgtEl>
+                                          <p:spTgt spid="6"/>
+                                        </p:tgtEl>
+                                        <p:attrNameLst>
+                                          <p:attrName>style.visibility</p:attrName>
+                                        </p:attrNameLst>
+                                      </p:cBhvr>
+                                      <p:to>
+                                        <p:strVal val="visible"/>
+                                      </p:to>
+                                    </p:set>
+                                    <p:animEffect transition="in" filter="fade">
+                                      <p:cBhvr>
+                                        <p:cTn id="7" dur="450"/>
+                                        <p:tgtEl>
+                                          <p:spTgt spid="6"/>
+                                        </p:tgtEl>
+                                      </p:cBhvr>
+                                    </p:animEffect>
+                                  </p:childTnLst>
+                                </p:cTn>
+                              </p:par>
+                            </p:childTnLst>
+                          </p:cTn>
+                        </p:par>
+                        <p:par>
+                          <p:cTn id="8" fill="hold">
+                            <p:stCondLst>
+                              <p:cond delay="180"/>
+                            </p:stCondLst>
+                            <p:childTnLst>
+                              <p:par>
+                                <p:cTn id="9" presetID="2" presetClass="entr" presetSubtype="4" fill="hold" grpId="0" nodeType="afterEffect">
+                                  <p:stCondLst>
+                                    <p:cond delay="0"/>
+                                  </p:stCondLst>
+                                  <p:childTnLst>
+                                    <p:set>
+                                      <p:cBhvr>
+                                        <p:cTn id="10" dur="1" fill="hold">
+                                          <p:stCondLst>
+                                            <p:cond delay="0"/>
+                                          </p:stCondLst>
+                                        </p:cTn>
+                                        <p:tgtEl>
+                                          <p:spTgt spid="7"/>
+                                        </p:tgtEl>
+                                        <p:attrNameLst>
+                                          <p:attrName>style.visibility</p:attrName>
+                                        </p:attrNameLst>
+                                      </p:cBhvr>
+                                      <p:to>
+                                        <p:strVal val="visible"/>
+                                      </p:to>
+                                    </p:set>
+                                    <p:animEffect transition="in" filter="fade">
+                                      <p:cBhvr>
+                                        <p:cTn id="11" dur="450"/>
+                                        <p:tgtEl>
+                                          <p:spTgt spid="7"/>
+                                        </p:tgtEl>
+                                      </p:cBhvr>
+                                    </p:animEffect>
+                                  </p:childTnLst>
+                                </p:cTn>
+                              </p:par>
+                            </p:childTnLst>
+                          </p:cTn>
+                        </p:par>
+                        <p:par>
+                          <p:cTn id="12" fill="hold">
+                            <p:stCondLst>
+                              <p:cond delay="180"/>
+                            </p:stCondLst>
+                            <p:childTnLst>
+                              <p:par>
+                                <p:cTn id="13" presetID="2" presetClass="entr" presetSubtype="4" fill="hold" grpId="0" nodeType="afterEffect">
+                                  <p:stCondLst>
+                                    <p:cond delay="0"/>
+                                  </p:stCondLst>
+                                  <p:childTnLst>
+                                    <p:set>
+                                      <p:cBhvr>
+                                        <p:cTn id="14" dur="1" fill="hold">
+                                          <p:stCondLst>
+                                            <p:cond delay="0"/>
+                                          </p:stCondLst>
+                                        </p:cTn>
+                                        <p:tgtEl>
+                                          <p:spTgt spid="8"/>
+                                        </p:tgtEl>
+                                        <p:attrNameLst>
+                                          <p:attrName>style.visibility</p:attrName>
+                                        </p:attrNameLst>
+                                      </p:cBhvr>
+                                      <p:to>
+                                        <p:strVal val="visible"/>
+                                      </p:to>
+                                    </p:set>
+                                    <p:animEffect transition="in" filter="fade">
+                                      <p:cBhvr>
+                                        <p:cTn id="15" dur="450"/>
+                                        <p:tgtEl>
+                                          <p:spTgt spid="8"/>
+                                        </p:tgtEl>
+                                      </p:cBhvr>
+                                    </p:animEffect>
+                                  </p:childTnLst>
+                                </p:cTn>
+                              </p:par>
+                            </p:childTnLst>
+                          </p:cTn>
+                        </p:par>
+                        <p:par>
+                          <p:cTn id="16" fill="hold">
+                            <p:stCondLst>
+                              <p:cond delay="180"/>
+                            </p:stCondLst>
+                            <p:childTnLst>
+                              <p:par>
+                                <p:cTn id="17" presetID="2" presetClass="entr" presetSubtype="4" fill="hold" grpId="0" nodeType="afterEffect">
+                                  <p:stCondLst>
+                                    <p:cond delay="0"/>
+                                  </p:stCondLst>
+                                  <p:childTnLst>
+                                    <p:set>
+                                      <p:cBhvr>
+                                        <p:cTn id="18" dur="1" fill="hold">
+                                          <p:stCondLst>
+                                            <p:cond delay="0"/>
+                                          </p:stCondLst>
+                                        </p:cTn>
+                                        <p:tgtEl>
+                                          <p:spTgt spid="9"/>
+                                        </p:tgtEl>
+                                        <p:attrNameLst>
+                                          <p:attrName>style.visibility</p:attrName>
+                                        </p:attrNameLst>
+                                      </p:cBhvr>
+                                      <p:to>
+                                        <p:strVal val="visible"/>
+                                      </p:to>
+                                    </p:set>
+                                    <p:animEffect transition="in" filter="fade">
+                                      <p:cBhvr>
+                                        <p:cTn id="19" dur="450"/>
+                                        <p:tgtEl>
+                                          <p:spTgt spid="9"/>
+                                        </p:tgtEl>
+                                      </p:cBhvr>
+                                    </p:animEffect>
+                                  </p:childTnLst>
+                                </p:cTn>
+                              </p:par>
+                            </p:childTnLst>
+                          </p:cTn>
+                        </p:par>
+                        <p:par>
+                          <p:cTn id="20" fill="hold">
+                            <p:stCondLst>
+                              <p:cond delay="180"/>
+                            </p:stCondLst>
+                            <p:childTnLst>
+                              <p:par>
+                                <p:cTn id="21" presetID="2" presetClass="entr" presetSubtype="4" fill="hold" grpId="0" nodeType="afterEffect">
+                                  <p:stCondLst>
+                                    <p:cond delay="0"/>
+                                  </p:stCondLst>
+                                  <p:childTnLst>
+                                    <p:set>
+                                      <p:cBhvr>
+                                        <p:cTn id="22" dur="1" fill="hold">
+                                          <p:stCondLst>
+                                            <p:cond delay="0"/>
+                                          </p:stCondLst>
+                                        </p:cTn>
+                                        <p:tgtEl>
+                                          <p:spTgt spid="10"/>
+                                        </p:tgtEl>
+                                        <p:attrNameLst>
+                                          <p:attrName>style.visibility</p:attrName>
+                                        </p:attrNameLst>
+                                      </p:cBhvr>
+                                      <p:to>
+                                        <p:strVal val="visible"/>
+                                      </p:to>
+                                    </p:set>
+                                    <p:animEffect transition="in" filter="fade">
+                                      <p:cBhvr>
+                                        <p:cTn id="23" dur="450"/>
+                                        <p:tgtEl>
+                                          <p:spTgt spid="10"/>
+                                        </p:tgtEl>
+                                      </p:cBhvr>
+                                    </p:animEffect>
+                                  </p:childTnLst>
+                                </p:cTn>
+                              </p:par>
+                            </p:childTnLst>
+                          </p:cTn>
+                        </p:par>
+                        <p:par>
+                          <p:cTn id="24" fill="hold">
+                            <p:stCondLst>
+                              <p:cond delay="180"/>
+                            </p:stCondLst>
+                            <p:childTnLst>
+                              <p:par>
+                                <p:cTn id="25" presetID="2" presetClass="entr" presetSubtype="4" fill="hold" grpId="0" nodeType="afterEffect">
+                                  <p:stCondLst>
+                                    <p:cond delay="0"/>
+                                  </p:stCondLst>
+                                  <p:childTnLst>
+                                    <p:set>
+                                      <p:cBhvr>
+                                        <p:cTn id="26" dur="1" fill="hold">
+                                          <p:stCondLst>
+                                            <p:cond delay="0"/>
+                                          </p:stCondLst>
+                                        </p:cTn>
+                                        <p:tgtEl>
+                                          <p:spTgt spid="11"/>
+                                        </p:tgtEl>
+                                        <p:attrNameLst>
+                                          <p:attrName>style.visibility</p:attrName>
+                                        </p:attrNameLst>
+                                      </p:cBhvr>
+                                      <p:to>
+                                        <p:strVal val="visible"/>
+                                      </p:to>
+                                    </p:set>
+                                    <p:animEffect transition="in" filter="fade">
+                                      <p:cBhvr>
+                                        <p:cTn id="27" dur="450"/>
+                                        <p:tgtEl>
+                                          <p:spTgt spid="11"/>
+                                        </p:tgtEl>
+                                      </p:cBhvr>
+                                    </p:animEffect>
+                                  </p:childTnLst>
+                                </p:cTn>
+                              </p:par>
+                            </p:childTnLst>
+                          </p:cTn>
+                        </p:par>
+                        <p:par>
+                          <p:cTn id="28" fill="hold">
+                            <p:stCondLst>
+                              <p:cond delay="180"/>
+                            </p:stCondLst>
+                            <p:childTnLst>
+                              <p:par>
+                                <p:cTn id="29" presetID="2" presetClass="entr" presetSubtype="4" fill="hold" grpId="0" nodeType="afterEffect">
+                                  <p:stCondLst>
+                                    <p:cond delay="0"/>
+                                  </p:stCondLst>
+                                  <p:childTnLst>
+                                    <p:set>
+                                      <p:cBhvr>
+                                        <p:cTn id="30" dur="1" fill="hold">
+                                          <p:stCondLst>
+                                            <p:cond delay="0"/>
+                                          </p:stCondLst>
+                                        </p:cTn>
+                                        <p:tgtEl>
+                                          <p:spTgt spid="13"/>
+                                        </p:tgtEl>
+                                        <p:attrNameLst>
+                                          <p:attrName>style.visibility</p:attrName>
+                                        </p:attrNameLst>
+                                      </p:cBhvr>
+                                      <p:to>
+                                        <p:strVal val="visible"/>
+                                      </p:to>
+                                    </p:set>
+                                    <p:animEffect transition="in" filter="fade">
+                                      <p:cBhvr>
+                                        <p:cTn id="31" dur="450"/>
+                                        <p:tgtEl>
+                                          <p:spTgt spid="13"/>
+                                        </p:tgtEl>
+                                      </p:cBhvr>
+                                    </p:animEffect>
+                                  </p:childTnLst>
+                                </p:cTn>
+                              </p:par>
+                            </p:childTnLst>
+                          </p:cTn>
+                        </p:par>
+                        <p:par>
+                          <p:cTn id="32" fill="hold">
+                            <p:stCondLst>
+                              <p:cond delay="180"/>
+                            </p:stCondLst>
+                            <p:childTnLst>
+                              <p:par>
+                                <p:cTn id="33" presetID="2" presetClass="entr" presetSubtype="4" fill="hold" grpId="0" nodeType="afterEffect">
+                                  <p:stCondLst>
+                                    <p:cond delay="0"/>
+                                  </p:stCondLst>
+                                  <p:childTnLst>
+                                    <p:set>
+                                      <p:cBhvr>
+                                        <p:cTn id="34" dur="1" fill="hold">
+                                          <p:stCondLst>
+                                            <p:cond delay="0"/>
+                                          </p:stCondLst>
+                                        </p:cTn>
+                                        <p:tgtEl>
+                                          <p:spTgt spid="14"/>
+                                        </p:tgtEl>
+                                        <p:attrNameLst>
+                                          <p:attrName>style.visibility</p:attrName>
+                                        </p:attrNameLst>
+                                      </p:cBhvr>
+                                      <p:to>
+                                        <p:strVal val="visible"/>
+                                      </p:to>
+                                    </p:set>
+                                    <p:animEffect transition="in" filter="fade">
+                                      <p:cBhvr>
+                                        <p:cTn id="35" dur="450"/>
+                                        <p:tgtEl>
+                                          <p:spTgt spid="14"/>
+                                        </p:tgtEl>
+                                      </p:cBhvr>
+                                    </p:animEffect>
+                                  </p:childTnLst>
+                                </p:cTn>
+                              </p:par>
+                            </p:childTnLst>
+                          </p:cTn>
+                        </p:par>
+                      </p:childTnLst>
+                    </p:cTn>
+                  </p:par>
+                </p:childTnLst>
+              </p:cTn>
+              <p:prevCondLst>
+                <p:cond evt="onPrev" delay="0">
+                  <p:tgtEl>
+                    <p:sldTgt/>
+                  </p:tgtEl>
+                </p:cond>
+              </p:prevCondLst>
+              <p:nextCondLst>
+                <p:cond evt="onNext" delay="0">
+                  <p:tgtEl>
+                    <p:sldTgt/>
+                  </p:tgtEl>
+                </p:cond>
+              </p:nextCondLst>
+            </p:seq>
+          </p:childTnLst>
+        </p:cTn>
+      </p:par>
+    </p:tnLst>
+    <p:bldLst>
+      <p:bldP spid="6" grpId="0"/>
+      <p:bldP spid="7" grpId="0"/>
+      <p:bldP spid="8" grpId="0"/>
+      <p:bldP spid="9" grpId="0"/>
+      <p:bldP spid="10" grpId="0"/>
+      <p:bldP spid="11" grpId="0"/>
+      <p:bldP spid="13" grpId="0"/>
+      <p:bldP spid="14" grpId="0"/>
+    </p:bldLst>
+  </p:timing>
 </p:sld>
 </file>
 

--- a/docs/Cloud_Next_27_Agents_CLI_LangGraph.pptx
+++ b/docs/Cloud_Next_27_Agents_CLI_LangGraph.pptx
@@ -104,21 +104,35 @@
       </p:grpSpPr>
       <p:sp>
         <p:nvSpPr>
-          <p:cNvPr id="2" name="Rect 2"/>
+          <p:cNvPr id="2" name="GradientBar 2"/>
           <p:cNvSpPr/>
           <p:nvPr/>
         </p:nvSpPr>
         <p:spPr>
           <a:xfrm>
             <a:off x="0" y="0"/>
-            <a:ext cx="3048000" cy="63500"/>
+            <a:ext cx="12192000" cy="76200"/>
           </a:xfrm>
           <a:prstGeom prst="rect">
             <a:avLst/>
           </a:prstGeom>
-          <a:solidFill>
-            <a:srgbClr val="4285F4"/>
-          </a:solidFill>
+          <a:gradFill flip="none" rotWithShape="1">
+            <a:gsLst>
+              <a:gs pos="0">
+                <a:srgbClr val="4285F4"/>
+              </a:gs>
+              <a:gs pos="33000">
+                <a:srgbClr val="EA4335"/>
+              </a:gs>
+              <a:gs pos="66000">
+                <a:srgbClr val="FBBC04"/>
+              </a:gs>
+              <a:gs pos="100000">
+                <a:srgbClr val="34A853"/>
+              </a:gs>
+            </a:gsLst>
+            <a:lin ang="0" scaled="1"/>
+          </a:gradFill>
           <a:ln>
             <a:noFill/>
           </a:ln>
@@ -126,73 +140,7 @@
       </p:sp>
       <p:sp>
         <p:nvSpPr>
-          <p:cNvPr id="3" name="Rect 3"/>
-          <p:cNvSpPr/>
-          <p:nvPr/>
-        </p:nvSpPr>
-        <p:spPr>
-          <a:xfrm>
-            <a:off x="3048000" y="0"/>
-            <a:ext cx="3048000" cy="63500"/>
-          </a:xfrm>
-          <a:prstGeom prst="rect">
-            <a:avLst/>
-          </a:prstGeom>
-          <a:solidFill>
-            <a:srgbClr val="EA4335"/>
-          </a:solidFill>
-          <a:ln>
-            <a:noFill/>
-          </a:ln>
-        </p:spPr>
-      </p:sp>
-      <p:sp>
-        <p:nvSpPr>
-          <p:cNvPr id="4" name="Rect 4"/>
-          <p:cNvSpPr/>
-          <p:nvPr/>
-        </p:nvSpPr>
-        <p:spPr>
-          <a:xfrm>
-            <a:off x="6096000" y="0"/>
-            <a:ext cx="3048000" cy="63500"/>
-          </a:xfrm>
-          <a:prstGeom prst="rect">
-            <a:avLst/>
-          </a:prstGeom>
-          <a:solidFill>
-            <a:srgbClr val="FBBC04"/>
-          </a:solidFill>
-          <a:ln>
-            <a:noFill/>
-          </a:ln>
-        </p:spPr>
-      </p:sp>
-      <p:sp>
-        <p:nvSpPr>
-          <p:cNvPr id="5" name="Rect 5"/>
-          <p:cNvSpPr/>
-          <p:nvPr/>
-        </p:nvSpPr>
-        <p:spPr>
-          <a:xfrm>
-            <a:off x="9144000" y="0"/>
-            <a:ext cx="3048000" cy="63500"/>
-          </a:xfrm>
-          <a:prstGeom prst="rect">
-            <a:avLst/>
-          </a:prstGeom>
-          <a:solidFill>
-            <a:srgbClr val="34A853"/>
-          </a:solidFill>
-          <a:ln>
-            <a:noFill/>
-          </a:ln>
-        </p:spPr>
-      </p:sp>
-      <p:sp>
-        <p:nvSpPr>
-          <p:cNvPr id="6" name="Box 6"/>
+          <p:cNvPr id="3" name="Box 3"/>
           <p:cNvSpPr txBox="1"/>
           <p:nvPr/>
         </p:nvSpPr>
@@ -239,7 +187,7 @@
       </p:sp>
       <p:sp>
         <p:nvSpPr>
-          <p:cNvPr id="7" name="Box 7"/>
+          <p:cNvPr id="4" name="Box 4"/>
           <p:cNvSpPr txBox="1"/>
           <p:nvPr/>
         </p:nvSpPr>
@@ -280,7 +228,7 @@
       </p:sp>
       <p:sp>
         <p:nvSpPr>
-          <p:cNvPr id="8" name="Box 8"/>
+          <p:cNvPr id="5" name="Box 5"/>
           <p:cNvSpPr txBox="1"/>
           <p:nvPr/>
         </p:nvSpPr>
@@ -321,7 +269,7 @@
       </p:sp>
       <p:sp>
         <p:nvSpPr>
-          <p:cNvPr id="9" name="Box 9"/>
+          <p:cNvPr id="6" name="Box 6"/>
           <p:cNvSpPr txBox="1"/>
           <p:nvPr/>
         </p:nvSpPr>
@@ -362,7 +310,7 @@
       </p:sp>
       <p:sp>
         <p:nvSpPr>
-          <p:cNvPr id="10" name="Box 10"/>
+          <p:cNvPr id="7" name="Box 7"/>
           <p:cNvSpPr txBox="1"/>
           <p:nvPr/>
         </p:nvSpPr>
@@ -440,7 +388,7 @@
       </p:sp>
       <p:sp>
         <p:nvSpPr>
-          <p:cNvPr id="11" name="Box 11"/>
+          <p:cNvPr id="8" name="Box 8"/>
           <p:cNvSpPr txBox="1"/>
           <p:nvPr/>
         </p:nvSpPr>
@@ -481,7 +429,7 @@
       </p:sp>
       <p:sp>
         <p:nvSpPr>
-          <p:cNvPr id="12" name="Rect 12"/>
+          <p:cNvPr id="9" name="Rect 9"/>
           <p:cNvSpPr/>
           <p:nvPr/>
         </p:nvSpPr>
@@ -503,7 +451,7 @@
       </p:sp>
       <p:sp>
         <p:nvSpPr>
-          <p:cNvPr id="13" name="Box 13"/>
+          <p:cNvPr id="10" name="Box 10"/>
           <p:cNvSpPr txBox="1"/>
           <p:nvPr/>
         </p:nvSpPr>
@@ -550,7 +498,7 @@
       </p:sp>
       <p:sp>
         <p:nvSpPr>
-          <p:cNvPr id="14" name="Box 14"/>
+          <p:cNvPr id="11" name="Box 11"/>
           <p:cNvSpPr txBox="1"/>
           <p:nvPr/>
         </p:nvSpPr>
@@ -618,7 +566,7 @@
                             </p:stCondLst>
                             <p:childTnLst>
                               <p:par>
-                                <p:cTn id="5" presetID="2" presetClass="entr" presetSubtype="4" fill="hold" grpId="0" nodeType="withEffect">
+                                <p:cTn id="5" presetID="10" presetClass="entr" presetSubtype="0" fill="hold" grpId="0" nodeType="withEffect">
                                   <p:stCondLst>
                                     <p:cond delay="0"/>
                                   </p:stCondLst>
@@ -631,7 +579,7 @@
                                           </p:stCondLst>
                                         </p:cTn>
                                         <p:tgtEl>
-                                          <p:spTgt spid="6"/>
+                                          <p:spTgt spid="2"/>
                                         </p:tgtEl>
                                         <p:attrNameLst>
                                           <p:attrName>style.visibility</p:attrName>
@@ -645,7 +593,7 @@
                                       <p:cBhvr>
                                         <p:cTn id="7" dur="450"/>
                                         <p:tgtEl>
-                                          <p:spTgt spid="6"/>
+                                          <p:spTgt spid="2"/>
                                         </p:tgtEl>
                                       </p:cBhvr>
                                     </p:animEffect>
@@ -675,7 +623,7 @@
                                           </p:stCondLst>
                                         </p:cTn>
                                         <p:tgtEl>
-                                          <p:spTgt spid="7"/>
+                                          <p:spTgt spid="3"/>
                                         </p:tgtEl>
                                         <p:attrNameLst>
                                           <p:attrName>style.visibility</p:attrName>
@@ -689,7 +637,7 @@
                                       <p:cBhvr>
                                         <p:cTn id="11" dur="450"/>
                                         <p:tgtEl>
-                                          <p:spTgt spid="7"/>
+                                          <p:spTgt spid="3"/>
                                         </p:tgtEl>
                                       </p:cBhvr>
                                     </p:animEffect>
@@ -719,7 +667,7 @@
                                           </p:stCondLst>
                                         </p:cTn>
                                         <p:tgtEl>
-                                          <p:spTgt spid="8"/>
+                                          <p:spTgt spid="4"/>
                                         </p:tgtEl>
                                         <p:attrNameLst>
                                           <p:attrName>style.visibility</p:attrName>
@@ -733,7 +681,7 @@
                                       <p:cBhvr>
                                         <p:cTn id="15" dur="450"/>
                                         <p:tgtEl>
-                                          <p:spTgt spid="8"/>
+                                          <p:spTgt spid="4"/>
                                         </p:tgtEl>
                                       </p:cBhvr>
                                     </p:animEffect>
@@ -763,7 +711,7 @@
                                           </p:stCondLst>
                                         </p:cTn>
                                         <p:tgtEl>
-                                          <p:spTgt spid="9"/>
+                                          <p:spTgt spid="5"/>
                                         </p:tgtEl>
                                         <p:attrNameLst>
                                           <p:attrName>style.visibility</p:attrName>
@@ -777,7 +725,7 @@
                                       <p:cBhvr>
                                         <p:cTn id="19" dur="450"/>
                                         <p:tgtEl>
-                                          <p:spTgt spid="9"/>
+                                          <p:spTgt spid="5"/>
                                         </p:tgtEl>
                                       </p:cBhvr>
                                     </p:animEffect>
@@ -807,7 +755,7 @@
                                           </p:stCondLst>
                                         </p:cTn>
                                         <p:tgtEl>
-                                          <p:spTgt spid="10"/>
+                                          <p:spTgt spid="6"/>
                                         </p:tgtEl>
                                         <p:attrNameLst>
                                           <p:attrName>style.visibility</p:attrName>
@@ -821,7 +769,7 @@
                                       <p:cBhvr>
                                         <p:cTn id="23" dur="450"/>
                                         <p:tgtEl>
-                                          <p:spTgt spid="10"/>
+                                          <p:spTgt spid="6"/>
                                         </p:tgtEl>
                                       </p:cBhvr>
                                     </p:animEffect>
@@ -851,7 +799,7 @@
                                           </p:stCondLst>
                                         </p:cTn>
                                         <p:tgtEl>
-                                          <p:spTgt spid="11"/>
+                                          <p:spTgt spid="7"/>
                                         </p:tgtEl>
                                         <p:attrNameLst>
                                           <p:attrName>style.visibility</p:attrName>
@@ -865,7 +813,7 @@
                                       <p:cBhvr>
                                         <p:cTn id="27" dur="450"/>
                                         <p:tgtEl>
-                                          <p:spTgt spid="11"/>
+                                          <p:spTgt spid="7"/>
                                         </p:tgtEl>
                                       </p:cBhvr>
                                     </p:animEffect>
@@ -895,7 +843,7 @@
                                           </p:stCondLst>
                                         </p:cTn>
                                         <p:tgtEl>
-                                          <p:spTgt spid="13"/>
+                                          <p:spTgt spid="8"/>
                                         </p:tgtEl>
                                         <p:attrNameLst>
                                           <p:attrName>style.visibility</p:attrName>
@@ -909,7 +857,7 @@
                                       <p:cBhvr>
                                         <p:cTn id="31" dur="450"/>
                                         <p:tgtEl>
-                                          <p:spTgt spid="13"/>
+                                          <p:spTgt spid="8"/>
                                         </p:tgtEl>
                                       </p:cBhvr>
                                     </p:animEffect>
@@ -939,7 +887,7 @@
                                           </p:stCondLst>
                                         </p:cTn>
                                         <p:tgtEl>
-                                          <p:spTgt spid="14"/>
+                                          <p:spTgt spid="10"/>
                                         </p:tgtEl>
                                         <p:attrNameLst>
                                           <p:attrName>style.visibility</p:attrName>
@@ -953,7 +901,51 @@
                                       <p:cBhvr>
                                         <p:cTn id="35" dur="450"/>
                                         <p:tgtEl>
-                                          <p:spTgt spid="14"/>
+                                          <p:spTgt spid="10"/>
+                                        </p:tgtEl>
+                                      </p:cBhvr>
+                                    </p:animEffect>
+                                  </p:childTnLst>
+                                </p:cTn>
+                              </p:par>
+                            </p:childTnLst>
+                          </p:cTn>
+                        </p:par>
+                        <p:par>
+                          <p:cTn id="36" fill="hold">
+                            <p:stCondLst>
+                              <p:cond delay="180"/>
+                            </p:stCondLst>
+                            <p:childTnLst>
+                              <p:par>
+                                <p:cTn id="37" presetID="2" presetClass="entr" presetSubtype="4" fill="hold" grpId="0" nodeType="afterEffect">
+                                  <p:stCondLst>
+                                    <p:cond delay="0"/>
+                                  </p:stCondLst>
+                                  <p:childTnLst>
+                                    <p:set>
+                                      <p:cBhvr>
+                                        <p:cTn id="38" dur="1" fill="hold">
+                                          <p:stCondLst>
+                                            <p:cond delay="0"/>
+                                          </p:stCondLst>
+                                        </p:cTn>
+                                        <p:tgtEl>
+                                          <p:spTgt spid="11"/>
+                                        </p:tgtEl>
+                                        <p:attrNameLst>
+                                          <p:attrName>style.visibility</p:attrName>
+                                        </p:attrNameLst>
+                                      </p:cBhvr>
+                                      <p:to>
+                                        <p:strVal val="visible"/>
+                                      </p:to>
+                                    </p:set>
+                                    <p:animEffect transition="in" filter="fade">
+                                      <p:cBhvr>
+                                        <p:cTn id="39" dur="450"/>
+                                        <p:tgtEl>
+                                          <p:spTgt spid="11"/>
                                         </p:tgtEl>
                                       </p:cBhvr>
                                     </p:animEffect>
@@ -988,14 +980,15 @@
       </p:par>
     </p:tnLst>
     <p:bldLst>
+      <p:bldP spid="2" grpId="0"/>
+      <p:bldP spid="3" grpId="0"/>
+      <p:bldP spid="4" grpId="0"/>
+      <p:bldP spid="5" grpId="0"/>
       <p:bldP spid="6" grpId="0"/>
       <p:bldP spid="7" grpId="0"/>
       <p:bldP spid="8" grpId="0"/>
-      <p:bldP spid="9" grpId="0"/>
       <p:bldP spid="10" grpId="0"/>
       <p:bldP spid="11" grpId="0"/>
-      <p:bldP spid="13" grpId="0"/>
-      <p:bldP spid="14" grpId="0"/>
     </p:bldLst>
   </p:timing>
 </p:sld>
@@ -1028,21 +1021,35 @@
       </p:grpSpPr>
       <p:sp>
         <p:nvSpPr>
-          <p:cNvPr id="2" name="Rect 2"/>
+          <p:cNvPr id="2" name="GradientBar 2"/>
           <p:cNvSpPr/>
           <p:nvPr/>
         </p:nvSpPr>
         <p:spPr>
           <a:xfrm>
             <a:off x="0" y="0"/>
-            <a:ext cx="3048000" cy="63500"/>
+            <a:ext cx="12192000" cy="76200"/>
           </a:xfrm>
           <a:prstGeom prst="rect">
             <a:avLst/>
           </a:prstGeom>
-          <a:solidFill>
-            <a:srgbClr val="4285F4"/>
-          </a:solidFill>
+          <a:gradFill flip="none" rotWithShape="1">
+            <a:gsLst>
+              <a:gs pos="0">
+                <a:srgbClr val="4285F4"/>
+              </a:gs>
+              <a:gs pos="33000">
+                <a:srgbClr val="EA4335"/>
+              </a:gs>
+              <a:gs pos="66000">
+                <a:srgbClr val="FBBC04"/>
+              </a:gs>
+              <a:gs pos="100000">
+                <a:srgbClr val="34A853"/>
+              </a:gs>
+            </a:gsLst>
+            <a:lin ang="0" scaled="1"/>
+          </a:gradFill>
           <a:ln>
             <a:noFill/>
           </a:ln>
@@ -1050,73 +1057,7 @@
       </p:sp>
       <p:sp>
         <p:nvSpPr>
-          <p:cNvPr id="3" name="Rect 3"/>
-          <p:cNvSpPr/>
-          <p:nvPr/>
-        </p:nvSpPr>
-        <p:spPr>
-          <a:xfrm>
-            <a:off x="3048000" y="0"/>
-            <a:ext cx="3048000" cy="63500"/>
-          </a:xfrm>
-          <a:prstGeom prst="rect">
-            <a:avLst/>
-          </a:prstGeom>
-          <a:solidFill>
-            <a:srgbClr val="EA4335"/>
-          </a:solidFill>
-          <a:ln>
-            <a:noFill/>
-          </a:ln>
-        </p:spPr>
-      </p:sp>
-      <p:sp>
-        <p:nvSpPr>
-          <p:cNvPr id="4" name="Rect 4"/>
-          <p:cNvSpPr/>
-          <p:nvPr/>
-        </p:nvSpPr>
-        <p:spPr>
-          <a:xfrm>
-            <a:off x="6096000" y="0"/>
-            <a:ext cx="3048000" cy="63500"/>
-          </a:xfrm>
-          <a:prstGeom prst="rect">
-            <a:avLst/>
-          </a:prstGeom>
-          <a:solidFill>
-            <a:srgbClr val="FBBC04"/>
-          </a:solidFill>
-          <a:ln>
-            <a:noFill/>
-          </a:ln>
-        </p:spPr>
-      </p:sp>
-      <p:sp>
-        <p:nvSpPr>
-          <p:cNvPr id="5" name="Rect 5"/>
-          <p:cNvSpPr/>
-          <p:nvPr/>
-        </p:nvSpPr>
-        <p:spPr>
-          <a:xfrm>
-            <a:off x="9144000" y="0"/>
-            <a:ext cx="3048000" cy="63500"/>
-          </a:xfrm>
-          <a:prstGeom prst="rect">
-            <a:avLst/>
-          </a:prstGeom>
-          <a:solidFill>
-            <a:srgbClr val="34A853"/>
-          </a:solidFill>
-          <a:ln>
-            <a:noFill/>
-          </a:ln>
-        </p:spPr>
-      </p:sp>
-      <p:sp>
-        <p:nvSpPr>
-          <p:cNvPr id="6" name="Box 6"/>
+          <p:cNvPr id="3" name="Box 3"/>
           <p:cNvSpPr txBox="1"/>
           <p:nvPr/>
         </p:nvSpPr>
@@ -1157,7 +1098,7 @@
       </p:sp>
       <p:sp>
         <p:nvSpPr>
-          <p:cNvPr id="7" name="Box 7"/>
+          <p:cNvPr id="4" name="Box 4"/>
           <p:cNvSpPr txBox="1"/>
           <p:nvPr/>
         </p:nvSpPr>
@@ -1198,7 +1139,7 @@
       </p:sp>
       <p:sp>
         <p:nvSpPr>
-          <p:cNvPr id="8" name="Box 8"/>
+          <p:cNvPr id="5" name="Box 5"/>
           <p:cNvSpPr txBox="1"/>
           <p:nvPr/>
         </p:nvSpPr>
@@ -1239,7 +1180,7 @@
       </p:sp>
       <p:sp>
         <p:nvSpPr>
-          <p:cNvPr id="9" name="Box 9"/>
+          <p:cNvPr id="6" name="Box 6"/>
           <p:cNvSpPr txBox="1"/>
           <p:nvPr/>
         </p:nvSpPr>
@@ -1337,7 +1278,7 @@
       </p:sp>
       <p:sp>
         <p:nvSpPr>
-          <p:cNvPr id="10" name="Box 10"/>
+          <p:cNvPr id="7" name="Box 7"/>
           <p:cNvSpPr txBox="1"/>
           <p:nvPr/>
         </p:nvSpPr>
@@ -1435,7 +1376,7 @@
       </p:sp>
       <p:sp>
         <p:nvSpPr>
-          <p:cNvPr id="11" name="Box 11"/>
+          <p:cNvPr id="8" name="Box 8"/>
           <p:cNvSpPr txBox="1"/>
           <p:nvPr/>
         </p:nvSpPr>
@@ -1533,7 +1474,7 @@
       </p:sp>
       <p:sp>
         <p:nvSpPr>
-          <p:cNvPr id="12" name="Box 12"/>
+          <p:cNvPr id="9" name="Box 9"/>
           <p:cNvSpPr txBox="1"/>
           <p:nvPr/>
         </p:nvSpPr>
@@ -1631,7 +1572,7 @@
       </p:sp>
       <p:sp>
         <p:nvSpPr>
-          <p:cNvPr id="13" name="Box 13"/>
+          <p:cNvPr id="10" name="Box 10"/>
           <p:cNvSpPr txBox="1"/>
           <p:nvPr/>
         </p:nvSpPr>
@@ -1729,7 +1670,7 @@
       </p:sp>
       <p:sp>
         <p:nvSpPr>
-          <p:cNvPr id="14" name="Box 14"/>
+          <p:cNvPr id="11" name="Box 11"/>
           <p:cNvSpPr txBox="1"/>
           <p:nvPr/>
         </p:nvSpPr>
@@ -1827,7 +1768,7 @@
       </p:sp>
       <p:sp>
         <p:nvSpPr>
-          <p:cNvPr id="15" name="Rect 15"/>
+          <p:cNvPr id="12" name="Rect 12"/>
           <p:cNvSpPr/>
           <p:nvPr/>
         </p:nvSpPr>
@@ -1853,7 +1794,7 @@
       </p:sp>
       <p:sp>
         <p:nvSpPr>
-          <p:cNvPr id="16" name="Box 16"/>
+          <p:cNvPr id="13" name="Box 13"/>
           <p:cNvSpPr txBox="1"/>
           <p:nvPr/>
         </p:nvSpPr>
@@ -1911,7 +1852,7 @@
       </p:sp>
       <p:sp>
         <p:nvSpPr>
-          <p:cNvPr id="17" name="Box 17"/>
+          <p:cNvPr id="14" name="Box 14"/>
           <p:cNvSpPr txBox="1"/>
           <p:nvPr/>
         </p:nvSpPr>
@@ -1983,7 +1924,7 @@
                             </p:stCondLst>
                             <p:childTnLst>
                               <p:par>
-                                <p:cTn id="5" presetID="2" presetClass="entr" presetSubtype="4" fill="hold" grpId="0" nodeType="withEffect">
+                                <p:cTn id="5" presetID="10" presetClass="entr" presetSubtype="0" fill="hold" grpId="0" nodeType="withEffect">
                                   <p:stCondLst>
                                     <p:cond delay="0"/>
                                   </p:stCondLst>
@@ -1996,7 +1937,7 @@
                                           </p:stCondLst>
                                         </p:cTn>
                                         <p:tgtEl>
-                                          <p:spTgt spid="6"/>
+                                          <p:spTgt spid="2"/>
                                         </p:tgtEl>
                                         <p:attrNameLst>
                                           <p:attrName>style.visibility</p:attrName>
@@ -2010,7 +1951,7 @@
                                       <p:cBhvr>
                                         <p:cTn id="7" dur="450"/>
                                         <p:tgtEl>
-                                          <p:spTgt spid="6"/>
+                                          <p:spTgt spid="2"/>
                                         </p:tgtEl>
                                       </p:cBhvr>
                                     </p:animEffect>
@@ -2040,7 +1981,7 @@
                                           </p:stCondLst>
                                         </p:cTn>
                                         <p:tgtEl>
-                                          <p:spTgt spid="7"/>
+                                          <p:spTgt spid="3"/>
                                         </p:tgtEl>
                                         <p:attrNameLst>
                                           <p:attrName>style.visibility</p:attrName>
@@ -2054,7 +1995,7 @@
                                       <p:cBhvr>
                                         <p:cTn id="11" dur="450"/>
                                         <p:tgtEl>
-                                          <p:spTgt spid="7"/>
+                                          <p:spTgt spid="3"/>
                                         </p:tgtEl>
                                       </p:cBhvr>
                                     </p:animEffect>
@@ -2084,7 +2025,7 @@
                                           </p:stCondLst>
                                         </p:cTn>
                                         <p:tgtEl>
-                                          <p:spTgt spid="8"/>
+                                          <p:spTgt spid="4"/>
                                         </p:tgtEl>
                                         <p:attrNameLst>
                                           <p:attrName>style.visibility</p:attrName>
@@ -2098,7 +2039,7 @@
                                       <p:cBhvr>
                                         <p:cTn id="15" dur="450"/>
                                         <p:tgtEl>
-                                          <p:spTgt spid="8"/>
+                                          <p:spTgt spid="4"/>
                                         </p:tgtEl>
                                       </p:cBhvr>
                                     </p:animEffect>
@@ -2128,7 +2069,7 @@
                                           </p:stCondLst>
                                         </p:cTn>
                                         <p:tgtEl>
-                                          <p:spTgt spid="9"/>
+                                          <p:spTgt spid="5"/>
                                         </p:tgtEl>
                                         <p:attrNameLst>
                                           <p:attrName>style.visibility</p:attrName>
@@ -2142,7 +2083,7 @@
                                       <p:cBhvr>
                                         <p:cTn id="19" dur="450"/>
                                         <p:tgtEl>
-                                          <p:spTgt spid="9"/>
+                                          <p:spTgt spid="5"/>
                                         </p:tgtEl>
                                       </p:cBhvr>
                                     </p:animEffect>
@@ -2172,7 +2113,7 @@
                                           </p:stCondLst>
                                         </p:cTn>
                                         <p:tgtEl>
-                                          <p:spTgt spid="10"/>
+                                          <p:spTgt spid="6"/>
                                         </p:tgtEl>
                                         <p:attrNameLst>
                                           <p:attrName>style.visibility</p:attrName>
@@ -2186,7 +2127,7 @@
                                       <p:cBhvr>
                                         <p:cTn id="23" dur="450"/>
                                         <p:tgtEl>
-                                          <p:spTgt spid="10"/>
+                                          <p:spTgt spid="6"/>
                                         </p:tgtEl>
                                       </p:cBhvr>
                                     </p:animEffect>
@@ -2216,7 +2157,7 @@
                                           </p:stCondLst>
                                         </p:cTn>
                                         <p:tgtEl>
-                                          <p:spTgt spid="11"/>
+                                          <p:spTgt spid="7"/>
                                         </p:tgtEl>
                                         <p:attrNameLst>
                                           <p:attrName>style.visibility</p:attrName>
@@ -2230,7 +2171,7 @@
                                       <p:cBhvr>
                                         <p:cTn id="27" dur="450"/>
                                         <p:tgtEl>
-                                          <p:spTgt spid="11"/>
+                                          <p:spTgt spid="7"/>
                                         </p:tgtEl>
                                       </p:cBhvr>
                                     </p:animEffect>
@@ -2260,7 +2201,7 @@
                                           </p:stCondLst>
                                         </p:cTn>
                                         <p:tgtEl>
-                                          <p:spTgt spid="12"/>
+                                          <p:spTgt spid="8"/>
                                         </p:tgtEl>
                                         <p:attrNameLst>
                                           <p:attrName>style.visibility</p:attrName>
@@ -2274,7 +2215,7 @@
                                       <p:cBhvr>
                                         <p:cTn id="31" dur="450"/>
                                         <p:tgtEl>
-                                          <p:spTgt spid="12"/>
+                                          <p:spTgt spid="8"/>
                                         </p:tgtEl>
                                       </p:cBhvr>
                                     </p:animEffect>
@@ -2304,7 +2245,7 @@
                                           </p:stCondLst>
                                         </p:cTn>
                                         <p:tgtEl>
-                                          <p:spTgt spid="13"/>
+                                          <p:spTgt spid="9"/>
                                         </p:tgtEl>
                                         <p:attrNameLst>
                                           <p:attrName>style.visibility</p:attrName>
@@ -2318,7 +2259,7 @@
                                       <p:cBhvr>
                                         <p:cTn id="35" dur="450"/>
                                         <p:tgtEl>
-                                          <p:spTgt spid="13"/>
+                                          <p:spTgt spid="9"/>
                                         </p:tgtEl>
                                       </p:cBhvr>
                                     </p:animEffect>
@@ -2348,7 +2289,7 @@
                                           </p:stCondLst>
                                         </p:cTn>
                                         <p:tgtEl>
-                                          <p:spTgt spid="14"/>
+                                          <p:spTgt spid="10"/>
                                         </p:tgtEl>
                                         <p:attrNameLst>
                                           <p:attrName>style.visibility</p:attrName>
@@ -2362,7 +2303,7 @@
                                       <p:cBhvr>
                                         <p:cTn id="39" dur="450"/>
                                         <p:tgtEl>
-                                          <p:spTgt spid="14"/>
+                                          <p:spTgt spid="10"/>
                                         </p:tgtEl>
                                       </p:cBhvr>
                                     </p:animEffect>
@@ -2392,7 +2333,7 @@
                                           </p:stCondLst>
                                         </p:cTn>
                                         <p:tgtEl>
-                                          <p:spTgt spid="16"/>
+                                          <p:spTgt spid="11"/>
                                         </p:tgtEl>
                                         <p:attrNameLst>
                                           <p:attrName>style.visibility</p:attrName>
@@ -2406,7 +2347,7 @@
                                       <p:cBhvr>
                                         <p:cTn id="43" dur="450"/>
                                         <p:tgtEl>
-                                          <p:spTgt spid="16"/>
+                                          <p:spTgt spid="11"/>
                                         </p:tgtEl>
                                       </p:cBhvr>
                                     </p:animEffect>
@@ -2436,7 +2377,7 @@
                                           </p:stCondLst>
                                         </p:cTn>
                                         <p:tgtEl>
-                                          <p:spTgt spid="17"/>
+                                          <p:spTgt spid="13"/>
                                         </p:tgtEl>
                                         <p:attrNameLst>
                                           <p:attrName>style.visibility</p:attrName>
@@ -2450,7 +2391,51 @@
                                       <p:cBhvr>
                                         <p:cTn id="47" dur="450"/>
                                         <p:tgtEl>
-                                          <p:spTgt spid="17"/>
+                                          <p:spTgt spid="13"/>
+                                        </p:tgtEl>
+                                      </p:cBhvr>
+                                    </p:animEffect>
+                                  </p:childTnLst>
+                                </p:cTn>
+                              </p:par>
+                            </p:childTnLst>
+                          </p:cTn>
+                        </p:par>
+                        <p:par>
+                          <p:cTn id="48" fill="hold">
+                            <p:stCondLst>
+                              <p:cond delay="180"/>
+                            </p:stCondLst>
+                            <p:childTnLst>
+                              <p:par>
+                                <p:cTn id="49" presetID="2" presetClass="entr" presetSubtype="4" fill="hold" grpId="0" nodeType="afterEffect">
+                                  <p:stCondLst>
+                                    <p:cond delay="0"/>
+                                  </p:stCondLst>
+                                  <p:childTnLst>
+                                    <p:set>
+                                      <p:cBhvr>
+                                        <p:cTn id="50" dur="1" fill="hold">
+                                          <p:stCondLst>
+                                            <p:cond delay="0"/>
+                                          </p:stCondLst>
+                                        </p:cTn>
+                                        <p:tgtEl>
+                                          <p:spTgt spid="14"/>
+                                        </p:tgtEl>
+                                        <p:attrNameLst>
+                                          <p:attrName>style.visibility</p:attrName>
+                                        </p:attrNameLst>
+                                      </p:cBhvr>
+                                      <p:to>
+                                        <p:strVal val="visible"/>
+                                      </p:to>
+                                    </p:set>
+                                    <p:animEffect transition="in" filter="fade">
+                                      <p:cBhvr>
+                                        <p:cTn id="51" dur="450"/>
+                                        <p:tgtEl>
+                                          <p:spTgt spid="14"/>
                                         </p:tgtEl>
                                       </p:cBhvr>
                                     </p:animEffect>
@@ -2485,17 +2470,18 @@
       </p:par>
     </p:tnLst>
     <p:bldLst>
+      <p:bldP spid="2" grpId="0"/>
+      <p:bldP spid="3" grpId="0"/>
+      <p:bldP spid="4" grpId="0"/>
+      <p:bldP spid="5" grpId="0"/>
       <p:bldP spid="6" grpId="0"/>
       <p:bldP spid="7" grpId="0"/>
       <p:bldP spid="8" grpId="0"/>
       <p:bldP spid="9" grpId="0"/>
       <p:bldP spid="10" grpId="0"/>
       <p:bldP spid="11" grpId="0"/>
-      <p:bldP spid="12" grpId="0"/>
       <p:bldP spid="13" grpId="0"/>
       <p:bldP spid="14" grpId="0"/>
-      <p:bldP spid="16" grpId="0"/>
-      <p:bldP spid="17" grpId="0"/>
     </p:bldLst>
   </p:timing>
 </p:sld>
@@ -2528,21 +2514,35 @@
       </p:grpSpPr>
       <p:sp>
         <p:nvSpPr>
-          <p:cNvPr id="2" name="Rect 2"/>
+          <p:cNvPr id="2" name="GradientBar 2"/>
           <p:cNvSpPr/>
           <p:nvPr/>
         </p:nvSpPr>
         <p:spPr>
           <a:xfrm>
             <a:off x="0" y="0"/>
-            <a:ext cx="3048000" cy="63500"/>
+            <a:ext cx="12192000" cy="76200"/>
           </a:xfrm>
           <a:prstGeom prst="rect">
             <a:avLst/>
           </a:prstGeom>
-          <a:solidFill>
-            <a:srgbClr val="4285F4"/>
-          </a:solidFill>
+          <a:gradFill flip="none" rotWithShape="1">
+            <a:gsLst>
+              <a:gs pos="0">
+                <a:srgbClr val="4285F4"/>
+              </a:gs>
+              <a:gs pos="33000">
+                <a:srgbClr val="EA4335"/>
+              </a:gs>
+              <a:gs pos="66000">
+                <a:srgbClr val="FBBC04"/>
+              </a:gs>
+              <a:gs pos="100000">
+                <a:srgbClr val="34A853"/>
+              </a:gs>
+            </a:gsLst>
+            <a:lin ang="0" scaled="1"/>
+          </a:gradFill>
           <a:ln>
             <a:noFill/>
           </a:ln>
@@ -2550,73 +2550,7 @@
       </p:sp>
       <p:sp>
         <p:nvSpPr>
-          <p:cNvPr id="3" name="Rect 3"/>
-          <p:cNvSpPr/>
-          <p:nvPr/>
-        </p:nvSpPr>
-        <p:spPr>
-          <a:xfrm>
-            <a:off x="3048000" y="0"/>
-            <a:ext cx="3048000" cy="63500"/>
-          </a:xfrm>
-          <a:prstGeom prst="rect">
-            <a:avLst/>
-          </a:prstGeom>
-          <a:solidFill>
-            <a:srgbClr val="EA4335"/>
-          </a:solidFill>
-          <a:ln>
-            <a:noFill/>
-          </a:ln>
-        </p:spPr>
-      </p:sp>
-      <p:sp>
-        <p:nvSpPr>
-          <p:cNvPr id="4" name="Rect 4"/>
-          <p:cNvSpPr/>
-          <p:nvPr/>
-        </p:nvSpPr>
-        <p:spPr>
-          <a:xfrm>
-            <a:off x="6096000" y="0"/>
-            <a:ext cx="3048000" cy="63500"/>
-          </a:xfrm>
-          <a:prstGeom prst="rect">
-            <a:avLst/>
-          </a:prstGeom>
-          <a:solidFill>
-            <a:srgbClr val="FBBC04"/>
-          </a:solidFill>
-          <a:ln>
-            <a:noFill/>
-          </a:ln>
-        </p:spPr>
-      </p:sp>
-      <p:sp>
-        <p:nvSpPr>
-          <p:cNvPr id="5" name="Rect 5"/>
-          <p:cNvSpPr/>
-          <p:nvPr/>
-        </p:nvSpPr>
-        <p:spPr>
-          <a:xfrm>
-            <a:off x="9144000" y="0"/>
-            <a:ext cx="3048000" cy="63500"/>
-          </a:xfrm>
-          <a:prstGeom prst="rect">
-            <a:avLst/>
-          </a:prstGeom>
-          <a:solidFill>
-            <a:srgbClr val="34A853"/>
-          </a:solidFill>
-          <a:ln>
-            <a:noFill/>
-          </a:ln>
-        </p:spPr>
-      </p:sp>
-      <p:sp>
-        <p:nvSpPr>
-          <p:cNvPr id="6" name="Box 6"/>
+          <p:cNvPr id="3" name="Box 3"/>
           <p:cNvSpPr txBox="1"/>
           <p:nvPr/>
         </p:nvSpPr>
@@ -2657,7 +2591,7 @@
       </p:sp>
       <p:sp>
         <p:nvSpPr>
-          <p:cNvPr id="7" name="Box 7"/>
+          <p:cNvPr id="4" name="Box 4"/>
           <p:cNvSpPr txBox="1"/>
           <p:nvPr/>
         </p:nvSpPr>
@@ -2698,7 +2632,7 @@
       </p:sp>
       <p:sp>
         <p:nvSpPr>
-          <p:cNvPr id="8" name="Box 8"/>
+          <p:cNvPr id="5" name="Box 5"/>
           <p:cNvSpPr txBox="1"/>
           <p:nvPr/>
         </p:nvSpPr>
@@ -2739,7 +2673,7 @@
       </p:sp>
       <p:sp>
         <p:nvSpPr>
-          <p:cNvPr id="9" name="Box 9"/>
+          <p:cNvPr id="6" name="Box 6"/>
           <p:cNvSpPr txBox="1"/>
           <p:nvPr/>
         </p:nvSpPr>
@@ -2780,7 +2714,7 @@
       </p:sp>
       <p:sp>
         <p:nvSpPr>
-          <p:cNvPr id="10" name="Box 10"/>
+          <p:cNvPr id="7" name="Box 7"/>
           <p:cNvSpPr txBox="1"/>
           <p:nvPr/>
         </p:nvSpPr>
@@ -2895,7 +2829,7 @@
       </p:sp>
       <p:sp>
         <p:nvSpPr>
-          <p:cNvPr id="11" name="Box 11"/>
+          <p:cNvPr id="8" name="Box 8"/>
           <p:cNvSpPr txBox="1"/>
           <p:nvPr/>
         </p:nvSpPr>
@@ -3010,7 +2944,7 @@
       </p:sp>
       <p:sp>
         <p:nvSpPr>
-          <p:cNvPr id="12" name="Box 12"/>
+          <p:cNvPr id="9" name="Box 9"/>
           <p:cNvSpPr txBox="1"/>
           <p:nvPr/>
         </p:nvSpPr>
@@ -3125,7 +3059,7 @@
       </p:sp>
       <p:sp>
         <p:nvSpPr>
-          <p:cNvPr id="13" name="Rect 13"/>
+          <p:cNvPr id="10" name="Rect 10"/>
           <p:cNvSpPr/>
           <p:nvPr/>
         </p:nvSpPr>
@@ -3147,7 +3081,7 @@
       </p:sp>
       <p:sp>
         <p:nvSpPr>
-          <p:cNvPr id="14" name="Box 14"/>
+          <p:cNvPr id="11" name="Box 11"/>
           <p:cNvSpPr txBox="1"/>
           <p:nvPr/>
         </p:nvSpPr>
@@ -3188,7 +3122,7 @@
       </p:sp>
       <p:sp>
         <p:nvSpPr>
-          <p:cNvPr id="15" name="Box 15"/>
+          <p:cNvPr id="12" name="Box 12"/>
           <p:cNvSpPr txBox="1"/>
           <p:nvPr/>
         </p:nvSpPr>
@@ -3256,7 +3190,7 @@
                             </p:stCondLst>
                             <p:childTnLst>
                               <p:par>
-                                <p:cTn id="5" presetID="2" presetClass="entr" presetSubtype="4" fill="hold" grpId="0" nodeType="withEffect">
+                                <p:cTn id="5" presetID="10" presetClass="entr" presetSubtype="0" fill="hold" grpId="0" nodeType="withEffect">
                                   <p:stCondLst>
                                     <p:cond delay="0"/>
                                   </p:stCondLst>
@@ -3269,7 +3203,7 @@
                                           </p:stCondLst>
                                         </p:cTn>
                                         <p:tgtEl>
-                                          <p:spTgt spid="6"/>
+                                          <p:spTgt spid="2"/>
                                         </p:tgtEl>
                                         <p:attrNameLst>
                                           <p:attrName>style.visibility</p:attrName>
@@ -3283,7 +3217,7 @@
                                       <p:cBhvr>
                                         <p:cTn id="7" dur="450"/>
                                         <p:tgtEl>
-                                          <p:spTgt spid="6"/>
+                                          <p:spTgt spid="2"/>
                                         </p:tgtEl>
                                       </p:cBhvr>
                                     </p:animEffect>
@@ -3313,7 +3247,7 @@
                                           </p:stCondLst>
                                         </p:cTn>
                                         <p:tgtEl>
-                                          <p:spTgt spid="7"/>
+                                          <p:spTgt spid="3"/>
                                         </p:tgtEl>
                                         <p:attrNameLst>
                                           <p:attrName>style.visibility</p:attrName>
@@ -3327,7 +3261,7 @@
                                       <p:cBhvr>
                                         <p:cTn id="11" dur="450"/>
                                         <p:tgtEl>
-                                          <p:spTgt spid="7"/>
+                                          <p:spTgt spid="3"/>
                                         </p:tgtEl>
                                       </p:cBhvr>
                                     </p:animEffect>
@@ -3357,7 +3291,7 @@
                                           </p:stCondLst>
                                         </p:cTn>
                                         <p:tgtEl>
-                                          <p:spTgt spid="8"/>
+                                          <p:spTgt spid="4"/>
                                         </p:tgtEl>
                                         <p:attrNameLst>
                                           <p:attrName>style.visibility</p:attrName>
@@ -3371,7 +3305,7 @@
                                       <p:cBhvr>
                                         <p:cTn id="15" dur="450"/>
                                         <p:tgtEl>
-                                          <p:spTgt spid="8"/>
+                                          <p:spTgt spid="4"/>
                                         </p:tgtEl>
                                       </p:cBhvr>
                                     </p:animEffect>
@@ -3401,7 +3335,7 @@
                                           </p:stCondLst>
                                         </p:cTn>
                                         <p:tgtEl>
-                                          <p:spTgt spid="9"/>
+                                          <p:spTgt spid="5"/>
                                         </p:tgtEl>
                                         <p:attrNameLst>
                                           <p:attrName>style.visibility</p:attrName>
@@ -3415,7 +3349,7 @@
                                       <p:cBhvr>
                                         <p:cTn id="19" dur="450"/>
                                         <p:tgtEl>
-                                          <p:spTgt spid="9"/>
+                                          <p:spTgt spid="5"/>
                                         </p:tgtEl>
                                       </p:cBhvr>
                                     </p:animEffect>
@@ -3445,7 +3379,7 @@
                                           </p:stCondLst>
                                         </p:cTn>
                                         <p:tgtEl>
-                                          <p:spTgt spid="10"/>
+                                          <p:spTgt spid="6"/>
                                         </p:tgtEl>
                                         <p:attrNameLst>
                                           <p:attrName>style.visibility</p:attrName>
@@ -3459,7 +3393,7 @@
                                       <p:cBhvr>
                                         <p:cTn id="23" dur="450"/>
                                         <p:tgtEl>
-                                          <p:spTgt spid="10"/>
+                                          <p:spTgt spid="6"/>
                                         </p:tgtEl>
                                       </p:cBhvr>
                                     </p:animEffect>
@@ -3489,7 +3423,7 @@
                                           </p:stCondLst>
                                         </p:cTn>
                                         <p:tgtEl>
-                                          <p:spTgt spid="11"/>
+                                          <p:spTgt spid="7"/>
                                         </p:tgtEl>
                                         <p:attrNameLst>
                                           <p:attrName>style.visibility</p:attrName>
@@ -3503,7 +3437,7 @@
                                       <p:cBhvr>
                                         <p:cTn id="27" dur="450"/>
                                         <p:tgtEl>
-                                          <p:spTgt spid="11"/>
+                                          <p:spTgt spid="7"/>
                                         </p:tgtEl>
                                       </p:cBhvr>
                                     </p:animEffect>
@@ -3533,7 +3467,7 @@
                                           </p:stCondLst>
                                         </p:cTn>
                                         <p:tgtEl>
-                                          <p:spTgt spid="12"/>
+                                          <p:spTgt spid="8"/>
                                         </p:tgtEl>
                                         <p:attrNameLst>
                                           <p:attrName>style.visibility</p:attrName>
@@ -3547,7 +3481,7 @@
                                       <p:cBhvr>
                                         <p:cTn id="31" dur="450"/>
                                         <p:tgtEl>
-                                          <p:spTgt spid="12"/>
+                                          <p:spTgt spid="8"/>
                                         </p:tgtEl>
                                       </p:cBhvr>
                                     </p:animEffect>
@@ -3577,7 +3511,7 @@
                                           </p:stCondLst>
                                         </p:cTn>
                                         <p:tgtEl>
-                                          <p:spTgt spid="14"/>
+                                          <p:spTgt spid="9"/>
                                         </p:tgtEl>
                                         <p:attrNameLst>
                                           <p:attrName>style.visibility</p:attrName>
@@ -3591,7 +3525,7 @@
                                       <p:cBhvr>
                                         <p:cTn id="35" dur="450"/>
                                         <p:tgtEl>
-                                          <p:spTgt spid="14"/>
+                                          <p:spTgt spid="9"/>
                                         </p:tgtEl>
                                       </p:cBhvr>
                                     </p:animEffect>
@@ -3621,7 +3555,7 @@
                                           </p:stCondLst>
                                         </p:cTn>
                                         <p:tgtEl>
-                                          <p:spTgt spid="15"/>
+                                          <p:spTgt spid="11"/>
                                         </p:tgtEl>
                                         <p:attrNameLst>
                                           <p:attrName>style.visibility</p:attrName>
@@ -3635,7 +3569,51 @@
                                       <p:cBhvr>
                                         <p:cTn id="39" dur="450"/>
                                         <p:tgtEl>
-                                          <p:spTgt spid="15"/>
+                                          <p:spTgt spid="11"/>
+                                        </p:tgtEl>
+                                      </p:cBhvr>
+                                    </p:animEffect>
+                                  </p:childTnLst>
+                                </p:cTn>
+                              </p:par>
+                            </p:childTnLst>
+                          </p:cTn>
+                        </p:par>
+                        <p:par>
+                          <p:cTn id="40" fill="hold">
+                            <p:stCondLst>
+                              <p:cond delay="180"/>
+                            </p:stCondLst>
+                            <p:childTnLst>
+                              <p:par>
+                                <p:cTn id="41" presetID="2" presetClass="entr" presetSubtype="4" fill="hold" grpId="0" nodeType="afterEffect">
+                                  <p:stCondLst>
+                                    <p:cond delay="0"/>
+                                  </p:stCondLst>
+                                  <p:childTnLst>
+                                    <p:set>
+                                      <p:cBhvr>
+                                        <p:cTn id="42" dur="1" fill="hold">
+                                          <p:stCondLst>
+                                            <p:cond delay="0"/>
+                                          </p:stCondLst>
+                                        </p:cTn>
+                                        <p:tgtEl>
+                                          <p:spTgt spid="12"/>
+                                        </p:tgtEl>
+                                        <p:attrNameLst>
+                                          <p:attrName>style.visibility</p:attrName>
+                                        </p:attrNameLst>
+                                      </p:cBhvr>
+                                      <p:to>
+                                        <p:strVal val="visible"/>
+                                      </p:to>
+                                    </p:set>
+                                    <p:animEffect transition="in" filter="fade">
+                                      <p:cBhvr>
+                                        <p:cTn id="43" dur="450"/>
+                                        <p:tgtEl>
+                                          <p:spTgt spid="12"/>
                                         </p:tgtEl>
                                       </p:cBhvr>
                                     </p:animEffect>
@@ -3670,15 +3648,16 @@
       </p:par>
     </p:tnLst>
     <p:bldLst>
+      <p:bldP spid="2" grpId="0"/>
+      <p:bldP spid="3" grpId="0"/>
+      <p:bldP spid="4" grpId="0"/>
+      <p:bldP spid="5" grpId="0"/>
       <p:bldP spid="6" grpId="0"/>
       <p:bldP spid="7" grpId="0"/>
       <p:bldP spid="8" grpId="0"/>
       <p:bldP spid="9" grpId="0"/>
-      <p:bldP spid="10" grpId="0"/>
       <p:bldP spid="11" grpId="0"/>
       <p:bldP spid="12" grpId="0"/>
-      <p:bldP spid="14" grpId="0"/>
-      <p:bldP spid="15" grpId="0"/>
     </p:bldLst>
   </p:timing>
 </p:sld>
@@ -3711,21 +3690,35 @@
       </p:grpSpPr>
       <p:sp>
         <p:nvSpPr>
-          <p:cNvPr id="2" name="Rect 2"/>
+          <p:cNvPr id="2" name="GradientBar 2"/>
           <p:cNvSpPr/>
           <p:nvPr/>
         </p:nvSpPr>
         <p:spPr>
           <a:xfrm>
             <a:off x="0" y="0"/>
-            <a:ext cx="3048000" cy="63500"/>
+            <a:ext cx="12192000" cy="76200"/>
           </a:xfrm>
           <a:prstGeom prst="rect">
             <a:avLst/>
           </a:prstGeom>
-          <a:solidFill>
-            <a:srgbClr val="4285F4"/>
-          </a:solidFill>
+          <a:gradFill flip="none" rotWithShape="1">
+            <a:gsLst>
+              <a:gs pos="0">
+                <a:srgbClr val="4285F4"/>
+              </a:gs>
+              <a:gs pos="33000">
+                <a:srgbClr val="EA4335"/>
+              </a:gs>
+              <a:gs pos="66000">
+                <a:srgbClr val="FBBC04"/>
+              </a:gs>
+              <a:gs pos="100000">
+                <a:srgbClr val="34A853"/>
+              </a:gs>
+            </a:gsLst>
+            <a:lin ang="0" scaled="1"/>
+          </a:gradFill>
           <a:ln>
             <a:noFill/>
           </a:ln>
@@ -3733,73 +3726,7 @@
       </p:sp>
       <p:sp>
         <p:nvSpPr>
-          <p:cNvPr id="3" name="Rect 3"/>
-          <p:cNvSpPr/>
-          <p:nvPr/>
-        </p:nvSpPr>
-        <p:spPr>
-          <a:xfrm>
-            <a:off x="3048000" y="0"/>
-            <a:ext cx="3048000" cy="63500"/>
-          </a:xfrm>
-          <a:prstGeom prst="rect">
-            <a:avLst/>
-          </a:prstGeom>
-          <a:solidFill>
-            <a:srgbClr val="EA4335"/>
-          </a:solidFill>
-          <a:ln>
-            <a:noFill/>
-          </a:ln>
-        </p:spPr>
-      </p:sp>
-      <p:sp>
-        <p:nvSpPr>
-          <p:cNvPr id="4" name="Rect 4"/>
-          <p:cNvSpPr/>
-          <p:nvPr/>
-        </p:nvSpPr>
-        <p:spPr>
-          <a:xfrm>
-            <a:off x="6096000" y="0"/>
-            <a:ext cx="3048000" cy="63500"/>
-          </a:xfrm>
-          <a:prstGeom prst="rect">
-            <a:avLst/>
-          </a:prstGeom>
-          <a:solidFill>
-            <a:srgbClr val="FBBC04"/>
-          </a:solidFill>
-          <a:ln>
-            <a:noFill/>
-          </a:ln>
-        </p:spPr>
-      </p:sp>
-      <p:sp>
-        <p:nvSpPr>
-          <p:cNvPr id="5" name="Rect 5"/>
-          <p:cNvSpPr/>
-          <p:nvPr/>
-        </p:nvSpPr>
-        <p:spPr>
-          <a:xfrm>
-            <a:off x="9144000" y="0"/>
-            <a:ext cx="3048000" cy="63500"/>
-          </a:xfrm>
-          <a:prstGeom prst="rect">
-            <a:avLst/>
-          </a:prstGeom>
-          <a:solidFill>
-            <a:srgbClr val="34A853"/>
-          </a:solidFill>
-          <a:ln>
-            <a:noFill/>
-          </a:ln>
-        </p:spPr>
-      </p:sp>
-      <p:sp>
-        <p:nvSpPr>
-          <p:cNvPr id="6" name="Box 6"/>
+          <p:cNvPr id="3" name="Box 3"/>
           <p:cNvSpPr txBox="1"/>
           <p:nvPr/>
         </p:nvSpPr>
@@ -3840,7 +3767,7 @@
       </p:sp>
       <p:sp>
         <p:nvSpPr>
-          <p:cNvPr id="7" name="Box 7"/>
+          <p:cNvPr id="4" name="Box 4"/>
           <p:cNvSpPr txBox="1"/>
           <p:nvPr/>
         </p:nvSpPr>
@@ -3881,7 +3808,7 @@
       </p:sp>
       <p:sp>
         <p:nvSpPr>
-          <p:cNvPr id="8" name="Box 8"/>
+          <p:cNvPr id="5" name="Box 5"/>
           <p:cNvSpPr txBox="1"/>
           <p:nvPr/>
         </p:nvSpPr>
@@ -3922,7 +3849,7 @@
       </p:sp>
       <p:sp>
         <p:nvSpPr>
-          <p:cNvPr id="9" name="Box 9"/>
+          <p:cNvPr id="6" name="Box 6"/>
           <p:cNvSpPr txBox="1"/>
           <p:nvPr/>
         </p:nvSpPr>
@@ -3963,7 +3890,7 @@
       </p:sp>
       <p:sp>
         <p:nvSpPr>
-          <p:cNvPr id="10" name="Rect 10"/>
+          <p:cNvPr id="7" name="Rect 7"/>
           <p:cNvSpPr/>
           <p:nvPr/>
         </p:nvSpPr>
@@ -3989,7 +3916,7 @@
       </p:sp>
       <p:sp>
         <p:nvSpPr>
-          <p:cNvPr id="11" name="Box 11"/>
+          <p:cNvPr id="8" name="Box 8"/>
           <p:cNvSpPr txBox="1"/>
           <p:nvPr/>
         </p:nvSpPr>
@@ -4034,7 +3961,7 @@
       </p:sp>
       <p:sp>
         <p:nvSpPr>
-          <p:cNvPr id="12" name="Box 12"/>
+          <p:cNvPr id="9" name="Box 9"/>
           <p:cNvSpPr txBox="1"/>
           <p:nvPr/>
         </p:nvSpPr>
@@ -4109,7 +4036,7 @@
       </p:sp>
       <p:sp>
         <p:nvSpPr>
-          <p:cNvPr id="13" name="Rect 13"/>
+          <p:cNvPr id="10" name="Rect 10"/>
           <p:cNvSpPr/>
           <p:nvPr/>
         </p:nvSpPr>
@@ -4131,7 +4058,7 @@
       </p:sp>
       <p:sp>
         <p:nvSpPr>
-          <p:cNvPr id="14" name="Box 14"/>
+          <p:cNvPr id="11" name="Box 11"/>
           <p:cNvSpPr txBox="1"/>
           <p:nvPr/>
         </p:nvSpPr>
@@ -4172,7 +4099,7 @@
       </p:sp>
       <p:sp>
         <p:nvSpPr>
-          <p:cNvPr id="15" name="Rect 15"/>
+          <p:cNvPr id="12" name="Rect 12"/>
           <p:cNvSpPr/>
           <p:nvPr/>
         </p:nvSpPr>
@@ -4198,7 +4125,7 @@
       </p:sp>
       <p:sp>
         <p:nvSpPr>
-          <p:cNvPr id="16" name="Box 16"/>
+          <p:cNvPr id="13" name="Box 13"/>
           <p:cNvSpPr txBox="1"/>
           <p:nvPr/>
         </p:nvSpPr>
@@ -4243,7 +4170,7 @@
       </p:sp>
       <p:sp>
         <p:nvSpPr>
-          <p:cNvPr id="17" name="Box 17"/>
+          <p:cNvPr id="14" name="Box 14"/>
           <p:cNvSpPr txBox="1"/>
           <p:nvPr/>
         </p:nvSpPr>
@@ -4318,7 +4245,7 @@
       </p:sp>
       <p:sp>
         <p:nvSpPr>
-          <p:cNvPr id="18" name="Rect 18"/>
+          <p:cNvPr id="15" name="Rect 15"/>
           <p:cNvSpPr/>
           <p:nvPr/>
         </p:nvSpPr>
@@ -4340,7 +4267,7 @@
       </p:sp>
       <p:sp>
         <p:nvSpPr>
-          <p:cNvPr id="19" name="Box 19"/>
+          <p:cNvPr id="16" name="Box 16"/>
           <p:cNvSpPr txBox="1"/>
           <p:nvPr/>
         </p:nvSpPr>
@@ -4381,7 +4308,7 @@
       </p:sp>
       <p:sp>
         <p:nvSpPr>
-          <p:cNvPr id="20" name="Rect 20"/>
+          <p:cNvPr id="17" name="Rect 17"/>
           <p:cNvSpPr/>
           <p:nvPr/>
         </p:nvSpPr>
@@ -4407,7 +4334,7 @@
       </p:sp>
       <p:sp>
         <p:nvSpPr>
-          <p:cNvPr id="21" name="Box 21"/>
+          <p:cNvPr id="18" name="Box 18"/>
           <p:cNvSpPr txBox="1"/>
           <p:nvPr/>
         </p:nvSpPr>
@@ -4452,7 +4379,7 @@
       </p:sp>
       <p:sp>
         <p:nvSpPr>
-          <p:cNvPr id="22" name="Box 22"/>
+          <p:cNvPr id="19" name="Box 19"/>
           <p:cNvSpPr txBox="1"/>
           <p:nvPr/>
         </p:nvSpPr>
@@ -4527,7 +4454,7 @@
       </p:sp>
       <p:sp>
         <p:nvSpPr>
-          <p:cNvPr id="23" name="Rect 23"/>
+          <p:cNvPr id="20" name="Rect 20"/>
           <p:cNvSpPr/>
           <p:nvPr/>
         </p:nvSpPr>
@@ -4549,7 +4476,7 @@
       </p:sp>
       <p:sp>
         <p:nvSpPr>
-          <p:cNvPr id="24" name="Box 24"/>
+          <p:cNvPr id="21" name="Box 21"/>
           <p:cNvSpPr txBox="1"/>
           <p:nvPr/>
         </p:nvSpPr>
@@ -4590,7 +4517,7 @@
       </p:sp>
       <p:sp>
         <p:nvSpPr>
-          <p:cNvPr id="25" name="Rect 25"/>
+          <p:cNvPr id="22" name="Rect 22"/>
           <p:cNvSpPr/>
           <p:nvPr/>
         </p:nvSpPr>
@@ -4612,7 +4539,7 @@
       </p:sp>
       <p:sp>
         <p:nvSpPr>
-          <p:cNvPr id="26" name="Box 26"/>
+          <p:cNvPr id="23" name="Box 23"/>
           <p:cNvSpPr txBox="1"/>
           <p:nvPr/>
         </p:nvSpPr>
@@ -4653,7 +4580,7 @@
       </p:sp>
       <p:sp>
         <p:nvSpPr>
-          <p:cNvPr id="27" name="Box 27"/>
+          <p:cNvPr id="24" name="Box 24"/>
           <p:cNvSpPr txBox="1"/>
           <p:nvPr/>
         </p:nvSpPr>
@@ -4721,7 +4648,7 @@
                             </p:stCondLst>
                             <p:childTnLst>
                               <p:par>
-                                <p:cTn id="5" presetID="2" presetClass="entr" presetSubtype="4" fill="hold" grpId="0" nodeType="withEffect">
+                                <p:cTn id="5" presetID="10" presetClass="entr" presetSubtype="0" fill="hold" grpId="0" nodeType="withEffect">
                                   <p:stCondLst>
                                     <p:cond delay="0"/>
                                   </p:stCondLst>
@@ -4734,7 +4661,7 @@
                                           </p:stCondLst>
                                         </p:cTn>
                                         <p:tgtEl>
-                                          <p:spTgt spid="6"/>
+                                          <p:spTgt spid="2"/>
                                         </p:tgtEl>
                                         <p:attrNameLst>
                                           <p:attrName>style.visibility</p:attrName>
@@ -4748,7 +4675,7 @@
                                       <p:cBhvr>
                                         <p:cTn id="7" dur="450"/>
                                         <p:tgtEl>
-                                          <p:spTgt spid="6"/>
+                                          <p:spTgt spid="2"/>
                                         </p:tgtEl>
                                       </p:cBhvr>
                                     </p:animEffect>
@@ -4778,7 +4705,7 @@
                                           </p:stCondLst>
                                         </p:cTn>
                                         <p:tgtEl>
-                                          <p:spTgt spid="7"/>
+                                          <p:spTgt spid="3"/>
                                         </p:tgtEl>
                                         <p:attrNameLst>
                                           <p:attrName>style.visibility</p:attrName>
@@ -4792,7 +4719,7 @@
                                       <p:cBhvr>
                                         <p:cTn id="11" dur="450"/>
                                         <p:tgtEl>
-                                          <p:spTgt spid="7"/>
+                                          <p:spTgt spid="3"/>
                                         </p:tgtEl>
                                       </p:cBhvr>
                                     </p:animEffect>
@@ -4822,7 +4749,7 @@
                                           </p:stCondLst>
                                         </p:cTn>
                                         <p:tgtEl>
-                                          <p:spTgt spid="8"/>
+                                          <p:spTgt spid="4"/>
                                         </p:tgtEl>
                                         <p:attrNameLst>
                                           <p:attrName>style.visibility</p:attrName>
@@ -4836,7 +4763,7 @@
                                       <p:cBhvr>
                                         <p:cTn id="15" dur="450"/>
                                         <p:tgtEl>
-                                          <p:spTgt spid="8"/>
+                                          <p:spTgt spid="4"/>
                                         </p:tgtEl>
                                       </p:cBhvr>
                                     </p:animEffect>
@@ -4866,7 +4793,7 @@
                                           </p:stCondLst>
                                         </p:cTn>
                                         <p:tgtEl>
-                                          <p:spTgt spid="9"/>
+                                          <p:spTgt spid="5"/>
                                         </p:tgtEl>
                                         <p:attrNameLst>
                                           <p:attrName>style.visibility</p:attrName>
@@ -4880,7 +4807,7 @@
                                       <p:cBhvr>
                                         <p:cTn id="19" dur="450"/>
                                         <p:tgtEl>
-                                          <p:spTgt spid="9"/>
+                                          <p:spTgt spid="5"/>
                                         </p:tgtEl>
                                       </p:cBhvr>
                                     </p:animEffect>
@@ -4910,7 +4837,7 @@
                                           </p:stCondLst>
                                         </p:cTn>
                                         <p:tgtEl>
-                                          <p:spTgt spid="11"/>
+                                          <p:spTgt spid="6"/>
                                         </p:tgtEl>
                                         <p:attrNameLst>
                                           <p:attrName>style.visibility</p:attrName>
@@ -4924,7 +4851,7 @@
                                       <p:cBhvr>
                                         <p:cTn id="23" dur="450"/>
                                         <p:tgtEl>
-                                          <p:spTgt spid="11"/>
+                                          <p:spTgt spid="6"/>
                                         </p:tgtEl>
                                       </p:cBhvr>
                                     </p:animEffect>
@@ -4954,7 +4881,7 @@
                                           </p:stCondLst>
                                         </p:cTn>
                                         <p:tgtEl>
-                                          <p:spTgt spid="12"/>
+                                          <p:spTgt spid="8"/>
                                         </p:tgtEl>
                                         <p:attrNameLst>
                                           <p:attrName>style.visibility</p:attrName>
@@ -4968,7 +4895,7 @@
                                       <p:cBhvr>
                                         <p:cTn id="27" dur="450"/>
                                         <p:tgtEl>
-                                          <p:spTgt spid="12"/>
+                                          <p:spTgt spid="8"/>
                                         </p:tgtEl>
                                       </p:cBhvr>
                                     </p:animEffect>
@@ -4998,7 +4925,7 @@
                                           </p:stCondLst>
                                         </p:cTn>
                                         <p:tgtEl>
-                                          <p:spTgt spid="14"/>
+                                          <p:spTgt spid="9"/>
                                         </p:tgtEl>
                                         <p:attrNameLst>
                                           <p:attrName>style.visibility</p:attrName>
@@ -5012,7 +4939,7 @@
                                       <p:cBhvr>
                                         <p:cTn id="31" dur="450"/>
                                         <p:tgtEl>
-                                          <p:spTgt spid="14"/>
+                                          <p:spTgt spid="9"/>
                                         </p:tgtEl>
                                       </p:cBhvr>
                                     </p:animEffect>
@@ -5042,7 +4969,7 @@
                                           </p:stCondLst>
                                         </p:cTn>
                                         <p:tgtEl>
-                                          <p:spTgt spid="16"/>
+                                          <p:spTgt spid="11"/>
                                         </p:tgtEl>
                                         <p:attrNameLst>
                                           <p:attrName>style.visibility</p:attrName>
@@ -5056,7 +4983,7 @@
                                       <p:cBhvr>
                                         <p:cTn id="35" dur="450"/>
                                         <p:tgtEl>
-                                          <p:spTgt spid="16"/>
+                                          <p:spTgt spid="11"/>
                                         </p:tgtEl>
                                       </p:cBhvr>
                                     </p:animEffect>
@@ -5086,7 +5013,7 @@
                                           </p:stCondLst>
                                         </p:cTn>
                                         <p:tgtEl>
-                                          <p:spTgt spid="17"/>
+                                          <p:spTgt spid="13"/>
                                         </p:tgtEl>
                                         <p:attrNameLst>
                                           <p:attrName>style.visibility</p:attrName>
@@ -5100,7 +5027,7 @@
                                       <p:cBhvr>
                                         <p:cTn id="39" dur="450"/>
                                         <p:tgtEl>
-                                          <p:spTgt spid="17"/>
+                                          <p:spTgt spid="13"/>
                                         </p:tgtEl>
                                       </p:cBhvr>
                                     </p:animEffect>
@@ -5130,7 +5057,7 @@
                                           </p:stCondLst>
                                         </p:cTn>
                                         <p:tgtEl>
-                                          <p:spTgt spid="19"/>
+                                          <p:spTgt spid="14"/>
                                         </p:tgtEl>
                                         <p:attrNameLst>
                                           <p:attrName>style.visibility</p:attrName>
@@ -5144,7 +5071,7 @@
                                       <p:cBhvr>
                                         <p:cTn id="43" dur="450"/>
                                         <p:tgtEl>
-                                          <p:spTgt spid="19"/>
+                                          <p:spTgt spid="14"/>
                                         </p:tgtEl>
                                       </p:cBhvr>
                                     </p:animEffect>
@@ -5174,7 +5101,7 @@
                                           </p:stCondLst>
                                         </p:cTn>
                                         <p:tgtEl>
-                                          <p:spTgt spid="21"/>
+                                          <p:spTgt spid="16"/>
                                         </p:tgtEl>
                                         <p:attrNameLst>
                                           <p:attrName>style.visibility</p:attrName>
@@ -5188,7 +5115,7 @@
                                       <p:cBhvr>
                                         <p:cTn id="47" dur="450"/>
                                         <p:tgtEl>
-                                          <p:spTgt spid="21"/>
+                                          <p:spTgt spid="16"/>
                                         </p:tgtEl>
                                       </p:cBhvr>
                                     </p:animEffect>
@@ -5218,7 +5145,7 @@
                                           </p:stCondLst>
                                         </p:cTn>
                                         <p:tgtEl>
-                                          <p:spTgt spid="22"/>
+                                          <p:spTgt spid="18"/>
                                         </p:tgtEl>
                                         <p:attrNameLst>
                                           <p:attrName>style.visibility</p:attrName>
@@ -5232,7 +5159,7 @@
                                       <p:cBhvr>
                                         <p:cTn id="51" dur="450"/>
                                         <p:tgtEl>
-                                          <p:spTgt spid="22"/>
+                                          <p:spTgt spid="18"/>
                                         </p:tgtEl>
                                       </p:cBhvr>
                                     </p:animEffect>
@@ -5262,7 +5189,7 @@
                                           </p:stCondLst>
                                         </p:cTn>
                                         <p:tgtEl>
-                                          <p:spTgt spid="24"/>
+                                          <p:spTgt spid="19"/>
                                         </p:tgtEl>
                                         <p:attrNameLst>
                                           <p:attrName>style.visibility</p:attrName>
@@ -5276,7 +5203,7 @@
                                       <p:cBhvr>
                                         <p:cTn id="55" dur="450"/>
                                         <p:tgtEl>
-                                          <p:spTgt spid="24"/>
+                                          <p:spTgt spid="19"/>
                                         </p:tgtEl>
                                       </p:cBhvr>
                                     </p:animEffect>
@@ -5306,7 +5233,7 @@
                                           </p:stCondLst>
                                         </p:cTn>
                                         <p:tgtEl>
-                                          <p:spTgt spid="26"/>
+                                          <p:spTgt spid="21"/>
                                         </p:tgtEl>
                                         <p:attrNameLst>
                                           <p:attrName>style.visibility</p:attrName>
@@ -5320,7 +5247,7 @@
                                       <p:cBhvr>
                                         <p:cTn id="59" dur="450"/>
                                         <p:tgtEl>
-                                          <p:spTgt spid="26"/>
+                                          <p:spTgt spid="21"/>
                                         </p:tgtEl>
                                       </p:cBhvr>
                                     </p:animEffect>
@@ -5350,7 +5277,7 @@
                                           </p:stCondLst>
                                         </p:cTn>
                                         <p:tgtEl>
-                                          <p:spTgt spid="27"/>
+                                          <p:spTgt spid="23"/>
                                         </p:tgtEl>
                                         <p:attrNameLst>
                                           <p:attrName>style.visibility</p:attrName>
@@ -5364,7 +5291,51 @@
                                       <p:cBhvr>
                                         <p:cTn id="63" dur="450"/>
                                         <p:tgtEl>
-                                          <p:spTgt spid="27"/>
+                                          <p:spTgt spid="23"/>
+                                        </p:tgtEl>
+                                      </p:cBhvr>
+                                    </p:animEffect>
+                                  </p:childTnLst>
+                                </p:cTn>
+                              </p:par>
+                            </p:childTnLst>
+                          </p:cTn>
+                        </p:par>
+                        <p:par>
+                          <p:cTn id="64" fill="hold">
+                            <p:stCondLst>
+                              <p:cond delay="180"/>
+                            </p:stCondLst>
+                            <p:childTnLst>
+                              <p:par>
+                                <p:cTn id="65" presetID="2" presetClass="entr" presetSubtype="4" fill="hold" grpId="0" nodeType="afterEffect">
+                                  <p:stCondLst>
+                                    <p:cond delay="0"/>
+                                  </p:stCondLst>
+                                  <p:childTnLst>
+                                    <p:set>
+                                      <p:cBhvr>
+                                        <p:cTn id="66" dur="1" fill="hold">
+                                          <p:stCondLst>
+                                            <p:cond delay="0"/>
+                                          </p:stCondLst>
+                                        </p:cTn>
+                                        <p:tgtEl>
+                                          <p:spTgt spid="24"/>
+                                        </p:tgtEl>
+                                        <p:attrNameLst>
+                                          <p:attrName>style.visibility</p:attrName>
+                                        </p:attrNameLst>
+                                      </p:cBhvr>
+                                      <p:to>
+                                        <p:strVal val="visible"/>
+                                      </p:to>
+                                    </p:set>
+                                    <p:animEffect transition="in" filter="fade">
+                                      <p:cBhvr>
+                                        <p:cTn id="67" dur="450"/>
+                                        <p:tgtEl>
+                                          <p:spTgt spid="24"/>
                                         </p:tgtEl>
                                       </p:cBhvr>
                                     </p:animEffect>
@@ -5399,21 +5370,22 @@
       </p:par>
     </p:tnLst>
     <p:bldLst>
+      <p:bldP spid="2" grpId="0"/>
+      <p:bldP spid="3" grpId="0"/>
+      <p:bldP spid="4" grpId="0"/>
+      <p:bldP spid="5" grpId="0"/>
       <p:bldP spid="6" grpId="0"/>
-      <p:bldP spid="7" grpId="0"/>
       <p:bldP spid="8" grpId="0"/>
       <p:bldP spid="9" grpId="0"/>
       <p:bldP spid="11" grpId="0"/>
-      <p:bldP spid="12" grpId="0"/>
+      <p:bldP spid="13" grpId="0"/>
       <p:bldP spid="14" grpId="0"/>
       <p:bldP spid="16" grpId="0"/>
-      <p:bldP spid="17" grpId="0"/>
+      <p:bldP spid="18" grpId="0"/>
       <p:bldP spid="19" grpId="0"/>
       <p:bldP spid="21" grpId="0"/>
-      <p:bldP spid="22" grpId="0"/>
+      <p:bldP spid="23" grpId="0"/>
       <p:bldP spid="24" grpId="0"/>
-      <p:bldP spid="26" grpId="0"/>
-      <p:bldP spid="27" grpId="0"/>
     </p:bldLst>
   </p:timing>
 </p:sld>
@@ -5446,21 +5418,35 @@
       </p:grpSpPr>
       <p:sp>
         <p:nvSpPr>
-          <p:cNvPr id="2" name="Rect 2"/>
+          <p:cNvPr id="2" name="GradientBar 2"/>
           <p:cNvSpPr/>
           <p:nvPr/>
         </p:nvSpPr>
         <p:spPr>
           <a:xfrm>
             <a:off x="0" y="0"/>
-            <a:ext cx="3048000" cy="63500"/>
+            <a:ext cx="12192000" cy="76200"/>
           </a:xfrm>
           <a:prstGeom prst="rect">
             <a:avLst/>
           </a:prstGeom>
-          <a:solidFill>
-            <a:srgbClr val="4285F4"/>
-          </a:solidFill>
+          <a:gradFill flip="none" rotWithShape="1">
+            <a:gsLst>
+              <a:gs pos="0">
+                <a:srgbClr val="4285F4"/>
+              </a:gs>
+              <a:gs pos="33000">
+                <a:srgbClr val="EA4335"/>
+              </a:gs>
+              <a:gs pos="66000">
+                <a:srgbClr val="FBBC04"/>
+              </a:gs>
+              <a:gs pos="100000">
+                <a:srgbClr val="34A853"/>
+              </a:gs>
+            </a:gsLst>
+            <a:lin ang="0" scaled="1"/>
+          </a:gradFill>
           <a:ln>
             <a:noFill/>
           </a:ln>
@@ -5468,73 +5454,7 @@
       </p:sp>
       <p:sp>
         <p:nvSpPr>
-          <p:cNvPr id="3" name="Rect 3"/>
-          <p:cNvSpPr/>
-          <p:nvPr/>
-        </p:nvSpPr>
-        <p:spPr>
-          <a:xfrm>
-            <a:off x="3048000" y="0"/>
-            <a:ext cx="3048000" cy="63500"/>
-          </a:xfrm>
-          <a:prstGeom prst="rect">
-            <a:avLst/>
-          </a:prstGeom>
-          <a:solidFill>
-            <a:srgbClr val="EA4335"/>
-          </a:solidFill>
-          <a:ln>
-            <a:noFill/>
-          </a:ln>
-        </p:spPr>
-      </p:sp>
-      <p:sp>
-        <p:nvSpPr>
-          <p:cNvPr id="4" name="Rect 4"/>
-          <p:cNvSpPr/>
-          <p:nvPr/>
-        </p:nvSpPr>
-        <p:spPr>
-          <a:xfrm>
-            <a:off x="6096000" y="0"/>
-            <a:ext cx="3048000" cy="63500"/>
-          </a:xfrm>
-          <a:prstGeom prst="rect">
-            <a:avLst/>
-          </a:prstGeom>
-          <a:solidFill>
-            <a:srgbClr val="FBBC04"/>
-          </a:solidFill>
-          <a:ln>
-            <a:noFill/>
-          </a:ln>
-        </p:spPr>
-      </p:sp>
-      <p:sp>
-        <p:nvSpPr>
-          <p:cNvPr id="5" name="Rect 5"/>
-          <p:cNvSpPr/>
-          <p:nvPr/>
-        </p:nvSpPr>
-        <p:spPr>
-          <a:xfrm>
-            <a:off x="9144000" y="0"/>
-            <a:ext cx="3048000" cy="63500"/>
-          </a:xfrm>
-          <a:prstGeom prst="rect">
-            <a:avLst/>
-          </a:prstGeom>
-          <a:solidFill>
-            <a:srgbClr val="34A853"/>
-          </a:solidFill>
-          <a:ln>
-            <a:noFill/>
-          </a:ln>
-        </p:spPr>
-      </p:sp>
-      <p:sp>
-        <p:nvSpPr>
-          <p:cNvPr id="6" name="Box 6"/>
+          <p:cNvPr id="3" name="Box 3"/>
           <p:cNvSpPr txBox="1"/>
           <p:nvPr/>
         </p:nvSpPr>
@@ -5575,7 +5495,7 @@
       </p:sp>
       <p:sp>
         <p:nvSpPr>
-          <p:cNvPr id="7" name="Box 7"/>
+          <p:cNvPr id="4" name="Box 4"/>
           <p:cNvSpPr txBox="1"/>
           <p:nvPr/>
         </p:nvSpPr>
@@ -5616,7 +5536,7 @@
       </p:sp>
       <p:sp>
         <p:nvSpPr>
-          <p:cNvPr id="8" name="Box 8"/>
+          <p:cNvPr id="5" name="Box 5"/>
           <p:cNvSpPr txBox="1"/>
           <p:nvPr/>
         </p:nvSpPr>
@@ -5657,7 +5577,7 @@
       </p:sp>
       <p:sp>
         <p:nvSpPr>
-          <p:cNvPr id="9" name="Box 9"/>
+          <p:cNvPr id="6" name="Box 6"/>
           <p:cNvSpPr txBox="1"/>
           <p:nvPr/>
         </p:nvSpPr>
@@ -5698,7 +5618,7 @@
       </p:sp>
       <p:sp>
         <p:nvSpPr>
-          <p:cNvPr id="10" name="Rect 10"/>
+          <p:cNvPr id="7" name="Rect 7"/>
           <p:cNvSpPr/>
           <p:nvPr/>
         </p:nvSpPr>
@@ -5724,7 +5644,7 @@
       </p:sp>
       <p:sp>
         <p:nvSpPr>
-          <p:cNvPr id="11" name="Box 11"/>
+          <p:cNvPr id="8" name="Box 8"/>
           <p:cNvSpPr txBox="1"/>
           <p:nvPr/>
         </p:nvSpPr>
@@ -5765,7 +5685,7 @@
       </p:sp>
       <p:sp>
         <p:nvSpPr>
-          <p:cNvPr id="12" name="Box 12"/>
+          <p:cNvPr id="9" name="Box 9"/>
           <p:cNvSpPr txBox="1"/>
           <p:nvPr/>
         </p:nvSpPr>
@@ -5812,7 +5732,7 @@
       </p:sp>
       <p:sp>
         <p:nvSpPr>
-          <p:cNvPr id="13" name="Box 13"/>
+          <p:cNvPr id="10" name="Box 10"/>
           <p:cNvSpPr txBox="1"/>
           <p:nvPr/>
         </p:nvSpPr>
@@ -5859,7 +5779,7 @@
       </p:sp>
       <p:sp>
         <p:nvSpPr>
-          <p:cNvPr id="14" name="Box 14"/>
+          <p:cNvPr id="11" name="Box 11"/>
           <p:cNvSpPr txBox="1"/>
           <p:nvPr/>
         </p:nvSpPr>
@@ -5906,7 +5826,7 @@
       </p:sp>
       <p:sp>
         <p:nvSpPr>
-          <p:cNvPr id="15" name="Box 15"/>
+          <p:cNvPr id="12" name="Box 12"/>
           <p:cNvSpPr txBox="1"/>
           <p:nvPr/>
         </p:nvSpPr>
@@ -5953,7 +5873,7 @@
       </p:sp>
       <p:sp>
         <p:nvSpPr>
-          <p:cNvPr id="16" name="Box 16"/>
+          <p:cNvPr id="13" name="Box 13"/>
           <p:cNvSpPr txBox="1"/>
           <p:nvPr/>
         </p:nvSpPr>
@@ -5977,7 +5897,7 @@
           </a:ln>
         </p:spPr>
         <p:txBody>
-          <a:bodyPr wrap="square" lIns="203200" tIns="152400" rIns="203200" bIns="152400" anchor="t"/>
+          <a:bodyPr wrap="square" lIns="228600" tIns="203200" rIns="228600" bIns="203200" anchor="t"/>
           <a:lstStyle/>
           <a:p>
             <a:pPr algn="l">
@@ -5986,116 +5906,100 @@
               </a:lnSpc>
             </a:pPr>
             <a:r>
-              <a:rPr lang="en-US" sz="1200" b="1" dirty="0">
+              <a:rPr lang="en-US" sz="1150" b="1" dirty="0">
                 <a:solidFill>
                   <a:srgbClr val="1967D2"/>
                 </a:solidFill>
                 <a:latin typeface="Google Sans"/>
                 <a:cs typeface="Google Sans"/>
               </a:rPr>
-              <a:t>6 Overridden Runtime Commands   </a:t>
-            </a:r>
-            <a:r>
-              <a:rPr lang="en-US" sz="1000" b="1" dirty="0">
-                <a:solidFill>
-                  <a:srgbClr val="1967D2"/>
+              <a:t>6 Overridden Runtime Commands</a:t>
+            </a:r>
+          </a:p>
+          <a:p>
+            <a:pPr algn="l">
+              <a:lnSpc>
+                <a:spcPct val="118000"/>
+              </a:lnSpc>
+            </a:pPr>
+            <a:r>
+              <a:rPr lang="en-US" sz="800" b="0" dirty="0">
+                <a:solidFill>
+                  <a:srgbClr val="3C4043"/>
+                </a:solidFill>
+                <a:latin typeface="Google Sans Text"/>
+                <a:cs typeface="Google Sans Text"/>
+              </a:rPr>
+              <a:t/>
+            </a:r>
+          </a:p>
+          <a:p>
+            <a:pPr algn="l">
+              <a:lnSpc>
+                <a:spcPct val="118000"/>
+              </a:lnSpc>
+            </a:pPr>
+            <a:r>
+              <a:rPr lang="en-US" sz="1000" b="0" dirty="0">
+                <a:solidFill>
+                  <a:srgbClr val="3C4043"/>
                 </a:solidFill>
                 <a:latin typeface="Google Sans Mono"/>
                 <a:cs typeface="Google Sans Mono"/>
               </a:rPr>
-              <a:t>[↑ langchain]</a:t>
-            </a:r>
-          </a:p>
-          <a:p>
-            <a:pPr algn="l">
-              <a:lnSpc>
-                <a:spcPct val="118000"/>
-              </a:lnSpc>
-            </a:pPr>
-            <a:r>
-              <a:rPr lang="en-US" sz="400" b="0" dirty="0">
-                <a:solidFill>
-                  <a:srgbClr val="3C4043"/>
-                </a:solidFill>
-                <a:latin typeface="Google Sans Text"/>
-                <a:cs typeface="Google Sans Text"/>
-              </a:rPr>
-              <a:t/>
-            </a:r>
-          </a:p>
-          <a:p>
-            <a:pPr algn="l">
-              <a:lnSpc>
-                <a:spcPct val="118000"/>
-              </a:lnSpc>
-            </a:pPr>
-            <a:r>
-              <a:rPr lang="en-US" sz="950" b="0" dirty="0">
-                <a:solidFill>
-                  <a:srgbClr val="3C4043"/>
-                </a:solidFill>
-                <a:latin typeface="Google Sans Mono"/>
-                <a:cs typeface="Google Sans Mono"/>
-              </a:rPr>
-              <a:t>• run -&gt; uv run python scripts/run.py</a:t>
-            </a:r>
-          </a:p>
-          <a:p>
-            <a:pPr algn="l">
-              <a:lnSpc>
-                <a:spcPct val="118000"/>
-              </a:lnSpc>
-            </a:pPr>
-            <a:r>
-              <a:rPr lang="en-US" sz="950" b="0" dirty="0">
-                <a:solidFill>
-                  <a:srgbClr val="3C4043"/>
-                </a:solidFill>
-                <a:latin typeface="Google Sans Mono"/>
-                <a:cs typeface="Google Sans Mono"/>
-              </a:rPr>
-              <a:t>• playground -&gt; uv run langgraph dev --port 8080</a:t>
-            </a:r>
-          </a:p>
-          <a:p>
-            <a:pPr algn="l">
-              <a:lnSpc>
-                <a:spcPct val="118000"/>
-              </a:lnSpc>
-            </a:pPr>
-            <a:r>
-              <a:rPr lang="en-US" sz="950" b="0" dirty="0">
-                <a:solidFill>
-                  <a:srgbClr val="3C4043"/>
-                </a:solidFill>
-                <a:latin typeface="Google Sans Mono"/>
-                <a:cs typeface="Google Sans Mono"/>
-              </a:rPr>
-              <a:t>• eval.generate -&gt; uv run python scripts/eval_generate.py</a:t>
-            </a:r>
-          </a:p>
-          <a:p>
-            <a:pPr algn="l">
-              <a:lnSpc>
-                <a:spcPct val="118000"/>
-              </a:lnSpc>
-            </a:pPr>
-            <a:r>
-              <a:rPr lang="en-US" sz="950" b="0" dirty="0">
-                <a:solidFill>
-                  <a:srgbClr val="3C4043"/>
-                </a:solidFill>
-                <a:latin typeface="Google Sans Mono"/>
-                <a:cs typeface="Google Sans Mono"/>
-              </a:rPr>
-              <a:t>• publish.gemini-enterprise &amp; eval.dataset / optimize</a:t>
+              <a:t>run • playground (LangGraph Studio) • eval.generate • publish.gemini-enterprise • eval.dataset • eval.optimize</a:t>
             </a:r>
           </a:p>
         </p:txBody>
       </p:sp>
       <p:sp>
         <p:nvSpPr>
-          <p:cNvPr id="17" name="Box 17"/>
+          <p:cNvPr id="14" name="Box 14"/>
+          <p:cNvSpPr txBox="1"/>
+          <p:nvPr/>
+        </p:nvSpPr>
+        <p:spPr>
+          <a:xfrm>
+            <a:off x="4470400" y="3022600"/>
+            <a:ext cx="1320800" cy="304800"/>
+          </a:xfrm>
+          <a:prstGeom prst="roundRect">
+            <a:avLst>
+              <a:gd name="adj" fmla="val 25000"/>
+            </a:avLst>
+          </a:prstGeom>
+          <a:solidFill>
+            <a:srgbClr val="E8F0FE"/>
+          </a:solidFill>
+          <a:ln>
+            <a:noFill/>
+          </a:ln>
+        </p:spPr>
+        <p:txBody>
+          <a:bodyPr wrap="square" lIns="50800" tIns="25400" rIns="50800" bIns="25400" anchor="ctr"/>
+          <a:lstStyle/>
+          <a:p>
+            <a:pPr algn="c">
+              <a:lnSpc>
+                <a:spcPct val="118000"/>
+              </a:lnSpc>
+            </a:pPr>
+            <a:r>
+              <a:rPr lang="en-US" sz="900" b="1" dirty="0">
+                <a:solidFill>
+                  <a:srgbClr val="1967D2"/>
+                </a:solidFill>
+                <a:latin typeface="Google Sans Mono"/>
+                <a:cs typeface="Google Sans Mono"/>
+              </a:rPr>
+              <a:t>[↑ langchain]</a:t>
+            </a:r>
+          </a:p>
+        </p:txBody>
+      </p:sp>
+      <p:sp>
+        <p:nvSpPr>
+          <p:cNvPr id="15" name="Box 15"/>
           <p:cNvSpPr txBox="1"/>
           <p:nvPr/>
         </p:nvSpPr>
@@ -6119,7 +6023,7 @@
           </a:ln>
         </p:spPr>
         <p:txBody>
-          <a:bodyPr wrap="square" lIns="203200" tIns="152400" rIns="203200" bIns="152400" anchor="t"/>
+          <a:bodyPr wrap="square" lIns="228600" tIns="203200" rIns="228600" bIns="203200" anchor="t"/>
           <a:lstStyle/>
           <a:p>
             <a:pPr algn="l">
@@ -6128,116 +6032,100 @@
               </a:lnSpc>
             </a:pPr>
             <a:r>
-              <a:rPr lang="en-US" sz="1200" b="1" dirty="0">
+              <a:rPr lang="en-US" sz="1150" b="1" dirty="0">
                 <a:solidFill>
                   <a:srgbClr val="137333"/>
                 </a:solidFill>
                 <a:latin typeface="Google Sans"/>
                 <a:cs typeface="Google Sans"/>
               </a:rPr>
-              <a:t>18+ Native Production Commands   </a:t>
-            </a:r>
-            <a:r>
-              <a:rPr lang="en-US" sz="1000" b="1" dirty="0">
-                <a:solidFill>
-                  <a:srgbClr val="137333"/>
+              <a:t>18+ Native Production Commands</a:t>
+            </a:r>
+          </a:p>
+          <a:p>
+            <a:pPr algn="l">
+              <a:lnSpc>
+                <a:spcPct val="118000"/>
+              </a:lnSpc>
+            </a:pPr>
+            <a:r>
+              <a:rPr lang="en-US" sz="800" b="0" dirty="0">
+                <a:solidFill>
+                  <a:srgbClr val="3C4043"/>
+                </a:solidFill>
+                <a:latin typeface="Google Sans Text"/>
+                <a:cs typeface="Google Sans Text"/>
+              </a:rPr>
+              <a:t/>
+            </a:r>
+          </a:p>
+          <a:p>
+            <a:pPr algn="l">
+              <a:lnSpc>
+                <a:spcPct val="118000"/>
+              </a:lnSpc>
+            </a:pPr>
+            <a:r>
+              <a:rPr lang="en-US" sz="1000" b="0" dirty="0">
+                <a:solidFill>
+                  <a:srgbClr val="3C4043"/>
                 </a:solidFill>
                 <a:latin typeface="Google Sans Mono"/>
                 <a:cs typeface="Google Sans Mono"/>
               </a:rPr>
-              <a:t>[Built-In]</a:t>
-            </a:r>
-          </a:p>
-          <a:p>
-            <a:pPr algn="l">
-              <a:lnSpc>
-                <a:spcPct val="118000"/>
-              </a:lnSpc>
-            </a:pPr>
-            <a:r>
-              <a:rPr lang="en-US" sz="400" b="0" dirty="0">
-                <a:solidFill>
-                  <a:srgbClr val="3C4043"/>
-                </a:solidFill>
-                <a:latin typeface="Google Sans Text"/>
-                <a:cs typeface="Google Sans Text"/>
-              </a:rPr>
-              <a:t/>
-            </a:r>
-          </a:p>
-          <a:p>
-            <a:pPr algn="l">
-              <a:lnSpc>
-                <a:spcPct val="118000"/>
-              </a:lnSpc>
-            </a:pPr>
-            <a:r>
-              <a:rPr lang="en-US" sz="950" b="0" dirty="0">
-                <a:solidFill>
-                  <a:srgbClr val="3C4043"/>
-                </a:solidFill>
-                <a:latin typeface="Google Sans Mono"/>
-                <a:cs typeface="Google Sans Mono"/>
-              </a:rPr>
-              <a:t>• deploy (Cloud Run / GKE via FastAPI A2A)</a:t>
-            </a:r>
-          </a:p>
-          <a:p>
-            <a:pPr algn="l">
-              <a:lnSpc>
-                <a:spcPct val="118000"/>
-              </a:lnSpc>
-            </a:pPr>
-            <a:r>
-              <a:rPr lang="en-US" sz="950" b="0" dirty="0">
-                <a:solidFill>
-                  <a:srgbClr val="3C4043"/>
-                </a:solidFill>
-                <a:latin typeface="Google Sans Mono"/>
-                <a:cs typeface="Google Sans Mono"/>
-              </a:rPr>
-              <a:t>• eval grade / eval compare / eval analyze (Vertex AI)</a:t>
-            </a:r>
-          </a:p>
-          <a:p>
-            <a:pPr algn="l">
-              <a:lnSpc>
-                <a:spcPct val="118000"/>
-              </a:lnSpc>
-            </a:pPr>
-            <a:r>
-              <a:rPr lang="en-US" sz="950" b="0" dirty="0">
-                <a:solidFill>
-                  <a:srgbClr val="3C4043"/>
-                </a:solidFill>
-                <a:latin typeface="Google Sans Mono"/>
-                <a:cs typeface="Google Sans Mono"/>
-              </a:rPr>
-              <a:t>• infra (Terraform) &amp; scaffold create / enhance / upgrade</a:t>
-            </a:r>
-          </a:p>
-          <a:p>
-            <a:pPr algn="l">
-              <a:lnSpc>
-                <a:spcPct val="118000"/>
-              </a:lnSpc>
-            </a:pPr>
-            <a:r>
-              <a:rPr lang="en-US" sz="950" b="0" dirty="0">
-                <a:solidFill>
-                  <a:srgbClr val="3C4043"/>
-                </a:solidFill>
-                <a:latin typeface="Google Sans Mono"/>
-                <a:cs typeface="Google Sans Mono"/>
-              </a:rPr>
-              <a:t>• extension add / list / update &amp; install / info / lint</a:t>
+              <a:t>deploy • eval grade • eval compare • infra (Terraform) • scaffold • extension • install • lint</a:t>
             </a:r>
           </a:p>
         </p:txBody>
       </p:sp>
       <p:sp>
         <p:nvSpPr>
-          <p:cNvPr id="18" name="Rect 18"/>
+          <p:cNvPr id="16" name="Box 16"/>
+          <p:cNvSpPr txBox="1"/>
+          <p:nvPr/>
+        </p:nvSpPr>
+        <p:spPr>
+          <a:xfrm>
+            <a:off x="10439400" y="3022600"/>
+            <a:ext cx="939800" cy="304800"/>
+          </a:xfrm>
+          <a:prstGeom prst="roundRect">
+            <a:avLst>
+              <a:gd name="adj" fmla="val 25000"/>
+            </a:avLst>
+          </a:prstGeom>
+          <a:solidFill>
+            <a:srgbClr val="E6F4EA"/>
+          </a:solidFill>
+          <a:ln>
+            <a:noFill/>
+          </a:ln>
+        </p:spPr>
+        <p:txBody>
+          <a:bodyPr wrap="square" lIns="50800" tIns="25400" rIns="50800" bIns="25400" anchor="ctr"/>
+          <a:lstStyle/>
+          <a:p>
+            <a:pPr algn="c">
+              <a:lnSpc>
+                <a:spcPct val="118000"/>
+              </a:lnSpc>
+            </a:pPr>
+            <a:r>
+              <a:rPr lang="en-US" sz="900" b="1" dirty="0">
+                <a:solidFill>
+                  <a:srgbClr val="137333"/>
+                </a:solidFill>
+                <a:latin typeface="Google Sans Mono"/>
+                <a:cs typeface="Google Sans Mono"/>
+              </a:rPr>
+              <a:t>Built-In</a:t>
+            </a:r>
+          </a:p>
+        </p:txBody>
+      </p:sp>
+      <p:sp>
+        <p:nvSpPr>
+          <p:cNvPr id="17" name="Rect 17"/>
           <p:cNvSpPr/>
           <p:nvPr/>
         </p:nvSpPr>
@@ -6261,7 +6149,7 @@
       </p:sp>
       <p:sp>
         <p:nvSpPr>
-          <p:cNvPr id="19" name="Box 19"/>
+          <p:cNvPr id="18" name="Box 18"/>
           <p:cNvSpPr txBox="1"/>
           <p:nvPr/>
         </p:nvSpPr>
@@ -6302,7 +6190,7 @@
       </p:sp>
       <p:sp>
         <p:nvSpPr>
-          <p:cNvPr id="20" name="Box 20"/>
+          <p:cNvPr id="19" name="Box 19"/>
           <p:cNvSpPr txBox="1"/>
           <p:nvPr/>
         </p:nvSpPr>
@@ -6347,7 +6235,7 @@
       </p:sp>
       <p:sp>
         <p:nvSpPr>
-          <p:cNvPr id="21" name="Box 21"/>
+          <p:cNvPr id="20" name="Box 20"/>
           <p:cNvSpPr txBox="1"/>
           <p:nvPr/>
         </p:nvSpPr>
@@ -6392,7 +6280,7 @@
       </p:sp>
       <p:sp>
         <p:nvSpPr>
-          <p:cNvPr id="22" name="Box 22"/>
+          <p:cNvPr id="21" name="Box 21"/>
           <p:cNvSpPr txBox="1"/>
           <p:nvPr/>
         </p:nvSpPr>
@@ -6437,7 +6325,7 @@
       </p:sp>
       <p:sp>
         <p:nvSpPr>
-          <p:cNvPr id="23" name="Box 23"/>
+          <p:cNvPr id="22" name="Box 22"/>
           <p:cNvSpPr txBox="1"/>
           <p:nvPr/>
         </p:nvSpPr>
@@ -6482,7 +6370,7 @@
       </p:sp>
       <p:sp>
         <p:nvSpPr>
-          <p:cNvPr id="24" name="Rect 24"/>
+          <p:cNvPr id="23" name="Rect 23"/>
           <p:cNvSpPr/>
           <p:nvPr/>
         </p:nvSpPr>
@@ -6504,7 +6392,7 @@
       </p:sp>
       <p:sp>
         <p:nvSpPr>
-          <p:cNvPr id="25" name="Box 25"/>
+          <p:cNvPr id="24" name="Box 24"/>
           <p:cNvSpPr txBox="1"/>
           <p:nvPr/>
         </p:nvSpPr>
@@ -6545,7 +6433,7 @@
       </p:sp>
       <p:sp>
         <p:nvSpPr>
-          <p:cNvPr id="26" name="Box 26"/>
+          <p:cNvPr id="25" name="Box 25"/>
           <p:cNvSpPr txBox="1"/>
           <p:nvPr/>
         </p:nvSpPr>
@@ -6613,7 +6501,7 @@
                             </p:stCondLst>
                             <p:childTnLst>
                               <p:par>
-                                <p:cTn id="5" presetID="2" presetClass="entr" presetSubtype="4" fill="hold" grpId="0" nodeType="withEffect">
+                                <p:cTn id="5" presetID="10" presetClass="entr" presetSubtype="0" fill="hold" grpId="0" nodeType="withEffect">
                                   <p:stCondLst>
                                     <p:cond delay="0"/>
                                   </p:stCondLst>
@@ -6626,7 +6514,7 @@
                                           </p:stCondLst>
                                         </p:cTn>
                                         <p:tgtEl>
-                                          <p:spTgt spid="6"/>
+                                          <p:spTgt spid="2"/>
                                         </p:tgtEl>
                                         <p:attrNameLst>
                                           <p:attrName>style.visibility</p:attrName>
@@ -6640,7 +6528,7 @@
                                       <p:cBhvr>
                                         <p:cTn id="7" dur="450"/>
                                         <p:tgtEl>
-                                          <p:spTgt spid="6"/>
+                                          <p:spTgt spid="2"/>
                                         </p:tgtEl>
                                       </p:cBhvr>
                                     </p:animEffect>
@@ -6670,7 +6558,7 @@
                                           </p:stCondLst>
                                         </p:cTn>
                                         <p:tgtEl>
-                                          <p:spTgt spid="7"/>
+                                          <p:spTgt spid="3"/>
                                         </p:tgtEl>
                                         <p:attrNameLst>
                                           <p:attrName>style.visibility</p:attrName>
@@ -6684,7 +6572,7 @@
                                       <p:cBhvr>
                                         <p:cTn id="11" dur="450"/>
                                         <p:tgtEl>
-                                          <p:spTgt spid="7"/>
+                                          <p:spTgt spid="3"/>
                                         </p:tgtEl>
                                       </p:cBhvr>
                                     </p:animEffect>
@@ -6714,7 +6602,7 @@
                                           </p:stCondLst>
                                         </p:cTn>
                                         <p:tgtEl>
-                                          <p:spTgt spid="8"/>
+                                          <p:spTgt spid="4"/>
                                         </p:tgtEl>
                                         <p:attrNameLst>
                                           <p:attrName>style.visibility</p:attrName>
@@ -6728,7 +6616,7 @@
                                       <p:cBhvr>
                                         <p:cTn id="15" dur="450"/>
                                         <p:tgtEl>
-                                          <p:spTgt spid="8"/>
+                                          <p:spTgt spid="4"/>
                                         </p:tgtEl>
                                       </p:cBhvr>
                                     </p:animEffect>
@@ -6758,7 +6646,7 @@
                                           </p:stCondLst>
                                         </p:cTn>
                                         <p:tgtEl>
-                                          <p:spTgt spid="9"/>
+                                          <p:spTgt spid="5"/>
                                         </p:tgtEl>
                                         <p:attrNameLst>
                                           <p:attrName>style.visibility</p:attrName>
@@ -6772,7 +6660,7 @@
                                       <p:cBhvr>
                                         <p:cTn id="19" dur="450"/>
                                         <p:tgtEl>
-                                          <p:spTgt spid="9"/>
+                                          <p:spTgt spid="5"/>
                                         </p:tgtEl>
                                       </p:cBhvr>
                                     </p:animEffect>
@@ -6802,7 +6690,7 @@
                                           </p:stCondLst>
                                         </p:cTn>
                                         <p:tgtEl>
-                                          <p:spTgt spid="11"/>
+                                          <p:spTgt spid="6"/>
                                         </p:tgtEl>
                                         <p:attrNameLst>
                                           <p:attrName>style.visibility</p:attrName>
@@ -6816,7 +6704,7 @@
                                       <p:cBhvr>
                                         <p:cTn id="23" dur="450"/>
                                         <p:tgtEl>
-                                          <p:spTgt spid="11"/>
+                                          <p:spTgt spid="6"/>
                                         </p:tgtEl>
                                       </p:cBhvr>
                                     </p:animEffect>
@@ -6846,7 +6734,7 @@
                                           </p:stCondLst>
                                         </p:cTn>
                                         <p:tgtEl>
-                                          <p:spTgt spid="12"/>
+                                          <p:spTgt spid="8"/>
                                         </p:tgtEl>
                                         <p:attrNameLst>
                                           <p:attrName>style.visibility</p:attrName>
@@ -6860,7 +6748,7 @@
                                       <p:cBhvr>
                                         <p:cTn id="27" dur="450"/>
                                         <p:tgtEl>
-                                          <p:spTgt spid="12"/>
+                                          <p:spTgt spid="8"/>
                                         </p:tgtEl>
                                       </p:cBhvr>
                                     </p:animEffect>
@@ -6890,7 +6778,7 @@
                                           </p:stCondLst>
                                         </p:cTn>
                                         <p:tgtEl>
-                                          <p:spTgt spid="13"/>
+                                          <p:spTgt spid="9"/>
                                         </p:tgtEl>
                                         <p:attrNameLst>
                                           <p:attrName>style.visibility</p:attrName>
@@ -6904,7 +6792,7 @@
                                       <p:cBhvr>
                                         <p:cTn id="31" dur="450"/>
                                         <p:tgtEl>
-                                          <p:spTgt spid="13"/>
+                                          <p:spTgt spid="9"/>
                                         </p:tgtEl>
                                       </p:cBhvr>
                                     </p:animEffect>
@@ -6934,7 +6822,7 @@
                                           </p:stCondLst>
                                         </p:cTn>
                                         <p:tgtEl>
-                                          <p:spTgt spid="14"/>
+                                          <p:spTgt spid="10"/>
                                         </p:tgtEl>
                                         <p:attrNameLst>
                                           <p:attrName>style.visibility</p:attrName>
@@ -6948,7 +6836,7 @@
                                       <p:cBhvr>
                                         <p:cTn id="35" dur="450"/>
                                         <p:tgtEl>
-                                          <p:spTgt spid="14"/>
+                                          <p:spTgt spid="10"/>
                                         </p:tgtEl>
                                       </p:cBhvr>
                                     </p:animEffect>
@@ -6978,7 +6866,7 @@
                                           </p:stCondLst>
                                         </p:cTn>
                                         <p:tgtEl>
-                                          <p:spTgt spid="15"/>
+                                          <p:spTgt spid="11"/>
                                         </p:tgtEl>
                                         <p:attrNameLst>
                                           <p:attrName>style.visibility</p:attrName>
@@ -6992,7 +6880,7 @@
                                       <p:cBhvr>
                                         <p:cTn id="39" dur="450"/>
                                         <p:tgtEl>
-                                          <p:spTgt spid="15"/>
+                                          <p:spTgt spid="11"/>
                                         </p:tgtEl>
                                       </p:cBhvr>
                                     </p:animEffect>
@@ -7022,7 +6910,7 @@
                                           </p:stCondLst>
                                         </p:cTn>
                                         <p:tgtEl>
-                                          <p:spTgt spid="16"/>
+                                          <p:spTgt spid="12"/>
                                         </p:tgtEl>
                                         <p:attrNameLst>
                                           <p:attrName>style.visibility</p:attrName>
@@ -7036,7 +6924,7 @@
                                       <p:cBhvr>
                                         <p:cTn id="43" dur="450"/>
                                         <p:tgtEl>
-                                          <p:spTgt spid="16"/>
+                                          <p:spTgt spid="12"/>
                                         </p:tgtEl>
                                       </p:cBhvr>
                                     </p:animEffect>
@@ -7066,7 +6954,7 @@
                                           </p:stCondLst>
                                         </p:cTn>
                                         <p:tgtEl>
-                                          <p:spTgt spid="17"/>
+                                          <p:spTgt spid="13"/>
                                         </p:tgtEl>
                                         <p:attrNameLst>
                                           <p:attrName>style.visibility</p:attrName>
@@ -7080,7 +6968,7 @@
                                       <p:cBhvr>
                                         <p:cTn id="47" dur="450"/>
                                         <p:tgtEl>
-                                          <p:spTgt spid="17"/>
+                                          <p:spTgt spid="13"/>
                                         </p:tgtEl>
                                       </p:cBhvr>
                                     </p:animEffect>
@@ -7110,7 +6998,7 @@
                                           </p:stCondLst>
                                         </p:cTn>
                                         <p:tgtEl>
-                                          <p:spTgt spid="19"/>
+                                          <p:spTgt spid="14"/>
                                         </p:tgtEl>
                                         <p:attrNameLst>
                                           <p:attrName>style.visibility</p:attrName>
@@ -7124,7 +7012,7 @@
                                       <p:cBhvr>
                                         <p:cTn id="51" dur="450"/>
                                         <p:tgtEl>
-                                          <p:spTgt spid="19"/>
+                                          <p:spTgt spid="14"/>
                                         </p:tgtEl>
                                       </p:cBhvr>
                                     </p:animEffect>
@@ -7154,7 +7042,7 @@
                                           </p:stCondLst>
                                         </p:cTn>
                                         <p:tgtEl>
-                                          <p:spTgt spid="20"/>
+                                          <p:spTgt spid="15"/>
                                         </p:tgtEl>
                                         <p:attrNameLst>
                                           <p:attrName>style.visibility</p:attrName>
@@ -7168,7 +7056,7 @@
                                       <p:cBhvr>
                                         <p:cTn id="55" dur="450"/>
                                         <p:tgtEl>
-                                          <p:spTgt spid="20"/>
+                                          <p:spTgt spid="15"/>
                                         </p:tgtEl>
                                       </p:cBhvr>
                                     </p:animEffect>
@@ -7198,7 +7086,7 @@
                                           </p:stCondLst>
                                         </p:cTn>
                                         <p:tgtEl>
-                                          <p:spTgt spid="21"/>
+                                          <p:spTgt spid="16"/>
                                         </p:tgtEl>
                                         <p:attrNameLst>
                                           <p:attrName>style.visibility</p:attrName>
@@ -7212,7 +7100,7 @@
                                       <p:cBhvr>
                                         <p:cTn id="59" dur="450"/>
                                         <p:tgtEl>
-                                          <p:spTgt spid="21"/>
+                                          <p:spTgt spid="16"/>
                                         </p:tgtEl>
                                       </p:cBhvr>
                                     </p:animEffect>
@@ -7242,7 +7130,7 @@
                                           </p:stCondLst>
                                         </p:cTn>
                                         <p:tgtEl>
-                                          <p:spTgt spid="22"/>
+                                          <p:spTgt spid="18"/>
                                         </p:tgtEl>
                                         <p:attrNameLst>
                                           <p:attrName>style.visibility</p:attrName>
@@ -7256,7 +7144,7 @@
                                       <p:cBhvr>
                                         <p:cTn id="63" dur="450"/>
                                         <p:tgtEl>
-                                          <p:spTgt spid="22"/>
+                                          <p:spTgt spid="18"/>
                                         </p:tgtEl>
                                       </p:cBhvr>
                                     </p:animEffect>
@@ -7286,7 +7174,7 @@
                                           </p:stCondLst>
                                         </p:cTn>
                                         <p:tgtEl>
-                                          <p:spTgt spid="23"/>
+                                          <p:spTgt spid="19"/>
                                         </p:tgtEl>
                                         <p:attrNameLst>
                                           <p:attrName>style.visibility</p:attrName>
@@ -7300,7 +7188,7 @@
                                       <p:cBhvr>
                                         <p:cTn id="67" dur="450"/>
                                         <p:tgtEl>
-                                          <p:spTgt spid="23"/>
+                                          <p:spTgt spid="19"/>
                                         </p:tgtEl>
                                       </p:cBhvr>
                                     </p:animEffect>
@@ -7330,7 +7218,7 @@
                                           </p:stCondLst>
                                         </p:cTn>
                                         <p:tgtEl>
-                                          <p:spTgt spid="25"/>
+                                          <p:spTgt spid="20"/>
                                         </p:tgtEl>
                                         <p:attrNameLst>
                                           <p:attrName>style.visibility</p:attrName>
@@ -7344,7 +7232,7 @@
                                       <p:cBhvr>
                                         <p:cTn id="71" dur="450"/>
                                         <p:tgtEl>
-                                          <p:spTgt spid="25"/>
+                                          <p:spTgt spid="20"/>
                                         </p:tgtEl>
                                       </p:cBhvr>
                                     </p:animEffect>
@@ -7374,7 +7262,7 @@
                                           </p:stCondLst>
                                         </p:cTn>
                                         <p:tgtEl>
-                                          <p:spTgt spid="26"/>
+                                          <p:spTgt spid="21"/>
                                         </p:tgtEl>
                                         <p:attrNameLst>
                                           <p:attrName>style.visibility</p:attrName>
@@ -7388,7 +7276,139 @@
                                       <p:cBhvr>
                                         <p:cTn id="75" dur="450"/>
                                         <p:tgtEl>
-                                          <p:spTgt spid="26"/>
+                                          <p:spTgt spid="21"/>
+                                        </p:tgtEl>
+                                      </p:cBhvr>
+                                    </p:animEffect>
+                                  </p:childTnLst>
+                                </p:cTn>
+                              </p:par>
+                            </p:childTnLst>
+                          </p:cTn>
+                        </p:par>
+                        <p:par>
+                          <p:cTn id="76" fill="hold">
+                            <p:stCondLst>
+                              <p:cond delay="180"/>
+                            </p:stCondLst>
+                            <p:childTnLst>
+                              <p:par>
+                                <p:cTn id="77" presetID="2" presetClass="entr" presetSubtype="4" fill="hold" grpId="0" nodeType="afterEffect">
+                                  <p:stCondLst>
+                                    <p:cond delay="0"/>
+                                  </p:stCondLst>
+                                  <p:childTnLst>
+                                    <p:set>
+                                      <p:cBhvr>
+                                        <p:cTn id="78" dur="1" fill="hold">
+                                          <p:stCondLst>
+                                            <p:cond delay="0"/>
+                                          </p:stCondLst>
+                                        </p:cTn>
+                                        <p:tgtEl>
+                                          <p:spTgt spid="22"/>
+                                        </p:tgtEl>
+                                        <p:attrNameLst>
+                                          <p:attrName>style.visibility</p:attrName>
+                                        </p:attrNameLst>
+                                      </p:cBhvr>
+                                      <p:to>
+                                        <p:strVal val="visible"/>
+                                      </p:to>
+                                    </p:set>
+                                    <p:animEffect transition="in" filter="fade">
+                                      <p:cBhvr>
+                                        <p:cTn id="79" dur="450"/>
+                                        <p:tgtEl>
+                                          <p:spTgt spid="22"/>
+                                        </p:tgtEl>
+                                      </p:cBhvr>
+                                    </p:animEffect>
+                                  </p:childTnLst>
+                                </p:cTn>
+                              </p:par>
+                            </p:childTnLst>
+                          </p:cTn>
+                        </p:par>
+                        <p:par>
+                          <p:cTn id="80" fill="hold">
+                            <p:stCondLst>
+                              <p:cond delay="180"/>
+                            </p:stCondLst>
+                            <p:childTnLst>
+                              <p:par>
+                                <p:cTn id="81" presetID="2" presetClass="entr" presetSubtype="4" fill="hold" grpId="0" nodeType="afterEffect">
+                                  <p:stCondLst>
+                                    <p:cond delay="0"/>
+                                  </p:stCondLst>
+                                  <p:childTnLst>
+                                    <p:set>
+                                      <p:cBhvr>
+                                        <p:cTn id="82" dur="1" fill="hold">
+                                          <p:stCondLst>
+                                            <p:cond delay="0"/>
+                                          </p:stCondLst>
+                                        </p:cTn>
+                                        <p:tgtEl>
+                                          <p:spTgt spid="24"/>
+                                        </p:tgtEl>
+                                        <p:attrNameLst>
+                                          <p:attrName>style.visibility</p:attrName>
+                                        </p:attrNameLst>
+                                      </p:cBhvr>
+                                      <p:to>
+                                        <p:strVal val="visible"/>
+                                      </p:to>
+                                    </p:set>
+                                    <p:animEffect transition="in" filter="fade">
+                                      <p:cBhvr>
+                                        <p:cTn id="83" dur="450"/>
+                                        <p:tgtEl>
+                                          <p:spTgt spid="24"/>
+                                        </p:tgtEl>
+                                      </p:cBhvr>
+                                    </p:animEffect>
+                                  </p:childTnLst>
+                                </p:cTn>
+                              </p:par>
+                            </p:childTnLst>
+                          </p:cTn>
+                        </p:par>
+                        <p:par>
+                          <p:cTn id="84" fill="hold">
+                            <p:stCondLst>
+                              <p:cond delay="180"/>
+                            </p:stCondLst>
+                            <p:childTnLst>
+                              <p:par>
+                                <p:cTn id="85" presetID="2" presetClass="entr" presetSubtype="4" fill="hold" grpId="0" nodeType="afterEffect">
+                                  <p:stCondLst>
+                                    <p:cond delay="0"/>
+                                  </p:stCondLst>
+                                  <p:childTnLst>
+                                    <p:set>
+                                      <p:cBhvr>
+                                        <p:cTn id="86" dur="1" fill="hold">
+                                          <p:stCondLst>
+                                            <p:cond delay="0"/>
+                                          </p:stCondLst>
+                                        </p:cTn>
+                                        <p:tgtEl>
+                                          <p:spTgt spid="25"/>
+                                        </p:tgtEl>
+                                        <p:attrNameLst>
+                                          <p:attrName>style.visibility</p:attrName>
+                                        </p:attrNameLst>
+                                      </p:cBhvr>
+                                      <p:to>
+                                        <p:strVal val="visible"/>
+                                      </p:to>
+                                    </p:set>
+                                    <p:animEffect transition="in" filter="fade">
+                                      <p:cBhvr>
+                                        <p:cTn id="87" dur="450"/>
+                                        <p:tgtEl>
+                                          <p:spTgt spid="25"/>
                                         </p:tgtEl>
                                       </p:cBhvr>
                                     </p:animEffect>
@@ -7423,24 +7443,27 @@
       </p:par>
     </p:tnLst>
     <p:bldLst>
+      <p:bldP spid="2" grpId="0"/>
+      <p:bldP spid="3" grpId="0"/>
+      <p:bldP spid="4" grpId="0"/>
+      <p:bldP spid="5" grpId="0"/>
       <p:bldP spid="6" grpId="0"/>
-      <p:bldP spid="7" grpId="0"/>
       <p:bldP spid="8" grpId="0"/>
       <p:bldP spid="9" grpId="0"/>
+      <p:bldP spid="10" grpId="0"/>
       <p:bldP spid="11" grpId="0"/>
       <p:bldP spid="12" grpId="0"/>
       <p:bldP spid="13" grpId="0"/>
       <p:bldP spid="14" grpId="0"/>
       <p:bldP spid="15" grpId="0"/>
       <p:bldP spid="16" grpId="0"/>
-      <p:bldP spid="17" grpId="0"/>
+      <p:bldP spid="18" grpId="0"/>
       <p:bldP spid="19" grpId="0"/>
       <p:bldP spid="20" grpId="0"/>
       <p:bldP spid="21" grpId="0"/>
       <p:bldP spid="22" grpId="0"/>
-      <p:bldP spid="23" grpId="0"/>
+      <p:bldP spid="24" grpId="0"/>
       <p:bldP spid="25" grpId="0"/>
-      <p:bldP spid="26" grpId="0"/>
     </p:bldLst>
   </p:timing>
 </p:sld>
@@ -7473,21 +7496,35 @@
       </p:grpSpPr>
       <p:sp>
         <p:nvSpPr>
-          <p:cNvPr id="2" name="Rect 2"/>
+          <p:cNvPr id="2" name="GradientBar 2"/>
           <p:cNvSpPr/>
           <p:nvPr/>
         </p:nvSpPr>
         <p:spPr>
           <a:xfrm>
             <a:off x="0" y="0"/>
-            <a:ext cx="3048000" cy="63500"/>
+            <a:ext cx="12192000" cy="76200"/>
           </a:xfrm>
           <a:prstGeom prst="rect">
             <a:avLst/>
           </a:prstGeom>
-          <a:solidFill>
-            <a:srgbClr val="4285F4"/>
-          </a:solidFill>
+          <a:gradFill flip="none" rotWithShape="1">
+            <a:gsLst>
+              <a:gs pos="0">
+                <a:srgbClr val="4285F4"/>
+              </a:gs>
+              <a:gs pos="33000">
+                <a:srgbClr val="EA4335"/>
+              </a:gs>
+              <a:gs pos="66000">
+                <a:srgbClr val="FBBC04"/>
+              </a:gs>
+              <a:gs pos="100000">
+                <a:srgbClr val="34A853"/>
+              </a:gs>
+            </a:gsLst>
+            <a:lin ang="0" scaled="1"/>
+          </a:gradFill>
           <a:ln>
             <a:noFill/>
           </a:ln>
@@ -7495,73 +7532,7 @@
       </p:sp>
       <p:sp>
         <p:nvSpPr>
-          <p:cNvPr id="3" name="Rect 3"/>
-          <p:cNvSpPr/>
-          <p:nvPr/>
-        </p:nvSpPr>
-        <p:spPr>
-          <a:xfrm>
-            <a:off x="3048000" y="0"/>
-            <a:ext cx="3048000" cy="63500"/>
-          </a:xfrm>
-          <a:prstGeom prst="rect">
-            <a:avLst/>
-          </a:prstGeom>
-          <a:solidFill>
-            <a:srgbClr val="EA4335"/>
-          </a:solidFill>
-          <a:ln>
-            <a:noFill/>
-          </a:ln>
-        </p:spPr>
-      </p:sp>
-      <p:sp>
-        <p:nvSpPr>
-          <p:cNvPr id="4" name="Rect 4"/>
-          <p:cNvSpPr/>
-          <p:nvPr/>
-        </p:nvSpPr>
-        <p:spPr>
-          <a:xfrm>
-            <a:off x="6096000" y="0"/>
-            <a:ext cx="3048000" cy="63500"/>
-          </a:xfrm>
-          <a:prstGeom prst="rect">
-            <a:avLst/>
-          </a:prstGeom>
-          <a:solidFill>
-            <a:srgbClr val="FBBC04"/>
-          </a:solidFill>
-          <a:ln>
-            <a:noFill/>
-          </a:ln>
-        </p:spPr>
-      </p:sp>
-      <p:sp>
-        <p:nvSpPr>
-          <p:cNvPr id="5" name="Rect 5"/>
-          <p:cNvSpPr/>
-          <p:nvPr/>
-        </p:nvSpPr>
-        <p:spPr>
-          <a:xfrm>
-            <a:off x="9144000" y="0"/>
-            <a:ext cx="3048000" cy="63500"/>
-          </a:xfrm>
-          <a:prstGeom prst="rect">
-            <a:avLst/>
-          </a:prstGeom>
-          <a:solidFill>
-            <a:srgbClr val="34A853"/>
-          </a:solidFill>
-          <a:ln>
-            <a:noFill/>
-          </a:ln>
-        </p:spPr>
-      </p:sp>
-      <p:sp>
-        <p:nvSpPr>
-          <p:cNvPr id="6" name="Box 6"/>
+          <p:cNvPr id="3" name="Box 3"/>
           <p:cNvSpPr txBox="1"/>
           <p:nvPr/>
         </p:nvSpPr>
@@ -7602,7 +7573,7 @@
       </p:sp>
       <p:sp>
         <p:nvSpPr>
-          <p:cNvPr id="7" name="Box 7"/>
+          <p:cNvPr id="4" name="Box 4"/>
           <p:cNvSpPr txBox="1"/>
           <p:nvPr/>
         </p:nvSpPr>
@@ -7643,7 +7614,7 @@
       </p:sp>
       <p:sp>
         <p:nvSpPr>
-          <p:cNvPr id="8" name="Box 8"/>
+          <p:cNvPr id="5" name="Box 5"/>
           <p:cNvSpPr txBox="1"/>
           <p:nvPr/>
         </p:nvSpPr>
@@ -7684,7 +7655,7 @@
       </p:sp>
       <p:sp>
         <p:nvSpPr>
-          <p:cNvPr id="9" name="Box 9"/>
+          <p:cNvPr id="6" name="Box 6"/>
           <p:cNvSpPr txBox="1"/>
           <p:nvPr/>
         </p:nvSpPr>
@@ -7725,7 +7696,7 @@
       </p:sp>
       <p:sp>
         <p:nvSpPr>
-          <p:cNvPr id="10" name="Rect 10"/>
+          <p:cNvPr id="7" name="Rect 7"/>
           <p:cNvSpPr/>
           <p:nvPr/>
         </p:nvSpPr>
@@ -7751,7 +7722,7 @@
       </p:sp>
       <p:sp>
         <p:nvSpPr>
-          <p:cNvPr id="11" name="Rect 11"/>
+          <p:cNvPr id="8" name="Rect 8"/>
           <p:cNvSpPr/>
           <p:nvPr/>
         </p:nvSpPr>
@@ -7777,7 +7748,7 @@
       </p:sp>
       <p:sp>
         <p:nvSpPr>
-          <p:cNvPr id="12" name="Rect 12"/>
+          <p:cNvPr id="9" name="Rect 9"/>
           <p:cNvSpPr/>
           <p:nvPr/>
         </p:nvSpPr>
@@ -7801,7 +7772,7 @@
       </p:sp>
       <p:sp>
         <p:nvSpPr>
-          <p:cNvPr id="13" name="Rect 13"/>
+          <p:cNvPr id="10" name="Rect 10"/>
           <p:cNvSpPr/>
           <p:nvPr/>
         </p:nvSpPr>
@@ -7825,7 +7796,7 @@
       </p:sp>
       <p:sp>
         <p:nvSpPr>
-          <p:cNvPr id="14" name="Rect 14"/>
+          <p:cNvPr id="11" name="Rect 11"/>
           <p:cNvSpPr/>
           <p:nvPr/>
         </p:nvSpPr>
@@ -7849,7 +7820,7 @@
       </p:sp>
       <p:sp>
         <p:nvSpPr>
-          <p:cNvPr id="15" name="Box 15"/>
+          <p:cNvPr id="12" name="Box 12"/>
           <p:cNvSpPr txBox="1"/>
           <p:nvPr/>
         </p:nvSpPr>
@@ -7890,7 +7861,7 @@
       </p:sp>
       <p:sp>
         <p:nvSpPr>
-          <p:cNvPr id="16" name="Box 16"/>
+          <p:cNvPr id="13" name="Box 13"/>
           <p:cNvSpPr txBox="1"/>
           <p:nvPr/>
         </p:nvSpPr>
@@ -7982,7 +7953,7 @@
       </p:sp>
       <p:sp>
         <p:nvSpPr>
-          <p:cNvPr id="17" name="Box 17"/>
+          <p:cNvPr id="14" name="Box 14"/>
           <p:cNvSpPr txBox="1"/>
           <p:nvPr/>
         </p:nvSpPr>
@@ -8057,7 +8028,7 @@
       </p:sp>
       <p:sp>
         <p:nvSpPr>
-          <p:cNvPr id="18" name="Box 18"/>
+          <p:cNvPr id="15" name="Box 15"/>
           <p:cNvSpPr txBox="1"/>
           <p:nvPr/>
         </p:nvSpPr>
@@ -8132,7 +8103,7 @@
       </p:sp>
       <p:sp>
         <p:nvSpPr>
-          <p:cNvPr id="19" name="Rect 19"/>
+          <p:cNvPr id="16" name="Rect 16"/>
           <p:cNvSpPr/>
           <p:nvPr/>
         </p:nvSpPr>
@@ -8154,7 +8125,7 @@
       </p:sp>
       <p:sp>
         <p:nvSpPr>
-          <p:cNvPr id="20" name="Box 20"/>
+          <p:cNvPr id="17" name="Box 17"/>
           <p:cNvSpPr txBox="1"/>
           <p:nvPr/>
         </p:nvSpPr>
@@ -8195,7 +8166,7 @@
       </p:sp>
       <p:sp>
         <p:nvSpPr>
-          <p:cNvPr id="21" name="Box 21"/>
+          <p:cNvPr id="18" name="Box 18"/>
           <p:cNvSpPr txBox="1"/>
           <p:nvPr/>
         </p:nvSpPr>
@@ -8263,7 +8234,7 @@
                             </p:stCondLst>
                             <p:childTnLst>
                               <p:par>
-                                <p:cTn id="5" presetID="2" presetClass="entr" presetSubtype="4" fill="hold" grpId="0" nodeType="withEffect">
+                                <p:cTn id="5" presetID="10" presetClass="entr" presetSubtype="0" fill="hold" grpId="0" nodeType="withEffect">
                                   <p:stCondLst>
                                     <p:cond delay="0"/>
                                   </p:stCondLst>
@@ -8276,7 +8247,7 @@
                                           </p:stCondLst>
                                         </p:cTn>
                                         <p:tgtEl>
-                                          <p:spTgt spid="6"/>
+                                          <p:spTgt spid="2"/>
                                         </p:tgtEl>
                                         <p:attrNameLst>
                                           <p:attrName>style.visibility</p:attrName>
@@ -8290,7 +8261,7 @@
                                       <p:cBhvr>
                                         <p:cTn id="7" dur="450"/>
                                         <p:tgtEl>
-                                          <p:spTgt spid="6"/>
+                                          <p:spTgt spid="2"/>
                                         </p:tgtEl>
                                       </p:cBhvr>
                                     </p:animEffect>
@@ -8320,7 +8291,7 @@
                                           </p:stCondLst>
                                         </p:cTn>
                                         <p:tgtEl>
-                                          <p:spTgt spid="7"/>
+                                          <p:spTgt spid="3"/>
                                         </p:tgtEl>
                                         <p:attrNameLst>
                                           <p:attrName>style.visibility</p:attrName>
@@ -8334,7 +8305,7 @@
                                       <p:cBhvr>
                                         <p:cTn id="11" dur="450"/>
                                         <p:tgtEl>
-                                          <p:spTgt spid="7"/>
+                                          <p:spTgt spid="3"/>
                                         </p:tgtEl>
                                       </p:cBhvr>
                                     </p:animEffect>
@@ -8364,7 +8335,7 @@
                                           </p:stCondLst>
                                         </p:cTn>
                                         <p:tgtEl>
-                                          <p:spTgt spid="8"/>
+                                          <p:spTgt spid="4"/>
                                         </p:tgtEl>
                                         <p:attrNameLst>
                                           <p:attrName>style.visibility</p:attrName>
@@ -8378,7 +8349,7 @@
                                       <p:cBhvr>
                                         <p:cTn id="15" dur="450"/>
                                         <p:tgtEl>
-                                          <p:spTgt spid="8"/>
+                                          <p:spTgt spid="4"/>
                                         </p:tgtEl>
                                       </p:cBhvr>
                                     </p:animEffect>
@@ -8408,7 +8379,7 @@
                                           </p:stCondLst>
                                         </p:cTn>
                                         <p:tgtEl>
-                                          <p:spTgt spid="9"/>
+                                          <p:spTgt spid="5"/>
                                         </p:tgtEl>
                                         <p:attrNameLst>
                                           <p:attrName>style.visibility</p:attrName>
@@ -8422,7 +8393,7 @@
                                       <p:cBhvr>
                                         <p:cTn id="19" dur="450"/>
                                         <p:tgtEl>
-                                          <p:spTgt spid="9"/>
+                                          <p:spTgt spid="5"/>
                                         </p:tgtEl>
                                       </p:cBhvr>
                                     </p:animEffect>
@@ -8452,7 +8423,7 @@
                                           </p:stCondLst>
                                         </p:cTn>
                                         <p:tgtEl>
-                                          <p:spTgt spid="15"/>
+                                          <p:spTgt spid="6"/>
                                         </p:tgtEl>
                                         <p:attrNameLst>
                                           <p:attrName>style.visibility</p:attrName>
@@ -8466,7 +8437,7 @@
                                       <p:cBhvr>
                                         <p:cTn id="23" dur="450"/>
                                         <p:tgtEl>
-                                          <p:spTgt spid="15"/>
+                                          <p:spTgt spid="6"/>
                                         </p:tgtEl>
                                       </p:cBhvr>
                                     </p:animEffect>
@@ -8496,7 +8467,7 @@
                                           </p:stCondLst>
                                         </p:cTn>
                                         <p:tgtEl>
-                                          <p:spTgt spid="16"/>
+                                          <p:spTgt spid="12"/>
                                         </p:tgtEl>
                                         <p:attrNameLst>
                                           <p:attrName>style.visibility</p:attrName>
@@ -8510,7 +8481,7 @@
                                       <p:cBhvr>
                                         <p:cTn id="27" dur="450"/>
                                         <p:tgtEl>
-                                          <p:spTgt spid="16"/>
+                                          <p:spTgt spid="12"/>
                                         </p:tgtEl>
                                       </p:cBhvr>
                                     </p:animEffect>
@@ -8540,7 +8511,7 @@
                                           </p:stCondLst>
                                         </p:cTn>
                                         <p:tgtEl>
-                                          <p:spTgt spid="17"/>
+                                          <p:spTgt spid="13"/>
                                         </p:tgtEl>
                                         <p:attrNameLst>
                                           <p:attrName>style.visibility</p:attrName>
@@ -8554,7 +8525,7 @@
                                       <p:cBhvr>
                                         <p:cTn id="31" dur="450"/>
                                         <p:tgtEl>
-                                          <p:spTgt spid="17"/>
+                                          <p:spTgt spid="13"/>
                                         </p:tgtEl>
                                       </p:cBhvr>
                                     </p:animEffect>
@@ -8584,7 +8555,7 @@
                                           </p:stCondLst>
                                         </p:cTn>
                                         <p:tgtEl>
-                                          <p:spTgt spid="18"/>
+                                          <p:spTgt spid="14"/>
                                         </p:tgtEl>
                                         <p:attrNameLst>
                                           <p:attrName>style.visibility</p:attrName>
@@ -8598,7 +8569,7 @@
                                       <p:cBhvr>
                                         <p:cTn id="35" dur="450"/>
                                         <p:tgtEl>
-                                          <p:spTgt spid="18"/>
+                                          <p:spTgt spid="14"/>
                                         </p:tgtEl>
                                       </p:cBhvr>
                                     </p:animEffect>
@@ -8628,7 +8599,7 @@
                                           </p:stCondLst>
                                         </p:cTn>
                                         <p:tgtEl>
-                                          <p:spTgt spid="20"/>
+                                          <p:spTgt spid="15"/>
                                         </p:tgtEl>
                                         <p:attrNameLst>
                                           <p:attrName>style.visibility</p:attrName>
@@ -8642,7 +8613,7 @@
                                       <p:cBhvr>
                                         <p:cTn id="39" dur="450"/>
                                         <p:tgtEl>
-                                          <p:spTgt spid="20"/>
+                                          <p:spTgt spid="15"/>
                                         </p:tgtEl>
                                       </p:cBhvr>
                                     </p:animEffect>
@@ -8672,7 +8643,7 @@
                                           </p:stCondLst>
                                         </p:cTn>
                                         <p:tgtEl>
-                                          <p:spTgt spid="21"/>
+                                          <p:spTgt spid="17"/>
                                         </p:tgtEl>
                                         <p:attrNameLst>
                                           <p:attrName>style.visibility</p:attrName>
@@ -8686,7 +8657,51 @@
                                       <p:cBhvr>
                                         <p:cTn id="43" dur="450"/>
                                         <p:tgtEl>
-                                          <p:spTgt spid="21"/>
+                                          <p:spTgt spid="17"/>
+                                        </p:tgtEl>
+                                      </p:cBhvr>
+                                    </p:animEffect>
+                                  </p:childTnLst>
+                                </p:cTn>
+                              </p:par>
+                            </p:childTnLst>
+                          </p:cTn>
+                        </p:par>
+                        <p:par>
+                          <p:cTn id="44" fill="hold">
+                            <p:stCondLst>
+                              <p:cond delay="180"/>
+                            </p:stCondLst>
+                            <p:childTnLst>
+                              <p:par>
+                                <p:cTn id="45" presetID="2" presetClass="entr" presetSubtype="4" fill="hold" grpId="0" nodeType="afterEffect">
+                                  <p:stCondLst>
+                                    <p:cond delay="0"/>
+                                  </p:stCondLst>
+                                  <p:childTnLst>
+                                    <p:set>
+                                      <p:cBhvr>
+                                        <p:cTn id="46" dur="1" fill="hold">
+                                          <p:stCondLst>
+                                            <p:cond delay="0"/>
+                                          </p:stCondLst>
+                                        </p:cTn>
+                                        <p:tgtEl>
+                                          <p:spTgt spid="18"/>
+                                        </p:tgtEl>
+                                        <p:attrNameLst>
+                                          <p:attrName>style.visibility</p:attrName>
+                                        </p:attrNameLst>
+                                      </p:cBhvr>
+                                      <p:to>
+                                        <p:strVal val="visible"/>
+                                      </p:to>
+                                    </p:set>
+                                    <p:animEffect transition="in" filter="fade">
+                                      <p:cBhvr>
+                                        <p:cTn id="47" dur="450"/>
+                                        <p:tgtEl>
+                                          <p:spTgt spid="18"/>
                                         </p:tgtEl>
                                       </p:cBhvr>
                                     </p:animEffect>
@@ -8721,16 +8736,17 @@
       </p:par>
     </p:tnLst>
     <p:bldLst>
+      <p:bldP spid="2" grpId="0"/>
+      <p:bldP spid="3" grpId="0"/>
+      <p:bldP spid="4" grpId="0"/>
+      <p:bldP spid="5" grpId="0"/>
       <p:bldP spid="6" grpId="0"/>
-      <p:bldP spid="7" grpId="0"/>
-      <p:bldP spid="8" grpId="0"/>
-      <p:bldP spid="9" grpId="0"/>
+      <p:bldP spid="12" grpId="0"/>
+      <p:bldP spid="13" grpId="0"/>
+      <p:bldP spid="14" grpId="0"/>
       <p:bldP spid="15" grpId="0"/>
-      <p:bldP spid="16" grpId="0"/>
       <p:bldP spid="17" grpId="0"/>
       <p:bldP spid="18" grpId="0"/>
-      <p:bldP spid="20" grpId="0"/>
-      <p:bldP spid="21" grpId="0"/>
     </p:bldLst>
   </p:timing>
 </p:sld>
@@ -8763,21 +8779,35 @@
       </p:grpSpPr>
       <p:sp>
         <p:nvSpPr>
-          <p:cNvPr id="2" name="Rect 2"/>
+          <p:cNvPr id="2" name="GradientBar 2"/>
           <p:cNvSpPr/>
           <p:nvPr/>
         </p:nvSpPr>
         <p:spPr>
           <a:xfrm>
             <a:off x="0" y="0"/>
-            <a:ext cx="3048000" cy="63500"/>
+            <a:ext cx="12192000" cy="76200"/>
           </a:xfrm>
           <a:prstGeom prst="rect">
             <a:avLst/>
           </a:prstGeom>
-          <a:solidFill>
-            <a:srgbClr val="4285F4"/>
-          </a:solidFill>
+          <a:gradFill flip="none" rotWithShape="1">
+            <a:gsLst>
+              <a:gs pos="0">
+                <a:srgbClr val="4285F4"/>
+              </a:gs>
+              <a:gs pos="33000">
+                <a:srgbClr val="EA4335"/>
+              </a:gs>
+              <a:gs pos="66000">
+                <a:srgbClr val="FBBC04"/>
+              </a:gs>
+              <a:gs pos="100000">
+                <a:srgbClr val="34A853"/>
+              </a:gs>
+            </a:gsLst>
+            <a:lin ang="0" scaled="1"/>
+          </a:gradFill>
           <a:ln>
             <a:noFill/>
           </a:ln>
@@ -8785,73 +8815,7 @@
       </p:sp>
       <p:sp>
         <p:nvSpPr>
-          <p:cNvPr id="3" name="Rect 3"/>
-          <p:cNvSpPr/>
-          <p:nvPr/>
-        </p:nvSpPr>
-        <p:spPr>
-          <a:xfrm>
-            <a:off x="3048000" y="0"/>
-            <a:ext cx="3048000" cy="63500"/>
-          </a:xfrm>
-          <a:prstGeom prst="rect">
-            <a:avLst/>
-          </a:prstGeom>
-          <a:solidFill>
-            <a:srgbClr val="EA4335"/>
-          </a:solidFill>
-          <a:ln>
-            <a:noFill/>
-          </a:ln>
-        </p:spPr>
-      </p:sp>
-      <p:sp>
-        <p:nvSpPr>
-          <p:cNvPr id="4" name="Rect 4"/>
-          <p:cNvSpPr/>
-          <p:nvPr/>
-        </p:nvSpPr>
-        <p:spPr>
-          <a:xfrm>
-            <a:off x="6096000" y="0"/>
-            <a:ext cx="3048000" cy="63500"/>
-          </a:xfrm>
-          <a:prstGeom prst="rect">
-            <a:avLst/>
-          </a:prstGeom>
-          <a:solidFill>
-            <a:srgbClr val="FBBC04"/>
-          </a:solidFill>
-          <a:ln>
-            <a:noFill/>
-          </a:ln>
-        </p:spPr>
-      </p:sp>
-      <p:sp>
-        <p:nvSpPr>
-          <p:cNvPr id="5" name="Rect 5"/>
-          <p:cNvSpPr/>
-          <p:nvPr/>
-        </p:nvSpPr>
-        <p:spPr>
-          <a:xfrm>
-            <a:off x="9144000" y="0"/>
-            <a:ext cx="3048000" cy="63500"/>
-          </a:xfrm>
-          <a:prstGeom prst="rect">
-            <a:avLst/>
-          </a:prstGeom>
-          <a:solidFill>
-            <a:srgbClr val="34A853"/>
-          </a:solidFill>
-          <a:ln>
-            <a:noFill/>
-          </a:ln>
-        </p:spPr>
-      </p:sp>
-      <p:sp>
-        <p:nvSpPr>
-          <p:cNvPr id="6" name="Box 6"/>
+          <p:cNvPr id="3" name="Box 3"/>
           <p:cNvSpPr txBox="1"/>
           <p:nvPr/>
         </p:nvSpPr>
@@ -8892,7 +8856,7 @@
       </p:sp>
       <p:sp>
         <p:nvSpPr>
-          <p:cNvPr id="7" name="Box 7"/>
+          <p:cNvPr id="4" name="Box 4"/>
           <p:cNvSpPr txBox="1"/>
           <p:nvPr/>
         </p:nvSpPr>
@@ -8933,7 +8897,7 @@
       </p:sp>
       <p:sp>
         <p:nvSpPr>
-          <p:cNvPr id="8" name="Box 8"/>
+          <p:cNvPr id="5" name="Box 5"/>
           <p:cNvSpPr txBox="1"/>
           <p:nvPr/>
         </p:nvSpPr>
@@ -8974,7 +8938,7 @@
       </p:sp>
       <p:sp>
         <p:nvSpPr>
-          <p:cNvPr id="9" name="Box 9"/>
+          <p:cNvPr id="6" name="Box 6"/>
           <p:cNvSpPr txBox="1"/>
           <p:nvPr/>
         </p:nvSpPr>
@@ -9015,7 +8979,7 @@
       </p:sp>
       <p:sp>
         <p:nvSpPr>
-          <p:cNvPr id="10" name="Box 10"/>
+          <p:cNvPr id="7" name="Box 7"/>
           <p:cNvSpPr txBox="1"/>
           <p:nvPr/>
         </p:nvSpPr>
@@ -9363,7 +9327,7 @@
       </p:sp>
       <p:sp>
         <p:nvSpPr>
-          <p:cNvPr id="11" name="Box 11"/>
+          <p:cNvPr id="8" name="Box 8"/>
           <p:cNvSpPr txBox="1"/>
           <p:nvPr/>
         </p:nvSpPr>
@@ -9665,7 +9629,7 @@
       </p:sp>
       <p:sp>
         <p:nvSpPr>
-          <p:cNvPr id="12" name="Rect 12"/>
+          <p:cNvPr id="9" name="Rect 9"/>
           <p:cNvSpPr/>
           <p:nvPr/>
         </p:nvSpPr>
@@ -9687,7 +9651,7 @@
       </p:sp>
       <p:sp>
         <p:nvSpPr>
-          <p:cNvPr id="13" name="Box 13"/>
+          <p:cNvPr id="10" name="Box 10"/>
           <p:cNvSpPr txBox="1"/>
           <p:nvPr/>
         </p:nvSpPr>
@@ -9728,7 +9692,7 @@
       </p:sp>
       <p:sp>
         <p:nvSpPr>
-          <p:cNvPr id="14" name="Box 14"/>
+          <p:cNvPr id="11" name="Box 11"/>
           <p:cNvSpPr txBox="1"/>
           <p:nvPr/>
         </p:nvSpPr>
@@ -9796,7 +9760,7 @@
                             </p:stCondLst>
                             <p:childTnLst>
                               <p:par>
-                                <p:cTn id="5" presetID="2" presetClass="entr" presetSubtype="4" fill="hold" grpId="0" nodeType="withEffect">
+                                <p:cTn id="5" presetID="10" presetClass="entr" presetSubtype="0" fill="hold" grpId="0" nodeType="withEffect">
                                   <p:stCondLst>
                                     <p:cond delay="0"/>
                                   </p:stCondLst>
@@ -9809,7 +9773,7 @@
                                           </p:stCondLst>
                                         </p:cTn>
                                         <p:tgtEl>
-                                          <p:spTgt spid="6"/>
+                                          <p:spTgt spid="2"/>
                                         </p:tgtEl>
                                         <p:attrNameLst>
                                           <p:attrName>style.visibility</p:attrName>
@@ -9823,7 +9787,7 @@
                                       <p:cBhvr>
                                         <p:cTn id="7" dur="450"/>
                                         <p:tgtEl>
-                                          <p:spTgt spid="6"/>
+                                          <p:spTgt spid="2"/>
                                         </p:tgtEl>
                                       </p:cBhvr>
                                     </p:animEffect>
@@ -9853,7 +9817,7 @@
                                           </p:stCondLst>
                                         </p:cTn>
                                         <p:tgtEl>
-                                          <p:spTgt spid="7"/>
+                                          <p:spTgt spid="3"/>
                                         </p:tgtEl>
                                         <p:attrNameLst>
                                           <p:attrName>style.visibility</p:attrName>
@@ -9867,7 +9831,7 @@
                                       <p:cBhvr>
                                         <p:cTn id="11" dur="450"/>
                                         <p:tgtEl>
-                                          <p:spTgt spid="7"/>
+                                          <p:spTgt spid="3"/>
                                         </p:tgtEl>
                                       </p:cBhvr>
                                     </p:animEffect>
@@ -9897,7 +9861,7 @@
                                           </p:stCondLst>
                                         </p:cTn>
                                         <p:tgtEl>
-                                          <p:spTgt spid="8"/>
+                                          <p:spTgt spid="4"/>
                                         </p:tgtEl>
                                         <p:attrNameLst>
                                           <p:attrName>style.visibility</p:attrName>
@@ -9911,7 +9875,7 @@
                                       <p:cBhvr>
                                         <p:cTn id="15" dur="450"/>
                                         <p:tgtEl>
-                                          <p:spTgt spid="8"/>
+                                          <p:spTgt spid="4"/>
                                         </p:tgtEl>
                                       </p:cBhvr>
                                     </p:animEffect>
@@ -9941,7 +9905,7 @@
                                           </p:stCondLst>
                                         </p:cTn>
                                         <p:tgtEl>
-                                          <p:spTgt spid="9"/>
+                                          <p:spTgt spid="5"/>
                                         </p:tgtEl>
                                         <p:attrNameLst>
                                           <p:attrName>style.visibility</p:attrName>
@@ -9955,7 +9919,7 @@
                                       <p:cBhvr>
                                         <p:cTn id="19" dur="450"/>
                                         <p:tgtEl>
-                                          <p:spTgt spid="9"/>
+                                          <p:spTgt spid="5"/>
                                         </p:tgtEl>
                                       </p:cBhvr>
                                     </p:animEffect>
@@ -9985,7 +9949,7 @@
                                           </p:stCondLst>
                                         </p:cTn>
                                         <p:tgtEl>
-                                          <p:spTgt spid="10"/>
+                                          <p:spTgt spid="6"/>
                                         </p:tgtEl>
                                         <p:attrNameLst>
                                           <p:attrName>style.visibility</p:attrName>
@@ -9999,7 +9963,7 @@
                                       <p:cBhvr>
                                         <p:cTn id="23" dur="450"/>
                                         <p:tgtEl>
-                                          <p:spTgt spid="10"/>
+                                          <p:spTgt spid="6"/>
                                         </p:tgtEl>
                                       </p:cBhvr>
                                     </p:animEffect>
@@ -10029,7 +9993,7 @@
                                           </p:stCondLst>
                                         </p:cTn>
                                         <p:tgtEl>
-                                          <p:spTgt spid="11"/>
+                                          <p:spTgt spid="7"/>
                                         </p:tgtEl>
                                         <p:attrNameLst>
                                           <p:attrName>style.visibility</p:attrName>
@@ -10043,7 +10007,7 @@
                                       <p:cBhvr>
                                         <p:cTn id="27" dur="450"/>
                                         <p:tgtEl>
-                                          <p:spTgt spid="11"/>
+                                          <p:spTgt spid="7"/>
                                         </p:tgtEl>
                                       </p:cBhvr>
                                     </p:animEffect>
@@ -10073,7 +10037,7 @@
                                           </p:stCondLst>
                                         </p:cTn>
                                         <p:tgtEl>
-                                          <p:spTgt spid="13"/>
+                                          <p:spTgt spid="8"/>
                                         </p:tgtEl>
                                         <p:attrNameLst>
                                           <p:attrName>style.visibility</p:attrName>
@@ -10087,7 +10051,7 @@
                                       <p:cBhvr>
                                         <p:cTn id="31" dur="450"/>
                                         <p:tgtEl>
-                                          <p:spTgt spid="13"/>
+                                          <p:spTgt spid="8"/>
                                         </p:tgtEl>
                                       </p:cBhvr>
                                     </p:animEffect>
@@ -10117,7 +10081,7 @@
                                           </p:stCondLst>
                                         </p:cTn>
                                         <p:tgtEl>
-                                          <p:spTgt spid="14"/>
+                                          <p:spTgt spid="10"/>
                                         </p:tgtEl>
                                         <p:attrNameLst>
                                           <p:attrName>style.visibility</p:attrName>
@@ -10131,7 +10095,51 @@
                                       <p:cBhvr>
                                         <p:cTn id="35" dur="450"/>
                                         <p:tgtEl>
-                                          <p:spTgt spid="14"/>
+                                          <p:spTgt spid="10"/>
+                                        </p:tgtEl>
+                                      </p:cBhvr>
+                                    </p:animEffect>
+                                  </p:childTnLst>
+                                </p:cTn>
+                              </p:par>
+                            </p:childTnLst>
+                          </p:cTn>
+                        </p:par>
+                        <p:par>
+                          <p:cTn id="36" fill="hold">
+                            <p:stCondLst>
+                              <p:cond delay="180"/>
+                            </p:stCondLst>
+                            <p:childTnLst>
+                              <p:par>
+                                <p:cTn id="37" presetID="2" presetClass="entr" presetSubtype="4" fill="hold" grpId="0" nodeType="afterEffect">
+                                  <p:stCondLst>
+                                    <p:cond delay="0"/>
+                                  </p:stCondLst>
+                                  <p:childTnLst>
+                                    <p:set>
+                                      <p:cBhvr>
+                                        <p:cTn id="38" dur="1" fill="hold">
+                                          <p:stCondLst>
+                                            <p:cond delay="0"/>
+                                          </p:stCondLst>
+                                        </p:cTn>
+                                        <p:tgtEl>
+                                          <p:spTgt spid="11"/>
+                                        </p:tgtEl>
+                                        <p:attrNameLst>
+                                          <p:attrName>style.visibility</p:attrName>
+                                        </p:attrNameLst>
+                                      </p:cBhvr>
+                                      <p:to>
+                                        <p:strVal val="visible"/>
+                                      </p:to>
+                                    </p:set>
+                                    <p:animEffect transition="in" filter="fade">
+                                      <p:cBhvr>
+                                        <p:cTn id="39" dur="450"/>
+                                        <p:tgtEl>
+                                          <p:spTgt spid="11"/>
                                         </p:tgtEl>
                                       </p:cBhvr>
                                     </p:animEffect>
@@ -10166,14 +10174,15 @@
       </p:par>
     </p:tnLst>
     <p:bldLst>
+      <p:bldP spid="2" grpId="0"/>
+      <p:bldP spid="3" grpId="0"/>
+      <p:bldP spid="4" grpId="0"/>
+      <p:bldP spid="5" grpId="0"/>
       <p:bldP spid="6" grpId="0"/>
       <p:bldP spid="7" grpId="0"/>
       <p:bldP spid="8" grpId="0"/>
-      <p:bldP spid="9" grpId="0"/>
       <p:bldP spid="10" grpId="0"/>
       <p:bldP spid="11" grpId="0"/>
-      <p:bldP spid="13" grpId="0"/>
-      <p:bldP spid="14" grpId="0"/>
     </p:bldLst>
   </p:timing>
 </p:sld>
@@ -10206,21 +10215,35 @@
       </p:grpSpPr>
       <p:sp>
         <p:nvSpPr>
-          <p:cNvPr id="2" name="Rect 2"/>
+          <p:cNvPr id="2" name="GradientBar 2"/>
           <p:cNvSpPr/>
           <p:nvPr/>
         </p:nvSpPr>
         <p:spPr>
           <a:xfrm>
             <a:off x="0" y="0"/>
-            <a:ext cx="3048000" cy="63500"/>
+            <a:ext cx="12192000" cy="76200"/>
           </a:xfrm>
           <a:prstGeom prst="rect">
             <a:avLst/>
           </a:prstGeom>
-          <a:solidFill>
-            <a:srgbClr val="4285F4"/>
-          </a:solidFill>
+          <a:gradFill flip="none" rotWithShape="1">
+            <a:gsLst>
+              <a:gs pos="0">
+                <a:srgbClr val="4285F4"/>
+              </a:gs>
+              <a:gs pos="33000">
+                <a:srgbClr val="EA4335"/>
+              </a:gs>
+              <a:gs pos="66000">
+                <a:srgbClr val="FBBC04"/>
+              </a:gs>
+              <a:gs pos="100000">
+                <a:srgbClr val="34A853"/>
+              </a:gs>
+            </a:gsLst>
+            <a:lin ang="0" scaled="1"/>
+          </a:gradFill>
           <a:ln>
             <a:noFill/>
           </a:ln>
@@ -10228,73 +10251,7 @@
       </p:sp>
       <p:sp>
         <p:nvSpPr>
-          <p:cNvPr id="3" name="Rect 3"/>
-          <p:cNvSpPr/>
-          <p:nvPr/>
-        </p:nvSpPr>
-        <p:spPr>
-          <a:xfrm>
-            <a:off x="3048000" y="0"/>
-            <a:ext cx="3048000" cy="63500"/>
-          </a:xfrm>
-          <a:prstGeom prst="rect">
-            <a:avLst/>
-          </a:prstGeom>
-          <a:solidFill>
-            <a:srgbClr val="EA4335"/>
-          </a:solidFill>
-          <a:ln>
-            <a:noFill/>
-          </a:ln>
-        </p:spPr>
-      </p:sp>
-      <p:sp>
-        <p:nvSpPr>
-          <p:cNvPr id="4" name="Rect 4"/>
-          <p:cNvSpPr/>
-          <p:nvPr/>
-        </p:nvSpPr>
-        <p:spPr>
-          <a:xfrm>
-            <a:off x="6096000" y="0"/>
-            <a:ext cx="3048000" cy="63500"/>
-          </a:xfrm>
-          <a:prstGeom prst="rect">
-            <a:avLst/>
-          </a:prstGeom>
-          <a:solidFill>
-            <a:srgbClr val="FBBC04"/>
-          </a:solidFill>
-          <a:ln>
-            <a:noFill/>
-          </a:ln>
-        </p:spPr>
-      </p:sp>
-      <p:sp>
-        <p:nvSpPr>
-          <p:cNvPr id="5" name="Rect 5"/>
-          <p:cNvSpPr/>
-          <p:nvPr/>
-        </p:nvSpPr>
-        <p:spPr>
-          <a:xfrm>
-            <a:off x="9144000" y="0"/>
-            <a:ext cx="3048000" cy="63500"/>
-          </a:xfrm>
-          <a:prstGeom prst="rect">
-            <a:avLst/>
-          </a:prstGeom>
-          <a:solidFill>
-            <a:srgbClr val="34A853"/>
-          </a:solidFill>
-          <a:ln>
-            <a:noFill/>
-          </a:ln>
-        </p:spPr>
-      </p:sp>
-      <p:sp>
-        <p:nvSpPr>
-          <p:cNvPr id="6" name="Box 6"/>
+          <p:cNvPr id="3" name="Box 3"/>
           <p:cNvSpPr txBox="1"/>
           <p:nvPr/>
         </p:nvSpPr>
@@ -10335,7 +10292,7 @@
       </p:sp>
       <p:sp>
         <p:nvSpPr>
-          <p:cNvPr id="7" name="Box 7"/>
+          <p:cNvPr id="4" name="Box 4"/>
           <p:cNvSpPr txBox="1"/>
           <p:nvPr/>
         </p:nvSpPr>
@@ -10376,7 +10333,7 @@
       </p:sp>
       <p:sp>
         <p:nvSpPr>
-          <p:cNvPr id="8" name="Box 8"/>
+          <p:cNvPr id="5" name="Box 5"/>
           <p:cNvSpPr txBox="1"/>
           <p:nvPr/>
         </p:nvSpPr>
@@ -10417,7 +10374,7 @@
       </p:sp>
       <p:sp>
         <p:nvSpPr>
-          <p:cNvPr id="9" name="Box 9"/>
+          <p:cNvPr id="6" name="Box 6"/>
           <p:cNvSpPr txBox="1"/>
           <p:nvPr/>
         </p:nvSpPr>
@@ -10458,7 +10415,7 @@
       </p:sp>
       <p:sp>
         <p:nvSpPr>
-          <p:cNvPr id="10" name="Box 10"/>
+          <p:cNvPr id="7" name="Box 7"/>
           <p:cNvSpPr txBox="1"/>
           <p:nvPr/>
         </p:nvSpPr>
@@ -10573,7 +10530,7 @@
       </p:sp>
       <p:sp>
         <p:nvSpPr>
-          <p:cNvPr id="11" name="Rect 11"/>
+          <p:cNvPr id="8" name="Rect 8"/>
           <p:cNvSpPr/>
           <p:nvPr/>
         </p:nvSpPr>
@@ -10595,7 +10552,7 @@
       </p:sp>
       <p:sp>
         <p:nvSpPr>
-          <p:cNvPr id="12" name="Box 12"/>
+          <p:cNvPr id="9" name="Box 9"/>
           <p:cNvSpPr txBox="1"/>
           <p:nvPr/>
         </p:nvSpPr>
@@ -10710,7 +10667,7 @@
       </p:sp>
       <p:sp>
         <p:nvSpPr>
-          <p:cNvPr id="13" name="Rect 13"/>
+          <p:cNvPr id="10" name="Rect 10"/>
           <p:cNvSpPr/>
           <p:nvPr/>
         </p:nvSpPr>
@@ -10732,7 +10689,7 @@
       </p:sp>
       <p:sp>
         <p:nvSpPr>
-          <p:cNvPr id="14" name="Box 14"/>
+          <p:cNvPr id="11" name="Box 11"/>
           <p:cNvSpPr txBox="1"/>
           <p:nvPr/>
         </p:nvSpPr>
@@ -10847,7 +10804,7 @@
       </p:sp>
       <p:sp>
         <p:nvSpPr>
-          <p:cNvPr id="15" name="Rect 15"/>
+          <p:cNvPr id="12" name="Rect 12"/>
           <p:cNvSpPr/>
           <p:nvPr/>
         </p:nvSpPr>
@@ -10869,7 +10826,7 @@
       </p:sp>
       <p:sp>
         <p:nvSpPr>
-          <p:cNvPr id="16" name="Box 16"/>
+          <p:cNvPr id="13" name="Box 13"/>
           <p:cNvSpPr txBox="1"/>
           <p:nvPr/>
         </p:nvSpPr>
@@ -10984,7 +10941,7 @@
       </p:sp>
       <p:sp>
         <p:nvSpPr>
-          <p:cNvPr id="17" name="Rect 17"/>
+          <p:cNvPr id="14" name="Rect 14"/>
           <p:cNvSpPr/>
           <p:nvPr/>
         </p:nvSpPr>
@@ -11006,7 +10963,7 @@
       </p:sp>
       <p:sp>
         <p:nvSpPr>
-          <p:cNvPr id="18" name="Rect 18"/>
+          <p:cNvPr id="15" name="Rect 15"/>
           <p:cNvSpPr/>
           <p:nvPr/>
         </p:nvSpPr>
@@ -11028,7 +10985,7 @@
       </p:sp>
       <p:sp>
         <p:nvSpPr>
-          <p:cNvPr id="19" name="Box 19"/>
+          <p:cNvPr id="16" name="Box 16"/>
           <p:cNvSpPr txBox="1"/>
           <p:nvPr/>
         </p:nvSpPr>
@@ -11069,7 +11026,7 @@
       </p:sp>
       <p:sp>
         <p:nvSpPr>
-          <p:cNvPr id="20" name="Box 20"/>
+          <p:cNvPr id="17" name="Box 17"/>
           <p:cNvSpPr txBox="1"/>
           <p:nvPr/>
         </p:nvSpPr>
@@ -11137,7 +11094,7 @@
                             </p:stCondLst>
                             <p:childTnLst>
                               <p:par>
-                                <p:cTn id="5" presetID="2" presetClass="entr" presetSubtype="4" fill="hold" grpId="0" nodeType="withEffect">
+                                <p:cTn id="5" presetID="10" presetClass="entr" presetSubtype="0" fill="hold" grpId="0" nodeType="withEffect">
                                   <p:stCondLst>
                                     <p:cond delay="0"/>
                                   </p:stCondLst>
@@ -11150,7 +11107,7 @@
                                           </p:stCondLst>
                                         </p:cTn>
                                         <p:tgtEl>
-                                          <p:spTgt spid="6"/>
+                                          <p:spTgt spid="2"/>
                                         </p:tgtEl>
                                         <p:attrNameLst>
                                           <p:attrName>style.visibility</p:attrName>
@@ -11164,7 +11121,7 @@
                                       <p:cBhvr>
                                         <p:cTn id="7" dur="450"/>
                                         <p:tgtEl>
-                                          <p:spTgt spid="6"/>
+                                          <p:spTgt spid="2"/>
                                         </p:tgtEl>
                                       </p:cBhvr>
                                     </p:animEffect>
@@ -11194,7 +11151,7 @@
                                           </p:stCondLst>
                                         </p:cTn>
                                         <p:tgtEl>
-                                          <p:spTgt spid="7"/>
+                                          <p:spTgt spid="3"/>
                                         </p:tgtEl>
                                         <p:attrNameLst>
                                           <p:attrName>style.visibility</p:attrName>
@@ -11208,7 +11165,7 @@
                                       <p:cBhvr>
                                         <p:cTn id="11" dur="450"/>
                                         <p:tgtEl>
-                                          <p:spTgt spid="7"/>
+                                          <p:spTgt spid="3"/>
                                         </p:tgtEl>
                                       </p:cBhvr>
                                     </p:animEffect>
@@ -11238,7 +11195,7 @@
                                           </p:stCondLst>
                                         </p:cTn>
                                         <p:tgtEl>
-                                          <p:spTgt spid="8"/>
+                                          <p:spTgt spid="4"/>
                                         </p:tgtEl>
                                         <p:attrNameLst>
                                           <p:attrName>style.visibility</p:attrName>
@@ -11252,7 +11209,7 @@
                                       <p:cBhvr>
                                         <p:cTn id="15" dur="450"/>
                                         <p:tgtEl>
-                                          <p:spTgt spid="8"/>
+                                          <p:spTgt spid="4"/>
                                         </p:tgtEl>
                                       </p:cBhvr>
                                     </p:animEffect>
@@ -11282,7 +11239,7 @@
                                           </p:stCondLst>
                                         </p:cTn>
                                         <p:tgtEl>
-                                          <p:spTgt spid="9"/>
+                                          <p:spTgt spid="5"/>
                                         </p:tgtEl>
                                         <p:attrNameLst>
                                           <p:attrName>style.visibility</p:attrName>
@@ -11296,7 +11253,7 @@
                                       <p:cBhvr>
                                         <p:cTn id="19" dur="450"/>
                                         <p:tgtEl>
-                                          <p:spTgt spid="9"/>
+                                          <p:spTgt spid="5"/>
                                         </p:tgtEl>
                                       </p:cBhvr>
                                     </p:animEffect>
@@ -11326,7 +11283,7 @@
                                           </p:stCondLst>
                                         </p:cTn>
                                         <p:tgtEl>
-                                          <p:spTgt spid="10"/>
+                                          <p:spTgt spid="6"/>
                                         </p:tgtEl>
                                         <p:attrNameLst>
                                           <p:attrName>style.visibility</p:attrName>
@@ -11340,7 +11297,7 @@
                                       <p:cBhvr>
                                         <p:cTn id="23" dur="450"/>
                                         <p:tgtEl>
-                                          <p:spTgt spid="10"/>
+                                          <p:spTgt spid="6"/>
                                         </p:tgtEl>
                                       </p:cBhvr>
                                     </p:animEffect>
@@ -11370,7 +11327,7 @@
                                           </p:stCondLst>
                                         </p:cTn>
                                         <p:tgtEl>
-                                          <p:spTgt spid="12"/>
+                                          <p:spTgt spid="7"/>
                                         </p:tgtEl>
                                         <p:attrNameLst>
                                           <p:attrName>style.visibility</p:attrName>
@@ -11384,7 +11341,7 @@
                                       <p:cBhvr>
                                         <p:cTn id="27" dur="450"/>
                                         <p:tgtEl>
-                                          <p:spTgt spid="12"/>
+                                          <p:spTgt spid="7"/>
                                         </p:tgtEl>
                                       </p:cBhvr>
                                     </p:animEffect>
@@ -11414,7 +11371,7 @@
                                           </p:stCondLst>
                                         </p:cTn>
                                         <p:tgtEl>
-                                          <p:spTgt spid="14"/>
+                                          <p:spTgt spid="9"/>
                                         </p:tgtEl>
                                         <p:attrNameLst>
                                           <p:attrName>style.visibility</p:attrName>
@@ -11428,7 +11385,7 @@
                                       <p:cBhvr>
                                         <p:cTn id="31" dur="450"/>
                                         <p:tgtEl>
-                                          <p:spTgt spid="14"/>
+                                          <p:spTgt spid="9"/>
                                         </p:tgtEl>
                                       </p:cBhvr>
                                     </p:animEffect>
@@ -11458,7 +11415,7 @@
                                           </p:stCondLst>
                                         </p:cTn>
                                         <p:tgtEl>
-                                          <p:spTgt spid="16"/>
+                                          <p:spTgt spid="11"/>
                                         </p:tgtEl>
                                         <p:attrNameLst>
                                           <p:attrName>style.visibility</p:attrName>
@@ -11472,7 +11429,7 @@
                                       <p:cBhvr>
                                         <p:cTn id="35" dur="450"/>
                                         <p:tgtEl>
-                                          <p:spTgt spid="16"/>
+                                          <p:spTgt spid="11"/>
                                         </p:tgtEl>
                                       </p:cBhvr>
                                     </p:animEffect>
@@ -11502,7 +11459,7 @@
                                           </p:stCondLst>
                                         </p:cTn>
                                         <p:tgtEl>
-                                          <p:spTgt spid="19"/>
+                                          <p:spTgt spid="13"/>
                                         </p:tgtEl>
                                         <p:attrNameLst>
                                           <p:attrName>style.visibility</p:attrName>
@@ -11516,7 +11473,7 @@
                                       <p:cBhvr>
                                         <p:cTn id="39" dur="450"/>
                                         <p:tgtEl>
-                                          <p:spTgt spid="19"/>
+                                          <p:spTgt spid="13"/>
                                         </p:tgtEl>
                                       </p:cBhvr>
                                     </p:animEffect>
@@ -11546,7 +11503,7 @@
                                           </p:stCondLst>
                                         </p:cTn>
                                         <p:tgtEl>
-                                          <p:spTgt spid="20"/>
+                                          <p:spTgt spid="16"/>
                                         </p:tgtEl>
                                         <p:attrNameLst>
                                           <p:attrName>style.visibility</p:attrName>
@@ -11560,7 +11517,51 @@
                                       <p:cBhvr>
                                         <p:cTn id="43" dur="450"/>
                                         <p:tgtEl>
-                                          <p:spTgt spid="20"/>
+                                          <p:spTgt spid="16"/>
+                                        </p:tgtEl>
+                                      </p:cBhvr>
+                                    </p:animEffect>
+                                  </p:childTnLst>
+                                </p:cTn>
+                              </p:par>
+                            </p:childTnLst>
+                          </p:cTn>
+                        </p:par>
+                        <p:par>
+                          <p:cTn id="44" fill="hold">
+                            <p:stCondLst>
+                              <p:cond delay="180"/>
+                            </p:stCondLst>
+                            <p:childTnLst>
+                              <p:par>
+                                <p:cTn id="45" presetID="2" presetClass="entr" presetSubtype="4" fill="hold" grpId="0" nodeType="afterEffect">
+                                  <p:stCondLst>
+                                    <p:cond delay="0"/>
+                                  </p:stCondLst>
+                                  <p:childTnLst>
+                                    <p:set>
+                                      <p:cBhvr>
+                                        <p:cTn id="46" dur="1" fill="hold">
+                                          <p:stCondLst>
+                                            <p:cond delay="0"/>
+                                          </p:stCondLst>
+                                        </p:cTn>
+                                        <p:tgtEl>
+                                          <p:spTgt spid="17"/>
+                                        </p:tgtEl>
+                                        <p:attrNameLst>
+                                          <p:attrName>style.visibility</p:attrName>
+                                        </p:attrNameLst>
+                                      </p:cBhvr>
+                                      <p:to>
+                                        <p:strVal val="visible"/>
+                                      </p:to>
+                                    </p:set>
+                                    <p:animEffect transition="in" filter="fade">
+                                      <p:cBhvr>
+                                        <p:cTn id="47" dur="450"/>
+                                        <p:tgtEl>
+                                          <p:spTgt spid="17"/>
                                         </p:tgtEl>
                                       </p:cBhvr>
                                     </p:animEffect>
@@ -11595,16 +11596,17 @@
       </p:par>
     </p:tnLst>
     <p:bldLst>
+      <p:bldP spid="2" grpId="0"/>
+      <p:bldP spid="3" grpId="0"/>
+      <p:bldP spid="4" grpId="0"/>
+      <p:bldP spid="5" grpId="0"/>
       <p:bldP spid="6" grpId="0"/>
       <p:bldP spid="7" grpId="0"/>
-      <p:bldP spid="8" grpId="0"/>
       <p:bldP spid="9" grpId="0"/>
-      <p:bldP spid="10" grpId="0"/>
-      <p:bldP spid="12" grpId="0"/>
-      <p:bldP spid="14" grpId="0"/>
+      <p:bldP spid="11" grpId="0"/>
+      <p:bldP spid="13" grpId="0"/>
       <p:bldP spid="16" grpId="0"/>
-      <p:bldP spid="19" grpId="0"/>
-      <p:bldP spid="20" grpId="0"/>
+      <p:bldP spid="17" grpId="0"/>
     </p:bldLst>
   </p:timing>
 </p:sld>
@@ -11637,21 +11639,35 @@
       </p:grpSpPr>
       <p:sp>
         <p:nvSpPr>
-          <p:cNvPr id="2" name="Rect 2"/>
+          <p:cNvPr id="2" name="GradientBar 2"/>
           <p:cNvSpPr/>
           <p:nvPr/>
         </p:nvSpPr>
         <p:spPr>
           <a:xfrm>
             <a:off x="0" y="0"/>
-            <a:ext cx="3048000" cy="63500"/>
+            <a:ext cx="12192000" cy="76200"/>
           </a:xfrm>
           <a:prstGeom prst="rect">
             <a:avLst/>
           </a:prstGeom>
-          <a:solidFill>
-            <a:srgbClr val="4285F4"/>
-          </a:solidFill>
+          <a:gradFill flip="none" rotWithShape="1">
+            <a:gsLst>
+              <a:gs pos="0">
+                <a:srgbClr val="4285F4"/>
+              </a:gs>
+              <a:gs pos="33000">
+                <a:srgbClr val="EA4335"/>
+              </a:gs>
+              <a:gs pos="66000">
+                <a:srgbClr val="FBBC04"/>
+              </a:gs>
+              <a:gs pos="100000">
+                <a:srgbClr val="34A853"/>
+              </a:gs>
+            </a:gsLst>
+            <a:lin ang="0" scaled="1"/>
+          </a:gradFill>
           <a:ln>
             <a:noFill/>
           </a:ln>
@@ -11659,73 +11675,7 @@
       </p:sp>
       <p:sp>
         <p:nvSpPr>
-          <p:cNvPr id="3" name="Rect 3"/>
-          <p:cNvSpPr/>
-          <p:nvPr/>
-        </p:nvSpPr>
-        <p:spPr>
-          <a:xfrm>
-            <a:off x="3048000" y="0"/>
-            <a:ext cx="3048000" cy="63500"/>
-          </a:xfrm>
-          <a:prstGeom prst="rect">
-            <a:avLst/>
-          </a:prstGeom>
-          <a:solidFill>
-            <a:srgbClr val="EA4335"/>
-          </a:solidFill>
-          <a:ln>
-            <a:noFill/>
-          </a:ln>
-        </p:spPr>
-      </p:sp>
-      <p:sp>
-        <p:nvSpPr>
-          <p:cNvPr id="4" name="Rect 4"/>
-          <p:cNvSpPr/>
-          <p:nvPr/>
-        </p:nvSpPr>
-        <p:spPr>
-          <a:xfrm>
-            <a:off x="6096000" y="0"/>
-            <a:ext cx="3048000" cy="63500"/>
-          </a:xfrm>
-          <a:prstGeom prst="rect">
-            <a:avLst/>
-          </a:prstGeom>
-          <a:solidFill>
-            <a:srgbClr val="FBBC04"/>
-          </a:solidFill>
-          <a:ln>
-            <a:noFill/>
-          </a:ln>
-        </p:spPr>
-      </p:sp>
-      <p:sp>
-        <p:nvSpPr>
-          <p:cNvPr id="5" name="Rect 5"/>
-          <p:cNvSpPr/>
-          <p:nvPr/>
-        </p:nvSpPr>
-        <p:spPr>
-          <a:xfrm>
-            <a:off x="9144000" y="0"/>
-            <a:ext cx="3048000" cy="63500"/>
-          </a:xfrm>
-          <a:prstGeom prst="rect">
-            <a:avLst/>
-          </a:prstGeom>
-          <a:solidFill>
-            <a:srgbClr val="34A853"/>
-          </a:solidFill>
-          <a:ln>
-            <a:noFill/>
-          </a:ln>
-        </p:spPr>
-      </p:sp>
-      <p:sp>
-        <p:nvSpPr>
-          <p:cNvPr id="6" name="Box 6"/>
+          <p:cNvPr id="3" name="Box 3"/>
           <p:cNvSpPr txBox="1"/>
           <p:nvPr/>
         </p:nvSpPr>
@@ -11766,7 +11716,7 @@
       </p:sp>
       <p:sp>
         <p:nvSpPr>
-          <p:cNvPr id="7" name="Box 7"/>
+          <p:cNvPr id="4" name="Box 4"/>
           <p:cNvSpPr txBox="1"/>
           <p:nvPr/>
         </p:nvSpPr>
@@ -11807,7 +11757,7 @@
       </p:sp>
       <p:sp>
         <p:nvSpPr>
-          <p:cNvPr id="8" name="Box 8"/>
+          <p:cNvPr id="5" name="Box 5"/>
           <p:cNvSpPr txBox="1"/>
           <p:nvPr/>
         </p:nvSpPr>
@@ -11848,7 +11798,7 @@
       </p:sp>
       <p:sp>
         <p:nvSpPr>
-          <p:cNvPr id="9" name="Box 9"/>
+          <p:cNvPr id="6" name="Box 6"/>
           <p:cNvSpPr txBox="1"/>
           <p:nvPr/>
         </p:nvSpPr>
@@ -11889,7 +11839,7 @@
       </p:sp>
       <p:sp>
         <p:nvSpPr>
-          <p:cNvPr id="10" name="Box 10"/>
+          <p:cNvPr id="7" name="Box 7"/>
           <p:cNvSpPr txBox="1"/>
           <p:nvPr/>
         </p:nvSpPr>
@@ -12126,7 +12076,7 @@
       </p:sp>
       <p:sp>
         <p:nvSpPr>
-          <p:cNvPr id="11" name="Box 11"/>
+          <p:cNvPr id="8" name="Box 8"/>
           <p:cNvSpPr txBox="1"/>
           <p:nvPr/>
         </p:nvSpPr>
@@ -12343,7 +12293,7 @@
       </p:sp>
       <p:sp>
         <p:nvSpPr>
-          <p:cNvPr id="12" name="Rect 12"/>
+          <p:cNvPr id="9" name="Rect 9"/>
           <p:cNvSpPr/>
           <p:nvPr/>
         </p:nvSpPr>
@@ -12365,7 +12315,7 @@
       </p:sp>
       <p:sp>
         <p:nvSpPr>
-          <p:cNvPr id="13" name="Box 13"/>
+          <p:cNvPr id="10" name="Box 10"/>
           <p:cNvSpPr txBox="1"/>
           <p:nvPr/>
         </p:nvSpPr>
@@ -12406,7 +12356,7 @@
       </p:sp>
       <p:sp>
         <p:nvSpPr>
-          <p:cNvPr id="14" name="Box 14"/>
+          <p:cNvPr id="11" name="Box 11"/>
           <p:cNvSpPr txBox="1"/>
           <p:nvPr/>
         </p:nvSpPr>
@@ -12474,7 +12424,7 @@
                             </p:stCondLst>
                             <p:childTnLst>
                               <p:par>
-                                <p:cTn id="5" presetID="2" presetClass="entr" presetSubtype="4" fill="hold" grpId="0" nodeType="withEffect">
+                                <p:cTn id="5" presetID="10" presetClass="entr" presetSubtype="0" fill="hold" grpId="0" nodeType="withEffect">
                                   <p:stCondLst>
                                     <p:cond delay="0"/>
                                   </p:stCondLst>
@@ -12487,7 +12437,7 @@
                                           </p:stCondLst>
                                         </p:cTn>
                                         <p:tgtEl>
-                                          <p:spTgt spid="6"/>
+                                          <p:spTgt spid="2"/>
                                         </p:tgtEl>
                                         <p:attrNameLst>
                                           <p:attrName>style.visibility</p:attrName>
@@ -12501,7 +12451,7 @@
                                       <p:cBhvr>
                                         <p:cTn id="7" dur="450"/>
                                         <p:tgtEl>
-                                          <p:spTgt spid="6"/>
+                                          <p:spTgt spid="2"/>
                                         </p:tgtEl>
                                       </p:cBhvr>
                                     </p:animEffect>
@@ -12531,7 +12481,7 @@
                                           </p:stCondLst>
                                         </p:cTn>
                                         <p:tgtEl>
-                                          <p:spTgt spid="7"/>
+                                          <p:spTgt spid="3"/>
                                         </p:tgtEl>
                                         <p:attrNameLst>
                                           <p:attrName>style.visibility</p:attrName>
@@ -12545,7 +12495,7 @@
                                       <p:cBhvr>
                                         <p:cTn id="11" dur="450"/>
                                         <p:tgtEl>
-                                          <p:spTgt spid="7"/>
+                                          <p:spTgt spid="3"/>
                                         </p:tgtEl>
                                       </p:cBhvr>
                                     </p:animEffect>
@@ -12575,7 +12525,7 @@
                                           </p:stCondLst>
                                         </p:cTn>
                                         <p:tgtEl>
-                                          <p:spTgt spid="8"/>
+                                          <p:spTgt spid="4"/>
                                         </p:tgtEl>
                                         <p:attrNameLst>
                                           <p:attrName>style.visibility</p:attrName>
@@ -12589,7 +12539,7 @@
                                       <p:cBhvr>
                                         <p:cTn id="15" dur="450"/>
                                         <p:tgtEl>
-                                          <p:spTgt spid="8"/>
+                                          <p:spTgt spid="4"/>
                                         </p:tgtEl>
                                       </p:cBhvr>
                                     </p:animEffect>
@@ -12619,7 +12569,7 @@
                                           </p:stCondLst>
                                         </p:cTn>
                                         <p:tgtEl>
-                                          <p:spTgt spid="9"/>
+                                          <p:spTgt spid="5"/>
                                         </p:tgtEl>
                                         <p:attrNameLst>
                                           <p:attrName>style.visibility</p:attrName>
@@ -12633,7 +12583,7 @@
                                       <p:cBhvr>
                                         <p:cTn id="19" dur="450"/>
                                         <p:tgtEl>
-                                          <p:spTgt spid="9"/>
+                                          <p:spTgt spid="5"/>
                                         </p:tgtEl>
                                       </p:cBhvr>
                                     </p:animEffect>
@@ -12663,7 +12613,7 @@
                                           </p:stCondLst>
                                         </p:cTn>
                                         <p:tgtEl>
-                                          <p:spTgt spid="10"/>
+                                          <p:spTgt spid="6"/>
                                         </p:tgtEl>
                                         <p:attrNameLst>
                                           <p:attrName>style.visibility</p:attrName>
@@ -12677,7 +12627,7 @@
                                       <p:cBhvr>
                                         <p:cTn id="23" dur="450"/>
                                         <p:tgtEl>
-                                          <p:spTgt spid="10"/>
+                                          <p:spTgt spid="6"/>
                                         </p:tgtEl>
                                       </p:cBhvr>
                                     </p:animEffect>
@@ -12707,7 +12657,7 @@
                                           </p:stCondLst>
                                         </p:cTn>
                                         <p:tgtEl>
-                                          <p:spTgt spid="11"/>
+                                          <p:spTgt spid="7"/>
                                         </p:tgtEl>
                                         <p:attrNameLst>
                                           <p:attrName>style.visibility</p:attrName>
@@ -12721,7 +12671,7 @@
                                       <p:cBhvr>
                                         <p:cTn id="27" dur="450"/>
                                         <p:tgtEl>
-                                          <p:spTgt spid="11"/>
+                                          <p:spTgt spid="7"/>
                                         </p:tgtEl>
                                       </p:cBhvr>
                                     </p:animEffect>
@@ -12751,7 +12701,7 @@
                                           </p:stCondLst>
                                         </p:cTn>
                                         <p:tgtEl>
-                                          <p:spTgt spid="13"/>
+                                          <p:spTgt spid="8"/>
                                         </p:tgtEl>
                                         <p:attrNameLst>
                                           <p:attrName>style.visibility</p:attrName>
@@ -12765,7 +12715,7 @@
                                       <p:cBhvr>
                                         <p:cTn id="31" dur="450"/>
                                         <p:tgtEl>
-                                          <p:spTgt spid="13"/>
+                                          <p:spTgt spid="8"/>
                                         </p:tgtEl>
                                       </p:cBhvr>
                                     </p:animEffect>
@@ -12795,7 +12745,7 @@
                                           </p:stCondLst>
                                         </p:cTn>
                                         <p:tgtEl>
-                                          <p:spTgt spid="14"/>
+                                          <p:spTgt spid="10"/>
                                         </p:tgtEl>
                                         <p:attrNameLst>
                                           <p:attrName>style.visibility</p:attrName>
@@ -12809,7 +12759,51 @@
                                       <p:cBhvr>
                                         <p:cTn id="35" dur="450"/>
                                         <p:tgtEl>
-                                          <p:spTgt spid="14"/>
+                                          <p:spTgt spid="10"/>
+                                        </p:tgtEl>
+                                      </p:cBhvr>
+                                    </p:animEffect>
+                                  </p:childTnLst>
+                                </p:cTn>
+                              </p:par>
+                            </p:childTnLst>
+                          </p:cTn>
+                        </p:par>
+                        <p:par>
+                          <p:cTn id="36" fill="hold">
+                            <p:stCondLst>
+                              <p:cond delay="180"/>
+                            </p:stCondLst>
+                            <p:childTnLst>
+                              <p:par>
+                                <p:cTn id="37" presetID="2" presetClass="entr" presetSubtype="4" fill="hold" grpId="0" nodeType="afterEffect">
+                                  <p:stCondLst>
+                                    <p:cond delay="0"/>
+                                  </p:stCondLst>
+                                  <p:childTnLst>
+                                    <p:set>
+                                      <p:cBhvr>
+                                        <p:cTn id="38" dur="1" fill="hold">
+                                          <p:stCondLst>
+                                            <p:cond delay="0"/>
+                                          </p:stCondLst>
+                                        </p:cTn>
+                                        <p:tgtEl>
+                                          <p:spTgt spid="11"/>
+                                        </p:tgtEl>
+                                        <p:attrNameLst>
+                                          <p:attrName>style.visibility</p:attrName>
+                                        </p:attrNameLst>
+                                      </p:cBhvr>
+                                      <p:to>
+                                        <p:strVal val="visible"/>
+                                      </p:to>
+                                    </p:set>
+                                    <p:animEffect transition="in" filter="fade">
+                                      <p:cBhvr>
+                                        <p:cTn id="39" dur="450"/>
+                                        <p:tgtEl>
+                                          <p:spTgt spid="11"/>
                                         </p:tgtEl>
                                       </p:cBhvr>
                                     </p:animEffect>
@@ -12844,14 +12838,15 @@
       </p:par>
     </p:tnLst>
     <p:bldLst>
+      <p:bldP spid="2" grpId="0"/>
+      <p:bldP spid="3" grpId="0"/>
+      <p:bldP spid="4" grpId="0"/>
+      <p:bldP spid="5" grpId="0"/>
       <p:bldP spid="6" grpId="0"/>
       <p:bldP spid="7" grpId="0"/>
       <p:bldP spid="8" grpId="0"/>
-      <p:bldP spid="9" grpId="0"/>
       <p:bldP spid="10" grpId="0"/>
       <p:bldP spid="11" grpId="0"/>
-      <p:bldP spid="13" grpId="0"/>
-      <p:bldP spid="14" grpId="0"/>
     </p:bldLst>
   </p:timing>
 </p:sld>
@@ -12884,21 +12879,35 @@
       </p:grpSpPr>
       <p:sp>
         <p:nvSpPr>
-          <p:cNvPr id="2" name="Rect 2"/>
+          <p:cNvPr id="2" name="GradientBar 2"/>
           <p:cNvSpPr/>
           <p:nvPr/>
         </p:nvSpPr>
         <p:spPr>
           <a:xfrm>
             <a:off x="0" y="0"/>
-            <a:ext cx="3048000" cy="63500"/>
+            <a:ext cx="12192000" cy="76200"/>
           </a:xfrm>
           <a:prstGeom prst="rect">
             <a:avLst/>
           </a:prstGeom>
-          <a:solidFill>
-            <a:srgbClr val="4285F4"/>
-          </a:solidFill>
+          <a:gradFill flip="none" rotWithShape="1">
+            <a:gsLst>
+              <a:gs pos="0">
+                <a:srgbClr val="4285F4"/>
+              </a:gs>
+              <a:gs pos="33000">
+                <a:srgbClr val="EA4335"/>
+              </a:gs>
+              <a:gs pos="66000">
+                <a:srgbClr val="FBBC04"/>
+              </a:gs>
+              <a:gs pos="100000">
+                <a:srgbClr val="34A853"/>
+              </a:gs>
+            </a:gsLst>
+            <a:lin ang="0" scaled="1"/>
+          </a:gradFill>
           <a:ln>
             <a:noFill/>
           </a:ln>
@@ -12906,73 +12915,7 @@
       </p:sp>
       <p:sp>
         <p:nvSpPr>
-          <p:cNvPr id="3" name="Rect 3"/>
-          <p:cNvSpPr/>
-          <p:nvPr/>
-        </p:nvSpPr>
-        <p:spPr>
-          <a:xfrm>
-            <a:off x="3048000" y="0"/>
-            <a:ext cx="3048000" cy="63500"/>
-          </a:xfrm>
-          <a:prstGeom prst="rect">
-            <a:avLst/>
-          </a:prstGeom>
-          <a:solidFill>
-            <a:srgbClr val="EA4335"/>
-          </a:solidFill>
-          <a:ln>
-            <a:noFill/>
-          </a:ln>
-        </p:spPr>
-      </p:sp>
-      <p:sp>
-        <p:nvSpPr>
-          <p:cNvPr id="4" name="Rect 4"/>
-          <p:cNvSpPr/>
-          <p:nvPr/>
-        </p:nvSpPr>
-        <p:spPr>
-          <a:xfrm>
-            <a:off x="6096000" y="0"/>
-            <a:ext cx="3048000" cy="63500"/>
-          </a:xfrm>
-          <a:prstGeom prst="rect">
-            <a:avLst/>
-          </a:prstGeom>
-          <a:solidFill>
-            <a:srgbClr val="FBBC04"/>
-          </a:solidFill>
-          <a:ln>
-            <a:noFill/>
-          </a:ln>
-        </p:spPr>
-      </p:sp>
-      <p:sp>
-        <p:nvSpPr>
-          <p:cNvPr id="5" name="Rect 5"/>
-          <p:cNvSpPr/>
-          <p:nvPr/>
-        </p:nvSpPr>
-        <p:spPr>
-          <a:xfrm>
-            <a:off x="9144000" y="0"/>
-            <a:ext cx="3048000" cy="63500"/>
-          </a:xfrm>
-          <a:prstGeom prst="rect">
-            <a:avLst/>
-          </a:prstGeom>
-          <a:solidFill>
-            <a:srgbClr val="34A853"/>
-          </a:solidFill>
-          <a:ln>
-            <a:noFill/>
-          </a:ln>
-        </p:spPr>
-      </p:sp>
-      <p:sp>
-        <p:nvSpPr>
-          <p:cNvPr id="6" name="Box 6"/>
+          <p:cNvPr id="3" name="Box 3"/>
           <p:cNvSpPr txBox="1"/>
           <p:nvPr/>
         </p:nvSpPr>
@@ -13013,7 +12956,7 @@
       </p:sp>
       <p:sp>
         <p:nvSpPr>
-          <p:cNvPr id="7" name="Box 7"/>
+          <p:cNvPr id="4" name="Box 4"/>
           <p:cNvSpPr txBox="1"/>
           <p:nvPr/>
         </p:nvSpPr>
@@ -13054,7 +12997,7 @@
       </p:sp>
       <p:sp>
         <p:nvSpPr>
-          <p:cNvPr id="8" name="Box 8"/>
+          <p:cNvPr id="5" name="Box 5"/>
           <p:cNvSpPr txBox="1"/>
           <p:nvPr/>
         </p:nvSpPr>
@@ -13095,7 +13038,7 @@
       </p:sp>
       <p:sp>
         <p:nvSpPr>
-          <p:cNvPr id="9" name="Box 9"/>
+          <p:cNvPr id="6" name="Box 6"/>
           <p:cNvSpPr txBox="1"/>
           <p:nvPr/>
         </p:nvSpPr>
@@ -13136,7 +13079,7 @@
       </p:sp>
       <p:sp>
         <p:nvSpPr>
-          <p:cNvPr id="10" name="Box 10"/>
+          <p:cNvPr id="7" name="Box 7"/>
           <p:cNvSpPr txBox="1"/>
           <p:nvPr/>
         </p:nvSpPr>
@@ -13438,7 +13381,7 @@
       </p:sp>
       <p:sp>
         <p:nvSpPr>
-          <p:cNvPr id="11" name="Box 11"/>
+          <p:cNvPr id="8" name="Box 8"/>
           <p:cNvSpPr txBox="1"/>
           <p:nvPr/>
         </p:nvSpPr>
@@ -13706,7 +13649,7 @@
       </p:sp>
       <p:sp>
         <p:nvSpPr>
-          <p:cNvPr id="12" name="Rect 12"/>
+          <p:cNvPr id="9" name="Rect 9"/>
           <p:cNvSpPr/>
           <p:nvPr/>
         </p:nvSpPr>
@@ -13728,7 +13671,7 @@
       </p:sp>
       <p:sp>
         <p:nvSpPr>
-          <p:cNvPr id="13" name="Box 13"/>
+          <p:cNvPr id="10" name="Box 10"/>
           <p:cNvSpPr txBox="1"/>
           <p:nvPr/>
         </p:nvSpPr>
@@ -13769,7 +13712,7 @@
       </p:sp>
       <p:sp>
         <p:nvSpPr>
-          <p:cNvPr id="14" name="Box 14"/>
+          <p:cNvPr id="11" name="Box 11"/>
           <p:cNvSpPr txBox="1"/>
           <p:nvPr/>
         </p:nvSpPr>
@@ -13837,7 +13780,7 @@
                             </p:stCondLst>
                             <p:childTnLst>
                               <p:par>
-                                <p:cTn id="5" presetID="2" presetClass="entr" presetSubtype="4" fill="hold" grpId="0" nodeType="withEffect">
+                                <p:cTn id="5" presetID="10" presetClass="entr" presetSubtype="0" fill="hold" grpId="0" nodeType="withEffect">
                                   <p:stCondLst>
                                     <p:cond delay="0"/>
                                   </p:stCondLst>
@@ -13850,7 +13793,7 @@
                                           </p:stCondLst>
                                         </p:cTn>
                                         <p:tgtEl>
-                                          <p:spTgt spid="6"/>
+                                          <p:spTgt spid="2"/>
                                         </p:tgtEl>
                                         <p:attrNameLst>
                                           <p:attrName>style.visibility</p:attrName>
@@ -13864,7 +13807,7 @@
                                       <p:cBhvr>
                                         <p:cTn id="7" dur="450"/>
                                         <p:tgtEl>
-                                          <p:spTgt spid="6"/>
+                                          <p:spTgt spid="2"/>
                                         </p:tgtEl>
                                       </p:cBhvr>
                                     </p:animEffect>
@@ -13894,7 +13837,7 @@
                                           </p:stCondLst>
                                         </p:cTn>
                                         <p:tgtEl>
-                                          <p:spTgt spid="7"/>
+                                          <p:spTgt spid="3"/>
                                         </p:tgtEl>
                                         <p:attrNameLst>
                                           <p:attrName>style.visibility</p:attrName>
@@ -13908,7 +13851,7 @@
                                       <p:cBhvr>
                                         <p:cTn id="11" dur="450"/>
                                         <p:tgtEl>
-                                          <p:spTgt spid="7"/>
+                                          <p:spTgt spid="3"/>
                                         </p:tgtEl>
                                       </p:cBhvr>
                                     </p:animEffect>
@@ -13938,7 +13881,7 @@
                                           </p:stCondLst>
                                         </p:cTn>
                                         <p:tgtEl>
-                                          <p:spTgt spid="8"/>
+                                          <p:spTgt spid="4"/>
                                         </p:tgtEl>
                                         <p:attrNameLst>
                                           <p:attrName>style.visibility</p:attrName>
@@ -13952,7 +13895,7 @@
                                       <p:cBhvr>
                                         <p:cTn id="15" dur="450"/>
                                         <p:tgtEl>
-                                          <p:spTgt spid="8"/>
+                                          <p:spTgt spid="4"/>
                                         </p:tgtEl>
                                       </p:cBhvr>
                                     </p:animEffect>
@@ -13982,7 +13925,7 @@
                                           </p:stCondLst>
                                         </p:cTn>
                                         <p:tgtEl>
-                                          <p:spTgt spid="9"/>
+                                          <p:spTgt spid="5"/>
                                         </p:tgtEl>
                                         <p:attrNameLst>
                                           <p:attrName>style.visibility</p:attrName>
@@ -13996,7 +13939,7 @@
                                       <p:cBhvr>
                                         <p:cTn id="19" dur="450"/>
                                         <p:tgtEl>
-                                          <p:spTgt spid="9"/>
+                                          <p:spTgt spid="5"/>
                                         </p:tgtEl>
                                       </p:cBhvr>
                                     </p:animEffect>
@@ -14026,7 +13969,7 @@
                                           </p:stCondLst>
                                         </p:cTn>
                                         <p:tgtEl>
-                                          <p:spTgt spid="10"/>
+                                          <p:spTgt spid="6"/>
                                         </p:tgtEl>
                                         <p:attrNameLst>
                                           <p:attrName>style.visibility</p:attrName>
@@ -14040,7 +13983,7 @@
                                       <p:cBhvr>
                                         <p:cTn id="23" dur="450"/>
                                         <p:tgtEl>
-                                          <p:spTgt spid="10"/>
+                                          <p:spTgt spid="6"/>
                                         </p:tgtEl>
                                       </p:cBhvr>
                                     </p:animEffect>
@@ -14070,7 +14013,7 @@
                                           </p:stCondLst>
                                         </p:cTn>
                                         <p:tgtEl>
-                                          <p:spTgt spid="11"/>
+                                          <p:spTgt spid="7"/>
                                         </p:tgtEl>
                                         <p:attrNameLst>
                                           <p:attrName>style.visibility</p:attrName>
@@ -14084,7 +14027,7 @@
                                       <p:cBhvr>
                                         <p:cTn id="27" dur="450"/>
                                         <p:tgtEl>
-                                          <p:spTgt spid="11"/>
+                                          <p:spTgt spid="7"/>
                                         </p:tgtEl>
                                       </p:cBhvr>
                                     </p:animEffect>
@@ -14114,7 +14057,7 @@
                                           </p:stCondLst>
                                         </p:cTn>
                                         <p:tgtEl>
-                                          <p:spTgt spid="13"/>
+                                          <p:spTgt spid="8"/>
                                         </p:tgtEl>
                                         <p:attrNameLst>
                                           <p:attrName>style.visibility</p:attrName>
@@ -14128,7 +14071,7 @@
                                       <p:cBhvr>
                                         <p:cTn id="31" dur="450"/>
                                         <p:tgtEl>
-                                          <p:spTgt spid="13"/>
+                                          <p:spTgt spid="8"/>
                                         </p:tgtEl>
                                       </p:cBhvr>
                                     </p:animEffect>
@@ -14158,7 +14101,7 @@
                                           </p:stCondLst>
                                         </p:cTn>
                                         <p:tgtEl>
-                                          <p:spTgt spid="14"/>
+                                          <p:spTgt spid="10"/>
                                         </p:tgtEl>
                                         <p:attrNameLst>
                                           <p:attrName>style.visibility</p:attrName>
@@ -14172,7 +14115,51 @@
                                       <p:cBhvr>
                                         <p:cTn id="35" dur="450"/>
                                         <p:tgtEl>
-                                          <p:spTgt spid="14"/>
+                                          <p:spTgt spid="10"/>
+                                        </p:tgtEl>
+                                      </p:cBhvr>
+                                    </p:animEffect>
+                                  </p:childTnLst>
+                                </p:cTn>
+                              </p:par>
+                            </p:childTnLst>
+                          </p:cTn>
+                        </p:par>
+                        <p:par>
+                          <p:cTn id="36" fill="hold">
+                            <p:stCondLst>
+                              <p:cond delay="180"/>
+                            </p:stCondLst>
+                            <p:childTnLst>
+                              <p:par>
+                                <p:cTn id="37" presetID="2" presetClass="entr" presetSubtype="4" fill="hold" grpId="0" nodeType="afterEffect">
+                                  <p:stCondLst>
+                                    <p:cond delay="0"/>
+                                  </p:stCondLst>
+                                  <p:childTnLst>
+                                    <p:set>
+                                      <p:cBhvr>
+                                        <p:cTn id="38" dur="1" fill="hold">
+                                          <p:stCondLst>
+                                            <p:cond delay="0"/>
+                                          </p:stCondLst>
+                                        </p:cTn>
+                                        <p:tgtEl>
+                                          <p:spTgt spid="11"/>
+                                        </p:tgtEl>
+                                        <p:attrNameLst>
+                                          <p:attrName>style.visibility</p:attrName>
+                                        </p:attrNameLst>
+                                      </p:cBhvr>
+                                      <p:to>
+                                        <p:strVal val="visible"/>
+                                      </p:to>
+                                    </p:set>
+                                    <p:animEffect transition="in" filter="fade">
+                                      <p:cBhvr>
+                                        <p:cTn id="39" dur="450"/>
+                                        <p:tgtEl>
+                                          <p:spTgt spid="11"/>
                                         </p:tgtEl>
                                       </p:cBhvr>
                                     </p:animEffect>
@@ -14207,14 +14194,15 @@
       </p:par>
     </p:tnLst>
     <p:bldLst>
+      <p:bldP spid="2" grpId="0"/>
+      <p:bldP spid="3" grpId="0"/>
+      <p:bldP spid="4" grpId="0"/>
+      <p:bldP spid="5" grpId="0"/>
       <p:bldP spid="6" grpId="0"/>
       <p:bldP spid="7" grpId="0"/>
       <p:bldP spid="8" grpId="0"/>
-      <p:bldP spid="9" grpId="0"/>
       <p:bldP spid="10" grpId="0"/>
       <p:bldP spid="11" grpId="0"/>
-      <p:bldP spid="13" grpId="0"/>
-      <p:bldP spid="14" grpId="0"/>
     </p:bldLst>
   </p:timing>
 </p:sld>
